--- a/Apresentacao/Apresentacao_MPIO.pptx
+++ b/Apresentacao/Apresentacao_MPIO.pptx
@@ -32,9 +32,9 @@
     <p:sldId id="280" r:id="rId23"/>
     <p:sldId id="275" r:id="rId24"/>
     <p:sldId id="276" r:id="rId25"/>
-    <p:sldId id="270" r:id="rId26"/>
-    <p:sldId id="274" r:id="rId27"/>
-    <p:sldId id="288" r:id="rId28"/>
+    <p:sldId id="288" r:id="rId26"/>
+    <p:sldId id="270" r:id="rId27"/>
+    <p:sldId id="274" r:id="rId28"/>
     <p:sldId id="287" r:id="rId29"/>
   </p:sldIdLst>
   <p:sldSz cx="12192000" cy="6858000"/>
@@ -1681,7 +1681,13 @@
   <p:cSld>
     <p:spTree>
       <p:nvGrpSpPr>
-        <p:cNvPr id="1" name=""/>
+        <p:cNvPr id="1" name="">
+          <a:extLst>
+            <a:ext uri="{FF2B5EF4-FFF2-40B4-BE49-F238E27FC236}">
+              <a16:creationId xmlns:a16="http://schemas.microsoft.com/office/drawing/2014/main" id="{9597C3DA-DC25-5321-D481-23F69FE1DA67}"/>
+            </a:ext>
+          </a:extLst>
+        </p:cNvPr>
         <p:cNvGrpSpPr/>
         <p:nvPr/>
       </p:nvGrpSpPr>
@@ -1695,7 +1701,13 @@
       </p:grpSpPr>
       <p:sp>
         <p:nvSpPr>
-          <p:cNvPr id="2" name="Slide Image Placeholder 1"/>
+          <p:cNvPr id="2" name="Slide Image Placeholder 1">
+            <a:extLst>
+              <a:ext uri="{FF2B5EF4-FFF2-40B4-BE49-F238E27FC236}">
+                <a16:creationId xmlns:a16="http://schemas.microsoft.com/office/drawing/2014/main" id="{FE8E66BA-F66A-0406-9392-BFE24C24A4B3}"/>
+              </a:ext>
+            </a:extLst>
+          </p:cNvPr>
           <p:cNvSpPr>
             <a:spLocks noGrp="1" noRot="1" noChangeAspect="1"/>
           </p:cNvSpPr>
@@ -1707,7 +1719,13 @@
       </p:sp>
       <p:sp>
         <p:nvSpPr>
-          <p:cNvPr id="3" name="Notes Placeholder 2"/>
+          <p:cNvPr id="3" name="Notes Placeholder 2">
+            <a:extLst>
+              <a:ext uri="{FF2B5EF4-FFF2-40B4-BE49-F238E27FC236}">
+                <a16:creationId xmlns:a16="http://schemas.microsoft.com/office/drawing/2014/main" id="{CEECF299-EE20-C3ED-34F8-7837BC840547}"/>
+              </a:ext>
+            </a:extLst>
+          </p:cNvPr>
           <p:cNvSpPr>
             <a:spLocks noGrp="1"/>
           </p:cNvSpPr>
@@ -1726,7 +1744,13 @@
       </p:sp>
       <p:sp>
         <p:nvSpPr>
-          <p:cNvPr id="4" name="Slide Number Placeholder 3"/>
+          <p:cNvPr id="4" name="Slide Number Placeholder 3">
+            <a:extLst>
+              <a:ext uri="{FF2B5EF4-FFF2-40B4-BE49-F238E27FC236}">
+                <a16:creationId xmlns:a16="http://schemas.microsoft.com/office/drawing/2014/main" id="{716686E9-0E54-0D2B-8135-B1859A512065}"/>
+              </a:ext>
+            </a:extLst>
+          </p:cNvPr>
           <p:cNvSpPr>
             <a:spLocks noGrp="1"/>
           </p:cNvSpPr>
@@ -1737,6 +1761,11 @@
         <p:spPr/>
       </p:sp>
     </p:spTree>
+    <p:extLst>
+      <p:ext uri="{BB962C8B-B14F-4D97-AF65-F5344CB8AC3E}">
+        <p14:creationId xmlns:p14="http://schemas.microsoft.com/office/powerpoint/2010/main" val="349750284"/>
+      </p:ext>
+    </p:extLst>
   </p:cSld>
   <p:clrMapOvr>
     <a:masterClrMapping/>
@@ -1817,13 +1846,7 @@
   <p:cSld>
     <p:spTree>
       <p:nvGrpSpPr>
-        <p:cNvPr id="1" name="">
-          <a:extLst>
-            <a:ext uri="{FF2B5EF4-FFF2-40B4-BE49-F238E27FC236}">
-              <a16:creationId xmlns:a16="http://schemas.microsoft.com/office/drawing/2014/main" id="{9597C3DA-DC25-5321-D481-23F69FE1DA67}"/>
-            </a:ext>
-          </a:extLst>
-        </p:cNvPr>
+        <p:cNvPr id="1" name=""/>
         <p:cNvGrpSpPr/>
         <p:nvPr/>
       </p:nvGrpSpPr>
@@ -1837,13 +1860,7 @@
       </p:grpSpPr>
       <p:sp>
         <p:nvSpPr>
-          <p:cNvPr id="2" name="Slide Image Placeholder 1">
-            <a:extLst>
-              <a:ext uri="{FF2B5EF4-FFF2-40B4-BE49-F238E27FC236}">
-                <a16:creationId xmlns:a16="http://schemas.microsoft.com/office/drawing/2014/main" id="{FE8E66BA-F66A-0406-9392-BFE24C24A4B3}"/>
-              </a:ext>
-            </a:extLst>
-          </p:cNvPr>
+          <p:cNvPr id="2" name="Slide Image Placeholder 1"/>
           <p:cNvSpPr>
             <a:spLocks noGrp="1" noRot="1" noChangeAspect="1"/>
           </p:cNvSpPr>
@@ -1855,13 +1872,7 @@
       </p:sp>
       <p:sp>
         <p:nvSpPr>
-          <p:cNvPr id="3" name="Notes Placeholder 2">
-            <a:extLst>
-              <a:ext uri="{FF2B5EF4-FFF2-40B4-BE49-F238E27FC236}">
-                <a16:creationId xmlns:a16="http://schemas.microsoft.com/office/drawing/2014/main" id="{CEECF299-EE20-C3ED-34F8-7837BC840547}"/>
-              </a:ext>
-            </a:extLst>
-          </p:cNvPr>
+          <p:cNvPr id="3" name="Notes Placeholder 2"/>
           <p:cNvSpPr>
             <a:spLocks noGrp="1"/>
           </p:cNvSpPr>
@@ -1880,13 +1891,7 @@
       </p:sp>
       <p:sp>
         <p:nvSpPr>
-          <p:cNvPr id="4" name="Slide Number Placeholder 3">
-            <a:extLst>
-              <a:ext uri="{FF2B5EF4-FFF2-40B4-BE49-F238E27FC236}">
-                <a16:creationId xmlns:a16="http://schemas.microsoft.com/office/drawing/2014/main" id="{716686E9-0E54-0D2B-8135-B1859A512065}"/>
-              </a:ext>
-            </a:extLst>
-          </p:cNvPr>
+          <p:cNvPr id="4" name="Slide Number Placeholder 3"/>
           <p:cNvSpPr>
             <a:spLocks noGrp="1"/>
           </p:cNvSpPr>
@@ -1897,11 +1902,6 @@
         <p:spPr/>
       </p:sp>
     </p:spTree>
-    <p:extLst>
-      <p:ext uri="{BB962C8B-B14F-4D97-AF65-F5344CB8AC3E}">
-        <p14:creationId xmlns:p14="http://schemas.microsoft.com/office/powerpoint/2010/main" val="349750284"/>
-      </p:ext>
-    </p:extLst>
   </p:cSld>
   <p:clrMapOvr>
     <a:masterClrMapping/>
@@ -16627,7 +16627,39 @@
                   <a:srgbClr val="00B050"/>
                 </a:solidFill>
               </a:rPr>
-              <a:t> até 380 Gb/s (113×) na AWS e 34 Gb/s (13,7×) no </a:t>
+              <a:t> até </a:t>
+            </a:r>
+            <a:r>
+              <a:rPr lang="pt-BR" sz="1800" b="1" dirty="0">
+                <a:solidFill>
+                  <a:srgbClr val="00B050"/>
+                </a:solidFill>
+              </a:rPr>
+              <a:t>380 Gb/s (113×) </a:t>
+            </a:r>
+            <a:r>
+              <a:rPr lang="pt-BR" sz="1800" dirty="0">
+                <a:solidFill>
+                  <a:srgbClr val="00B050"/>
+                </a:solidFill>
+              </a:rPr>
+              <a:t>na AWS </a:t>
+            </a:r>
+            <a:r>
+              <a:rPr lang="pt-BR" sz="1800" b="1" dirty="0">
+                <a:solidFill>
+                  <a:srgbClr val="00B050"/>
+                </a:solidFill>
+              </a:rPr>
+              <a:t>e 34 Gb/s (13,7×) </a:t>
+            </a:r>
+            <a:r>
+              <a:rPr lang="pt-BR" sz="1800" dirty="0">
+                <a:solidFill>
+                  <a:srgbClr val="00B050"/>
+                </a:solidFill>
+              </a:rPr>
+              <a:t>no </a:t>
             </a:r>
             <a:r>
               <a:rPr lang="pt-BR" sz="1800" dirty="0" err="1">
@@ -16660,7 +16692,47 @@
                   <a:srgbClr val="00B050"/>
                 </a:solidFill>
               </a:rPr>
-              <a:t>Em 32 nós a E/S consome 49,5% do tempo na implementação atual; com escritas independentes em MPI-IO cai para 0,7%, e o tempo total cai 36,7% (2.013 s → 1.274 s)</a:t>
+              <a:t>Em 32 nós a E/S consome </a:t>
+            </a:r>
+            <a:r>
+              <a:rPr lang="pt-BR" sz="1800" b="1" dirty="0">
+                <a:solidFill>
+                  <a:srgbClr val="00B050"/>
+                </a:solidFill>
+              </a:rPr>
+              <a:t>49,5%</a:t>
+            </a:r>
+            <a:r>
+              <a:rPr lang="pt-BR" sz="1800" dirty="0">
+                <a:solidFill>
+                  <a:srgbClr val="00B050"/>
+                </a:solidFill>
+              </a:rPr>
+              <a:t> do tempo na implementação atual; com escritas independentes em MPI-IO cai para </a:t>
+            </a:r>
+            <a:r>
+              <a:rPr lang="pt-BR" sz="1800" b="1" dirty="0">
+                <a:solidFill>
+                  <a:srgbClr val="00B050"/>
+                </a:solidFill>
+              </a:rPr>
+              <a:t>0,7%, </a:t>
+            </a:r>
+            <a:r>
+              <a:rPr lang="pt-BR" sz="1800" dirty="0">
+                <a:solidFill>
+                  <a:srgbClr val="00B050"/>
+                </a:solidFill>
+              </a:rPr>
+              <a:t>e o tempo total cai </a:t>
+            </a:r>
+            <a:r>
+              <a:rPr lang="pt-BR" sz="1800" b="1" dirty="0">
+                <a:solidFill>
+                  <a:srgbClr val="00B050"/>
+                </a:solidFill>
+              </a:rPr>
+              <a:t>36,7% (2.013 s → 1.274 s)</a:t>
             </a:r>
           </a:p>
           <a:p>
@@ -16677,7 +16749,23 @@
                   <a:srgbClr val="00B050"/>
                 </a:solidFill>
               </a:rPr>
-              <a:t>Portabilidade: o mesmo padrão se repete em nuvem dedicada e em supercomputador compartilhado (40,4% de redução em 32 nós no </a:t>
+              <a:t>Portabilidade: o mesmo padrão se repete em nuvem dedicada e em supercomputador compartilhado (</a:t>
+            </a:r>
+            <a:r>
+              <a:rPr lang="pt-BR" sz="1800" b="1" dirty="0">
+                <a:solidFill>
+                  <a:srgbClr val="00B050"/>
+                </a:solidFill>
+              </a:rPr>
+              <a:t>40,4% </a:t>
+            </a:r>
+            <a:r>
+              <a:rPr lang="pt-BR" sz="1800" dirty="0">
+                <a:solidFill>
+                  <a:srgbClr val="00B050"/>
+                </a:solidFill>
+              </a:rPr>
+              <a:t>de redução em 32 nós no </a:t>
             </a:r>
             <a:r>
               <a:rPr lang="pt-BR" sz="1800" dirty="0" err="1">
@@ -16726,7 +16814,39 @@
                   <a:srgbClr val="FFC000"/>
                 </a:solidFill>
               </a:rPr>
-              <a:t> amplia a banda agregada 5,6× em 16 nós e 23,6× em 32 nós</a:t>
+              <a:t> amplia a banda agregada </a:t>
+            </a:r>
+            <a:r>
+              <a:rPr lang="pt-BR" sz="1800" b="1" dirty="0">
+                <a:solidFill>
+                  <a:srgbClr val="FFC000"/>
+                </a:solidFill>
+              </a:rPr>
+              <a:t>5,6× </a:t>
+            </a:r>
+            <a:r>
+              <a:rPr lang="pt-BR" sz="1800" dirty="0">
+                <a:solidFill>
+                  <a:srgbClr val="FFC000"/>
+                </a:solidFill>
+              </a:rPr>
+              <a:t>em 16 nós e </a:t>
+            </a:r>
+            <a:r>
+              <a:rPr lang="pt-BR" sz="1800" b="1" dirty="0">
+                <a:solidFill>
+                  <a:srgbClr val="FFC000"/>
+                </a:solidFill>
+              </a:rPr>
+              <a:t>23,6× </a:t>
+            </a:r>
+            <a:r>
+              <a:rPr lang="pt-BR" sz="1800" dirty="0">
+                <a:solidFill>
+                  <a:srgbClr val="FFC000"/>
+                </a:solidFill>
+              </a:rPr>
+              <a:t>em 32 nós</a:t>
             </a:r>
           </a:p>
           <a:p>
@@ -16743,7 +16863,23 @@
                   <a:srgbClr val="FF0000"/>
                 </a:solidFill>
               </a:rPr>
-              <a:t>Limites assumidos: eficiência de 43,5% em 32 nós (</a:t>
+              <a:t>Limites assumidos: eficiência de </a:t>
+            </a:r>
+            <a:r>
+              <a:rPr lang="pt-BR" sz="1800" b="1" dirty="0">
+                <a:solidFill>
+                  <a:srgbClr val="FF0000"/>
+                </a:solidFill>
+              </a:rPr>
+              <a:t>43,5</a:t>
+            </a:r>
+            <a:r>
+              <a:rPr lang="pt-BR" sz="1800" dirty="0">
+                <a:solidFill>
+                  <a:srgbClr val="FF0000"/>
+                </a:solidFill>
+              </a:rPr>
+              <a:t>% em 32 nós (</a:t>
             </a:r>
             <a:r>
               <a:rPr lang="pt-BR" sz="1800" dirty="0" err="1">
@@ -16778,7 +16914,7 @@
               <a:t>, gargalo de computação) e </a:t>
             </a:r>
             <a:r>
-              <a:rPr lang="pt-BR" sz="1800" dirty="0" err="1">
+              <a:rPr lang="pt-BR" sz="1800" b="1" dirty="0" err="1">
                 <a:solidFill>
                   <a:srgbClr val="FF0000"/>
                 </a:solidFill>
@@ -16786,12 +16922,36 @@
               <a:t>MPI_File_open</a:t>
             </a:r>
             <a:r>
+              <a:rPr lang="pt-BR" sz="1800" b="1" dirty="0">
+                <a:solidFill>
+                  <a:srgbClr val="FF0000"/>
+                </a:solidFill>
+              </a:rPr>
+              <a:t>/close </a:t>
+            </a:r>
+            <a:r>
               <a:rPr lang="pt-BR" sz="1800" dirty="0">
                 <a:solidFill>
                   <a:srgbClr val="FF0000"/>
                 </a:solidFill>
               </a:rPr>
-              <a:t>/close em 11,6% do tempo — custo fixo por execução, não por carga</a:t>
+              <a:t>em </a:t>
+            </a:r>
+            <a:r>
+              <a:rPr lang="pt-BR" sz="1800" b="1" dirty="0">
+                <a:solidFill>
+                  <a:srgbClr val="FF0000"/>
+                </a:solidFill>
+              </a:rPr>
+              <a:t>11,6% </a:t>
+            </a:r>
+            <a:r>
+              <a:rPr lang="pt-BR" sz="1800" dirty="0">
+                <a:solidFill>
+                  <a:srgbClr val="FF0000"/>
+                </a:solidFill>
+              </a:rPr>
+              <a:t>do tempo — custo fixo por execução, não por carga</a:t>
             </a:r>
           </a:p>
           <a:p>
@@ -16816,7 +16976,39 @@
                   <a:srgbClr val="FF0000"/>
                 </a:solidFill>
               </a:rPr>
-              <a:t>: o escritor único inverte a escalabilidade — na AWS a banda percebida cai de 60,5 para 3,4 Gb/s entre 2 e 32 nós, e o melhor tempo total ocorre em 16 nós, não </a:t>
+              <a:t>: o escritor único inverte a escalabilidade — na AWS a banda percebida cai de </a:t>
+            </a:r>
+            <a:r>
+              <a:rPr sz="1800" b="1" dirty="0">
+                <a:solidFill>
+                  <a:srgbClr val="FF0000"/>
+                </a:solidFill>
+              </a:rPr>
+              <a:t>60,5</a:t>
+            </a:r>
+            <a:r>
+              <a:rPr sz="1800" dirty="0">
+                <a:solidFill>
+                  <a:srgbClr val="FF0000"/>
+                </a:solidFill>
+              </a:rPr>
+              <a:t> para </a:t>
+            </a:r>
+            <a:r>
+              <a:rPr sz="1800" b="1" dirty="0">
+                <a:solidFill>
+                  <a:srgbClr val="FF0000"/>
+                </a:solidFill>
+              </a:rPr>
+              <a:t>3,4 Gb/s </a:t>
+            </a:r>
+            <a:r>
+              <a:rPr sz="1800" dirty="0">
+                <a:solidFill>
+                  <a:srgbClr val="FF0000"/>
+                </a:solidFill>
+              </a:rPr>
+              <a:t>entre 2 e 32 nós, e o melhor tempo total ocorre em 16 nós, não </a:t>
             </a:r>
             <a:r>
               <a:rPr sz="1800" dirty="0" err="1">
@@ -16928,9 +17120,142 @@
               <a:buChar char="§"/>
             </a:pPr>
             <a:r>
-              <a:rPr sz="1800"/>
-              <a:t>Reorganizar o padrão dos arquivos diários (13 dos 117 arquivos), agrupando o mês em uma escrita por (estágio, cenário) — elimina a parcela residual de requisições pequenas</a:t>
-            </a:r>
+              <a:rPr sz="1800" dirty="0" err="1"/>
+              <a:t>Reorganizar</a:t>
+            </a:r>
+            <a:r>
+              <a:rPr sz="1800" dirty="0"/>
+              <a:t> o </a:t>
+            </a:r>
+            <a:r>
+              <a:rPr sz="1800" dirty="0" err="1"/>
+              <a:t>padrão</a:t>
+            </a:r>
+            <a:r>
+              <a:rPr sz="1800" dirty="0"/>
+              <a:t> dos </a:t>
+            </a:r>
+            <a:r>
+              <a:rPr sz="1800" dirty="0" err="1"/>
+              <a:t>arquivos</a:t>
+            </a:r>
+            <a:r>
+              <a:rPr sz="1800" dirty="0"/>
+              <a:t> </a:t>
+            </a:r>
+            <a:r>
+              <a:rPr sz="1800" dirty="0" err="1"/>
+              <a:t>diários</a:t>
+            </a:r>
+            <a:r>
+              <a:rPr sz="1800" dirty="0"/>
+              <a:t> (13 dos 117 </a:t>
+            </a:r>
+            <a:r>
+              <a:rPr sz="1800" dirty="0" err="1"/>
+              <a:t>arquivos</a:t>
+            </a:r>
+            <a:r>
+              <a:rPr sz="1800" dirty="0"/>
+              <a:t>), </a:t>
+            </a:r>
+            <a:r>
+              <a:rPr sz="1800" dirty="0" err="1"/>
+              <a:t>agrupando</a:t>
+            </a:r>
+            <a:r>
+              <a:rPr sz="1800" dirty="0"/>
+              <a:t> o </a:t>
+            </a:r>
+            <a:r>
+              <a:rPr sz="1800" dirty="0" err="1"/>
+              <a:t>mês</a:t>
+            </a:r>
+            <a:r>
+              <a:rPr sz="1800" dirty="0"/>
+              <a:t> </a:t>
+            </a:r>
+            <a:r>
+              <a:rPr sz="1800" dirty="0" err="1"/>
+              <a:t>em</a:t>
+            </a:r>
+            <a:r>
+              <a:rPr sz="1800" dirty="0"/>
+              <a:t> </a:t>
+            </a:r>
+            <a:r>
+              <a:rPr sz="1800" dirty="0" err="1"/>
+              <a:t>uma</a:t>
+            </a:r>
+            <a:r>
+              <a:rPr sz="1800" dirty="0"/>
+              <a:t> </a:t>
+            </a:r>
+            <a:r>
+              <a:rPr sz="1800" dirty="0" err="1"/>
+              <a:t>escrita</a:t>
+            </a:r>
+            <a:r>
+              <a:rPr sz="1800" dirty="0"/>
+              <a:t> </a:t>
+            </a:r>
+            <a:r>
+              <a:rPr sz="1800" dirty="0" err="1"/>
+              <a:t>por</a:t>
+            </a:r>
+            <a:r>
+              <a:rPr sz="1800" dirty="0"/>
+              <a:t> (</a:t>
+            </a:r>
+            <a:r>
+              <a:rPr sz="1800" dirty="0" err="1"/>
+              <a:t>estágio</a:t>
+            </a:r>
+            <a:r>
+              <a:rPr sz="1800" dirty="0"/>
+              <a:t>, </a:t>
+            </a:r>
+            <a:r>
+              <a:rPr sz="1800" dirty="0" err="1"/>
+              <a:t>cenário</a:t>
+            </a:r>
+            <a:r>
+              <a:rPr sz="1800" dirty="0"/>
+              <a:t>) — </a:t>
+            </a:r>
+            <a:r>
+              <a:rPr sz="1800" dirty="0" err="1"/>
+              <a:t>elimina</a:t>
+            </a:r>
+            <a:r>
+              <a:rPr sz="1800" dirty="0"/>
+              <a:t> a </a:t>
+            </a:r>
+            <a:r>
+              <a:rPr sz="1800" dirty="0" err="1"/>
+              <a:t>parcela</a:t>
+            </a:r>
+            <a:r>
+              <a:rPr sz="1800" dirty="0"/>
+              <a:t> residual de </a:t>
+            </a:r>
+            <a:r>
+              <a:rPr sz="1800" dirty="0" err="1"/>
+              <a:t>requisições</a:t>
+            </a:r>
+            <a:r>
+              <a:rPr sz="1800" dirty="0"/>
+              <a:t> </a:t>
+            </a:r>
+            <a:r>
+              <a:rPr sz="1800" dirty="0" err="1"/>
+              <a:t>pequenas</a:t>
+            </a:r>
+            <a:r>
+              <a:rPr lang="en-US" sz="1800" dirty="0"/>
+              <a:t>.</a:t>
+            </a:r>
+            <a:endParaRPr sz="1800" dirty="0"/>
           </a:p>
           <a:p>
             <a:pPr marL="342900" indent="-342900">
@@ -16941,9 +17266,90 @@
               <a:buChar char="§"/>
             </a:pPr>
             <a:r>
-              <a:rPr sz="1800"/>
-              <a:t>Bufferização alinhada às stripes do Lustre, para que cada submissão MPI-IO incida sobre exatamente um OST (Liao et al., 2007)</a:t>
-            </a:r>
+              <a:rPr sz="1800" dirty="0" err="1"/>
+              <a:t>Bufferização</a:t>
+            </a:r>
+            <a:r>
+              <a:rPr sz="1800" dirty="0"/>
+              <a:t> </a:t>
+            </a:r>
+            <a:r>
+              <a:rPr sz="1800" dirty="0" err="1"/>
+              <a:t>alinhada</a:t>
+            </a:r>
+            <a:r>
+              <a:rPr sz="1800" dirty="0"/>
+              <a:t> </a:t>
+            </a:r>
+            <a:r>
+              <a:rPr sz="1800" dirty="0" err="1"/>
+              <a:t>às</a:t>
+            </a:r>
+            <a:r>
+              <a:rPr sz="1800" dirty="0"/>
+              <a:t> stripes do </a:t>
+            </a:r>
+            <a:r>
+              <a:rPr sz="1800" dirty="0" err="1"/>
+              <a:t>Lustre</a:t>
+            </a:r>
+            <a:r>
+              <a:rPr sz="1800" dirty="0"/>
+              <a:t>, para </a:t>
+            </a:r>
+            <a:r>
+              <a:rPr sz="1800" dirty="0" err="1"/>
+              <a:t>que</a:t>
+            </a:r>
+            <a:r>
+              <a:rPr sz="1800" dirty="0"/>
+              <a:t> </a:t>
+            </a:r>
+            <a:r>
+              <a:rPr sz="1800" dirty="0" err="1"/>
+              <a:t>cada</a:t>
+            </a:r>
+            <a:r>
+              <a:rPr sz="1800" dirty="0"/>
+              <a:t> </a:t>
+            </a:r>
+            <a:r>
+              <a:rPr sz="1800" dirty="0" err="1"/>
+              <a:t>submissão</a:t>
+            </a:r>
+            <a:r>
+              <a:rPr sz="1800" dirty="0"/>
+              <a:t> MPI-IO </a:t>
+            </a:r>
+            <a:r>
+              <a:rPr sz="1800" dirty="0" err="1"/>
+              <a:t>incida</a:t>
+            </a:r>
+            <a:r>
+              <a:rPr sz="1800" dirty="0"/>
+              <a:t> </a:t>
+            </a:r>
+            <a:r>
+              <a:rPr sz="1800" dirty="0" err="1"/>
+              <a:t>sobre</a:t>
+            </a:r>
+            <a:r>
+              <a:rPr sz="1800" dirty="0"/>
+              <a:t> </a:t>
+            </a:r>
+            <a:r>
+              <a:rPr sz="1800" dirty="0" err="1"/>
+              <a:t>exatamente</a:t>
+            </a:r>
+            <a:r>
+              <a:rPr sz="1800" dirty="0"/>
+              <a:t> um OST (Liao et al., 2007)</a:t>
+            </a:r>
+            <a:r>
+              <a:rPr lang="en-US" sz="1800" dirty="0"/>
+              <a:t>.</a:t>
+            </a:r>
+            <a:endParaRPr sz="1800" dirty="0"/>
           </a:p>
           <a:p>
             <a:pPr marL="342900" indent="-342900">
@@ -16954,9 +17360,54 @@
               <a:buChar char="§"/>
             </a:pPr>
             <a:r>
-              <a:rPr sz="1800"/>
-              <a:t>Sensibilidade aos parâmetros de projeto: stripe_size do Lustre e limiar síncrono/assíncrono (64, 128 e 256 KB)</a:t>
-            </a:r>
+              <a:rPr sz="1800" dirty="0" err="1"/>
+              <a:t>Sensibilidade</a:t>
+            </a:r>
+            <a:r>
+              <a:rPr sz="1800" dirty="0"/>
+              <a:t> </a:t>
+            </a:r>
+            <a:r>
+              <a:rPr sz="1800" dirty="0" err="1"/>
+              <a:t>aos</a:t>
+            </a:r>
+            <a:r>
+              <a:rPr sz="1800" dirty="0"/>
+              <a:t> </a:t>
+            </a:r>
+            <a:r>
+              <a:rPr sz="1800" dirty="0" err="1"/>
+              <a:t>parâmetros</a:t>
+            </a:r>
+            <a:r>
+              <a:rPr sz="1800" dirty="0"/>
+              <a:t> de </a:t>
+            </a:r>
+            <a:r>
+              <a:rPr sz="1800" dirty="0" err="1"/>
+              <a:t>projeto</a:t>
+            </a:r>
+            <a:r>
+              <a:rPr sz="1800" dirty="0"/>
+              <a:t>: </a:t>
+            </a:r>
+            <a:r>
+              <a:rPr sz="1800" dirty="0" err="1"/>
+              <a:t>stripe_size</a:t>
+            </a:r>
+            <a:r>
+              <a:rPr sz="1800" dirty="0"/>
+              <a:t> do </a:t>
+            </a:r>
+            <a:r>
+              <a:rPr sz="1800" dirty="0" err="1"/>
+              <a:t>Lustre</a:t>
+            </a:r>
+            <a:r>
+              <a:rPr lang="en-US" sz="1800" dirty="0"/>
+              <a:t>.</a:t>
+            </a:r>
+            <a:endParaRPr sz="1800" dirty="0"/>
           </a:p>
           <a:p>
             <a:pPr marL="342900" indent="-342900">
@@ -16967,9 +17418,102 @@
               <a:buChar char="§"/>
             </a:pPr>
             <a:r>
-              <a:rPr sz="1800"/>
-              <a:t>Escrita coletiva (two-phase I/O): tentativas preliminares resultaram em deadlock com o bag-of-tasks — exige reconciliar distribuição dinâmica e semântica coletiva</a:t>
-            </a:r>
+              <a:rPr sz="1800" dirty="0" err="1"/>
+              <a:t>Escrita</a:t>
+            </a:r>
+            <a:r>
+              <a:rPr sz="1800" dirty="0"/>
+              <a:t> </a:t>
+            </a:r>
+            <a:r>
+              <a:rPr sz="1800" dirty="0" err="1"/>
+              <a:t>coletiva</a:t>
+            </a:r>
+            <a:r>
+              <a:rPr sz="1800" dirty="0"/>
+              <a:t> (two-phase I/O): </a:t>
+            </a:r>
+            <a:r>
+              <a:rPr sz="1800" dirty="0" err="1"/>
+              <a:t>tentativas</a:t>
+            </a:r>
+            <a:r>
+              <a:rPr sz="1800" dirty="0"/>
+              <a:t> </a:t>
+            </a:r>
+            <a:r>
+              <a:rPr sz="1800" dirty="0" err="1"/>
+              <a:t>preliminares</a:t>
+            </a:r>
+            <a:r>
+              <a:rPr sz="1800" dirty="0"/>
+              <a:t> </a:t>
+            </a:r>
+            <a:r>
+              <a:rPr sz="1800" dirty="0" err="1"/>
+              <a:t>resultaram</a:t>
+            </a:r>
+            <a:r>
+              <a:rPr sz="1800" dirty="0"/>
+              <a:t> </a:t>
+            </a:r>
+            <a:r>
+              <a:rPr sz="1800" dirty="0" err="1"/>
+              <a:t>em</a:t>
+            </a:r>
+            <a:r>
+              <a:rPr sz="1800" dirty="0"/>
+              <a:t> deadlock com o bag-of-tasks — </a:t>
+            </a:r>
+            <a:r>
+              <a:rPr sz="1800" dirty="0" err="1"/>
+              <a:t>exige</a:t>
+            </a:r>
+            <a:r>
+              <a:rPr sz="1800" dirty="0"/>
+              <a:t> </a:t>
+            </a:r>
+            <a:r>
+              <a:rPr sz="1800" dirty="0" err="1"/>
+              <a:t>reconciliar</a:t>
+            </a:r>
+            <a:r>
+              <a:rPr sz="1800" dirty="0"/>
+              <a:t> </a:t>
+            </a:r>
+            <a:r>
+              <a:rPr sz="1800" dirty="0" err="1"/>
+              <a:t>distribuição</a:t>
+            </a:r>
+            <a:r>
+              <a:rPr sz="1800" dirty="0"/>
+              <a:t> </a:t>
+            </a:r>
+            <a:r>
+              <a:rPr sz="1800" dirty="0" err="1"/>
+              <a:t>dinâmica</a:t>
+            </a:r>
+            <a:r>
+              <a:rPr sz="1800" dirty="0"/>
+              <a:t> e </a:t>
+            </a:r>
+            <a:r>
+              <a:rPr sz="1800" dirty="0" err="1"/>
+              <a:t>semântica</a:t>
+            </a:r>
+            <a:r>
+              <a:rPr sz="1800" dirty="0"/>
+              <a:t> </a:t>
+            </a:r>
+            <a:r>
+              <a:rPr sz="1800" dirty="0" err="1"/>
+              <a:t>coletiva</a:t>
+            </a:r>
+            <a:r>
+              <a:rPr lang="en-US" sz="1800" dirty="0"/>
+              <a:t>.</a:t>
+            </a:r>
+            <a:endParaRPr sz="1800" dirty="0"/>
           </a:p>
           <a:p>
             <a:pPr marL="342900" indent="-342900">
@@ -16980,9 +17524,90 @@
               <a:buChar char="§"/>
             </a:pPr>
             <a:r>
-              <a:rPr sz="1800"/>
-              <a:t>Redes de baixa latência (InfiniBand HDR/NDR, AWS EFA) e escalas acima de 32 nós, onde pode surgir saturação de metadados</a:t>
-            </a:r>
+              <a:rPr sz="1800" dirty="0"/>
+              <a:t>Redes de </a:t>
+            </a:r>
+            <a:r>
+              <a:rPr sz="1800" dirty="0" err="1"/>
+              <a:t>baixa</a:t>
+            </a:r>
+            <a:r>
+              <a:rPr sz="1800" dirty="0"/>
+              <a:t> </a:t>
+            </a:r>
+            <a:r>
+              <a:rPr sz="1800" dirty="0" err="1"/>
+              <a:t>latência</a:t>
+            </a:r>
+            <a:r>
+              <a:rPr sz="1800" dirty="0"/>
+              <a:t> (InfiniBand HDR/NDR, AWS EFA) e </a:t>
+            </a:r>
+            <a:r>
+              <a:rPr sz="1800" dirty="0" err="1"/>
+              <a:t>escalas</a:t>
+            </a:r>
+            <a:r>
+              <a:rPr sz="1800" dirty="0"/>
+              <a:t> </a:t>
+            </a:r>
+            <a:r>
+              <a:rPr sz="1800" dirty="0" err="1"/>
+              <a:t>acima</a:t>
+            </a:r>
+            <a:r>
+              <a:rPr sz="1800" dirty="0"/>
+              <a:t> de 32 </a:t>
+            </a:r>
+            <a:r>
+              <a:rPr sz="1800" dirty="0" err="1"/>
+              <a:t>nós</a:t>
+            </a:r>
+            <a:r>
+              <a:rPr sz="1800" dirty="0"/>
+              <a:t>, </a:t>
+            </a:r>
+            <a:r>
+              <a:rPr sz="1800" dirty="0" err="1"/>
+              <a:t>onde</a:t>
+            </a:r>
+            <a:r>
+              <a:rPr sz="1800" dirty="0"/>
+              <a:t> </a:t>
+            </a:r>
+            <a:r>
+              <a:rPr sz="1800" dirty="0" err="1"/>
+              <a:t>pode</a:t>
+            </a:r>
+            <a:r>
+              <a:rPr sz="1800" dirty="0"/>
+              <a:t> </a:t>
+            </a:r>
+            <a:r>
+              <a:rPr sz="1800" dirty="0" err="1"/>
+              <a:t>surgir</a:t>
+            </a:r>
+            <a:r>
+              <a:rPr sz="1800" dirty="0"/>
+              <a:t> </a:t>
+            </a:r>
+            <a:r>
+              <a:rPr sz="1800" dirty="0" err="1"/>
+              <a:t>saturação</a:t>
+            </a:r>
+            <a:r>
+              <a:rPr sz="1800" dirty="0"/>
+              <a:t> de </a:t>
+            </a:r>
+            <a:r>
+              <a:rPr sz="1800" dirty="0" err="1"/>
+              <a:t>metadados</a:t>
+            </a:r>
+            <a:r>
+              <a:rPr lang="en-US" sz="1800" dirty="0"/>
+              <a:t>.</a:t>
+            </a:r>
+            <a:endParaRPr sz="1800" dirty="0"/>
           </a:p>
           <a:p>
             <a:pPr marL="342900" indent="-342900">
@@ -16993,9 +17618,70 @@
               <a:buChar char="§"/>
             </a:pPr>
             <a:r>
-              <a:rPr sz="1800"/>
-              <a:t>Estender a arquitetura à fase de geração de cortes e diagnosticar o gargalo computacional do regime de strong scaling</a:t>
-            </a:r>
+              <a:rPr sz="1800" dirty="0" err="1"/>
+              <a:t>Estender</a:t>
+            </a:r>
+            <a:r>
+              <a:rPr sz="1800" dirty="0"/>
+              <a:t> a </a:t>
+            </a:r>
+            <a:r>
+              <a:rPr sz="1800" dirty="0" err="1"/>
+              <a:t>arquitetura</a:t>
+            </a:r>
+            <a:r>
+              <a:rPr sz="1800" dirty="0"/>
+              <a:t> à </a:t>
+            </a:r>
+            <a:r>
+              <a:rPr sz="1800" dirty="0" err="1"/>
+              <a:t>fase</a:t>
+            </a:r>
+            <a:r>
+              <a:rPr lang="en-US" sz="1800" dirty="0"/>
+              <a:t> de </a:t>
+            </a:r>
+            <a:r>
+              <a:rPr lang="en-US" sz="1800" dirty="0" err="1"/>
+              <a:t>politica</a:t>
+            </a:r>
+            <a:r>
+              <a:rPr lang="en-US" sz="1800" dirty="0"/>
+              <a:t> </a:t>
+            </a:r>
+            <a:r>
+              <a:rPr sz="1800" dirty="0"/>
+              <a:t>e </a:t>
+            </a:r>
+            <a:r>
+              <a:rPr sz="1800" dirty="0" err="1"/>
+              <a:t>diagnosticar</a:t>
+            </a:r>
+            <a:r>
+              <a:rPr sz="1800" dirty="0"/>
+              <a:t> o </a:t>
+            </a:r>
+            <a:r>
+              <a:rPr sz="1800" dirty="0" err="1"/>
+              <a:t>gargalo</a:t>
+            </a:r>
+            <a:r>
+              <a:rPr sz="1800" dirty="0"/>
+              <a:t> </a:t>
+            </a:r>
+            <a:r>
+              <a:rPr sz="1800" dirty="0" err="1"/>
+              <a:t>computacional</a:t>
+            </a:r>
+            <a:r>
+              <a:rPr sz="1800" dirty="0"/>
+              <a:t> do regime de strong scaling</a:t>
+            </a:r>
+            <a:r>
+              <a:rPr lang="en-US" sz="1800" dirty="0"/>
+              <a:t>.</a:t>
+            </a:r>
+            <a:endParaRPr sz="1800" dirty="0"/>
           </a:p>
         </p:txBody>
       </p:sp>
@@ -17030,190 +17716,6 @@
 </file>
 
 <file path=ppt/slides/slide25.xml><?xml version="1.0" encoding="utf-8"?>
-<p:sld xmlns:a="http://schemas.openxmlformats.org/drawingml/2006/main" xmlns:r="http://schemas.openxmlformats.org/officeDocument/2006/relationships" xmlns:p="http://schemas.openxmlformats.org/presentationml/2006/main">
-  <p:cSld>
-    <p:spTree>
-      <p:nvGrpSpPr>
-        <p:cNvPr id="1" name=""/>
-        <p:cNvGrpSpPr/>
-        <p:nvPr/>
-      </p:nvGrpSpPr>
-      <p:grpSpPr>
-        <a:xfrm>
-          <a:off x="0" y="0"/>
-          <a:ext cx="0" cy="0"/>
-          <a:chOff x="0" y="0"/>
-          <a:chExt cx="0" cy="0"/>
-        </a:xfrm>
-      </p:grpSpPr>
-      <p:sp>
-        <p:nvSpPr>
-          <p:cNvPr id="2" name="Title 1"/>
-          <p:cNvSpPr>
-            <a:spLocks noGrp="1"/>
-          </p:cNvSpPr>
-          <p:nvPr>
-            <p:ph type="title"/>
-          </p:nvPr>
-        </p:nvSpPr>
-        <p:spPr/>
-        <p:txBody>
-          <a:bodyPr/>
-          <a:lstStyle/>
-          <a:p>
-            <a:r>
-              <a:t>Tempo de bloqueio dos envios por tamanho — AWS</a:t>
-            </a:r>
-          </a:p>
-        </p:txBody>
-      </p:sp>
-      <p:sp>
-        <p:nvSpPr>
-          <p:cNvPr id="4" name="Text Placeholder 3"/>
-          <p:cNvSpPr>
-            <a:spLocks noGrp="1"/>
-          </p:cNvSpPr>
-          <p:nvPr>
-            <p:ph type="body" sz="quarter" idx="13"/>
-          </p:nvPr>
-        </p:nvSpPr>
-        <p:spPr/>
-        <p:txBody>
-          <a:bodyPr/>
-          <a:lstStyle/>
-          <a:p>
-            <a:r>
-              <a:rPr sz="1400"/>
-              <a:t>Capítulo 4 — Figura 4.5</a:t>
-            </a:r>
-          </a:p>
-        </p:txBody>
-      </p:sp>
-      <p:pic>
-        <p:nvPicPr>
-          <p:cNvPr id="5" name="Picture 4" descr="EnvioPorTamanho_AWS.png"/>
-          <p:cNvPicPr>
-            <a:picLocks noChangeAspect="1"/>
-          </p:cNvPicPr>
-          <p:nvPr/>
-        </p:nvPicPr>
-        <p:blipFill>
-          <a:blip r:embed="rId3"/>
-          <a:stretch>
-            <a:fillRect/>
-          </a:stretch>
-        </p:blipFill>
-        <p:spPr>
-          <a:xfrm>
-            <a:off x="3009616" y="1371601"/>
-            <a:ext cx="6135809" cy="4924424"/>
-          </a:xfrm>
-          <a:prstGeom prst="rect">
-            <a:avLst/>
-          </a:prstGeom>
-        </p:spPr>
-      </p:pic>
-    </p:spTree>
-  </p:cSld>
-  <p:clrMapOvr>
-    <a:masterClrMapping/>
-  </p:clrMapOvr>
-</p:sld>
-</file>
-
-<file path=ppt/slides/slide26.xml><?xml version="1.0" encoding="utf-8"?>
-<p:sld xmlns:a="http://schemas.openxmlformats.org/drawingml/2006/main" xmlns:r="http://schemas.openxmlformats.org/officeDocument/2006/relationships" xmlns:p="http://schemas.openxmlformats.org/presentationml/2006/main">
-  <p:cSld>
-    <p:spTree>
-      <p:nvGrpSpPr>
-        <p:cNvPr id="1" name=""/>
-        <p:cNvGrpSpPr/>
-        <p:nvPr/>
-      </p:nvGrpSpPr>
-      <p:grpSpPr>
-        <a:xfrm>
-          <a:off x="0" y="0"/>
-          <a:ext cx="0" cy="0"/>
-          <a:chOff x="0" y="0"/>
-          <a:chExt cx="0" cy="0"/>
-        </a:xfrm>
-      </p:grpSpPr>
-      <p:sp>
-        <p:nvSpPr>
-          <p:cNvPr id="2" name="Title 1"/>
-          <p:cNvSpPr>
-            <a:spLocks noGrp="1"/>
-          </p:cNvSpPr>
-          <p:nvPr>
-            <p:ph type="title"/>
-          </p:nvPr>
-        </p:nvSpPr>
-        <p:spPr/>
-        <p:txBody>
-          <a:bodyPr/>
-          <a:lstStyle/>
-          <a:p>
-            <a:r>
-              <a:t>Tempo de bloqueio dos envios por tamanho — SDumont</a:t>
-            </a:r>
-          </a:p>
-        </p:txBody>
-      </p:sp>
-      <p:sp>
-        <p:nvSpPr>
-          <p:cNvPr id="4" name="Text Placeholder 3"/>
-          <p:cNvSpPr>
-            <a:spLocks noGrp="1"/>
-          </p:cNvSpPr>
-          <p:nvPr>
-            <p:ph type="body" sz="quarter" idx="13"/>
-          </p:nvPr>
-        </p:nvSpPr>
-        <p:spPr/>
-        <p:txBody>
-          <a:bodyPr/>
-          <a:lstStyle/>
-          <a:p>
-            <a:r>
-              <a:rPr sz="1400"/>
-              <a:t>Capítulo 4 — Figura 4.10</a:t>
-            </a:r>
-          </a:p>
-        </p:txBody>
-      </p:sp>
-      <p:pic>
-        <p:nvPicPr>
-          <p:cNvPr id="5" name="Picture 4" descr="EnvioPorTamanho_SDumont.png"/>
-          <p:cNvPicPr>
-            <a:picLocks noChangeAspect="1"/>
-          </p:cNvPicPr>
-          <p:nvPr/>
-        </p:nvPicPr>
-        <p:blipFill>
-          <a:blip r:embed="rId3"/>
-          <a:stretch>
-            <a:fillRect/>
-          </a:stretch>
-        </p:blipFill>
-        <p:spPr>
-          <a:xfrm>
-            <a:off x="3009616" y="1371601"/>
-            <a:ext cx="6135809" cy="4924424"/>
-          </a:xfrm>
-          <a:prstGeom prst="rect">
-            <a:avLst/>
-          </a:prstGeom>
-        </p:spPr>
-      </p:pic>
-    </p:spTree>
-  </p:cSld>
-  <p:clrMapOvr>
-    <a:masterClrMapping/>
-  </p:clrMapOvr>
-</p:sld>
-</file>
-
-<file path=ppt/slides/slide27.xml><?xml version="1.0" encoding="utf-8"?>
 <p:sld xmlns:a="http://schemas.openxmlformats.org/drawingml/2006/main" xmlns:r="http://schemas.openxmlformats.org/officeDocument/2006/relationships" xmlns:p="http://schemas.openxmlformats.org/presentationml/2006/main">
   <p:cSld>
     <p:spTree>
@@ -17331,6 +17833,190 @@
         <p14:creationId xmlns:p14="http://schemas.microsoft.com/office/powerpoint/2010/main" val="984290397"/>
       </p:ext>
     </p:extLst>
+  </p:cSld>
+  <p:clrMapOvr>
+    <a:masterClrMapping/>
+  </p:clrMapOvr>
+</p:sld>
+</file>
+
+<file path=ppt/slides/slide26.xml><?xml version="1.0" encoding="utf-8"?>
+<p:sld xmlns:a="http://schemas.openxmlformats.org/drawingml/2006/main" xmlns:r="http://schemas.openxmlformats.org/officeDocument/2006/relationships" xmlns:p="http://schemas.openxmlformats.org/presentationml/2006/main">
+  <p:cSld>
+    <p:spTree>
+      <p:nvGrpSpPr>
+        <p:cNvPr id="1" name=""/>
+        <p:cNvGrpSpPr/>
+        <p:nvPr/>
+      </p:nvGrpSpPr>
+      <p:grpSpPr>
+        <a:xfrm>
+          <a:off x="0" y="0"/>
+          <a:ext cx="0" cy="0"/>
+          <a:chOff x="0" y="0"/>
+          <a:chExt cx="0" cy="0"/>
+        </a:xfrm>
+      </p:grpSpPr>
+      <p:sp>
+        <p:nvSpPr>
+          <p:cNvPr id="2" name="Title 1"/>
+          <p:cNvSpPr>
+            <a:spLocks noGrp="1"/>
+          </p:cNvSpPr>
+          <p:nvPr>
+            <p:ph type="title"/>
+          </p:nvPr>
+        </p:nvSpPr>
+        <p:spPr/>
+        <p:txBody>
+          <a:bodyPr/>
+          <a:lstStyle/>
+          <a:p>
+            <a:r>
+              <a:t>Tempo de bloqueio dos envios por tamanho — AWS</a:t>
+            </a:r>
+          </a:p>
+        </p:txBody>
+      </p:sp>
+      <p:sp>
+        <p:nvSpPr>
+          <p:cNvPr id="4" name="Text Placeholder 3"/>
+          <p:cNvSpPr>
+            <a:spLocks noGrp="1"/>
+          </p:cNvSpPr>
+          <p:nvPr>
+            <p:ph type="body" sz="quarter" idx="13"/>
+          </p:nvPr>
+        </p:nvSpPr>
+        <p:spPr/>
+        <p:txBody>
+          <a:bodyPr/>
+          <a:lstStyle/>
+          <a:p>
+            <a:r>
+              <a:rPr sz="1400"/>
+              <a:t>Capítulo 4 — Figura 4.5</a:t>
+            </a:r>
+          </a:p>
+        </p:txBody>
+      </p:sp>
+      <p:pic>
+        <p:nvPicPr>
+          <p:cNvPr id="5" name="Picture 4" descr="EnvioPorTamanho_AWS.png"/>
+          <p:cNvPicPr>
+            <a:picLocks noChangeAspect="1"/>
+          </p:cNvPicPr>
+          <p:nvPr/>
+        </p:nvPicPr>
+        <p:blipFill>
+          <a:blip r:embed="rId3"/>
+          <a:stretch>
+            <a:fillRect/>
+          </a:stretch>
+        </p:blipFill>
+        <p:spPr>
+          <a:xfrm>
+            <a:off x="3009616" y="1371601"/>
+            <a:ext cx="6135809" cy="4924424"/>
+          </a:xfrm>
+          <a:prstGeom prst="rect">
+            <a:avLst/>
+          </a:prstGeom>
+        </p:spPr>
+      </p:pic>
+    </p:spTree>
+  </p:cSld>
+  <p:clrMapOvr>
+    <a:masterClrMapping/>
+  </p:clrMapOvr>
+</p:sld>
+</file>
+
+<file path=ppt/slides/slide27.xml><?xml version="1.0" encoding="utf-8"?>
+<p:sld xmlns:a="http://schemas.openxmlformats.org/drawingml/2006/main" xmlns:r="http://schemas.openxmlformats.org/officeDocument/2006/relationships" xmlns:p="http://schemas.openxmlformats.org/presentationml/2006/main">
+  <p:cSld>
+    <p:spTree>
+      <p:nvGrpSpPr>
+        <p:cNvPr id="1" name=""/>
+        <p:cNvGrpSpPr/>
+        <p:nvPr/>
+      </p:nvGrpSpPr>
+      <p:grpSpPr>
+        <a:xfrm>
+          <a:off x="0" y="0"/>
+          <a:ext cx="0" cy="0"/>
+          <a:chOff x="0" y="0"/>
+          <a:chExt cx="0" cy="0"/>
+        </a:xfrm>
+      </p:grpSpPr>
+      <p:sp>
+        <p:nvSpPr>
+          <p:cNvPr id="2" name="Title 1"/>
+          <p:cNvSpPr>
+            <a:spLocks noGrp="1"/>
+          </p:cNvSpPr>
+          <p:nvPr>
+            <p:ph type="title"/>
+          </p:nvPr>
+        </p:nvSpPr>
+        <p:spPr/>
+        <p:txBody>
+          <a:bodyPr/>
+          <a:lstStyle/>
+          <a:p>
+            <a:r>
+              <a:t>Tempo de bloqueio dos envios por tamanho — SDumont</a:t>
+            </a:r>
+          </a:p>
+        </p:txBody>
+      </p:sp>
+      <p:sp>
+        <p:nvSpPr>
+          <p:cNvPr id="4" name="Text Placeholder 3"/>
+          <p:cNvSpPr>
+            <a:spLocks noGrp="1"/>
+          </p:cNvSpPr>
+          <p:nvPr>
+            <p:ph type="body" sz="quarter" idx="13"/>
+          </p:nvPr>
+        </p:nvSpPr>
+        <p:spPr/>
+        <p:txBody>
+          <a:bodyPr/>
+          <a:lstStyle/>
+          <a:p>
+            <a:r>
+              <a:rPr sz="1400"/>
+              <a:t>Capítulo 4 — Figura 4.10</a:t>
+            </a:r>
+          </a:p>
+        </p:txBody>
+      </p:sp>
+      <p:pic>
+        <p:nvPicPr>
+          <p:cNvPr id="5" name="Picture 4" descr="EnvioPorTamanho_SDumont.png"/>
+          <p:cNvPicPr>
+            <a:picLocks noChangeAspect="1"/>
+          </p:cNvPicPr>
+          <p:nvPr/>
+        </p:nvPicPr>
+        <p:blipFill>
+          <a:blip r:embed="rId3"/>
+          <a:stretch>
+            <a:fillRect/>
+          </a:stretch>
+        </p:blipFill>
+        <p:spPr>
+          <a:xfrm>
+            <a:off x="3009616" y="1371601"/>
+            <a:ext cx="6135809" cy="4924424"/>
+          </a:xfrm>
+          <a:prstGeom prst="rect">
+            <a:avLst/>
+          </a:prstGeom>
+        </p:spPr>
+      </p:pic>
+    </p:spTree>
   </p:cSld>
   <p:clrMapOvr>
     <a:masterClrMapping/>

--- a/Apresentacao/Apresentacao_MPIO.pptx
+++ b/Apresentacao/Apresentacao_MPIO.pptx
@@ -5,7 +5,7 @@
     <p:sldMasterId id="2147483648" r:id="rId1"/>
   </p:sldMasterIdLst>
   <p:notesMasterIdLst>
-    <p:notesMasterId r:id="rId30"/>
+    <p:notesMasterId r:id="rId31"/>
   </p:notesMasterIdLst>
   <p:sldIdLst>
     <p:sldId id="278" r:id="rId2"/>
@@ -13,29 +13,30 @@
     <p:sldId id="259" r:id="rId4"/>
     <p:sldId id="260" r:id="rId5"/>
     <p:sldId id="261" r:id="rId6"/>
-    <p:sldId id="262" r:id="rId7"/>
-    <p:sldId id="263" r:id="rId8"/>
-    <p:sldId id="265" r:id="rId9"/>
-    <p:sldId id="279" r:id="rId10"/>
-    <p:sldId id="267" r:id="rId11"/>
-    <p:sldId id="268" r:id="rId12"/>
-    <p:sldId id="269" r:id="rId13"/>
-    <p:sldId id="281" r:id="rId14"/>
-    <p:sldId id="282" r:id="rId15"/>
-    <p:sldId id="283" r:id="rId16"/>
-    <p:sldId id="271" r:id="rId17"/>
-    <p:sldId id="272" r:id="rId18"/>
-    <p:sldId id="273" r:id="rId19"/>
-    <p:sldId id="284" r:id="rId20"/>
-    <p:sldId id="285" r:id="rId21"/>
-    <p:sldId id="286" r:id="rId22"/>
-    <p:sldId id="280" r:id="rId23"/>
-    <p:sldId id="275" r:id="rId24"/>
-    <p:sldId id="276" r:id="rId25"/>
-    <p:sldId id="288" r:id="rId26"/>
-    <p:sldId id="270" r:id="rId27"/>
-    <p:sldId id="274" r:id="rId28"/>
-    <p:sldId id="287" r:id="rId29"/>
+    <p:sldId id="289" r:id="rId7"/>
+    <p:sldId id="262" r:id="rId8"/>
+    <p:sldId id="263" r:id="rId9"/>
+    <p:sldId id="265" r:id="rId10"/>
+    <p:sldId id="279" r:id="rId11"/>
+    <p:sldId id="267" r:id="rId12"/>
+    <p:sldId id="268" r:id="rId13"/>
+    <p:sldId id="269" r:id="rId14"/>
+    <p:sldId id="281" r:id="rId15"/>
+    <p:sldId id="282" r:id="rId16"/>
+    <p:sldId id="283" r:id="rId17"/>
+    <p:sldId id="271" r:id="rId18"/>
+    <p:sldId id="272" r:id="rId19"/>
+    <p:sldId id="273" r:id="rId20"/>
+    <p:sldId id="284" r:id="rId21"/>
+    <p:sldId id="285" r:id="rId22"/>
+    <p:sldId id="286" r:id="rId23"/>
+    <p:sldId id="280" r:id="rId24"/>
+    <p:sldId id="275" r:id="rId25"/>
+    <p:sldId id="276" r:id="rId26"/>
+    <p:sldId id="288" r:id="rId27"/>
+    <p:sldId id="270" r:id="rId28"/>
+    <p:sldId id="274" r:id="rId29"/>
+    <p:sldId id="287" r:id="rId30"/>
   </p:sldIdLst>
   <p:sldSz cx="12192000" cy="6858000"/>
   <p:notesSz cx="6858000" cy="9144000"/>
@@ -5832,6 +5833,706 @@
           <a:lstStyle/>
           <a:p>
             <a:r>
+              <a:t>Ambientes experimentais</a:t>
+            </a:r>
+          </a:p>
+        </p:txBody>
+      </p:sp>
+      <p:sp>
+        <p:nvSpPr>
+          <p:cNvPr id="4" name="Text Placeholder 3"/>
+          <p:cNvSpPr>
+            <a:spLocks noGrp="1"/>
+          </p:cNvSpPr>
+          <p:nvPr>
+            <p:ph type="body" sz="quarter" idx="13"/>
+          </p:nvPr>
+        </p:nvSpPr>
+        <p:spPr/>
+        <p:txBody>
+          <a:bodyPr/>
+          <a:lstStyle/>
+          <a:p>
+            <a:r>
+              <a:rPr sz="1400"/>
+              <a:t>Capítulo 4 — mesma carga, duas infraestruturas</a:t>
+            </a:r>
+          </a:p>
+        </p:txBody>
+      </p:sp>
+      <p:sp>
+        <p:nvSpPr>
+          <p:cNvPr id="5" name="Comum"/>
+          <p:cNvSpPr txBox="1"/>
+          <p:nvPr/>
+        </p:nvSpPr>
+        <p:spPr>
+          <a:xfrm>
+            <a:off x="201168" y="1225296"/>
+            <a:ext cx="11786616" cy="868680"/>
+          </a:xfrm>
+          <a:prstGeom prst="rect">
+            <a:avLst/>
+          </a:prstGeom>
+          <a:noFill/>
+        </p:spPr>
+        <p:txBody>
+          <a:bodyPr wrap="square">
+            <a:spAutoFit/>
+          </a:bodyPr>
+          <a:lstStyle/>
+          <a:p>
+            <a:r>
+              <a:rPr sz="1300">
+                <a:solidFill>
+                  <a:srgbClr val="202020"/>
+                </a:solidFill>
+              </a:rPr>
+              <a:t>Base PMO/PAR de outubro de 2023  ·  1.536 cenários × 3 estágios mensais  ·  24 ranks por nó (1 por núcleo físico; sem hyper-threading, pois cada rank usa mais de 8 GB residentes)</a:t>
+            </a:r>
+          </a:p>
+          <a:p>
+            <a:pPr>
+              <a:spcBef>
+                <a:spcPts val="300"/>
+              </a:spcBef>
+            </a:pPr>
+            <a:r>
+              <a:rPr sz="1300">
+                <a:solidFill>
+                  <a:srgbClr val="202020"/>
+                </a:solidFill>
+              </a:rPr>
+              <a:t>2 a 32 nós  ·  5 repetições por configuração (média ± desvio padrão)  ·  strong scaling: problema fixo, número de nós variável</a:t>
+            </a:r>
+          </a:p>
+        </p:txBody>
+      </p:sp>
+      <p:sp>
+        <p:nvSpPr>
+          <p:cNvPr id="6" name="AWS_tit"/>
+          <p:cNvSpPr txBox="1"/>
+          <p:nvPr/>
+        </p:nvSpPr>
+        <p:spPr>
+          <a:xfrm>
+            <a:off x="201168" y="2212848"/>
+            <a:ext cx="5760720" cy="365760"/>
+          </a:xfrm>
+          <a:prstGeom prst="rect">
+            <a:avLst/>
+          </a:prstGeom>
+          <a:noFill/>
+        </p:spPr>
+        <p:txBody>
+          <a:bodyPr wrap="square">
+            <a:spAutoFit/>
+          </a:bodyPr>
+          <a:lstStyle/>
+          <a:p>
+            <a:r>
+              <a:rPr sz="1500" b="1">
+                <a:solidFill>
+                  <a:srgbClr val="2F5893"/>
+                </a:solidFill>
+              </a:rPr>
+              <a:t>AWS — nuvem com armazenamento dedicado</a:t>
+            </a:r>
+          </a:p>
+        </p:txBody>
+      </p:sp>
+      <p:sp>
+        <p:nvSpPr>
+          <p:cNvPr id="7" name="AWS"/>
+          <p:cNvSpPr txBox="1"/>
+          <p:nvPr/>
+        </p:nvSpPr>
+        <p:spPr>
+          <a:xfrm>
+            <a:off x="201168" y="2651760"/>
+            <a:ext cx="5760720" cy="3383280"/>
+          </a:xfrm>
+          <a:prstGeom prst="rect">
+            <a:avLst/>
+          </a:prstGeom>
+          <a:noFill/>
+        </p:spPr>
+        <p:txBody>
+          <a:bodyPr wrap="square">
+            <a:spAutoFit/>
+          </a:bodyPr>
+          <a:lstStyle/>
+          <a:p>
+            <a:pPr marL="285750" indent="-285750">
+              <a:spcBef>
+                <a:spcPts val="200"/>
+              </a:spcBef>
+              <a:buFont typeface="Wingdings" pitchFamily="2" charset="2"/>
+              <a:buChar char="§"/>
+            </a:pPr>
+            <a:r>
+              <a:rPr sz="1300" b="1">
+                <a:solidFill>
+                  <a:srgbClr val="202020"/>
+                </a:solidFill>
+              </a:rPr>
+              <a:t>Nós: </a:t>
+            </a:r>
+            <a:r>
+              <a:rPr sz="1300">
+                <a:solidFill>
+                  <a:srgbClr val="202020"/>
+                </a:solidFill>
+              </a:rPr>
+              <a:t>até 32 × r7i.12xlarge (memory-optimized)</a:t>
+            </a:r>
+          </a:p>
+          <a:p>
+            <a:pPr marL="285750" indent="-285750">
+              <a:spcBef>
+                <a:spcPts val="200"/>
+              </a:spcBef>
+              <a:buFont typeface="Wingdings" pitchFamily="2" charset="2"/>
+              <a:buChar char="§"/>
+            </a:pPr>
+            <a:r>
+              <a:rPr sz="1300" b="1">
+                <a:solidFill>
+                  <a:srgbClr val="202020"/>
+                </a:solidFill>
+              </a:rPr>
+              <a:t>CPU: </a:t>
+            </a:r>
+            <a:r>
+              <a:rPr sz="1300">
+                <a:solidFill>
+                  <a:srgbClr val="202020"/>
+                </a:solidFill>
+              </a:rPr>
+              <a:t>Intel Xeon Sapphire Rapids 8488C, 3,2 GHz — 24 núcleos físicos (48 lógicos)</a:t>
+            </a:r>
+          </a:p>
+          <a:p>
+            <a:pPr marL="285750" indent="-285750">
+              <a:spcBef>
+                <a:spcPts val="200"/>
+              </a:spcBef>
+              <a:buFont typeface="Wingdings" pitchFamily="2" charset="2"/>
+              <a:buChar char="§"/>
+            </a:pPr>
+            <a:r>
+              <a:rPr sz="1300" b="1">
+                <a:solidFill>
+                  <a:srgbClr val="202020"/>
+                </a:solidFill>
+              </a:rPr>
+              <a:t>Memória: </a:t>
+            </a:r>
+            <a:r>
+              <a:rPr sz="1300">
+                <a:solidFill>
+                  <a:srgbClr val="202020"/>
+                </a:solidFill>
+              </a:rPr>
+              <a:t>384 GB DDR5</a:t>
+            </a:r>
+          </a:p>
+          <a:p>
+            <a:pPr marL="285750" indent="-285750">
+              <a:spcBef>
+                <a:spcPts val="200"/>
+              </a:spcBef>
+              <a:buFont typeface="Wingdings" pitchFamily="2" charset="2"/>
+              <a:buChar char="§"/>
+            </a:pPr>
+            <a:r>
+              <a:rPr sz="1300" b="1">
+                <a:solidFill>
+                  <a:srgbClr val="202020"/>
+                </a:solidFill>
+              </a:rPr>
+              <a:t>Rede: </a:t>
+            </a:r>
+            <a:r>
+              <a:rPr sz="1300">
+                <a:solidFill>
+                  <a:srgbClr val="202020"/>
+                </a:solidFill>
+              </a:rPr>
+              <a:t>Elastic Network Adapter (Ethernet), até 18,75 Gb/s</a:t>
+            </a:r>
+          </a:p>
+          <a:p>
+            <a:pPr marL="285750" indent="-285750">
+              <a:spcBef>
+                <a:spcPts val="200"/>
+              </a:spcBef>
+              <a:buFont typeface="Wingdings" pitchFamily="2" charset="2"/>
+              <a:buChar char="§"/>
+            </a:pPr>
+            <a:r>
+              <a:rPr sz="1300" b="1">
+                <a:solidFill>
+                  <a:srgbClr val="202020"/>
+                </a:solidFill>
+              </a:rPr>
+              <a:t>Armazenamento: </a:t>
+            </a:r>
+            <a:r>
+              <a:rPr sz="1300">
+                <a:solidFill>
+                  <a:srgbClr val="202020"/>
+                </a:solidFill>
+              </a:rPr>
+              <a:t>Amazon FSx for Lustre 2.12, 12 TB — 1 MDS (350 GB) + 10 OSTs (1,165 TB cada)</a:t>
+            </a:r>
+          </a:p>
+          <a:p>
+            <a:pPr marL="285750" indent="-285750">
+              <a:spcBef>
+                <a:spcPts val="200"/>
+              </a:spcBef>
+              <a:buFont typeface="Wingdings" pitchFamily="2" charset="2"/>
+              <a:buChar char="§"/>
+            </a:pPr>
+            <a:r>
+              <a:rPr sz="1300" b="1">
+                <a:solidFill>
+                  <a:srgbClr val="202020"/>
+                </a:solidFill>
+              </a:rPr>
+              <a:t>Lustre: </a:t>
+            </a:r>
+            <a:r>
+              <a:rPr sz="1300">
+                <a:solidFill>
+                  <a:srgbClr val="202020"/>
+                </a:solidFill>
+              </a:rPr>
+              <a:t>stripe_count = 10, stripe_size = 1 MB</a:t>
+            </a:r>
+          </a:p>
+          <a:p>
+            <a:pPr marL="285750" indent="-285750">
+              <a:spcBef>
+                <a:spcPts val="200"/>
+              </a:spcBef>
+              <a:buFont typeface="Wingdings" pitchFamily="2" charset="2"/>
+              <a:buChar char="§"/>
+            </a:pPr>
+            <a:r>
+              <a:rPr sz="1300" b="1">
+                <a:solidFill>
+                  <a:srgbClr val="202020"/>
+                </a:solidFill>
+              </a:rPr>
+              <a:t>MPI: </a:t>
+            </a:r>
+            <a:r>
+              <a:rPr sz="1300">
+                <a:solidFill>
+                  <a:srgbClr val="202020"/>
+                </a:solidFill>
+              </a:rPr>
+              <a:t>MPICH2 3.2</a:t>
+            </a:r>
+          </a:p>
+        </p:txBody>
+      </p:sp>
+      <p:sp>
+        <p:nvSpPr>
+          <p:cNvPr id="8" name="AWS_fecho"/>
+          <p:cNvSpPr txBox="1"/>
+          <p:nvPr/>
+        </p:nvSpPr>
+        <p:spPr>
+          <a:xfrm>
+            <a:off x="201168" y="4818888"/>
+            <a:ext cx="5760720" cy="457200"/>
+          </a:xfrm>
+          <a:prstGeom prst="rect">
+            <a:avLst/>
+          </a:prstGeom>
+          <a:noFill/>
+        </p:spPr>
+        <p:txBody>
+          <a:bodyPr wrap="square">
+            <a:spAutoFit/>
+          </a:bodyPr>
+          <a:lstStyle/>
+          <a:p>
+            <a:r>
+              <a:rPr sz="1350" b="1">
+                <a:solidFill>
+                  <a:srgbClr val="8C7A4B"/>
+                </a:solidFill>
+              </a:rPr>
+              <a:t>Armazenamento dedicado ao experimento</a:t>
+            </a:r>
+          </a:p>
+        </p:txBody>
+      </p:sp>
+      <p:sp>
+        <p:nvSpPr>
+          <p:cNvPr id="9" name="SDU_tit"/>
+          <p:cNvSpPr txBox="1"/>
+          <p:nvPr/>
+        </p:nvSpPr>
+        <p:spPr>
+          <a:xfrm>
+            <a:off x="6227064" y="2212848"/>
+            <a:ext cx="5760720" cy="365760"/>
+          </a:xfrm>
+          <a:prstGeom prst="rect">
+            <a:avLst/>
+          </a:prstGeom>
+          <a:noFill/>
+        </p:spPr>
+        <p:txBody>
+          <a:bodyPr wrap="square">
+            <a:spAutoFit/>
+          </a:bodyPr>
+          <a:lstStyle/>
+          <a:p>
+            <a:r>
+              <a:rPr sz="1500" b="1">
+                <a:solidFill>
+                  <a:srgbClr val="2F5893"/>
+                </a:solidFill>
+              </a:rPr>
+              <a:t>SDumont — supercomputador (LNCC / SINAPAD)</a:t>
+            </a:r>
+          </a:p>
+        </p:txBody>
+      </p:sp>
+      <p:sp>
+        <p:nvSpPr>
+          <p:cNvPr id="10" name="SDU"/>
+          <p:cNvSpPr txBox="1"/>
+          <p:nvPr/>
+        </p:nvSpPr>
+        <p:spPr>
+          <a:xfrm>
+            <a:off x="6227064" y="2651760"/>
+            <a:ext cx="5760720" cy="3383280"/>
+          </a:xfrm>
+          <a:prstGeom prst="rect">
+            <a:avLst/>
+          </a:prstGeom>
+          <a:noFill/>
+        </p:spPr>
+        <p:txBody>
+          <a:bodyPr wrap="square">
+            <a:spAutoFit/>
+          </a:bodyPr>
+          <a:lstStyle/>
+          <a:p>
+            <a:pPr marL="285750" indent="-285750">
+              <a:spcBef>
+                <a:spcPts val="200"/>
+              </a:spcBef>
+              <a:buFont typeface="Wingdings" pitchFamily="2" charset="2"/>
+              <a:buChar char="§"/>
+            </a:pPr>
+            <a:r>
+              <a:rPr sz="1300" b="1">
+                <a:solidFill>
+                  <a:srgbClr val="202020"/>
+                </a:solidFill>
+              </a:rPr>
+              <a:t>Nós: </a:t>
+            </a:r>
+            <a:r>
+              <a:rPr sz="1300">
+                <a:solidFill>
+                  <a:srgbClr val="202020"/>
+                </a:solidFill>
+              </a:rPr>
+              <a:t>até 32 nós de processamento (EVIDEN/ATOS/BULL)</a:t>
+            </a:r>
+          </a:p>
+          <a:p>
+            <a:pPr marL="285750" indent="-285750">
+              <a:spcBef>
+                <a:spcPts val="200"/>
+              </a:spcBef>
+              <a:buFont typeface="Wingdings" pitchFamily="2" charset="2"/>
+              <a:buChar char="§"/>
+            </a:pPr>
+            <a:r>
+              <a:rPr sz="1300" b="1">
+                <a:solidFill>
+                  <a:srgbClr val="202020"/>
+                </a:solidFill>
+              </a:rPr>
+              <a:t>CPU: </a:t>
+            </a:r>
+            <a:r>
+              <a:rPr sz="1300">
+                <a:solidFill>
+                  <a:srgbClr val="202020"/>
+                </a:solidFill>
+              </a:rPr>
+              <a:t>2 × Intel Xeon Cascade Lake Gold 6252 — 24 núcleos físicos (48 lógicos)</a:t>
+            </a:r>
+          </a:p>
+          <a:p>
+            <a:pPr marL="285750" indent="-285750">
+              <a:spcBef>
+                <a:spcPts val="200"/>
+              </a:spcBef>
+              <a:buFont typeface="Wingdings" pitchFamily="2" charset="2"/>
+              <a:buChar char="§"/>
+            </a:pPr>
+            <a:r>
+              <a:rPr sz="1300" b="1">
+                <a:solidFill>
+                  <a:srgbClr val="202020"/>
+                </a:solidFill>
+              </a:rPr>
+              <a:t>Memória: </a:t>
+            </a:r>
+            <a:r>
+              <a:rPr sz="1300">
+                <a:solidFill>
+                  <a:srgbClr val="202020"/>
+                </a:solidFill>
+              </a:rPr>
+              <a:t>384 GB</a:t>
+            </a:r>
+          </a:p>
+          <a:p>
+            <a:pPr marL="285750" indent="-285750">
+              <a:spcBef>
+                <a:spcPts val="200"/>
+              </a:spcBef>
+              <a:buFont typeface="Wingdings" pitchFamily="2" charset="2"/>
+              <a:buChar char="§"/>
+            </a:pPr>
+            <a:r>
+              <a:rPr sz="1300" b="1">
+                <a:solidFill>
+                  <a:srgbClr val="202020"/>
+                </a:solidFill>
+              </a:rPr>
+              <a:t>Rede: </a:t>
+            </a:r>
+            <a:r>
+              <a:rPr sz="1300">
+                <a:solidFill>
+                  <a:srgbClr val="202020"/>
+                </a:solidFill>
+              </a:rPr>
+              <a:t>InfiniBand EDR, 100 Gb/s</a:t>
+            </a:r>
+          </a:p>
+          <a:p>
+            <a:pPr marL="285750" indent="-285750">
+              <a:spcBef>
+                <a:spcPts val="200"/>
+              </a:spcBef>
+              <a:buFont typeface="Wingdings" pitchFamily="2" charset="2"/>
+              <a:buChar char="§"/>
+            </a:pPr>
+            <a:r>
+              <a:rPr sz="1300" b="1">
+                <a:solidFill>
+                  <a:srgbClr val="202020"/>
+                </a:solidFill>
+              </a:rPr>
+              <a:t>Armazenamento: </a:t>
+            </a:r>
+            <a:r>
+              <a:rPr sz="1300">
+                <a:solidFill>
+                  <a:srgbClr val="202020"/>
+                </a:solidFill>
+              </a:rPr>
+              <a:t>Lustre 2.12 em Cray/HPE ClusterStor L300, 1,1 PB — 1 MDS (1 MDT) + 6 OSS (1 OST cada)</a:t>
+            </a:r>
+          </a:p>
+          <a:p>
+            <a:pPr marL="285750" indent="-285750">
+              <a:spcBef>
+                <a:spcPts val="200"/>
+              </a:spcBef>
+              <a:buFont typeface="Wingdings" pitchFamily="2" charset="2"/>
+              <a:buChar char="§"/>
+            </a:pPr>
+            <a:r>
+              <a:rPr sz="1300" b="1">
+                <a:solidFill>
+                  <a:srgbClr val="202020"/>
+                </a:solidFill>
+              </a:rPr>
+              <a:t>Lustre: </a:t>
+            </a:r>
+            <a:r>
+              <a:rPr sz="1300">
+                <a:solidFill>
+                  <a:srgbClr val="202020"/>
+                </a:solidFill>
+              </a:rPr>
+              <a:t>stripe_count = 6, stripe_size = 1 MB</a:t>
+            </a:r>
+          </a:p>
+          <a:p>
+            <a:pPr marL="285750" indent="-285750">
+              <a:spcBef>
+                <a:spcPts val="200"/>
+              </a:spcBef>
+              <a:buFont typeface="Wingdings" pitchFamily="2" charset="2"/>
+              <a:buChar char="§"/>
+            </a:pPr>
+            <a:r>
+              <a:rPr sz="1300" b="1">
+                <a:solidFill>
+                  <a:srgbClr val="202020"/>
+                </a:solidFill>
+              </a:rPr>
+              <a:t>MPI: </a:t>
+            </a:r>
+            <a:r>
+              <a:rPr sz="1300">
+                <a:solidFill>
+                  <a:srgbClr val="202020"/>
+                </a:solidFill>
+              </a:rPr>
+              <a:t>MPICH2 3.2</a:t>
+            </a:r>
+          </a:p>
+        </p:txBody>
+      </p:sp>
+      <p:sp>
+        <p:nvSpPr>
+          <p:cNvPr id="11" name="SDU_fecho"/>
+          <p:cNvSpPr txBox="1"/>
+          <p:nvPr/>
+        </p:nvSpPr>
+        <p:spPr>
+          <a:xfrm>
+            <a:off x="6227064" y="4818888"/>
+            <a:ext cx="5760720" cy="457200"/>
+          </a:xfrm>
+          <a:prstGeom prst="rect">
+            <a:avLst/>
+          </a:prstGeom>
+          <a:noFill/>
+        </p:spPr>
+        <p:txBody>
+          <a:bodyPr wrap="square">
+            <a:spAutoFit/>
+          </a:bodyPr>
+          <a:lstStyle/>
+          <a:p>
+            <a:r>
+              <a:rPr sz="1350" b="1">
+                <a:solidFill>
+                  <a:srgbClr val="8C7A4B"/>
+                </a:solidFill>
+              </a:rPr>
+              <a:t>Armazenamento compartilhado com outros jobs de HPC</a:t>
+            </a:r>
+          </a:p>
+        </p:txBody>
+      </p:sp>
+      <p:sp>
+        <p:nvSpPr>
+          <p:cNvPr id="12" name="Contrastes"/>
+          <p:cNvSpPr txBox="1"/>
+          <p:nvPr/>
+        </p:nvSpPr>
+        <p:spPr>
+          <a:xfrm>
+            <a:off x="201168" y="5440680"/>
+            <a:ext cx="11786616" cy="1005840"/>
+          </a:xfrm>
+          <a:prstGeom prst="rect">
+            <a:avLst/>
+          </a:prstGeom>
+          <a:noFill/>
+        </p:spPr>
+        <p:txBody>
+          <a:bodyPr wrap="square">
+            <a:spAutoFit/>
+          </a:bodyPr>
+          <a:lstStyle/>
+          <a:p>
+            <a:r>
+              <a:rPr sz="1350" b="1">
+                <a:solidFill>
+                  <a:srgbClr val="2F5893"/>
+                </a:solidFill>
+              </a:rPr>
+              <a:t>Três diferenças de infraestrutura, com a mesma carga:</a:t>
+            </a:r>
+            <a:r>
+              <a:rPr sz="1350">
+                <a:solidFill>
+                  <a:srgbClr val="202020"/>
+                </a:solidFill>
+              </a:rPr>
+              <a:t>  rede (18,75 Gb/s Ethernet × 100 Gb/s InfiniBand)  ·  OSTs (10 × 6)  ·  armazenamento dedicado × compartilhado</a:t>
+            </a:r>
+          </a:p>
+          <a:p>
+            <a:pPr>
+              <a:spcBef>
+                <a:spcPts val="500"/>
+              </a:spcBef>
+            </a:pPr>
+            <a:r>
+              <a:rPr sz="1300">
+                <a:solidFill>
+                  <a:srgbClr val="202020"/>
+                </a:solidFill>
+              </a:rPr>
+              <a:t>Manter a carga fixa e variar apenas a infraestrutura é o que permite separar efeito de arquitetura de efeito de plataforma.</a:t>
+            </a:r>
+          </a:p>
+        </p:txBody>
+      </p:sp>
+    </p:spTree>
+  </p:cSld>
+  <p:clrMapOvr>
+    <a:masterClrMapping/>
+  </p:clrMapOvr>
+</p:sld>
+</file>
+
+<file path=ppt/slides/slide11.xml><?xml version="1.0" encoding="utf-8"?>
+<p:sld xmlns:a="http://schemas.openxmlformats.org/drawingml/2006/main" xmlns:r="http://schemas.openxmlformats.org/officeDocument/2006/relationships" xmlns:p="http://schemas.openxmlformats.org/presentationml/2006/main">
+  <p:cSld>
+    <p:spTree>
+      <p:nvGrpSpPr>
+        <p:cNvPr id="1" name=""/>
+        <p:cNvGrpSpPr/>
+        <p:nvPr/>
+      </p:nvGrpSpPr>
+      <p:grpSpPr>
+        <a:xfrm>
+          <a:off x="0" y="0"/>
+          <a:ext cx="0" cy="0"/>
+          <a:chOff x="0" y="0"/>
+          <a:chExt cx="0" cy="0"/>
+        </a:xfrm>
+      </p:grpSpPr>
+      <p:sp>
+        <p:nvSpPr>
+          <p:cNvPr id="2" name="Title 1"/>
+          <p:cNvSpPr>
+            <a:spLocks noGrp="1"/>
+          </p:cNvSpPr>
+          <p:nvPr>
+            <p:ph type="title"/>
+          </p:nvPr>
+        </p:nvSpPr>
+        <p:spPr/>
+        <p:txBody>
+          <a:bodyPr/>
+          <a:lstStyle/>
+          <a:p>
+            <a:r>
               <a:t>Caracterização do perfil de E/S</a:t>
             </a:r>
           </a:p>
@@ -5987,7 +6688,7 @@
 </p:sld>
 </file>
 
-<file path=ppt/slides/slide11.xml><?xml version="1.0" encoding="utf-8"?>
+<file path=ppt/slides/slide12.xml><?xml version="1.0" encoding="utf-8"?>
 <p:sld xmlns:a="http://schemas.openxmlformats.org/drawingml/2006/main" xmlns:r="http://schemas.openxmlformats.org/officeDocument/2006/relationships" xmlns:p="http://schemas.openxmlformats.org/presentationml/2006/main">
   <p:cSld>
     <p:spTree>
@@ -6178,7 +6879,7 @@
 </p:sld>
 </file>
 
-<file path=ppt/slides/slide12.xml><?xml version="1.0" encoding="utf-8"?>
+<file path=ppt/slides/slide13.xml><?xml version="1.0" encoding="utf-8"?>
 <p:sld xmlns:a="http://schemas.openxmlformats.org/drawingml/2006/main" xmlns:r="http://schemas.openxmlformats.org/officeDocument/2006/relationships" xmlns:p="http://schemas.openxmlformats.org/presentationml/2006/main">
   <p:cSld>
     <p:spTree>
@@ -6369,7 +7070,7 @@
 </p:sld>
 </file>
 
-<file path=ppt/slides/slide13.xml><?xml version="1.0" encoding="utf-8"?>
+<file path=ppt/slides/slide14.xml><?xml version="1.0" encoding="utf-8"?>
 <p:sld xmlns:a="http://schemas.openxmlformats.org/drawingml/2006/main" xmlns:r="http://schemas.openxmlformats.org/officeDocument/2006/relationships" xmlns:p="http://schemas.openxmlformats.org/presentationml/2006/main">
   <p:cSld>
     <p:spTree>
@@ -7690,7 +8391,7 @@
 </p:sld>
 </file>
 
-<file path=ppt/slides/slide14.xml><?xml version="1.0" encoding="utf-8"?>
+<file path=ppt/slides/slide15.xml><?xml version="1.0" encoding="utf-8"?>
 <p:sld xmlns:a="http://schemas.openxmlformats.org/drawingml/2006/main" xmlns:r="http://schemas.openxmlformats.org/officeDocument/2006/relationships" xmlns:p="http://schemas.openxmlformats.org/presentationml/2006/main">
   <p:cSld>
     <p:spTree>
@@ -9161,7 +9862,7 @@
 </p:sld>
 </file>
 
-<file path=ppt/slides/slide15.xml><?xml version="1.0" encoding="utf-8"?>
+<file path=ppt/slides/slide16.xml><?xml version="1.0" encoding="utf-8"?>
 <p:sld xmlns:a="http://schemas.openxmlformats.org/drawingml/2006/main" xmlns:r="http://schemas.openxmlformats.org/officeDocument/2006/relationships" xmlns:p="http://schemas.openxmlformats.org/presentationml/2006/main">
   <p:cSld>
     <p:spTree>
@@ -10845,7 +11546,7 @@
 </p:sld>
 </file>
 
-<file path=ppt/slides/slide16.xml><?xml version="1.0" encoding="utf-8"?>
+<file path=ppt/slides/slide17.xml><?xml version="1.0" encoding="utf-8"?>
 <p:sld xmlns:a="http://schemas.openxmlformats.org/drawingml/2006/main" xmlns:r="http://schemas.openxmlformats.org/officeDocument/2006/relationships" xmlns:p="http://schemas.openxmlformats.org/presentationml/2006/main">
   <p:cSld>
     <p:spTree>
@@ -10973,7 +11674,7 @@
 </p:sld>
 </file>
 
-<file path=ppt/slides/slide17.xml><?xml version="1.0" encoding="utf-8"?>
+<file path=ppt/slides/slide18.xml><?xml version="1.0" encoding="utf-8"?>
 <p:sld xmlns:a="http://schemas.openxmlformats.org/drawingml/2006/main" xmlns:r="http://schemas.openxmlformats.org/officeDocument/2006/relationships" xmlns:p="http://schemas.openxmlformats.org/presentationml/2006/main">
   <p:cSld>
     <p:spTree>
@@ -11164,7 +11865,7 @@
 </p:sld>
 </file>
 
-<file path=ppt/slides/slide18.xml><?xml version="1.0" encoding="utf-8"?>
+<file path=ppt/slides/slide19.xml><?xml version="1.0" encoding="utf-8"?>
 <p:sld xmlns:a="http://schemas.openxmlformats.org/drawingml/2006/main" xmlns:r="http://schemas.openxmlformats.org/officeDocument/2006/relationships" xmlns:p="http://schemas.openxmlformats.org/presentationml/2006/main">
   <p:cSld>
     <p:spTree>
@@ -11355,7 +12056,237 @@
 </p:sld>
 </file>
 
-<file path=ppt/slides/slide19.xml><?xml version="1.0" encoding="utf-8"?>
+<file path=ppt/slides/slide2.xml><?xml version="1.0" encoding="utf-8"?>
+<p:sld xmlns:a="http://schemas.openxmlformats.org/drawingml/2006/main" xmlns:r="http://schemas.openxmlformats.org/officeDocument/2006/relationships" xmlns:p="http://schemas.openxmlformats.org/presentationml/2006/main">
+  <p:cSld>
+    <p:spTree>
+      <p:nvGrpSpPr>
+        <p:cNvPr id="1" name=""/>
+        <p:cNvGrpSpPr/>
+        <p:nvPr/>
+      </p:nvGrpSpPr>
+      <p:grpSpPr>
+        <a:xfrm>
+          <a:off x="0" y="0"/>
+          <a:ext cx="0" cy="0"/>
+          <a:chOff x="0" y="0"/>
+          <a:chExt cx="0" cy="0"/>
+        </a:xfrm>
+      </p:grpSpPr>
+      <p:sp>
+        <p:nvSpPr>
+          <p:cNvPr id="2" name="Title 1"/>
+          <p:cNvSpPr>
+            <a:spLocks noGrp="1"/>
+          </p:cNvSpPr>
+          <p:nvPr>
+            <p:ph type="title"/>
+          </p:nvPr>
+        </p:nvSpPr>
+        <p:spPr/>
+        <p:txBody>
+          <a:bodyPr/>
+          <a:lstStyle/>
+          <a:p>
+            <a:r>
+              <a:rPr lang="pt-BR" noProof="0" dirty="0"/>
+              <a:t>Introdução e Motivação</a:t>
+            </a:r>
+          </a:p>
+        </p:txBody>
+      </p:sp>
+      <p:sp>
+        <p:nvSpPr>
+          <p:cNvPr id="4" name="Text Placeholder 3"/>
+          <p:cNvSpPr>
+            <a:spLocks noGrp="1"/>
+          </p:cNvSpPr>
+          <p:nvPr>
+            <p:ph type="body" sz="quarter" idx="13"/>
+          </p:nvPr>
+        </p:nvSpPr>
+        <p:spPr/>
+        <p:txBody>
+          <a:bodyPr/>
+          <a:lstStyle/>
+          <a:p>
+            <a:r>
+              <a:rPr lang="pt-BR" sz="1400" noProof="0" dirty="0"/>
+              <a:t>Quando a E/S se torna o gargalo de uma aplicação paralela</a:t>
+            </a:r>
+          </a:p>
+        </p:txBody>
+      </p:sp>
+      <p:sp>
+        <p:nvSpPr>
+          <p:cNvPr id="5" name="TextBox 4"/>
+          <p:cNvSpPr txBox="1"/>
+          <p:nvPr/>
+        </p:nvSpPr>
+        <p:spPr>
+          <a:xfrm>
+            <a:off x="199751" y="1211601"/>
+            <a:ext cx="11755539" cy="1931298"/>
+          </a:xfrm>
+          <a:prstGeom prst="rect">
+            <a:avLst/>
+          </a:prstGeom>
+          <a:noFill/>
+        </p:spPr>
+        <p:txBody>
+          <a:bodyPr wrap="square">
+            <a:spAutoFit/>
+          </a:bodyPr>
+          <a:lstStyle/>
+          <a:p>
+            <a:pPr marL="285750" indent="-285750">
+              <a:spcBef>
+                <a:spcPts val="300"/>
+              </a:spcBef>
+              <a:buFont typeface="Wingdings" pitchFamily="2" charset="2"/>
+              <a:buChar char="§"/>
+            </a:pPr>
+            <a:r>
+              <a:rPr lang="pt-BR" sz="1600" noProof="0" dirty="0"/>
+              <a:t>Caso de estudo — o SDDP: na simulação final os problemas são independentes e cada processo produz blocos contíguo de dados por (estágio, cenário), </a:t>
+            </a:r>
+            <a:endParaRPr lang="pt-BR" sz="1600" dirty="0"/>
+          </a:p>
+          <a:p>
+            <a:pPr marL="285750" indent="-285750">
+              <a:spcBef>
+                <a:spcPts val="300"/>
+              </a:spcBef>
+              <a:buFont typeface="Wingdings" pitchFamily="2" charset="2"/>
+              <a:buChar char="§"/>
+            </a:pPr>
+            <a:r>
+              <a:rPr lang="pt-BR" sz="1600" noProof="0" dirty="0"/>
+              <a:t>A mudança de resolução por patamares para horária em alguns casos </a:t>
+            </a:r>
+            <a:r>
+              <a:rPr lang="pt-BR" sz="1600" noProof="0"/>
+              <a:t>pode ampliar em </a:t>
+            </a:r>
+            <a:r>
+              <a:rPr lang="pt-BR" sz="1600" noProof="0" dirty="0"/>
+              <a:t>até 240x o tamanho dos resultados.</a:t>
+            </a:r>
+          </a:p>
+          <a:p>
+            <a:pPr marL="285750" indent="-285750">
+              <a:spcBef>
+                <a:spcPts val="300"/>
+              </a:spcBef>
+              <a:buFont typeface="Wingdings" pitchFamily="2" charset="2"/>
+              <a:buChar char="§"/>
+            </a:pPr>
+            <a:r>
+              <a:rPr lang="pt-BR" sz="1600" noProof="0" dirty="0"/>
+              <a:t>O HPC oferece as duas peças para esse padrão: o Lustre entrega banda agregada que cresce com o número de </a:t>
+            </a:r>
+            <a:r>
+              <a:rPr lang="pt-BR" sz="1600" noProof="0" dirty="0" err="1"/>
+              <a:t>OSTs</a:t>
+            </a:r>
+            <a:r>
+              <a:rPr lang="pt-BR" sz="1600" noProof="0" dirty="0"/>
+              <a:t>, e a MPI-IO permite que vários processos gravem em offsets distintos de um mesmo arquivo</a:t>
+            </a:r>
+          </a:p>
+          <a:p>
+            <a:pPr marL="285750" indent="-285750">
+              <a:spcBef>
+                <a:spcPts val="300"/>
+              </a:spcBef>
+              <a:buFont typeface="Wingdings" pitchFamily="2" charset="2"/>
+              <a:buChar char="§"/>
+            </a:pPr>
+            <a:r>
+              <a:rPr lang="pt-BR" sz="1600" noProof="0" dirty="0"/>
+              <a:t>Mas essa banda é potencial, não automática: um único rank escritor converte a E/S em comunicação ponto a ponto e a serializa — o limite passa a ser a rede do nó escritor, não o armazenamento</a:t>
+            </a:r>
+          </a:p>
+        </p:txBody>
+      </p:sp>
+      <p:pic>
+        <p:nvPicPr>
+          <p:cNvPr id="6" name="Picture 5" descr="formato_patamares_vs_horario.png"/>
+          <p:cNvPicPr>
+            <a:picLocks noChangeAspect="1"/>
+          </p:cNvPicPr>
+          <p:nvPr/>
+        </p:nvPicPr>
+        <p:blipFill>
+          <a:blip r:embed="rId3"/>
+          <a:stretch>
+            <a:fillRect/>
+          </a:stretch>
+        </p:blipFill>
+        <p:spPr>
+          <a:xfrm>
+            <a:off x="2584937" y="3099920"/>
+            <a:ext cx="6985161" cy="1620000"/>
+          </a:xfrm>
+          <a:prstGeom prst="rect">
+            <a:avLst/>
+          </a:prstGeom>
+        </p:spPr>
+      </p:pic>
+      <p:sp>
+        <p:nvSpPr>
+          <p:cNvPr id="7" name="TextBox 6"/>
+          <p:cNvSpPr txBox="1"/>
+          <p:nvPr/>
+        </p:nvSpPr>
+        <p:spPr>
+          <a:xfrm>
+            <a:off x="199749" y="4871218"/>
+            <a:ext cx="11755539" cy="750000"/>
+          </a:xfrm>
+          <a:prstGeom prst="rect">
+            <a:avLst/>
+          </a:prstGeom>
+          <a:noFill/>
+        </p:spPr>
+        <p:txBody>
+          <a:bodyPr wrap="square">
+            <a:spAutoFit/>
+          </a:bodyPr>
+          <a:lstStyle/>
+          <a:p>
+            <a:pPr marL="0" indent="0">
+              <a:buNone/>
+            </a:pPr>
+            <a:r>
+              <a:rPr lang="pt-BR" sz="1700" b="1" noProof="0" dirty="0">
+                <a:solidFill>
+                  <a:srgbClr val="2F5893"/>
+                </a:solidFill>
+              </a:rPr>
+              <a:t>Por tarefa (estágio, cenário): 3 registros  →  720 registros  =  240x mais dados a persistir</a:t>
+            </a:r>
+          </a:p>
+          <a:p>
+            <a:pPr marL="0" indent="0">
+              <a:buNone/>
+            </a:pPr>
+            <a:r>
+              <a:rPr lang="pt-BR" sz="1200" noProof="0" dirty="0"/>
+              <a:t>A carga de computação por tarefa não muda — cresce o volume de saída, e o gargalo migra da CPU para a E/S</a:t>
+            </a:r>
+          </a:p>
+        </p:txBody>
+      </p:sp>
+    </p:spTree>
+  </p:cSld>
+  <p:clrMapOvr>
+    <a:masterClrMapping/>
+  </p:clrMapOvr>
+</p:sld>
+</file>
+
+<file path=ppt/slides/slide20.xml><?xml version="1.0" encoding="utf-8"?>
 <p:sld xmlns:a="http://schemas.openxmlformats.org/drawingml/2006/main" xmlns:r="http://schemas.openxmlformats.org/officeDocument/2006/relationships" xmlns:p="http://schemas.openxmlformats.org/presentationml/2006/main">
   <p:cSld>
     <p:spTree>
@@ -12676,237 +13607,7 @@
 </p:sld>
 </file>
 
-<file path=ppt/slides/slide2.xml><?xml version="1.0" encoding="utf-8"?>
-<p:sld xmlns:a="http://schemas.openxmlformats.org/drawingml/2006/main" xmlns:r="http://schemas.openxmlformats.org/officeDocument/2006/relationships" xmlns:p="http://schemas.openxmlformats.org/presentationml/2006/main">
-  <p:cSld>
-    <p:spTree>
-      <p:nvGrpSpPr>
-        <p:cNvPr id="1" name=""/>
-        <p:cNvGrpSpPr/>
-        <p:nvPr/>
-      </p:nvGrpSpPr>
-      <p:grpSpPr>
-        <a:xfrm>
-          <a:off x="0" y="0"/>
-          <a:ext cx="0" cy="0"/>
-          <a:chOff x="0" y="0"/>
-          <a:chExt cx="0" cy="0"/>
-        </a:xfrm>
-      </p:grpSpPr>
-      <p:sp>
-        <p:nvSpPr>
-          <p:cNvPr id="2" name="Title 1"/>
-          <p:cNvSpPr>
-            <a:spLocks noGrp="1"/>
-          </p:cNvSpPr>
-          <p:nvPr>
-            <p:ph type="title"/>
-          </p:nvPr>
-        </p:nvSpPr>
-        <p:spPr/>
-        <p:txBody>
-          <a:bodyPr/>
-          <a:lstStyle/>
-          <a:p>
-            <a:r>
-              <a:rPr lang="pt-BR" noProof="0" dirty="0"/>
-              <a:t>Introdução e Motivação</a:t>
-            </a:r>
-          </a:p>
-        </p:txBody>
-      </p:sp>
-      <p:sp>
-        <p:nvSpPr>
-          <p:cNvPr id="4" name="Text Placeholder 3"/>
-          <p:cNvSpPr>
-            <a:spLocks noGrp="1"/>
-          </p:cNvSpPr>
-          <p:nvPr>
-            <p:ph type="body" sz="quarter" idx="13"/>
-          </p:nvPr>
-        </p:nvSpPr>
-        <p:spPr/>
-        <p:txBody>
-          <a:bodyPr/>
-          <a:lstStyle/>
-          <a:p>
-            <a:r>
-              <a:rPr lang="pt-BR" sz="1400" noProof="0" dirty="0"/>
-              <a:t>Quando a E/S se torna o gargalo de uma aplicação paralela</a:t>
-            </a:r>
-          </a:p>
-        </p:txBody>
-      </p:sp>
-      <p:sp>
-        <p:nvSpPr>
-          <p:cNvPr id="5" name="TextBox 4"/>
-          <p:cNvSpPr txBox="1"/>
-          <p:nvPr/>
-        </p:nvSpPr>
-        <p:spPr>
-          <a:xfrm>
-            <a:off x="199751" y="1211601"/>
-            <a:ext cx="11755539" cy="1931298"/>
-          </a:xfrm>
-          <a:prstGeom prst="rect">
-            <a:avLst/>
-          </a:prstGeom>
-          <a:noFill/>
-        </p:spPr>
-        <p:txBody>
-          <a:bodyPr wrap="square">
-            <a:spAutoFit/>
-          </a:bodyPr>
-          <a:lstStyle/>
-          <a:p>
-            <a:pPr marL="285750" indent="-285750">
-              <a:spcBef>
-                <a:spcPts val="300"/>
-              </a:spcBef>
-              <a:buFont typeface="Wingdings" pitchFamily="2" charset="2"/>
-              <a:buChar char="§"/>
-            </a:pPr>
-            <a:r>
-              <a:rPr lang="pt-BR" sz="1600" noProof="0" dirty="0"/>
-              <a:t>Caso de estudo — o SDDP: na simulação final os problemas são independentes e cada processo produz blocos contíguo de dados por (estágio, cenário), </a:t>
-            </a:r>
-            <a:endParaRPr lang="pt-BR" sz="1600" dirty="0"/>
-          </a:p>
-          <a:p>
-            <a:pPr marL="285750" indent="-285750">
-              <a:spcBef>
-                <a:spcPts val="300"/>
-              </a:spcBef>
-              <a:buFont typeface="Wingdings" pitchFamily="2" charset="2"/>
-              <a:buChar char="§"/>
-            </a:pPr>
-            <a:r>
-              <a:rPr lang="pt-BR" sz="1600" noProof="0" dirty="0"/>
-              <a:t>A mudança de resolução por patamares para horária em alguns casos </a:t>
-            </a:r>
-            <a:r>
-              <a:rPr lang="pt-BR" sz="1600" noProof="0"/>
-              <a:t>pode ampliar em </a:t>
-            </a:r>
-            <a:r>
-              <a:rPr lang="pt-BR" sz="1600" noProof="0" dirty="0"/>
-              <a:t>até 240x o tamanho dos resultados.</a:t>
-            </a:r>
-          </a:p>
-          <a:p>
-            <a:pPr marL="285750" indent="-285750">
-              <a:spcBef>
-                <a:spcPts val="300"/>
-              </a:spcBef>
-              <a:buFont typeface="Wingdings" pitchFamily="2" charset="2"/>
-              <a:buChar char="§"/>
-            </a:pPr>
-            <a:r>
-              <a:rPr lang="pt-BR" sz="1600" noProof="0" dirty="0"/>
-              <a:t>O HPC oferece as duas peças para esse padrão: o Lustre entrega banda agregada que cresce com o número de </a:t>
-            </a:r>
-            <a:r>
-              <a:rPr lang="pt-BR" sz="1600" noProof="0" dirty="0" err="1"/>
-              <a:t>OSTs</a:t>
-            </a:r>
-            <a:r>
-              <a:rPr lang="pt-BR" sz="1600" noProof="0" dirty="0"/>
-              <a:t>, e a MPI-IO permite que vários processos gravem em offsets distintos de um mesmo arquivo</a:t>
-            </a:r>
-          </a:p>
-          <a:p>
-            <a:pPr marL="285750" indent="-285750">
-              <a:spcBef>
-                <a:spcPts val="300"/>
-              </a:spcBef>
-              <a:buFont typeface="Wingdings" pitchFamily="2" charset="2"/>
-              <a:buChar char="§"/>
-            </a:pPr>
-            <a:r>
-              <a:rPr lang="pt-BR" sz="1600" noProof="0" dirty="0"/>
-              <a:t>Mas essa banda é potencial, não automática: um único rank escritor converte a E/S em comunicação ponto a ponto e a serializa — o limite passa a ser a rede do nó escritor, não o armazenamento</a:t>
-            </a:r>
-          </a:p>
-        </p:txBody>
-      </p:sp>
-      <p:pic>
-        <p:nvPicPr>
-          <p:cNvPr id="6" name="Picture 5" descr="formato_patamares_vs_horario.png"/>
-          <p:cNvPicPr>
-            <a:picLocks noChangeAspect="1"/>
-          </p:cNvPicPr>
-          <p:nvPr/>
-        </p:nvPicPr>
-        <p:blipFill>
-          <a:blip r:embed="rId3"/>
-          <a:stretch>
-            <a:fillRect/>
-          </a:stretch>
-        </p:blipFill>
-        <p:spPr>
-          <a:xfrm>
-            <a:off x="2584937" y="3099920"/>
-            <a:ext cx="6985161" cy="1620000"/>
-          </a:xfrm>
-          <a:prstGeom prst="rect">
-            <a:avLst/>
-          </a:prstGeom>
-        </p:spPr>
-      </p:pic>
-      <p:sp>
-        <p:nvSpPr>
-          <p:cNvPr id="7" name="TextBox 6"/>
-          <p:cNvSpPr txBox="1"/>
-          <p:nvPr/>
-        </p:nvSpPr>
-        <p:spPr>
-          <a:xfrm>
-            <a:off x="199749" y="4871218"/>
-            <a:ext cx="11755539" cy="750000"/>
-          </a:xfrm>
-          <a:prstGeom prst="rect">
-            <a:avLst/>
-          </a:prstGeom>
-          <a:noFill/>
-        </p:spPr>
-        <p:txBody>
-          <a:bodyPr wrap="square">
-            <a:spAutoFit/>
-          </a:bodyPr>
-          <a:lstStyle/>
-          <a:p>
-            <a:pPr marL="0" indent="0">
-              <a:buNone/>
-            </a:pPr>
-            <a:r>
-              <a:rPr lang="pt-BR" sz="1700" b="1" noProof="0" dirty="0">
-                <a:solidFill>
-                  <a:srgbClr val="2F5893"/>
-                </a:solidFill>
-              </a:rPr>
-              <a:t>Por tarefa (estágio, cenário): 3 registros  →  720 registros  =  240x mais dados a persistir</a:t>
-            </a:r>
-          </a:p>
-          <a:p>
-            <a:pPr marL="0" indent="0">
-              <a:buNone/>
-            </a:pPr>
-            <a:r>
-              <a:rPr lang="pt-BR" sz="1200" noProof="0" dirty="0"/>
-              <a:t>A carga de computação por tarefa não muda — cresce o volume de saída, e o gargalo migra da CPU para a E/S</a:t>
-            </a:r>
-          </a:p>
-        </p:txBody>
-      </p:sp>
-    </p:spTree>
-  </p:cSld>
-  <p:clrMapOvr>
-    <a:masterClrMapping/>
-  </p:clrMapOvr>
-</p:sld>
-</file>
-
-<file path=ppt/slides/slide20.xml><?xml version="1.0" encoding="utf-8"?>
+<file path=ppt/slides/slide21.xml><?xml version="1.0" encoding="utf-8"?>
 <p:sld xmlns:a="http://schemas.openxmlformats.org/drawingml/2006/main" xmlns:r="http://schemas.openxmlformats.org/officeDocument/2006/relationships" xmlns:p="http://schemas.openxmlformats.org/presentationml/2006/main">
   <p:cSld>
     <p:spTree>
@@ -14377,7 +15078,7 @@
 </p:sld>
 </file>
 
-<file path=ppt/slides/slide21.xml><?xml version="1.0" encoding="utf-8"?>
+<file path=ppt/slides/slide22.xml><?xml version="1.0" encoding="utf-8"?>
 <p:sld xmlns:a="http://schemas.openxmlformats.org/drawingml/2006/main" xmlns:r="http://schemas.openxmlformats.org/officeDocument/2006/relationships" xmlns:p="http://schemas.openxmlformats.org/presentationml/2006/main">
   <p:cSld>
     <p:spTree>
@@ -16069,7 +16770,7 @@
 </p:sld>
 </file>
 
-<file path=ppt/slides/slide22.xml><?xml version="1.0" encoding="utf-8"?>
+<file path=ppt/slides/slide23.xml><?xml version="1.0" encoding="utf-8"?>
 <p:sld xmlns:a="http://schemas.openxmlformats.org/drawingml/2006/main" xmlns:r="http://schemas.openxmlformats.org/officeDocument/2006/relationships" xmlns:p="http://schemas.openxmlformats.org/presentationml/2006/main">
   <p:cSld>
     <p:spTree>
@@ -16545,520 +17246,6 @@
 </p:sld>
 </file>
 
-<file path=ppt/slides/slide23.xml><?xml version="1.0" encoding="utf-8"?>
-<p:sld xmlns:a="http://schemas.openxmlformats.org/drawingml/2006/main" xmlns:r="http://schemas.openxmlformats.org/officeDocument/2006/relationships" xmlns:p="http://schemas.openxmlformats.org/presentationml/2006/main">
-  <p:cSld>
-    <p:spTree>
-      <p:nvGrpSpPr>
-        <p:cNvPr id="1" name=""/>
-        <p:cNvGrpSpPr/>
-        <p:nvPr/>
-      </p:nvGrpSpPr>
-      <p:grpSpPr>
-        <a:xfrm>
-          <a:off x="0" y="0"/>
-          <a:ext cx="0" cy="0"/>
-          <a:chOff x="0" y="0"/>
-          <a:chExt cx="0" cy="0"/>
-        </a:xfrm>
-      </p:grpSpPr>
-      <p:sp>
-        <p:nvSpPr>
-          <p:cNvPr id="2" name="Title 1"/>
-          <p:cNvSpPr>
-            <a:spLocks noGrp="1"/>
-          </p:cNvSpPr>
-          <p:nvPr>
-            <p:ph type="title"/>
-          </p:nvPr>
-        </p:nvSpPr>
-        <p:spPr/>
-        <p:txBody>
-          <a:bodyPr/>
-          <a:lstStyle/>
-          <a:p>
-            <a:r>
-              <a:t>Conclusões</a:t>
-            </a:r>
-          </a:p>
-        </p:txBody>
-      </p:sp>
-      <p:sp>
-        <p:nvSpPr>
-          <p:cNvPr id="3" name="Content Placeholder 2"/>
-          <p:cNvSpPr>
-            <a:spLocks noGrp="1"/>
-          </p:cNvSpPr>
-          <p:nvPr>
-            <p:ph idx="1"/>
-          </p:nvPr>
-        </p:nvSpPr>
-        <p:spPr/>
-        <p:txBody>
-          <a:bodyPr wrap="square"/>
-          <a:lstStyle/>
-          <a:p>
-            <a:pPr marL="342900" indent="-342900">
-              <a:spcBef>
-                <a:spcPts val="600"/>
-              </a:spcBef>
-              <a:buFont typeface="Wingdings" pitchFamily="2" charset="2"/>
-              <a:buChar char="§"/>
-            </a:pPr>
-            <a:r>
-              <a:rPr lang="pt-BR" sz="1800" dirty="0">
-                <a:solidFill>
-                  <a:srgbClr val="00B050"/>
-                </a:solidFill>
-              </a:rPr>
-              <a:t>O contraste é qualitativo, não pontual: a banda da MPI-IO cresce </a:t>
-            </a:r>
-            <a:r>
-              <a:rPr lang="pt-BR" sz="1800" dirty="0" err="1">
-                <a:solidFill>
-                  <a:srgbClr val="00B050"/>
-                </a:solidFill>
-              </a:rPr>
-              <a:t>monotonicamente</a:t>
-            </a:r>
-            <a:r>
-              <a:rPr lang="pt-BR" sz="1800" dirty="0">
-                <a:solidFill>
-                  <a:srgbClr val="00B050"/>
-                </a:solidFill>
-              </a:rPr>
-              <a:t> até </a:t>
-            </a:r>
-            <a:r>
-              <a:rPr lang="pt-BR" sz="1800" b="1" dirty="0">
-                <a:solidFill>
-                  <a:srgbClr val="00B050"/>
-                </a:solidFill>
-              </a:rPr>
-              <a:t>380 Gb/s (113×) </a:t>
-            </a:r>
-            <a:r>
-              <a:rPr lang="pt-BR" sz="1800" dirty="0">
-                <a:solidFill>
-                  <a:srgbClr val="00B050"/>
-                </a:solidFill>
-              </a:rPr>
-              <a:t>na AWS </a:t>
-            </a:r>
-            <a:r>
-              <a:rPr lang="pt-BR" sz="1800" b="1" dirty="0">
-                <a:solidFill>
-                  <a:srgbClr val="00B050"/>
-                </a:solidFill>
-              </a:rPr>
-              <a:t>e 34 Gb/s (13,7×) </a:t>
-            </a:r>
-            <a:r>
-              <a:rPr lang="pt-BR" sz="1800" dirty="0">
-                <a:solidFill>
-                  <a:srgbClr val="00B050"/>
-                </a:solidFill>
-              </a:rPr>
-              <a:t>no </a:t>
-            </a:r>
-            <a:r>
-              <a:rPr lang="pt-BR" sz="1800" dirty="0" err="1">
-                <a:solidFill>
-                  <a:srgbClr val="00B050"/>
-                </a:solidFill>
-              </a:rPr>
-              <a:t>SDumont</a:t>
-            </a:r>
-            <a:r>
-              <a:rPr lang="pt-BR" sz="1800" dirty="0">
-                <a:solidFill>
-                  <a:srgbClr val="00B050"/>
-                </a:solidFill>
-              </a:rPr>
-              <a:t> — o armazenamento ainda não saturou.</a:t>
-            </a:r>
-          </a:p>
-          <a:p>
-            <a:pPr marL="342900" indent="-342900">
-              <a:spcBef>
-                <a:spcPts val="600"/>
-              </a:spcBef>
-              <a:buFont typeface="Wingdings" pitchFamily="2" charset="2"/>
-              <a:buChar char="§"/>
-            </a:pPr>
-            <a:r>
-              <a:rPr lang="pt-BR" sz="1800" dirty="0">
-                <a:solidFill>
-                  <a:srgbClr val="00B050"/>
-                </a:solidFill>
-              </a:rPr>
-              <a:t>Em 32 nós a E/S consome </a:t>
-            </a:r>
-            <a:r>
-              <a:rPr lang="pt-BR" sz="1800" b="1" dirty="0">
-                <a:solidFill>
-                  <a:srgbClr val="00B050"/>
-                </a:solidFill>
-              </a:rPr>
-              <a:t>49,5%</a:t>
-            </a:r>
-            <a:r>
-              <a:rPr lang="pt-BR" sz="1800" dirty="0">
-                <a:solidFill>
-                  <a:srgbClr val="00B050"/>
-                </a:solidFill>
-              </a:rPr>
-              <a:t> do tempo na implementação atual; com escritas independentes em MPI-IO cai para </a:t>
-            </a:r>
-            <a:r>
-              <a:rPr lang="pt-BR" sz="1800" b="1" dirty="0">
-                <a:solidFill>
-                  <a:srgbClr val="00B050"/>
-                </a:solidFill>
-              </a:rPr>
-              <a:t>0,7%, </a:t>
-            </a:r>
-            <a:r>
-              <a:rPr lang="pt-BR" sz="1800" dirty="0">
-                <a:solidFill>
-                  <a:srgbClr val="00B050"/>
-                </a:solidFill>
-              </a:rPr>
-              <a:t>e o tempo total cai </a:t>
-            </a:r>
-            <a:r>
-              <a:rPr lang="pt-BR" sz="1800" b="1" dirty="0">
-                <a:solidFill>
-                  <a:srgbClr val="00B050"/>
-                </a:solidFill>
-              </a:rPr>
-              <a:t>36,7% (2.013 s → 1.274 s)</a:t>
-            </a:r>
-          </a:p>
-          <a:p>
-            <a:pPr marL="342900" indent="-342900">
-              <a:spcBef>
-                <a:spcPts val="600"/>
-              </a:spcBef>
-              <a:buFont typeface="Wingdings" pitchFamily="2" charset="2"/>
-              <a:buChar char="§"/>
-            </a:pPr>
-            <a:r>
-              <a:rPr lang="pt-BR" sz="1800" dirty="0">
-                <a:solidFill>
-                  <a:srgbClr val="00B050"/>
-                </a:solidFill>
-              </a:rPr>
-              <a:t>Portabilidade: o mesmo padrão se repete em nuvem dedicada e em supercomputador compartilhado (</a:t>
-            </a:r>
-            <a:r>
-              <a:rPr lang="pt-BR" sz="1800" b="1" dirty="0">
-                <a:solidFill>
-                  <a:srgbClr val="00B050"/>
-                </a:solidFill>
-              </a:rPr>
-              <a:t>40,4% </a:t>
-            </a:r>
-            <a:r>
-              <a:rPr lang="pt-BR" sz="1800" dirty="0">
-                <a:solidFill>
-                  <a:srgbClr val="00B050"/>
-                </a:solidFill>
-              </a:rPr>
-              <a:t>de redução em 32 nós no </a:t>
-            </a:r>
-            <a:r>
-              <a:rPr lang="pt-BR" sz="1800" dirty="0" err="1">
-                <a:solidFill>
-                  <a:srgbClr val="00B050"/>
-                </a:solidFill>
-              </a:rPr>
-              <a:t>SDumont</a:t>
-            </a:r>
-            <a:r>
-              <a:rPr lang="pt-BR" sz="1800" dirty="0">
-                <a:solidFill>
-                  <a:srgbClr val="00B050"/>
-                </a:solidFill>
-              </a:rPr>
-              <a:t>) — não é artefato de infraestrutura</a:t>
-            </a:r>
-          </a:p>
-          <a:p>
-            <a:pPr marL="342900" indent="-342900">
-              <a:spcBef>
-                <a:spcPts val="600"/>
-              </a:spcBef>
-              <a:buFont typeface="Wingdings" pitchFamily="2" charset="2"/>
-              <a:buChar char="§"/>
-            </a:pPr>
-            <a:r>
-              <a:rPr lang="pt-BR" sz="1800" dirty="0">
-                <a:solidFill>
-                  <a:srgbClr val="FFC000"/>
-                </a:solidFill>
-              </a:rPr>
-              <a:t>Dimensionar o Lustre é parte do ganho: passar de 4 para 10 </a:t>
-            </a:r>
-            <a:r>
-              <a:rPr lang="pt-BR" sz="1800" dirty="0" err="1">
-                <a:solidFill>
-                  <a:srgbClr val="FFC000"/>
-                </a:solidFill>
-              </a:rPr>
-              <a:t>OSTs</a:t>
-            </a:r>
-            <a:r>
-              <a:rPr lang="pt-BR" sz="1800" dirty="0">
-                <a:solidFill>
-                  <a:srgbClr val="FFC000"/>
-                </a:solidFill>
-              </a:rPr>
-              <a:t> amplia a banda agregada </a:t>
-            </a:r>
-            <a:r>
-              <a:rPr lang="pt-BR" sz="1800" b="1" dirty="0">
-                <a:solidFill>
-                  <a:srgbClr val="FFC000"/>
-                </a:solidFill>
-              </a:rPr>
-              <a:t>5,6× </a:t>
-            </a:r>
-            <a:r>
-              <a:rPr lang="pt-BR" sz="1800" dirty="0">
-                <a:solidFill>
-                  <a:srgbClr val="FFC000"/>
-                </a:solidFill>
-              </a:rPr>
-              <a:t>em 16 nós e </a:t>
-            </a:r>
-            <a:r>
-              <a:rPr lang="pt-BR" sz="1800" b="1" dirty="0">
-                <a:solidFill>
-                  <a:srgbClr val="FFC000"/>
-                </a:solidFill>
-              </a:rPr>
-              <a:t>23,6× </a:t>
-            </a:r>
-            <a:r>
-              <a:rPr lang="pt-BR" sz="1800" dirty="0">
-                <a:solidFill>
-                  <a:srgbClr val="FFC000"/>
-                </a:solidFill>
-              </a:rPr>
-              <a:t>em 32 nós</a:t>
-            </a:r>
-          </a:p>
-          <a:p>
-            <a:pPr marL="342900" indent="-342900">
-              <a:spcBef>
-                <a:spcPts val="600"/>
-              </a:spcBef>
-              <a:buFont typeface="Wingdings" pitchFamily="2" charset="2"/>
-              <a:buChar char="§"/>
-            </a:pPr>
-            <a:r>
-              <a:rPr lang="pt-BR" sz="1800" dirty="0">
-                <a:solidFill>
-                  <a:srgbClr val="FF0000"/>
-                </a:solidFill>
-              </a:rPr>
-              <a:t>Limites assumidos: eficiência de </a:t>
-            </a:r>
-            <a:r>
-              <a:rPr lang="pt-BR" sz="1800" b="1" dirty="0">
-                <a:solidFill>
-                  <a:srgbClr val="FF0000"/>
-                </a:solidFill>
-              </a:rPr>
-              <a:t>43,5</a:t>
-            </a:r>
-            <a:r>
-              <a:rPr lang="pt-BR" sz="1800" dirty="0">
-                <a:solidFill>
-                  <a:srgbClr val="FF0000"/>
-                </a:solidFill>
-              </a:rPr>
-              <a:t>% em 32 nós (</a:t>
-            </a:r>
-            <a:r>
-              <a:rPr lang="pt-BR" sz="1800" dirty="0" err="1">
-                <a:solidFill>
-                  <a:srgbClr val="FF0000"/>
-                </a:solidFill>
-              </a:rPr>
-              <a:t>strong</a:t>
-            </a:r>
-            <a:r>
-              <a:rPr lang="pt-BR" sz="1800" dirty="0">
-                <a:solidFill>
-                  <a:srgbClr val="FF0000"/>
-                </a:solidFill>
-              </a:rPr>
-              <a:t> </a:t>
-            </a:r>
-            <a:r>
-              <a:rPr lang="pt-BR" sz="1800" dirty="0" err="1">
-                <a:solidFill>
-                  <a:srgbClr val="FF0000"/>
-                </a:solidFill>
-              </a:rPr>
-              <a:t>scaling</a:t>
-            </a:r>
-            <a:r>
-              <a:rPr lang="pt-BR" sz="1800" dirty="0">
-                <a:solidFill>
-                  <a:srgbClr val="FF0000"/>
-                </a:solidFill>
-              </a:rPr>
-              <a:t>, gargalo de computação) e </a:t>
-            </a:r>
-            <a:r>
-              <a:rPr lang="pt-BR" sz="1800" b="1" dirty="0" err="1">
-                <a:solidFill>
-                  <a:srgbClr val="FF0000"/>
-                </a:solidFill>
-              </a:rPr>
-              <a:t>MPI_File_open</a:t>
-            </a:r>
-            <a:r>
-              <a:rPr lang="pt-BR" sz="1800" b="1" dirty="0">
-                <a:solidFill>
-                  <a:srgbClr val="FF0000"/>
-                </a:solidFill>
-              </a:rPr>
-              <a:t>/close </a:t>
-            </a:r>
-            <a:r>
-              <a:rPr lang="pt-BR" sz="1800" dirty="0">
-                <a:solidFill>
-                  <a:srgbClr val="FF0000"/>
-                </a:solidFill>
-              </a:rPr>
-              <a:t>em </a:t>
-            </a:r>
-            <a:r>
-              <a:rPr lang="pt-BR" sz="1800" b="1" dirty="0">
-                <a:solidFill>
-                  <a:srgbClr val="FF0000"/>
-                </a:solidFill>
-              </a:rPr>
-              <a:t>11,6% </a:t>
-            </a:r>
-            <a:r>
-              <a:rPr lang="pt-BR" sz="1800" dirty="0">
-                <a:solidFill>
-                  <a:srgbClr val="FF0000"/>
-                </a:solidFill>
-              </a:rPr>
-              <a:t>do tempo — custo fixo por execução, não por carga</a:t>
-            </a:r>
-          </a:p>
-          <a:p>
-            <a:pPr marL="342900" indent="-342900">
-              <a:spcBef>
-                <a:spcPts val="600"/>
-              </a:spcBef>
-              <a:buFont typeface="Wingdings" pitchFamily="2" charset="2"/>
-              <a:buChar char="§"/>
-            </a:pPr>
-            <a:r>
-              <a:rPr sz="1800" dirty="0" err="1">
-                <a:solidFill>
-                  <a:srgbClr val="FF0000"/>
-                </a:solidFill>
-              </a:rPr>
-              <a:t>Diagnóstico</a:t>
-            </a:r>
-            <a:r>
-              <a:rPr sz="1800" dirty="0">
-                <a:solidFill>
-                  <a:srgbClr val="FF0000"/>
-                </a:solidFill>
-              </a:rPr>
-              <a:t>: o escritor único inverte a escalabilidade — na AWS a banda percebida cai de </a:t>
-            </a:r>
-            <a:r>
-              <a:rPr sz="1800" b="1" dirty="0">
-                <a:solidFill>
-                  <a:srgbClr val="FF0000"/>
-                </a:solidFill>
-              </a:rPr>
-              <a:t>60,5</a:t>
-            </a:r>
-            <a:r>
-              <a:rPr sz="1800" dirty="0">
-                <a:solidFill>
-                  <a:srgbClr val="FF0000"/>
-                </a:solidFill>
-              </a:rPr>
-              <a:t> para </a:t>
-            </a:r>
-            <a:r>
-              <a:rPr sz="1800" b="1" dirty="0">
-                <a:solidFill>
-                  <a:srgbClr val="FF0000"/>
-                </a:solidFill>
-              </a:rPr>
-              <a:t>3,4 Gb/s </a:t>
-            </a:r>
-            <a:r>
-              <a:rPr sz="1800" dirty="0">
-                <a:solidFill>
-                  <a:srgbClr val="FF0000"/>
-                </a:solidFill>
-              </a:rPr>
-              <a:t>entre 2 e 32 nós, e o melhor tempo total ocorre em 16 nós, não </a:t>
-            </a:r>
-            <a:r>
-              <a:rPr sz="1800" dirty="0" err="1">
-                <a:solidFill>
-                  <a:srgbClr val="FF0000"/>
-                </a:solidFill>
-              </a:rPr>
-              <a:t>em</a:t>
-            </a:r>
-            <a:r>
-              <a:rPr sz="1800" dirty="0">
-                <a:solidFill>
-                  <a:srgbClr val="FF0000"/>
-                </a:solidFill>
-              </a:rPr>
-              <a:t> 32</a:t>
-            </a:r>
-          </a:p>
-        </p:txBody>
-      </p:sp>
-      <p:sp>
-        <p:nvSpPr>
-          <p:cNvPr id="4" name="Text Placeholder 3"/>
-          <p:cNvSpPr>
-            <a:spLocks noGrp="1"/>
-          </p:cNvSpPr>
-          <p:nvPr>
-            <p:ph type="body" sz="quarter" idx="13"/>
-          </p:nvPr>
-        </p:nvSpPr>
-        <p:spPr/>
-        <p:txBody>
-          <a:bodyPr/>
-          <a:lstStyle/>
-          <a:p>
-            <a:r>
-              <a:rPr sz="1400"/>
-              <a:t>O que foi demonstrado</a:t>
-            </a:r>
-          </a:p>
-        </p:txBody>
-      </p:sp>
-    </p:spTree>
-  </p:cSld>
-  <p:clrMapOvr>
-    <a:masterClrMapping/>
-  </p:clrMapOvr>
-</p:sld>
-</file>
-
 <file path=ppt/slides/slide24.xml><?xml version="1.0" encoding="utf-8"?>
 <p:sld xmlns:a="http://schemas.openxmlformats.org/drawingml/2006/main" xmlns:r="http://schemas.openxmlformats.org/officeDocument/2006/relationships" xmlns:p="http://schemas.openxmlformats.org/presentationml/2006/main">
   <p:cSld>
@@ -17092,7 +17279,7 @@
           <a:lstStyle/>
           <a:p>
             <a:r>
-              <a:t>Trabalhos futuros</a:t>
+              <a:t>Conclusões</a:t>
             </a:r>
           </a:p>
         </p:txBody>
@@ -17120,142 +17307,77 @@
               <a:buChar char="§"/>
             </a:pPr>
             <a:r>
-              <a:rPr sz="1800" dirty="0" err="1"/>
-              <a:t>Reorganizar</a:t>
-            </a:r>
-            <a:r>
-              <a:rPr sz="1800" dirty="0"/>
-              <a:t> o </a:t>
-            </a:r>
-            <a:r>
-              <a:rPr sz="1800" dirty="0" err="1"/>
-              <a:t>padrão</a:t>
-            </a:r>
-            <a:r>
-              <a:rPr sz="1800" dirty="0"/>
-              <a:t> dos </a:t>
-            </a:r>
-            <a:r>
-              <a:rPr sz="1800" dirty="0" err="1"/>
-              <a:t>arquivos</a:t>
-            </a:r>
-            <a:r>
-              <a:rPr sz="1800" dirty="0"/>
-              <a:t> </a:t>
-            </a:r>
-            <a:r>
-              <a:rPr sz="1800" dirty="0" err="1"/>
-              <a:t>diários</a:t>
-            </a:r>
-            <a:r>
-              <a:rPr sz="1800" dirty="0"/>
-              <a:t> (13 dos 117 </a:t>
-            </a:r>
-            <a:r>
-              <a:rPr sz="1800" dirty="0" err="1"/>
-              <a:t>arquivos</a:t>
-            </a:r>
-            <a:r>
-              <a:rPr sz="1800" dirty="0"/>
-              <a:t>), </a:t>
-            </a:r>
-            <a:r>
-              <a:rPr sz="1800" dirty="0" err="1"/>
-              <a:t>agrupando</a:t>
-            </a:r>
-            <a:r>
-              <a:rPr sz="1800" dirty="0"/>
-              <a:t> o </a:t>
-            </a:r>
-            <a:r>
-              <a:rPr sz="1800" dirty="0" err="1"/>
-              <a:t>mês</a:t>
-            </a:r>
-            <a:r>
-              <a:rPr sz="1800" dirty="0"/>
-              <a:t> </a:t>
-            </a:r>
-            <a:r>
-              <a:rPr sz="1800" dirty="0" err="1"/>
-              <a:t>em</a:t>
-            </a:r>
-            <a:r>
-              <a:rPr sz="1800" dirty="0"/>
-              <a:t> </a:t>
-            </a:r>
-            <a:r>
-              <a:rPr sz="1800" dirty="0" err="1"/>
-              <a:t>uma</a:t>
-            </a:r>
-            <a:r>
-              <a:rPr sz="1800" dirty="0"/>
-              <a:t> </a:t>
-            </a:r>
-            <a:r>
-              <a:rPr sz="1800" dirty="0" err="1"/>
-              <a:t>escrita</a:t>
-            </a:r>
-            <a:r>
-              <a:rPr sz="1800" dirty="0"/>
-              <a:t> </a:t>
-            </a:r>
-            <a:r>
-              <a:rPr sz="1800" dirty="0" err="1"/>
-              <a:t>por</a:t>
-            </a:r>
-            <a:r>
-              <a:rPr sz="1800" dirty="0"/>
-              <a:t> (</a:t>
-            </a:r>
-            <a:r>
-              <a:rPr sz="1800" dirty="0" err="1"/>
-              <a:t>estágio</a:t>
-            </a:r>
-            <a:r>
-              <a:rPr sz="1800" dirty="0"/>
-              <a:t>, </a:t>
-            </a:r>
-            <a:r>
-              <a:rPr sz="1800" dirty="0" err="1"/>
-              <a:t>cenário</a:t>
-            </a:r>
-            <a:r>
-              <a:rPr sz="1800" dirty="0"/>
-              <a:t>) — </a:t>
-            </a:r>
-            <a:r>
-              <a:rPr sz="1800" dirty="0" err="1"/>
-              <a:t>elimina</a:t>
-            </a:r>
-            <a:r>
-              <a:rPr sz="1800" dirty="0"/>
-              <a:t> a </a:t>
-            </a:r>
-            <a:r>
-              <a:rPr sz="1800" dirty="0" err="1"/>
-              <a:t>parcela</a:t>
-            </a:r>
-            <a:r>
-              <a:rPr sz="1800" dirty="0"/>
-              <a:t> residual de </a:t>
-            </a:r>
-            <a:r>
-              <a:rPr sz="1800" dirty="0" err="1"/>
-              <a:t>requisições</a:t>
-            </a:r>
-            <a:r>
-              <a:rPr sz="1800" dirty="0"/>
-              <a:t> </a:t>
-            </a:r>
-            <a:r>
-              <a:rPr sz="1800" dirty="0" err="1"/>
-              <a:t>pequenas</a:t>
-            </a:r>
-            <a:r>
-              <a:rPr lang="en-US" sz="1800" dirty="0"/>
-              <a:t>.</a:t>
-            </a:r>
-            <a:endParaRPr sz="1800" dirty="0"/>
+              <a:rPr lang="pt-BR" sz="1800" dirty="0">
+                <a:solidFill>
+                  <a:srgbClr val="00B050"/>
+                </a:solidFill>
+              </a:rPr>
+              <a:t>O contraste é qualitativo, não pontual: a banda da MPI-IO cresce </a:t>
+            </a:r>
+            <a:r>
+              <a:rPr lang="pt-BR" sz="1800" dirty="0" err="1">
+                <a:solidFill>
+                  <a:srgbClr val="00B050"/>
+                </a:solidFill>
+              </a:rPr>
+              <a:t>monotonicamente</a:t>
+            </a:r>
+            <a:r>
+              <a:rPr lang="pt-BR" sz="1800" dirty="0">
+                <a:solidFill>
+                  <a:srgbClr val="00B050"/>
+                </a:solidFill>
+              </a:rPr>
+              <a:t> até </a:t>
+            </a:r>
+            <a:r>
+              <a:rPr lang="pt-BR" sz="1800" b="1" dirty="0">
+                <a:solidFill>
+                  <a:srgbClr val="00B050"/>
+                </a:solidFill>
+              </a:rPr>
+              <a:t>380 Gb/s (113×) </a:t>
+            </a:r>
+            <a:r>
+              <a:rPr lang="pt-BR" sz="1800" dirty="0">
+                <a:solidFill>
+                  <a:srgbClr val="00B050"/>
+                </a:solidFill>
+              </a:rPr>
+              <a:t>na AWS </a:t>
+            </a:r>
+            <a:r>
+              <a:rPr lang="pt-BR" sz="1800" b="1" dirty="0">
+                <a:solidFill>
+                  <a:srgbClr val="00B050"/>
+                </a:solidFill>
+              </a:rPr>
+              <a:t>e 34 Gb/s (13,7×) </a:t>
+            </a:r>
+            <a:r>
+              <a:rPr lang="pt-BR" sz="1800" dirty="0">
+                <a:solidFill>
+                  <a:srgbClr val="00B050"/>
+                </a:solidFill>
+              </a:rPr>
+              <a:t>no </a:t>
+            </a:r>
+            <a:r>
+              <a:rPr lang="pt-BR" sz="1800" dirty="0" err="1">
+                <a:solidFill>
+                  <a:srgbClr val="00B050"/>
+                </a:solidFill>
+              </a:rPr>
+              <a:t>SDumont</a:t>
+            </a:r>
+            <a:r>
+              <a:rPr lang="pt-BR" sz="1800" dirty="0">
+                <a:solidFill>
+                  <a:srgbClr val="00B050"/>
+                </a:solidFill>
+              </a:rPr>
+              <a:t> — o armazenamento ainda não saturou.</a:t>
+            </a:r>
           </a:p>
           <a:p>
             <a:pPr marL="342900" indent="-342900">
@@ -17266,90 +17388,53 @@
               <a:buChar char="§"/>
             </a:pPr>
             <a:r>
-              <a:rPr sz="1800" dirty="0" err="1"/>
-              <a:t>Bufferização</a:t>
-            </a:r>
-            <a:r>
-              <a:rPr sz="1800" dirty="0"/>
-              <a:t> </a:t>
-            </a:r>
-            <a:r>
-              <a:rPr sz="1800" dirty="0" err="1"/>
-              <a:t>alinhada</a:t>
-            </a:r>
-            <a:r>
-              <a:rPr sz="1800" dirty="0"/>
-              <a:t> </a:t>
-            </a:r>
-            <a:r>
-              <a:rPr sz="1800" dirty="0" err="1"/>
-              <a:t>às</a:t>
-            </a:r>
-            <a:r>
-              <a:rPr sz="1800" dirty="0"/>
-              <a:t> stripes do </a:t>
-            </a:r>
-            <a:r>
-              <a:rPr sz="1800" dirty="0" err="1"/>
-              <a:t>Lustre</a:t>
-            </a:r>
-            <a:r>
-              <a:rPr sz="1800" dirty="0"/>
-              <a:t>, para </a:t>
-            </a:r>
-            <a:r>
-              <a:rPr sz="1800" dirty="0" err="1"/>
-              <a:t>que</a:t>
-            </a:r>
-            <a:r>
-              <a:rPr sz="1800" dirty="0"/>
-              <a:t> </a:t>
-            </a:r>
-            <a:r>
-              <a:rPr sz="1800" dirty="0" err="1"/>
-              <a:t>cada</a:t>
-            </a:r>
-            <a:r>
-              <a:rPr sz="1800" dirty="0"/>
-              <a:t> </a:t>
-            </a:r>
-            <a:r>
-              <a:rPr sz="1800" dirty="0" err="1"/>
-              <a:t>submissão</a:t>
-            </a:r>
-            <a:r>
-              <a:rPr sz="1800" dirty="0"/>
-              <a:t> MPI-IO </a:t>
-            </a:r>
-            <a:r>
-              <a:rPr sz="1800" dirty="0" err="1"/>
-              <a:t>incida</a:t>
-            </a:r>
-            <a:r>
-              <a:rPr sz="1800" dirty="0"/>
-              <a:t> </a:t>
-            </a:r>
-            <a:r>
-              <a:rPr sz="1800" dirty="0" err="1"/>
-              <a:t>sobre</a:t>
-            </a:r>
-            <a:r>
-              <a:rPr sz="1800" dirty="0"/>
-              <a:t> </a:t>
-            </a:r>
-            <a:r>
-              <a:rPr sz="1800" dirty="0" err="1"/>
-              <a:t>exatamente</a:t>
-            </a:r>
-            <a:r>
-              <a:rPr sz="1800" dirty="0"/>
-              <a:t> um OST (Liao et al., 2007)</a:t>
-            </a:r>
-            <a:r>
-              <a:rPr lang="en-US" sz="1800" dirty="0"/>
-              <a:t>.</a:t>
-            </a:r>
-            <a:endParaRPr sz="1800" dirty="0"/>
+              <a:rPr lang="pt-BR" sz="1800" dirty="0">
+                <a:solidFill>
+                  <a:srgbClr val="00B050"/>
+                </a:solidFill>
+              </a:rPr>
+              <a:t>Em 32 nós a E/S consome </a:t>
+            </a:r>
+            <a:r>
+              <a:rPr lang="pt-BR" sz="1800" b="1" dirty="0">
+                <a:solidFill>
+                  <a:srgbClr val="00B050"/>
+                </a:solidFill>
+              </a:rPr>
+              <a:t>49,5%</a:t>
+            </a:r>
+            <a:r>
+              <a:rPr lang="pt-BR" sz="1800" dirty="0">
+                <a:solidFill>
+                  <a:srgbClr val="00B050"/>
+                </a:solidFill>
+              </a:rPr>
+              <a:t> do tempo na implementação atual; com escritas independentes em MPI-IO cai para </a:t>
+            </a:r>
+            <a:r>
+              <a:rPr lang="pt-BR" sz="1800" b="1" dirty="0">
+                <a:solidFill>
+                  <a:srgbClr val="00B050"/>
+                </a:solidFill>
+              </a:rPr>
+              <a:t>0,7%, </a:t>
+            </a:r>
+            <a:r>
+              <a:rPr lang="pt-BR" sz="1800" dirty="0">
+                <a:solidFill>
+                  <a:srgbClr val="00B050"/>
+                </a:solidFill>
+              </a:rPr>
+              <a:t>e o tempo total cai </a:t>
+            </a:r>
+            <a:r>
+              <a:rPr lang="pt-BR" sz="1800" b="1" dirty="0">
+                <a:solidFill>
+                  <a:srgbClr val="00B050"/>
+                </a:solidFill>
+              </a:rPr>
+              <a:t>36,7% (2.013 s → 1.274 s)</a:t>
+            </a:r>
           </a:p>
           <a:p>
             <a:pPr marL="342900" indent="-342900">
@@ -17360,54 +17445,45 @@
               <a:buChar char="§"/>
             </a:pPr>
             <a:r>
-              <a:rPr sz="1800" dirty="0" err="1"/>
-              <a:t>Sensibilidade</a:t>
-            </a:r>
-            <a:r>
-              <a:rPr sz="1800" dirty="0"/>
-              <a:t> </a:t>
-            </a:r>
-            <a:r>
-              <a:rPr sz="1800" dirty="0" err="1"/>
-              <a:t>aos</a:t>
-            </a:r>
-            <a:r>
-              <a:rPr sz="1800" dirty="0"/>
-              <a:t> </a:t>
-            </a:r>
-            <a:r>
-              <a:rPr sz="1800" dirty="0" err="1"/>
-              <a:t>parâmetros</a:t>
-            </a:r>
-            <a:r>
-              <a:rPr sz="1800" dirty="0"/>
-              <a:t> de </a:t>
-            </a:r>
-            <a:r>
-              <a:rPr sz="1800" dirty="0" err="1"/>
-              <a:t>projeto</a:t>
-            </a:r>
-            <a:r>
-              <a:rPr sz="1800" dirty="0"/>
-              <a:t>: </a:t>
-            </a:r>
-            <a:r>
-              <a:rPr sz="1800" dirty="0" err="1"/>
-              <a:t>stripe_size</a:t>
-            </a:r>
-            <a:r>
-              <a:rPr sz="1800" dirty="0"/>
-              <a:t> do </a:t>
-            </a:r>
-            <a:r>
-              <a:rPr sz="1800" dirty="0" err="1"/>
-              <a:t>Lustre</a:t>
-            </a:r>
-            <a:r>
-              <a:rPr lang="en-US" sz="1800" dirty="0"/>
-              <a:t>.</a:t>
-            </a:r>
-            <a:endParaRPr sz="1800" dirty="0"/>
+              <a:rPr lang="pt-BR" sz="1800" dirty="0">
+                <a:solidFill>
+                  <a:srgbClr val="00B050"/>
+                </a:solidFill>
+              </a:rPr>
+              <a:t>Portabilidade: o mesmo padrão se repete em nuvem dedicada e em supercomputador compartilhado (</a:t>
+            </a:r>
+            <a:r>
+              <a:rPr lang="pt-BR" sz="1800" b="1" dirty="0">
+                <a:solidFill>
+                  <a:srgbClr val="00B050"/>
+                </a:solidFill>
+              </a:rPr>
+              <a:t>40,4% </a:t>
+            </a:r>
+            <a:r>
+              <a:rPr lang="pt-BR" sz="1800" dirty="0">
+                <a:solidFill>
+                  <a:srgbClr val="00B050"/>
+                </a:solidFill>
+              </a:rPr>
+              <a:t>de redução em 32 nós no </a:t>
+            </a:r>
+            <a:r>
+              <a:rPr lang="pt-BR" sz="1800" dirty="0" err="1">
+                <a:solidFill>
+                  <a:srgbClr val="00B050"/>
+                </a:solidFill>
+              </a:rPr>
+              <a:t>SDumont</a:t>
+            </a:r>
+            <a:r>
+              <a:rPr lang="pt-BR" sz="1800" dirty="0">
+                <a:solidFill>
+                  <a:srgbClr val="00B050"/>
+                </a:solidFill>
+              </a:rPr>
+              <a:t>) — não é artefato de infraestrutura</a:t>
+            </a:r>
           </a:p>
           <a:p>
             <a:pPr marL="342900" indent="-342900">
@@ -17418,102 +17494,61 @@
               <a:buChar char="§"/>
             </a:pPr>
             <a:r>
-              <a:rPr sz="1800" dirty="0" err="1"/>
-              <a:t>Escrita</a:t>
-            </a:r>
-            <a:r>
-              <a:rPr sz="1800" dirty="0"/>
-              <a:t> </a:t>
-            </a:r>
-            <a:r>
-              <a:rPr sz="1800" dirty="0" err="1"/>
-              <a:t>coletiva</a:t>
-            </a:r>
-            <a:r>
-              <a:rPr sz="1800" dirty="0"/>
-              <a:t> (two-phase I/O): </a:t>
-            </a:r>
-            <a:r>
-              <a:rPr sz="1800" dirty="0" err="1"/>
-              <a:t>tentativas</a:t>
-            </a:r>
-            <a:r>
-              <a:rPr sz="1800" dirty="0"/>
-              <a:t> </a:t>
-            </a:r>
-            <a:r>
-              <a:rPr sz="1800" dirty="0" err="1"/>
-              <a:t>preliminares</a:t>
-            </a:r>
-            <a:r>
-              <a:rPr sz="1800" dirty="0"/>
-              <a:t> </a:t>
-            </a:r>
-            <a:r>
-              <a:rPr sz="1800" dirty="0" err="1"/>
-              <a:t>resultaram</a:t>
-            </a:r>
-            <a:r>
-              <a:rPr sz="1800" dirty="0"/>
-              <a:t> </a:t>
-            </a:r>
-            <a:r>
-              <a:rPr sz="1800" dirty="0" err="1"/>
-              <a:t>em</a:t>
-            </a:r>
-            <a:r>
-              <a:rPr sz="1800" dirty="0"/>
-              <a:t> deadlock com o bag-of-tasks — </a:t>
-            </a:r>
-            <a:r>
-              <a:rPr sz="1800" dirty="0" err="1"/>
-              <a:t>exige</a:t>
-            </a:r>
-            <a:r>
-              <a:rPr sz="1800" dirty="0"/>
-              <a:t> </a:t>
-            </a:r>
-            <a:r>
-              <a:rPr sz="1800" dirty="0" err="1"/>
-              <a:t>reconciliar</a:t>
-            </a:r>
-            <a:r>
-              <a:rPr sz="1800" dirty="0"/>
-              <a:t> </a:t>
-            </a:r>
-            <a:r>
-              <a:rPr sz="1800" dirty="0" err="1"/>
-              <a:t>distribuição</a:t>
-            </a:r>
-            <a:r>
-              <a:rPr sz="1800" dirty="0"/>
-              <a:t> </a:t>
-            </a:r>
-            <a:r>
-              <a:rPr sz="1800" dirty="0" err="1"/>
-              <a:t>dinâmica</a:t>
-            </a:r>
-            <a:r>
-              <a:rPr sz="1800" dirty="0"/>
-              <a:t> e </a:t>
-            </a:r>
-            <a:r>
-              <a:rPr sz="1800" dirty="0" err="1"/>
-              <a:t>semântica</a:t>
-            </a:r>
-            <a:r>
-              <a:rPr sz="1800" dirty="0"/>
-              <a:t> </a:t>
-            </a:r>
-            <a:r>
-              <a:rPr sz="1800" dirty="0" err="1"/>
-              <a:t>coletiva</a:t>
-            </a:r>
-            <a:r>
-              <a:rPr lang="en-US" sz="1800" dirty="0"/>
-              <a:t>.</a:t>
-            </a:r>
-            <a:endParaRPr sz="1800" dirty="0"/>
+              <a:rPr lang="pt-BR" sz="1800" dirty="0">
+                <a:solidFill>
+                  <a:srgbClr val="FFC000"/>
+                </a:solidFill>
+              </a:rPr>
+              <a:t>Dimensionar o Lustre é parte do ganho: passar de 4 para 10 </a:t>
+            </a:r>
+            <a:r>
+              <a:rPr lang="pt-BR" sz="1800" dirty="0" err="1">
+                <a:solidFill>
+                  <a:srgbClr val="FFC000"/>
+                </a:solidFill>
+              </a:rPr>
+              <a:t>OSTs</a:t>
+            </a:r>
+            <a:r>
+              <a:rPr lang="pt-BR" sz="1800" dirty="0">
+                <a:solidFill>
+                  <a:srgbClr val="FFC000"/>
+                </a:solidFill>
+              </a:rPr>
+              <a:t> amplia a banda agregada </a:t>
+            </a:r>
+            <a:r>
+              <a:rPr lang="pt-BR" sz="1800" b="1" dirty="0">
+                <a:solidFill>
+                  <a:srgbClr val="FFC000"/>
+                </a:solidFill>
+              </a:rPr>
+              <a:t>5,6× </a:t>
+            </a:r>
+            <a:r>
+              <a:rPr lang="pt-BR" sz="1800" dirty="0">
+                <a:solidFill>
+                  <a:srgbClr val="FFC000"/>
+                </a:solidFill>
+              </a:rPr>
+              <a:t>em 16 nós e </a:t>
+            </a:r>
+            <a:r>
+              <a:rPr lang="pt-BR" sz="1800" b="1" dirty="0">
+                <a:solidFill>
+                  <a:srgbClr val="FFC000"/>
+                </a:solidFill>
+              </a:rPr>
+              <a:t>23,6× </a:t>
+            </a:r>
+            <a:r>
+              <a:rPr lang="pt-BR" sz="1800" dirty="0">
+                <a:solidFill>
+                  <a:srgbClr val="FFC000"/>
+                </a:solidFill>
+              </a:rPr>
+              <a:t>em 32 nós</a:t>
+            </a:r>
           </a:p>
           <a:p>
             <a:pPr marL="342900" indent="-342900">
@@ -17524,90 +17559,101 @@
               <a:buChar char="§"/>
             </a:pPr>
             <a:r>
-              <a:rPr sz="1800" dirty="0"/>
-              <a:t>Redes de </a:t>
-            </a:r>
-            <a:r>
-              <a:rPr sz="1800" dirty="0" err="1"/>
-              <a:t>baixa</a:t>
-            </a:r>
-            <a:r>
-              <a:rPr sz="1800" dirty="0"/>
+              <a:rPr lang="pt-BR" sz="1800" dirty="0">
+                <a:solidFill>
+                  <a:srgbClr val="FF0000"/>
+                </a:solidFill>
+              </a:rPr>
+              <a:t>Limites assumidos: eficiência de </a:t>
+            </a:r>
+            <a:r>
+              <a:rPr lang="pt-BR" sz="1800" b="1" dirty="0">
+                <a:solidFill>
+                  <a:srgbClr val="FF0000"/>
+                </a:solidFill>
+              </a:rPr>
+              <a:t>43,5</a:t>
+            </a:r>
+            <a:r>
+              <a:rPr lang="pt-BR" sz="1800" dirty="0">
+                <a:solidFill>
+                  <a:srgbClr val="FF0000"/>
+                </a:solidFill>
+              </a:rPr>
+              <a:t>% em 32 nós (</a:t>
+            </a:r>
+            <a:r>
+              <a:rPr lang="pt-BR" sz="1800" dirty="0" err="1">
+                <a:solidFill>
+                  <a:srgbClr val="FF0000"/>
+                </a:solidFill>
+              </a:rPr>
+              <a:t>strong</a:t>
+            </a:r>
+            <a:r>
+              <a:rPr lang="pt-BR" sz="1800" dirty="0">
+                <a:solidFill>
+                  <a:srgbClr val="FF0000"/>
+                </a:solidFill>
+              </a:rPr>
               <a:t> </a:t>
             </a:r>
             <a:r>
-              <a:rPr sz="1800" dirty="0" err="1"/>
-              <a:t>latência</a:t>
-            </a:r>
-            <a:r>
-              <a:rPr sz="1800" dirty="0"/>
-              <a:t> (InfiniBand HDR/NDR, AWS EFA) e </a:t>
-            </a:r>
-            <a:r>
-              <a:rPr sz="1800" dirty="0" err="1"/>
-              <a:t>escalas</a:t>
-            </a:r>
-            <a:r>
-              <a:rPr sz="1800" dirty="0"/>
-              <a:t> </a:t>
-            </a:r>
-            <a:r>
-              <a:rPr sz="1800" dirty="0" err="1"/>
-              <a:t>acima</a:t>
-            </a:r>
-            <a:r>
-              <a:rPr sz="1800" dirty="0"/>
-              <a:t> de 32 </a:t>
-            </a:r>
-            <a:r>
-              <a:rPr sz="1800" dirty="0" err="1"/>
-              <a:t>nós</a:t>
-            </a:r>
-            <a:r>
-              <a:rPr sz="1800" dirty="0"/>
-              <a:t>, </a:t>
-            </a:r>
-            <a:r>
-              <a:rPr sz="1800" dirty="0" err="1"/>
-              <a:t>onde</a:t>
-            </a:r>
-            <a:r>
-              <a:rPr sz="1800" dirty="0"/>
-              <a:t> </a:t>
-            </a:r>
-            <a:r>
-              <a:rPr sz="1800" dirty="0" err="1"/>
-              <a:t>pode</a:t>
-            </a:r>
-            <a:r>
-              <a:rPr sz="1800" dirty="0"/>
-              <a:t> </a:t>
-            </a:r>
-            <a:r>
-              <a:rPr sz="1800" dirty="0" err="1"/>
-              <a:t>surgir</a:t>
-            </a:r>
-            <a:r>
-              <a:rPr sz="1800" dirty="0"/>
-              <a:t> </a:t>
-            </a:r>
-            <a:r>
-              <a:rPr sz="1800" dirty="0" err="1"/>
-              <a:t>saturação</a:t>
-            </a:r>
-            <a:r>
-              <a:rPr sz="1800" dirty="0"/>
-              <a:t> de </a:t>
-            </a:r>
-            <a:r>
-              <a:rPr sz="1800" dirty="0" err="1"/>
-              <a:t>metadados</a:t>
-            </a:r>
-            <a:r>
-              <a:rPr lang="en-US" sz="1800" dirty="0"/>
-              <a:t>.</a:t>
-            </a:r>
-            <a:endParaRPr sz="1800" dirty="0"/>
+              <a:rPr lang="pt-BR" sz="1800" dirty="0" err="1">
+                <a:solidFill>
+                  <a:srgbClr val="FF0000"/>
+                </a:solidFill>
+              </a:rPr>
+              <a:t>scaling</a:t>
+            </a:r>
+            <a:r>
+              <a:rPr lang="pt-BR" sz="1800" dirty="0">
+                <a:solidFill>
+                  <a:srgbClr val="FF0000"/>
+                </a:solidFill>
+              </a:rPr>
+              <a:t>, gargalo de computação) e </a:t>
+            </a:r>
+            <a:r>
+              <a:rPr lang="pt-BR" sz="1800" b="1" dirty="0" err="1">
+                <a:solidFill>
+                  <a:srgbClr val="FF0000"/>
+                </a:solidFill>
+              </a:rPr>
+              <a:t>MPI_File_open</a:t>
+            </a:r>
+            <a:r>
+              <a:rPr lang="pt-BR" sz="1800" b="1" dirty="0">
+                <a:solidFill>
+                  <a:srgbClr val="FF0000"/>
+                </a:solidFill>
+              </a:rPr>
+              <a:t>/close </a:t>
+            </a:r>
+            <a:r>
+              <a:rPr lang="pt-BR" sz="1800" dirty="0">
+                <a:solidFill>
+                  <a:srgbClr val="FF0000"/>
+                </a:solidFill>
+              </a:rPr>
+              <a:t>em </a:t>
+            </a:r>
+            <a:r>
+              <a:rPr lang="pt-BR" sz="1800" b="1" dirty="0">
+                <a:solidFill>
+                  <a:srgbClr val="FF0000"/>
+                </a:solidFill>
+              </a:rPr>
+              <a:t>11,6% </a:t>
+            </a:r>
+            <a:r>
+              <a:rPr lang="pt-BR" sz="1800" dirty="0">
+                <a:solidFill>
+                  <a:srgbClr val="FF0000"/>
+                </a:solidFill>
+              </a:rPr>
+              <a:t>do tempo — custo fixo por execução, não por carga</a:t>
+            </a:r>
           </a:p>
           <a:p>
             <a:pPr marL="342900" indent="-342900">
@@ -17618,70 +17664,69 @@
               <a:buChar char="§"/>
             </a:pPr>
             <a:r>
-              <a:rPr sz="1800" dirty="0" err="1"/>
-              <a:t>Estender</a:t>
-            </a:r>
-            <a:r>
-              <a:rPr sz="1800" dirty="0"/>
-              <a:t> a </a:t>
-            </a:r>
-            <a:r>
-              <a:rPr sz="1800" dirty="0" err="1"/>
-              <a:t>arquitetura</a:t>
-            </a:r>
-            <a:r>
-              <a:rPr sz="1800" dirty="0"/>
-              <a:t> à </a:t>
-            </a:r>
-            <a:r>
-              <a:rPr sz="1800" dirty="0" err="1"/>
-              <a:t>fase</a:t>
-            </a:r>
-            <a:r>
-              <a:rPr lang="en-US" sz="1800" dirty="0"/>
-              <a:t> de </a:t>
-            </a:r>
-            <a:r>
-              <a:rPr lang="en-US" sz="1800" dirty="0" err="1"/>
-              <a:t>politica</a:t>
-            </a:r>
-            <a:r>
-              <a:rPr lang="en-US" sz="1800" dirty="0"/>
-              <a:t> </a:t>
-            </a:r>
-            <a:r>
-              <a:rPr sz="1800" dirty="0"/>
-              <a:t>e </a:t>
-            </a:r>
-            <a:r>
-              <a:rPr sz="1800" dirty="0" err="1"/>
-              <a:t>diagnosticar</a:t>
-            </a:r>
-            <a:r>
-              <a:rPr sz="1800" dirty="0"/>
-              <a:t> o </a:t>
-            </a:r>
-            <a:r>
-              <a:rPr sz="1800" dirty="0" err="1"/>
-              <a:t>gargalo</a:t>
-            </a:r>
-            <a:r>
-              <a:rPr sz="1800" dirty="0"/>
-              <a:t> </a:t>
-            </a:r>
-            <a:r>
-              <a:rPr sz="1800" dirty="0" err="1"/>
-              <a:t>computacional</a:t>
-            </a:r>
-            <a:r>
-              <a:rPr sz="1800" dirty="0"/>
-              <a:t> do regime de strong scaling</a:t>
-            </a:r>
-            <a:r>
-              <a:rPr lang="en-US" sz="1800" dirty="0"/>
-              <a:t>.</a:t>
-            </a:r>
-            <a:endParaRPr sz="1800" dirty="0"/>
+              <a:rPr sz="1800" dirty="0" err="1">
+                <a:solidFill>
+                  <a:srgbClr val="FF0000"/>
+                </a:solidFill>
+              </a:rPr>
+              <a:t>Diagnóstico</a:t>
+            </a:r>
+            <a:r>
+              <a:rPr sz="1800" dirty="0">
+                <a:solidFill>
+                  <a:srgbClr val="FF0000"/>
+                </a:solidFill>
+              </a:rPr>
+              <a:t>: o escritor único inverte a escalabilidade — na AWS a banda percebida cai de </a:t>
+            </a:r>
+            <a:r>
+              <a:rPr sz="1800" b="1" dirty="0">
+                <a:solidFill>
+                  <a:srgbClr val="FF0000"/>
+                </a:solidFill>
+              </a:rPr>
+              <a:t>60,5</a:t>
+            </a:r>
+            <a:r>
+              <a:rPr sz="1800" dirty="0">
+                <a:solidFill>
+                  <a:srgbClr val="FF0000"/>
+                </a:solidFill>
+              </a:rPr>
+              <a:t> para </a:t>
+            </a:r>
+            <a:r>
+              <a:rPr sz="1800" b="1" dirty="0">
+                <a:solidFill>
+                  <a:srgbClr val="FF0000"/>
+                </a:solidFill>
+              </a:rPr>
+              <a:t>3,4 Gb/s </a:t>
+            </a:r>
+            <a:r>
+              <a:rPr sz="1800" dirty="0">
+                <a:solidFill>
+                  <a:srgbClr val="FF0000"/>
+                </a:solidFill>
+              </a:rPr>
+              <a:t>entre 2 e 32 nós, e o melhor tempo total ocorre em 16 nós, não </a:t>
+            </a:r>
+            <a:r>
+              <a:rPr sz="1800" dirty="0" err="1">
+                <a:solidFill>
+                  <a:srgbClr val="FF0000"/>
+                </a:solidFill>
+              </a:rPr>
+              <a:t>em</a:t>
+            </a:r>
+            <a:r>
+              <a:rPr sz="1800" dirty="0">
+                <a:solidFill>
+                  <a:srgbClr val="FF0000"/>
+                </a:solidFill>
+              </a:rPr>
+              <a:t> 32</a:t>
+            </a:r>
           </a:p>
         </p:txBody>
       </p:sp>
@@ -17702,7 +17747,7 @@
           <a:p>
             <a:r>
               <a:rPr sz="1400"/>
-              <a:t>Direções de continuidade</a:t>
+              <a:t>O que foi demonstrado</a:t>
             </a:r>
           </a:p>
         </p:txBody>
@@ -17716,6 +17761,662 @@
 </file>
 
 <file path=ppt/slides/slide25.xml><?xml version="1.0" encoding="utf-8"?>
+<p:sld xmlns:a="http://schemas.openxmlformats.org/drawingml/2006/main" xmlns:r="http://schemas.openxmlformats.org/officeDocument/2006/relationships" xmlns:p="http://schemas.openxmlformats.org/presentationml/2006/main">
+  <p:cSld>
+    <p:spTree>
+      <p:nvGrpSpPr>
+        <p:cNvPr id="1" name=""/>
+        <p:cNvGrpSpPr/>
+        <p:nvPr/>
+      </p:nvGrpSpPr>
+      <p:grpSpPr>
+        <a:xfrm>
+          <a:off x="0" y="0"/>
+          <a:ext cx="0" cy="0"/>
+          <a:chOff x="0" y="0"/>
+          <a:chExt cx="0" cy="0"/>
+        </a:xfrm>
+      </p:grpSpPr>
+      <p:sp>
+        <p:nvSpPr>
+          <p:cNvPr id="2" name="Title 1"/>
+          <p:cNvSpPr>
+            <a:spLocks noGrp="1"/>
+          </p:cNvSpPr>
+          <p:nvPr>
+            <p:ph type="title"/>
+          </p:nvPr>
+        </p:nvSpPr>
+        <p:spPr/>
+        <p:txBody>
+          <a:bodyPr/>
+          <a:lstStyle/>
+          <a:p>
+            <a:r>
+              <a:t>Trabalhos futuros</a:t>
+            </a:r>
+          </a:p>
+        </p:txBody>
+      </p:sp>
+      <p:sp>
+        <p:nvSpPr>
+          <p:cNvPr id="3" name="Content Placeholder 2"/>
+          <p:cNvSpPr>
+            <a:spLocks noGrp="1"/>
+          </p:cNvSpPr>
+          <p:nvPr>
+            <p:ph idx="1"/>
+          </p:nvPr>
+        </p:nvSpPr>
+        <p:spPr/>
+        <p:txBody>
+          <a:bodyPr wrap="square"/>
+          <a:lstStyle/>
+          <a:p>
+            <a:pPr marL="342900" indent="-342900">
+              <a:spcBef>
+                <a:spcPts val="600"/>
+              </a:spcBef>
+              <a:buFont typeface="Wingdings" pitchFamily="2" charset="2"/>
+              <a:buChar char="§"/>
+            </a:pPr>
+            <a:r>
+              <a:rPr sz="1800" dirty="0" err="1"/>
+              <a:t>Reorganizar</a:t>
+            </a:r>
+            <a:r>
+              <a:rPr sz="1800" dirty="0"/>
+              <a:t> o </a:t>
+            </a:r>
+            <a:r>
+              <a:rPr sz="1800" dirty="0" err="1"/>
+              <a:t>padrão</a:t>
+            </a:r>
+            <a:r>
+              <a:rPr sz="1800" dirty="0"/>
+              <a:t> dos </a:t>
+            </a:r>
+            <a:r>
+              <a:rPr sz="1800" dirty="0" err="1"/>
+              <a:t>arquivos</a:t>
+            </a:r>
+            <a:r>
+              <a:rPr sz="1800" dirty="0"/>
+              <a:t> </a:t>
+            </a:r>
+            <a:r>
+              <a:rPr sz="1800" dirty="0" err="1"/>
+              <a:t>diários</a:t>
+            </a:r>
+            <a:r>
+              <a:rPr sz="1800" dirty="0"/>
+              <a:t> (13 dos 117 </a:t>
+            </a:r>
+            <a:r>
+              <a:rPr sz="1800" dirty="0" err="1"/>
+              <a:t>arquivos</a:t>
+            </a:r>
+            <a:r>
+              <a:rPr sz="1800" dirty="0"/>
+              <a:t>), </a:t>
+            </a:r>
+            <a:r>
+              <a:rPr sz="1800" dirty="0" err="1"/>
+              <a:t>agrupando</a:t>
+            </a:r>
+            <a:r>
+              <a:rPr sz="1800" dirty="0"/>
+              <a:t> o </a:t>
+            </a:r>
+            <a:r>
+              <a:rPr sz="1800" dirty="0" err="1"/>
+              <a:t>mês</a:t>
+            </a:r>
+            <a:r>
+              <a:rPr sz="1800" dirty="0"/>
+              <a:t> </a:t>
+            </a:r>
+            <a:r>
+              <a:rPr sz="1800" dirty="0" err="1"/>
+              <a:t>em</a:t>
+            </a:r>
+            <a:r>
+              <a:rPr sz="1800" dirty="0"/>
+              <a:t> </a:t>
+            </a:r>
+            <a:r>
+              <a:rPr sz="1800" dirty="0" err="1"/>
+              <a:t>uma</a:t>
+            </a:r>
+            <a:r>
+              <a:rPr sz="1800" dirty="0"/>
+              <a:t> </a:t>
+            </a:r>
+            <a:r>
+              <a:rPr sz="1800" dirty="0" err="1"/>
+              <a:t>escrita</a:t>
+            </a:r>
+            <a:r>
+              <a:rPr sz="1800" dirty="0"/>
+              <a:t> </a:t>
+            </a:r>
+            <a:r>
+              <a:rPr sz="1800" dirty="0" err="1"/>
+              <a:t>por</a:t>
+            </a:r>
+            <a:r>
+              <a:rPr sz="1800" dirty="0"/>
+              <a:t> (</a:t>
+            </a:r>
+            <a:r>
+              <a:rPr sz="1800" dirty="0" err="1"/>
+              <a:t>estágio</a:t>
+            </a:r>
+            <a:r>
+              <a:rPr sz="1800" dirty="0"/>
+              <a:t>, </a:t>
+            </a:r>
+            <a:r>
+              <a:rPr sz="1800" dirty="0" err="1"/>
+              <a:t>cenário</a:t>
+            </a:r>
+            <a:r>
+              <a:rPr sz="1800" dirty="0"/>
+              <a:t>) — </a:t>
+            </a:r>
+            <a:r>
+              <a:rPr sz="1800" dirty="0" err="1"/>
+              <a:t>elimina</a:t>
+            </a:r>
+            <a:r>
+              <a:rPr sz="1800" dirty="0"/>
+              <a:t> a </a:t>
+            </a:r>
+            <a:r>
+              <a:rPr sz="1800" dirty="0" err="1"/>
+              <a:t>parcela</a:t>
+            </a:r>
+            <a:r>
+              <a:rPr sz="1800" dirty="0"/>
+              <a:t> residual de </a:t>
+            </a:r>
+            <a:r>
+              <a:rPr sz="1800" dirty="0" err="1"/>
+              <a:t>requisições</a:t>
+            </a:r>
+            <a:r>
+              <a:rPr sz="1800" dirty="0"/>
+              <a:t> </a:t>
+            </a:r>
+            <a:r>
+              <a:rPr sz="1800" dirty="0" err="1"/>
+              <a:t>pequenas</a:t>
+            </a:r>
+            <a:r>
+              <a:rPr lang="en-US" sz="1800" dirty="0"/>
+              <a:t>.</a:t>
+            </a:r>
+            <a:endParaRPr sz="1800" dirty="0"/>
+          </a:p>
+          <a:p>
+            <a:pPr marL="342900" indent="-342900">
+              <a:spcBef>
+                <a:spcPts val="600"/>
+              </a:spcBef>
+              <a:buFont typeface="Wingdings" pitchFamily="2" charset="2"/>
+              <a:buChar char="§"/>
+            </a:pPr>
+            <a:r>
+              <a:rPr sz="1800" dirty="0" err="1"/>
+              <a:t>Bufferização</a:t>
+            </a:r>
+            <a:r>
+              <a:rPr sz="1800" dirty="0"/>
+              <a:t> </a:t>
+            </a:r>
+            <a:r>
+              <a:rPr sz="1800" dirty="0" err="1"/>
+              <a:t>alinhada</a:t>
+            </a:r>
+            <a:r>
+              <a:rPr sz="1800" dirty="0"/>
+              <a:t> </a:t>
+            </a:r>
+            <a:r>
+              <a:rPr sz="1800" dirty="0" err="1"/>
+              <a:t>às</a:t>
+            </a:r>
+            <a:r>
+              <a:rPr sz="1800" dirty="0"/>
+              <a:t> stripes do </a:t>
+            </a:r>
+            <a:r>
+              <a:rPr sz="1800" dirty="0" err="1"/>
+              <a:t>Lustre</a:t>
+            </a:r>
+            <a:r>
+              <a:rPr sz="1800" dirty="0"/>
+              <a:t>, para </a:t>
+            </a:r>
+            <a:r>
+              <a:rPr sz="1800" dirty="0" err="1"/>
+              <a:t>que</a:t>
+            </a:r>
+            <a:r>
+              <a:rPr sz="1800" dirty="0"/>
+              <a:t> </a:t>
+            </a:r>
+            <a:r>
+              <a:rPr sz="1800" dirty="0" err="1"/>
+              <a:t>cada</a:t>
+            </a:r>
+            <a:r>
+              <a:rPr sz="1800" dirty="0"/>
+              <a:t> </a:t>
+            </a:r>
+            <a:r>
+              <a:rPr sz="1800" dirty="0" err="1"/>
+              <a:t>submissão</a:t>
+            </a:r>
+            <a:r>
+              <a:rPr sz="1800" dirty="0"/>
+              <a:t> MPI-IO </a:t>
+            </a:r>
+            <a:r>
+              <a:rPr sz="1800" dirty="0" err="1"/>
+              <a:t>incida</a:t>
+            </a:r>
+            <a:r>
+              <a:rPr sz="1800" dirty="0"/>
+              <a:t> </a:t>
+            </a:r>
+            <a:r>
+              <a:rPr sz="1800" dirty="0" err="1"/>
+              <a:t>sobre</a:t>
+            </a:r>
+            <a:r>
+              <a:rPr sz="1800" dirty="0"/>
+              <a:t> </a:t>
+            </a:r>
+            <a:r>
+              <a:rPr sz="1800" dirty="0" err="1"/>
+              <a:t>exatamente</a:t>
+            </a:r>
+            <a:r>
+              <a:rPr sz="1800" dirty="0"/>
+              <a:t> um OST (Liao et al., 2007)</a:t>
+            </a:r>
+            <a:r>
+              <a:rPr lang="en-US" sz="1800" dirty="0"/>
+              <a:t>.</a:t>
+            </a:r>
+            <a:endParaRPr sz="1800" dirty="0"/>
+          </a:p>
+          <a:p>
+            <a:pPr marL="342900" indent="-342900">
+              <a:spcBef>
+                <a:spcPts val="600"/>
+              </a:spcBef>
+              <a:buFont typeface="Wingdings" pitchFamily="2" charset="2"/>
+              <a:buChar char="§"/>
+            </a:pPr>
+            <a:r>
+              <a:rPr sz="1800" dirty="0" err="1"/>
+              <a:t>Sensibilidade</a:t>
+            </a:r>
+            <a:r>
+              <a:rPr sz="1800" dirty="0"/>
+              <a:t> </a:t>
+            </a:r>
+            <a:r>
+              <a:rPr sz="1800" dirty="0" err="1"/>
+              <a:t>aos</a:t>
+            </a:r>
+            <a:r>
+              <a:rPr sz="1800" dirty="0"/>
+              <a:t> </a:t>
+            </a:r>
+            <a:r>
+              <a:rPr sz="1800" dirty="0" err="1"/>
+              <a:t>parâmetros</a:t>
+            </a:r>
+            <a:r>
+              <a:rPr sz="1800" dirty="0"/>
+              <a:t> de </a:t>
+            </a:r>
+            <a:r>
+              <a:rPr sz="1800" dirty="0" err="1"/>
+              <a:t>projeto</a:t>
+            </a:r>
+            <a:r>
+              <a:rPr sz="1800" dirty="0"/>
+              <a:t>: </a:t>
+            </a:r>
+            <a:r>
+              <a:rPr sz="1800" dirty="0" err="1"/>
+              <a:t>stripe_size</a:t>
+            </a:r>
+            <a:r>
+              <a:rPr sz="1800" dirty="0"/>
+              <a:t> do </a:t>
+            </a:r>
+            <a:r>
+              <a:rPr sz="1800" dirty="0" err="1"/>
+              <a:t>Lustre</a:t>
+            </a:r>
+            <a:r>
+              <a:rPr lang="en-US" sz="1800" dirty="0"/>
+              <a:t>.</a:t>
+            </a:r>
+            <a:endParaRPr sz="1800" dirty="0"/>
+          </a:p>
+          <a:p>
+            <a:pPr marL="342900" indent="-342900">
+              <a:spcBef>
+                <a:spcPts val="600"/>
+              </a:spcBef>
+              <a:buFont typeface="Wingdings" pitchFamily="2" charset="2"/>
+              <a:buChar char="§"/>
+            </a:pPr>
+            <a:r>
+              <a:rPr sz="1800" dirty="0" err="1"/>
+              <a:t>Escrita</a:t>
+            </a:r>
+            <a:r>
+              <a:rPr sz="1800" dirty="0"/>
+              <a:t> </a:t>
+            </a:r>
+            <a:r>
+              <a:rPr sz="1800" dirty="0" err="1"/>
+              <a:t>coletiva</a:t>
+            </a:r>
+            <a:r>
+              <a:rPr sz="1800" dirty="0"/>
+              <a:t> (two-phase I/O): </a:t>
+            </a:r>
+            <a:r>
+              <a:rPr sz="1800" dirty="0" err="1"/>
+              <a:t>tentativas</a:t>
+            </a:r>
+            <a:r>
+              <a:rPr sz="1800" dirty="0"/>
+              <a:t> </a:t>
+            </a:r>
+            <a:r>
+              <a:rPr sz="1800" dirty="0" err="1"/>
+              <a:t>preliminares</a:t>
+            </a:r>
+            <a:r>
+              <a:rPr sz="1800" dirty="0"/>
+              <a:t> </a:t>
+            </a:r>
+            <a:r>
+              <a:rPr sz="1800" dirty="0" err="1"/>
+              <a:t>resultaram</a:t>
+            </a:r>
+            <a:r>
+              <a:rPr sz="1800" dirty="0"/>
+              <a:t> </a:t>
+            </a:r>
+            <a:r>
+              <a:rPr sz="1800" dirty="0" err="1"/>
+              <a:t>em</a:t>
+            </a:r>
+            <a:r>
+              <a:rPr sz="1800" dirty="0"/>
+              <a:t> deadlock com o bag-of-tasks — </a:t>
+            </a:r>
+            <a:r>
+              <a:rPr sz="1800" dirty="0" err="1"/>
+              <a:t>exige</a:t>
+            </a:r>
+            <a:r>
+              <a:rPr sz="1800" dirty="0"/>
+              <a:t> </a:t>
+            </a:r>
+            <a:r>
+              <a:rPr sz="1800" dirty="0" err="1"/>
+              <a:t>reconciliar</a:t>
+            </a:r>
+            <a:r>
+              <a:rPr sz="1800" dirty="0"/>
+              <a:t> </a:t>
+            </a:r>
+            <a:r>
+              <a:rPr sz="1800" dirty="0" err="1"/>
+              <a:t>distribuição</a:t>
+            </a:r>
+            <a:r>
+              <a:rPr sz="1800" dirty="0"/>
+              <a:t> </a:t>
+            </a:r>
+            <a:r>
+              <a:rPr sz="1800" dirty="0" err="1"/>
+              <a:t>dinâmica</a:t>
+            </a:r>
+            <a:r>
+              <a:rPr sz="1800" dirty="0"/>
+              <a:t> e </a:t>
+            </a:r>
+            <a:r>
+              <a:rPr sz="1800" dirty="0" err="1"/>
+              <a:t>semântica</a:t>
+            </a:r>
+            <a:r>
+              <a:rPr sz="1800" dirty="0"/>
+              <a:t> </a:t>
+            </a:r>
+            <a:r>
+              <a:rPr sz="1800" dirty="0" err="1"/>
+              <a:t>coletiva</a:t>
+            </a:r>
+            <a:r>
+              <a:rPr lang="en-US" sz="1800" dirty="0"/>
+              <a:t>.</a:t>
+            </a:r>
+            <a:endParaRPr sz="1800" dirty="0"/>
+          </a:p>
+          <a:p>
+            <a:pPr marL="342900" indent="-342900">
+              <a:spcBef>
+                <a:spcPts val="600"/>
+              </a:spcBef>
+              <a:buFont typeface="Wingdings" pitchFamily="2" charset="2"/>
+              <a:buChar char="§"/>
+            </a:pPr>
+            <a:r>
+              <a:rPr sz="1800" dirty="0"/>
+              <a:t>Redes de </a:t>
+            </a:r>
+            <a:r>
+              <a:rPr sz="1800" dirty="0" err="1"/>
+              <a:t>baixa</a:t>
+            </a:r>
+            <a:r>
+              <a:rPr sz="1800" dirty="0"/>
+              <a:t> </a:t>
+            </a:r>
+            <a:r>
+              <a:rPr sz="1800" dirty="0" err="1"/>
+              <a:t>latência</a:t>
+            </a:r>
+            <a:r>
+              <a:rPr sz="1800" dirty="0"/>
+              <a:t> (InfiniBand HDR/NDR, AWS EFA) e </a:t>
+            </a:r>
+            <a:r>
+              <a:rPr sz="1800" dirty="0" err="1"/>
+              <a:t>escalas</a:t>
+            </a:r>
+            <a:r>
+              <a:rPr sz="1800" dirty="0"/>
+              <a:t> </a:t>
+            </a:r>
+            <a:r>
+              <a:rPr sz="1800" dirty="0" err="1"/>
+              <a:t>acima</a:t>
+            </a:r>
+            <a:r>
+              <a:rPr sz="1800" dirty="0"/>
+              <a:t> de 32 </a:t>
+            </a:r>
+            <a:r>
+              <a:rPr sz="1800" dirty="0" err="1"/>
+              <a:t>nós</a:t>
+            </a:r>
+            <a:r>
+              <a:rPr sz="1800" dirty="0"/>
+              <a:t>, </a:t>
+            </a:r>
+            <a:r>
+              <a:rPr sz="1800" dirty="0" err="1"/>
+              <a:t>onde</a:t>
+            </a:r>
+            <a:r>
+              <a:rPr sz="1800" dirty="0"/>
+              <a:t> </a:t>
+            </a:r>
+            <a:r>
+              <a:rPr sz="1800" dirty="0" err="1"/>
+              <a:t>pode</a:t>
+            </a:r>
+            <a:r>
+              <a:rPr sz="1800" dirty="0"/>
+              <a:t> </a:t>
+            </a:r>
+            <a:r>
+              <a:rPr sz="1800" dirty="0" err="1"/>
+              <a:t>surgir</a:t>
+            </a:r>
+            <a:r>
+              <a:rPr sz="1800" dirty="0"/>
+              <a:t> </a:t>
+            </a:r>
+            <a:r>
+              <a:rPr sz="1800" dirty="0" err="1"/>
+              <a:t>saturação</a:t>
+            </a:r>
+            <a:r>
+              <a:rPr sz="1800" dirty="0"/>
+              <a:t> de </a:t>
+            </a:r>
+            <a:r>
+              <a:rPr sz="1800" dirty="0" err="1"/>
+              <a:t>metadados</a:t>
+            </a:r>
+            <a:r>
+              <a:rPr lang="en-US" sz="1800" dirty="0"/>
+              <a:t>.</a:t>
+            </a:r>
+            <a:endParaRPr sz="1800" dirty="0"/>
+          </a:p>
+          <a:p>
+            <a:pPr marL="342900" indent="-342900">
+              <a:spcBef>
+                <a:spcPts val="600"/>
+              </a:spcBef>
+              <a:buFont typeface="Wingdings" pitchFamily="2" charset="2"/>
+              <a:buChar char="§"/>
+            </a:pPr>
+            <a:r>
+              <a:rPr sz="1800" dirty="0" err="1"/>
+              <a:t>Estender</a:t>
+            </a:r>
+            <a:r>
+              <a:rPr sz="1800" dirty="0"/>
+              <a:t> a </a:t>
+            </a:r>
+            <a:r>
+              <a:rPr sz="1800" dirty="0" err="1"/>
+              <a:t>arquitetura</a:t>
+            </a:r>
+            <a:r>
+              <a:rPr sz="1800" dirty="0"/>
+              <a:t> à </a:t>
+            </a:r>
+            <a:r>
+              <a:rPr sz="1800" dirty="0" err="1"/>
+              <a:t>fase</a:t>
+            </a:r>
+            <a:r>
+              <a:rPr lang="en-US" sz="1800" dirty="0"/>
+              <a:t> de </a:t>
+            </a:r>
+            <a:r>
+              <a:rPr lang="en-US" sz="1800" dirty="0" err="1"/>
+              <a:t>politica</a:t>
+            </a:r>
+            <a:r>
+              <a:rPr lang="en-US" sz="1800" dirty="0"/>
+              <a:t> </a:t>
+            </a:r>
+            <a:r>
+              <a:rPr sz="1800" dirty="0"/>
+              <a:t>e </a:t>
+            </a:r>
+            <a:r>
+              <a:rPr sz="1800" dirty="0" err="1"/>
+              <a:t>diagnosticar</a:t>
+            </a:r>
+            <a:r>
+              <a:rPr sz="1800" dirty="0"/>
+              <a:t> o </a:t>
+            </a:r>
+            <a:r>
+              <a:rPr sz="1800" dirty="0" err="1"/>
+              <a:t>gargalo</a:t>
+            </a:r>
+            <a:r>
+              <a:rPr sz="1800" dirty="0"/>
+              <a:t> </a:t>
+            </a:r>
+            <a:r>
+              <a:rPr sz="1800" dirty="0" err="1"/>
+              <a:t>computacional</a:t>
+            </a:r>
+            <a:r>
+              <a:rPr sz="1800" dirty="0"/>
+              <a:t> do regime de strong scaling</a:t>
+            </a:r>
+            <a:r>
+              <a:rPr lang="en-US" sz="1800" dirty="0"/>
+              <a:t>.</a:t>
+            </a:r>
+            <a:endParaRPr sz="1800" dirty="0"/>
+          </a:p>
+        </p:txBody>
+      </p:sp>
+      <p:sp>
+        <p:nvSpPr>
+          <p:cNvPr id="4" name="Text Placeholder 3"/>
+          <p:cNvSpPr>
+            <a:spLocks noGrp="1"/>
+          </p:cNvSpPr>
+          <p:nvPr>
+            <p:ph type="body" sz="quarter" idx="13"/>
+          </p:nvPr>
+        </p:nvSpPr>
+        <p:spPr/>
+        <p:txBody>
+          <a:bodyPr/>
+          <a:lstStyle/>
+          <a:p>
+            <a:r>
+              <a:rPr sz="1400"/>
+              <a:t>Direções de continuidade</a:t>
+            </a:r>
+          </a:p>
+        </p:txBody>
+      </p:sp>
+    </p:spTree>
+  </p:cSld>
+  <p:clrMapOvr>
+    <a:masterClrMapping/>
+  </p:clrMapOvr>
+</p:sld>
+</file>
+
+<file path=ppt/slides/slide26.xml><?xml version="1.0" encoding="utf-8"?>
 <p:sld xmlns:a="http://schemas.openxmlformats.org/drawingml/2006/main" xmlns:r="http://schemas.openxmlformats.org/officeDocument/2006/relationships" xmlns:p="http://schemas.openxmlformats.org/presentationml/2006/main">
   <p:cSld>
     <p:spTree>
@@ -17840,7 +18541,7 @@
 </p:sld>
 </file>
 
-<file path=ppt/slides/slide26.xml><?xml version="1.0" encoding="utf-8"?>
+<file path=ppt/slides/slide27.xml><?xml version="1.0" encoding="utf-8"?>
 <p:sld xmlns:a="http://schemas.openxmlformats.org/drawingml/2006/main" xmlns:r="http://schemas.openxmlformats.org/officeDocument/2006/relationships" xmlns:p="http://schemas.openxmlformats.org/presentationml/2006/main">
   <p:cSld>
     <p:spTree>
@@ -17932,7 +18633,7 @@
 </p:sld>
 </file>
 
-<file path=ppt/slides/slide27.xml><?xml version="1.0" encoding="utf-8"?>
+<file path=ppt/slides/slide28.xml><?xml version="1.0" encoding="utf-8"?>
 <p:sld xmlns:a="http://schemas.openxmlformats.org/drawingml/2006/main" xmlns:r="http://schemas.openxmlformats.org/officeDocument/2006/relationships" xmlns:p="http://schemas.openxmlformats.org/presentationml/2006/main">
   <p:cSld>
     <p:spTree>
@@ -18024,7 +18725,7 @@
 </p:sld>
 </file>
 
-<file path=ppt/slides/slide28.xml><?xml version="1.0" encoding="utf-8"?>
+<file path=ppt/slides/slide29.xml><?xml version="1.0" encoding="utf-8"?>
 <p:sld xmlns:a="http://schemas.openxmlformats.org/drawingml/2006/main" xmlns:r="http://schemas.openxmlformats.org/officeDocument/2006/relationships" xmlns:p="http://schemas.openxmlformats.org/presentationml/2006/main">
   <p:cSld>
     <p:spTree>
@@ -19035,6 +19736,98 @@
           <a:lstStyle/>
           <a:p>
             <a:r>
+              <a:t>Distribuição em stripes no Lustre</a:t>
+            </a:r>
+          </a:p>
+        </p:txBody>
+      </p:sp>
+      <p:sp>
+        <p:nvSpPr>
+          <p:cNvPr id="4" name="Text Placeholder 3"/>
+          <p:cNvSpPr>
+            <a:spLocks noGrp="1"/>
+          </p:cNvSpPr>
+          <p:nvPr>
+            <p:ph type="body" sz="quarter" idx="13"/>
+          </p:nvPr>
+        </p:nvSpPr>
+        <p:spPr/>
+        <p:txBody>
+          <a:bodyPr/>
+          <a:lstStyle/>
+          <a:p>
+            <a:r>
+              <a:rPr sz="1400"/>
+              <a:t>Capítulo 2 — Figura 2.5</a:t>
+            </a:r>
+          </a:p>
+        </p:txBody>
+      </p:sp>
+      <p:pic>
+        <p:nvPicPr>
+          <p:cNvPr id="5" name="Figura 2.5" descr="figura_2_5_striping.png"/>
+          <p:cNvPicPr>
+            <a:picLocks noChangeAspect="1"/>
+          </p:cNvPicPr>
+          <p:nvPr/>
+        </p:nvPicPr>
+        <p:blipFill>
+          <a:blip r:embed="rId2"/>
+          <a:stretch>
+            <a:fillRect/>
+          </a:stretch>
+        </p:blipFill>
+        <p:spPr>
+          <a:xfrm>
+            <a:off x="2225538" y="1572768"/>
+            <a:ext cx="7740619" cy="4160520"/>
+          </a:xfrm>
+          <a:prstGeom prst="rect">
+            <a:avLst/>
+          </a:prstGeom>
+        </p:spPr>
+      </p:pic>
+    </p:spTree>
+  </p:cSld>
+  <p:clrMapOvr>
+    <a:masterClrMapping/>
+  </p:clrMapOvr>
+</p:sld>
+</file>
+
+<file path=ppt/slides/slide7.xml><?xml version="1.0" encoding="utf-8"?>
+<p:sld xmlns:a="http://schemas.openxmlformats.org/drawingml/2006/main" xmlns:r="http://schemas.openxmlformats.org/officeDocument/2006/relationships" xmlns:p="http://schemas.openxmlformats.org/presentationml/2006/main">
+  <p:cSld>
+    <p:spTree>
+      <p:nvGrpSpPr>
+        <p:cNvPr id="1" name=""/>
+        <p:cNvGrpSpPr/>
+        <p:nvPr/>
+      </p:nvGrpSpPr>
+      <p:grpSpPr>
+        <a:xfrm>
+          <a:off x="0" y="0"/>
+          <a:ext cx="0" cy="0"/>
+          <a:chOff x="0" y="0"/>
+          <a:chExt cx="0" cy="0"/>
+        </a:xfrm>
+      </p:grpSpPr>
+      <p:sp>
+        <p:nvSpPr>
+          <p:cNvPr id="2" name="Title 1"/>
+          <p:cNvSpPr>
+            <a:spLocks noGrp="1"/>
+          </p:cNvSpPr>
+          <p:nvPr>
+            <p:ph type="title"/>
+          </p:nvPr>
+        </p:nvSpPr>
+        <p:spPr/>
+        <p:txBody>
+          <a:bodyPr/>
+          <a:lstStyle/>
+          <a:p>
+            <a:r>
               <a:t>Arquitetura atual de E/S do SDDP</a:t>
             </a:r>
           </a:p>
@@ -19094,7 +19887,7 @@
 </p:sld>
 </file>
 
-<file path=ppt/slides/slide7.xml><?xml version="1.0" encoding="utf-8"?>
+<file path=ppt/slides/slide8.xml><?xml version="1.0" encoding="utf-8"?>
 <p:sld xmlns:a="http://schemas.openxmlformats.org/drawingml/2006/main" xmlns:r="http://schemas.openxmlformats.org/officeDocument/2006/relationships" xmlns:p="http://schemas.openxmlformats.org/presentationml/2006/main">
   <p:cSld>
     <p:spTree>
@@ -19186,7 +19979,7 @@
 </p:sld>
 </file>
 
-<file path=ppt/slides/slide8.xml><?xml version="1.0" encoding="utf-8"?>
+<file path=ppt/slides/slide9.xml><?xml version="1.0" encoding="utf-8"?>
 <p:sld xmlns:a="http://schemas.openxmlformats.org/drawingml/2006/main" xmlns:r="http://schemas.openxmlformats.org/officeDocument/2006/relationships" xmlns:p="http://schemas.openxmlformats.org/presentationml/2006/main">
   <p:cSld>
     <p:spTree>
@@ -19424,706 +20217,6 @@
                 </a:solidFill>
               </a:rPr>
               <a:t>A posição de cada registro é função do índice — então cada rank calcula sozinho onde gravar, sem coordenação global e sem escritor central.</a:t>
-            </a:r>
-          </a:p>
-        </p:txBody>
-      </p:sp>
-    </p:spTree>
-  </p:cSld>
-  <p:clrMapOvr>
-    <a:masterClrMapping/>
-  </p:clrMapOvr>
-</p:sld>
-</file>
-
-<file path=ppt/slides/slide9.xml><?xml version="1.0" encoding="utf-8"?>
-<p:sld xmlns:a="http://schemas.openxmlformats.org/drawingml/2006/main" xmlns:r="http://schemas.openxmlformats.org/officeDocument/2006/relationships" xmlns:p="http://schemas.openxmlformats.org/presentationml/2006/main">
-  <p:cSld>
-    <p:spTree>
-      <p:nvGrpSpPr>
-        <p:cNvPr id="1" name=""/>
-        <p:cNvGrpSpPr/>
-        <p:nvPr/>
-      </p:nvGrpSpPr>
-      <p:grpSpPr>
-        <a:xfrm>
-          <a:off x="0" y="0"/>
-          <a:ext cx="0" cy="0"/>
-          <a:chOff x="0" y="0"/>
-          <a:chExt cx="0" cy="0"/>
-        </a:xfrm>
-      </p:grpSpPr>
-      <p:sp>
-        <p:nvSpPr>
-          <p:cNvPr id="2" name="Title 1"/>
-          <p:cNvSpPr>
-            <a:spLocks noGrp="1"/>
-          </p:cNvSpPr>
-          <p:nvPr>
-            <p:ph type="title"/>
-          </p:nvPr>
-        </p:nvSpPr>
-        <p:spPr/>
-        <p:txBody>
-          <a:bodyPr/>
-          <a:lstStyle/>
-          <a:p>
-            <a:r>
-              <a:t>Ambientes experimentais</a:t>
-            </a:r>
-          </a:p>
-        </p:txBody>
-      </p:sp>
-      <p:sp>
-        <p:nvSpPr>
-          <p:cNvPr id="4" name="Text Placeholder 3"/>
-          <p:cNvSpPr>
-            <a:spLocks noGrp="1"/>
-          </p:cNvSpPr>
-          <p:nvPr>
-            <p:ph type="body" sz="quarter" idx="13"/>
-          </p:nvPr>
-        </p:nvSpPr>
-        <p:spPr/>
-        <p:txBody>
-          <a:bodyPr/>
-          <a:lstStyle/>
-          <a:p>
-            <a:r>
-              <a:rPr sz="1400"/>
-              <a:t>Capítulo 4 — mesma carga, duas infraestruturas</a:t>
-            </a:r>
-          </a:p>
-        </p:txBody>
-      </p:sp>
-      <p:sp>
-        <p:nvSpPr>
-          <p:cNvPr id="5" name="Comum"/>
-          <p:cNvSpPr txBox="1"/>
-          <p:nvPr/>
-        </p:nvSpPr>
-        <p:spPr>
-          <a:xfrm>
-            <a:off x="201168" y="1225296"/>
-            <a:ext cx="11786616" cy="868680"/>
-          </a:xfrm>
-          <a:prstGeom prst="rect">
-            <a:avLst/>
-          </a:prstGeom>
-          <a:noFill/>
-        </p:spPr>
-        <p:txBody>
-          <a:bodyPr wrap="square">
-            <a:spAutoFit/>
-          </a:bodyPr>
-          <a:lstStyle/>
-          <a:p>
-            <a:r>
-              <a:rPr sz="1300">
-                <a:solidFill>
-                  <a:srgbClr val="202020"/>
-                </a:solidFill>
-              </a:rPr>
-              <a:t>Base PMO/PAR de outubro de 2023  ·  1.536 cenários × 3 estágios mensais  ·  24 ranks por nó (1 por núcleo físico; sem hyper-threading, pois cada rank usa mais de 8 GB residentes)</a:t>
-            </a:r>
-          </a:p>
-          <a:p>
-            <a:pPr>
-              <a:spcBef>
-                <a:spcPts val="300"/>
-              </a:spcBef>
-            </a:pPr>
-            <a:r>
-              <a:rPr sz="1300">
-                <a:solidFill>
-                  <a:srgbClr val="202020"/>
-                </a:solidFill>
-              </a:rPr>
-              <a:t>2 a 32 nós  ·  5 repetições por configuração (média ± desvio padrão)  ·  strong scaling: problema fixo, número de nós variável</a:t>
-            </a:r>
-          </a:p>
-        </p:txBody>
-      </p:sp>
-      <p:sp>
-        <p:nvSpPr>
-          <p:cNvPr id="6" name="AWS_tit"/>
-          <p:cNvSpPr txBox="1"/>
-          <p:nvPr/>
-        </p:nvSpPr>
-        <p:spPr>
-          <a:xfrm>
-            <a:off x="201168" y="2212848"/>
-            <a:ext cx="5760720" cy="365760"/>
-          </a:xfrm>
-          <a:prstGeom prst="rect">
-            <a:avLst/>
-          </a:prstGeom>
-          <a:noFill/>
-        </p:spPr>
-        <p:txBody>
-          <a:bodyPr wrap="square">
-            <a:spAutoFit/>
-          </a:bodyPr>
-          <a:lstStyle/>
-          <a:p>
-            <a:r>
-              <a:rPr sz="1500" b="1">
-                <a:solidFill>
-                  <a:srgbClr val="2F5893"/>
-                </a:solidFill>
-              </a:rPr>
-              <a:t>AWS — nuvem com armazenamento dedicado</a:t>
-            </a:r>
-          </a:p>
-        </p:txBody>
-      </p:sp>
-      <p:sp>
-        <p:nvSpPr>
-          <p:cNvPr id="7" name="AWS"/>
-          <p:cNvSpPr txBox="1"/>
-          <p:nvPr/>
-        </p:nvSpPr>
-        <p:spPr>
-          <a:xfrm>
-            <a:off x="201168" y="2651760"/>
-            <a:ext cx="5760720" cy="3383280"/>
-          </a:xfrm>
-          <a:prstGeom prst="rect">
-            <a:avLst/>
-          </a:prstGeom>
-          <a:noFill/>
-        </p:spPr>
-        <p:txBody>
-          <a:bodyPr wrap="square">
-            <a:spAutoFit/>
-          </a:bodyPr>
-          <a:lstStyle/>
-          <a:p>
-            <a:pPr marL="285750" indent="-285750">
-              <a:spcBef>
-                <a:spcPts val="200"/>
-              </a:spcBef>
-              <a:buFont typeface="Wingdings" pitchFamily="2" charset="2"/>
-              <a:buChar char="§"/>
-            </a:pPr>
-            <a:r>
-              <a:rPr sz="1300" b="1">
-                <a:solidFill>
-                  <a:srgbClr val="202020"/>
-                </a:solidFill>
-              </a:rPr>
-              <a:t>Nós: </a:t>
-            </a:r>
-            <a:r>
-              <a:rPr sz="1300">
-                <a:solidFill>
-                  <a:srgbClr val="202020"/>
-                </a:solidFill>
-              </a:rPr>
-              <a:t>até 32 × r7i.12xlarge (memory-optimized)</a:t>
-            </a:r>
-          </a:p>
-          <a:p>
-            <a:pPr marL="285750" indent="-285750">
-              <a:spcBef>
-                <a:spcPts val="200"/>
-              </a:spcBef>
-              <a:buFont typeface="Wingdings" pitchFamily="2" charset="2"/>
-              <a:buChar char="§"/>
-            </a:pPr>
-            <a:r>
-              <a:rPr sz="1300" b="1">
-                <a:solidFill>
-                  <a:srgbClr val="202020"/>
-                </a:solidFill>
-              </a:rPr>
-              <a:t>CPU: </a:t>
-            </a:r>
-            <a:r>
-              <a:rPr sz="1300">
-                <a:solidFill>
-                  <a:srgbClr val="202020"/>
-                </a:solidFill>
-              </a:rPr>
-              <a:t>Intel Xeon Sapphire Rapids 8488C, 3,2 GHz — 24 núcleos físicos (48 lógicos)</a:t>
-            </a:r>
-          </a:p>
-          <a:p>
-            <a:pPr marL="285750" indent="-285750">
-              <a:spcBef>
-                <a:spcPts val="200"/>
-              </a:spcBef>
-              <a:buFont typeface="Wingdings" pitchFamily="2" charset="2"/>
-              <a:buChar char="§"/>
-            </a:pPr>
-            <a:r>
-              <a:rPr sz="1300" b="1">
-                <a:solidFill>
-                  <a:srgbClr val="202020"/>
-                </a:solidFill>
-              </a:rPr>
-              <a:t>Memória: </a:t>
-            </a:r>
-            <a:r>
-              <a:rPr sz="1300">
-                <a:solidFill>
-                  <a:srgbClr val="202020"/>
-                </a:solidFill>
-              </a:rPr>
-              <a:t>384 GB DDR5</a:t>
-            </a:r>
-          </a:p>
-          <a:p>
-            <a:pPr marL="285750" indent="-285750">
-              <a:spcBef>
-                <a:spcPts val="200"/>
-              </a:spcBef>
-              <a:buFont typeface="Wingdings" pitchFamily="2" charset="2"/>
-              <a:buChar char="§"/>
-            </a:pPr>
-            <a:r>
-              <a:rPr sz="1300" b="1">
-                <a:solidFill>
-                  <a:srgbClr val="202020"/>
-                </a:solidFill>
-              </a:rPr>
-              <a:t>Rede: </a:t>
-            </a:r>
-            <a:r>
-              <a:rPr sz="1300">
-                <a:solidFill>
-                  <a:srgbClr val="202020"/>
-                </a:solidFill>
-              </a:rPr>
-              <a:t>Elastic Network Adapter (Ethernet), até 18,75 Gb/s</a:t>
-            </a:r>
-          </a:p>
-          <a:p>
-            <a:pPr marL="285750" indent="-285750">
-              <a:spcBef>
-                <a:spcPts val="200"/>
-              </a:spcBef>
-              <a:buFont typeface="Wingdings" pitchFamily="2" charset="2"/>
-              <a:buChar char="§"/>
-            </a:pPr>
-            <a:r>
-              <a:rPr sz="1300" b="1">
-                <a:solidFill>
-                  <a:srgbClr val="202020"/>
-                </a:solidFill>
-              </a:rPr>
-              <a:t>Armazenamento: </a:t>
-            </a:r>
-            <a:r>
-              <a:rPr sz="1300">
-                <a:solidFill>
-                  <a:srgbClr val="202020"/>
-                </a:solidFill>
-              </a:rPr>
-              <a:t>Amazon FSx for Lustre 2.12, 12 TB — 1 MDS (350 GB) + 10 OSTs (1,165 TB cada)</a:t>
-            </a:r>
-          </a:p>
-          <a:p>
-            <a:pPr marL="285750" indent="-285750">
-              <a:spcBef>
-                <a:spcPts val="200"/>
-              </a:spcBef>
-              <a:buFont typeface="Wingdings" pitchFamily="2" charset="2"/>
-              <a:buChar char="§"/>
-            </a:pPr>
-            <a:r>
-              <a:rPr sz="1300" b="1">
-                <a:solidFill>
-                  <a:srgbClr val="202020"/>
-                </a:solidFill>
-              </a:rPr>
-              <a:t>Lustre: </a:t>
-            </a:r>
-            <a:r>
-              <a:rPr sz="1300">
-                <a:solidFill>
-                  <a:srgbClr val="202020"/>
-                </a:solidFill>
-              </a:rPr>
-              <a:t>stripe_count = 10, stripe_size = 1 MB</a:t>
-            </a:r>
-          </a:p>
-          <a:p>
-            <a:pPr marL="285750" indent="-285750">
-              <a:spcBef>
-                <a:spcPts val="200"/>
-              </a:spcBef>
-              <a:buFont typeface="Wingdings" pitchFamily="2" charset="2"/>
-              <a:buChar char="§"/>
-            </a:pPr>
-            <a:r>
-              <a:rPr sz="1300" b="1">
-                <a:solidFill>
-                  <a:srgbClr val="202020"/>
-                </a:solidFill>
-              </a:rPr>
-              <a:t>MPI: </a:t>
-            </a:r>
-            <a:r>
-              <a:rPr sz="1300">
-                <a:solidFill>
-                  <a:srgbClr val="202020"/>
-                </a:solidFill>
-              </a:rPr>
-              <a:t>MPICH2 3.2</a:t>
-            </a:r>
-          </a:p>
-        </p:txBody>
-      </p:sp>
-      <p:sp>
-        <p:nvSpPr>
-          <p:cNvPr id="8" name="AWS_fecho"/>
-          <p:cNvSpPr txBox="1"/>
-          <p:nvPr/>
-        </p:nvSpPr>
-        <p:spPr>
-          <a:xfrm>
-            <a:off x="201168" y="4818888"/>
-            <a:ext cx="5760720" cy="457200"/>
-          </a:xfrm>
-          <a:prstGeom prst="rect">
-            <a:avLst/>
-          </a:prstGeom>
-          <a:noFill/>
-        </p:spPr>
-        <p:txBody>
-          <a:bodyPr wrap="square">
-            <a:spAutoFit/>
-          </a:bodyPr>
-          <a:lstStyle/>
-          <a:p>
-            <a:r>
-              <a:rPr sz="1350" b="1">
-                <a:solidFill>
-                  <a:srgbClr val="8C7A4B"/>
-                </a:solidFill>
-              </a:rPr>
-              <a:t>Armazenamento dedicado ao experimento</a:t>
-            </a:r>
-          </a:p>
-        </p:txBody>
-      </p:sp>
-      <p:sp>
-        <p:nvSpPr>
-          <p:cNvPr id="9" name="SDU_tit"/>
-          <p:cNvSpPr txBox="1"/>
-          <p:nvPr/>
-        </p:nvSpPr>
-        <p:spPr>
-          <a:xfrm>
-            <a:off x="6227064" y="2212848"/>
-            <a:ext cx="5760720" cy="365760"/>
-          </a:xfrm>
-          <a:prstGeom prst="rect">
-            <a:avLst/>
-          </a:prstGeom>
-          <a:noFill/>
-        </p:spPr>
-        <p:txBody>
-          <a:bodyPr wrap="square">
-            <a:spAutoFit/>
-          </a:bodyPr>
-          <a:lstStyle/>
-          <a:p>
-            <a:r>
-              <a:rPr sz="1500" b="1">
-                <a:solidFill>
-                  <a:srgbClr val="2F5893"/>
-                </a:solidFill>
-              </a:rPr>
-              <a:t>SDumont — supercomputador (LNCC / SINAPAD)</a:t>
-            </a:r>
-          </a:p>
-        </p:txBody>
-      </p:sp>
-      <p:sp>
-        <p:nvSpPr>
-          <p:cNvPr id="10" name="SDU"/>
-          <p:cNvSpPr txBox="1"/>
-          <p:nvPr/>
-        </p:nvSpPr>
-        <p:spPr>
-          <a:xfrm>
-            <a:off x="6227064" y="2651760"/>
-            <a:ext cx="5760720" cy="3383280"/>
-          </a:xfrm>
-          <a:prstGeom prst="rect">
-            <a:avLst/>
-          </a:prstGeom>
-          <a:noFill/>
-        </p:spPr>
-        <p:txBody>
-          <a:bodyPr wrap="square">
-            <a:spAutoFit/>
-          </a:bodyPr>
-          <a:lstStyle/>
-          <a:p>
-            <a:pPr marL="285750" indent="-285750">
-              <a:spcBef>
-                <a:spcPts val="200"/>
-              </a:spcBef>
-              <a:buFont typeface="Wingdings" pitchFamily="2" charset="2"/>
-              <a:buChar char="§"/>
-            </a:pPr>
-            <a:r>
-              <a:rPr sz="1300" b="1">
-                <a:solidFill>
-                  <a:srgbClr val="202020"/>
-                </a:solidFill>
-              </a:rPr>
-              <a:t>Nós: </a:t>
-            </a:r>
-            <a:r>
-              <a:rPr sz="1300">
-                <a:solidFill>
-                  <a:srgbClr val="202020"/>
-                </a:solidFill>
-              </a:rPr>
-              <a:t>até 32 nós de processamento (EVIDEN/ATOS/BULL)</a:t>
-            </a:r>
-          </a:p>
-          <a:p>
-            <a:pPr marL="285750" indent="-285750">
-              <a:spcBef>
-                <a:spcPts val="200"/>
-              </a:spcBef>
-              <a:buFont typeface="Wingdings" pitchFamily="2" charset="2"/>
-              <a:buChar char="§"/>
-            </a:pPr>
-            <a:r>
-              <a:rPr sz="1300" b="1">
-                <a:solidFill>
-                  <a:srgbClr val="202020"/>
-                </a:solidFill>
-              </a:rPr>
-              <a:t>CPU: </a:t>
-            </a:r>
-            <a:r>
-              <a:rPr sz="1300">
-                <a:solidFill>
-                  <a:srgbClr val="202020"/>
-                </a:solidFill>
-              </a:rPr>
-              <a:t>2 × Intel Xeon Cascade Lake Gold 6252 — 24 núcleos físicos (48 lógicos)</a:t>
-            </a:r>
-          </a:p>
-          <a:p>
-            <a:pPr marL="285750" indent="-285750">
-              <a:spcBef>
-                <a:spcPts val="200"/>
-              </a:spcBef>
-              <a:buFont typeface="Wingdings" pitchFamily="2" charset="2"/>
-              <a:buChar char="§"/>
-            </a:pPr>
-            <a:r>
-              <a:rPr sz="1300" b="1">
-                <a:solidFill>
-                  <a:srgbClr val="202020"/>
-                </a:solidFill>
-              </a:rPr>
-              <a:t>Memória: </a:t>
-            </a:r>
-            <a:r>
-              <a:rPr sz="1300">
-                <a:solidFill>
-                  <a:srgbClr val="202020"/>
-                </a:solidFill>
-              </a:rPr>
-              <a:t>384 GB</a:t>
-            </a:r>
-          </a:p>
-          <a:p>
-            <a:pPr marL="285750" indent="-285750">
-              <a:spcBef>
-                <a:spcPts val="200"/>
-              </a:spcBef>
-              <a:buFont typeface="Wingdings" pitchFamily="2" charset="2"/>
-              <a:buChar char="§"/>
-            </a:pPr>
-            <a:r>
-              <a:rPr sz="1300" b="1">
-                <a:solidFill>
-                  <a:srgbClr val="202020"/>
-                </a:solidFill>
-              </a:rPr>
-              <a:t>Rede: </a:t>
-            </a:r>
-            <a:r>
-              <a:rPr sz="1300">
-                <a:solidFill>
-                  <a:srgbClr val="202020"/>
-                </a:solidFill>
-              </a:rPr>
-              <a:t>InfiniBand EDR, 100 Gb/s</a:t>
-            </a:r>
-          </a:p>
-          <a:p>
-            <a:pPr marL="285750" indent="-285750">
-              <a:spcBef>
-                <a:spcPts val="200"/>
-              </a:spcBef>
-              <a:buFont typeface="Wingdings" pitchFamily="2" charset="2"/>
-              <a:buChar char="§"/>
-            </a:pPr>
-            <a:r>
-              <a:rPr sz="1300" b="1">
-                <a:solidFill>
-                  <a:srgbClr val="202020"/>
-                </a:solidFill>
-              </a:rPr>
-              <a:t>Armazenamento: </a:t>
-            </a:r>
-            <a:r>
-              <a:rPr sz="1300">
-                <a:solidFill>
-                  <a:srgbClr val="202020"/>
-                </a:solidFill>
-              </a:rPr>
-              <a:t>Lustre 2.12 em Cray/HPE ClusterStor L300, 1,1 PB — 1 MDS (1 MDT) + 6 OSS (1 OST cada)</a:t>
-            </a:r>
-          </a:p>
-          <a:p>
-            <a:pPr marL="285750" indent="-285750">
-              <a:spcBef>
-                <a:spcPts val="200"/>
-              </a:spcBef>
-              <a:buFont typeface="Wingdings" pitchFamily="2" charset="2"/>
-              <a:buChar char="§"/>
-            </a:pPr>
-            <a:r>
-              <a:rPr sz="1300" b="1">
-                <a:solidFill>
-                  <a:srgbClr val="202020"/>
-                </a:solidFill>
-              </a:rPr>
-              <a:t>Lustre: </a:t>
-            </a:r>
-            <a:r>
-              <a:rPr sz="1300">
-                <a:solidFill>
-                  <a:srgbClr val="202020"/>
-                </a:solidFill>
-              </a:rPr>
-              <a:t>stripe_count = 6, stripe_size = 1 MB</a:t>
-            </a:r>
-          </a:p>
-          <a:p>
-            <a:pPr marL="285750" indent="-285750">
-              <a:spcBef>
-                <a:spcPts val="200"/>
-              </a:spcBef>
-              <a:buFont typeface="Wingdings" pitchFamily="2" charset="2"/>
-              <a:buChar char="§"/>
-            </a:pPr>
-            <a:r>
-              <a:rPr sz="1300" b="1">
-                <a:solidFill>
-                  <a:srgbClr val="202020"/>
-                </a:solidFill>
-              </a:rPr>
-              <a:t>MPI: </a:t>
-            </a:r>
-            <a:r>
-              <a:rPr sz="1300">
-                <a:solidFill>
-                  <a:srgbClr val="202020"/>
-                </a:solidFill>
-              </a:rPr>
-              <a:t>MPICH2 3.2</a:t>
-            </a:r>
-          </a:p>
-        </p:txBody>
-      </p:sp>
-      <p:sp>
-        <p:nvSpPr>
-          <p:cNvPr id="11" name="SDU_fecho"/>
-          <p:cNvSpPr txBox="1"/>
-          <p:nvPr/>
-        </p:nvSpPr>
-        <p:spPr>
-          <a:xfrm>
-            <a:off x="6227064" y="4818888"/>
-            <a:ext cx="5760720" cy="457200"/>
-          </a:xfrm>
-          <a:prstGeom prst="rect">
-            <a:avLst/>
-          </a:prstGeom>
-          <a:noFill/>
-        </p:spPr>
-        <p:txBody>
-          <a:bodyPr wrap="square">
-            <a:spAutoFit/>
-          </a:bodyPr>
-          <a:lstStyle/>
-          <a:p>
-            <a:r>
-              <a:rPr sz="1350" b="1">
-                <a:solidFill>
-                  <a:srgbClr val="8C7A4B"/>
-                </a:solidFill>
-              </a:rPr>
-              <a:t>Armazenamento compartilhado com outros jobs de HPC</a:t>
-            </a:r>
-          </a:p>
-        </p:txBody>
-      </p:sp>
-      <p:sp>
-        <p:nvSpPr>
-          <p:cNvPr id="12" name="Contrastes"/>
-          <p:cNvSpPr txBox="1"/>
-          <p:nvPr/>
-        </p:nvSpPr>
-        <p:spPr>
-          <a:xfrm>
-            <a:off x="201168" y="5440680"/>
-            <a:ext cx="11786616" cy="1005840"/>
-          </a:xfrm>
-          <a:prstGeom prst="rect">
-            <a:avLst/>
-          </a:prstGeom>
-          <a:noFill/>
-        </p:spPr>
-        <p:txBody>
-          <a:bodyPr wrap="square">
-            <a:spAutoFit/>
-          </a:bodyPr>
-          <a:lstStyle/>
-          <a:p>
-            <a:r>
-              <a:rPr sz="1350" b="1">
-                <a:solidFill>
-                  <a:srgbClr val="2F5893"/>
-                </a:solidFill>
-              </a:rPr>
-              <a:t>Três diferenças de infraestrutura, com a mesma carga:</a:t>
-            </a:r>
-            <a:r>
-              <a:rPr sz="1350">
-                <a:solidFill>
-                  <a:srgbClr val="202020"/>
-                </a:solidFill>
-              </a:rPr>
-              <a:t>  rede (18,75 Gb/s Ethernet × 100 Gb/s InfiniBand)  ·  OSTs (10 × 6)  ·  armazenamento dedicado × compartilhado</a:t>
-            </a:r>
-          </a:p>
-          <a:p>
-            <a:pPr>
-              <a:spcBef>
-                <a:spcPts val="500"/>
-              </a:spcBef>
-            </a:pPr>
-            <a:r>
-              <a:rPr sz="1300">
-                <a:solidFill>
-                  <a:srgbClr val="202020"/>
-                </a:solidFill>
-              </a:rPr>
-              <a:t>Manter a carga fixa e variar apenas a infraestrutura é o que permite separar efeito de arquitetura de efeito de plataforma.</a:t>
             </a:r>
           </a:p>
         </p:txBody>

--- a/Apresentacao/Apresentacao_MPIO.pptx
+++ b/Apresentacao/Apresentacao_MPIO.pptx
@@ -2811,42 +2811,6 @@
           </a:p>
         </p:txBody>
       </p:sp>
-      <p:pic>
-        <p:nvPicPr>
-          <p:cNvPr id="11" name="Picture 10" descr="A white triangle with dots and lines on a black background&#10;&#10;Description automatically generated">
-            <a:extLst>
-              <a:ext uri="{FF2B5EF4-FFF2-40B4-BE49-F238E27FC236}">
-                <a16:creationId xmlns:a16="http://schemas.microsoft.com/office/drawing/2014/main" id="{E0CF2FAB-F505-B460-25C1-71F66B9B6FD7}"/>
-              </a:ext>
-            </a:extLst>
-          </p:cNvPr>
-          <p:cNvPicPr>
-            <a:picLocks noChangeAspect="1"/>
-          </p:cNvPicPr>
-          <p:nvPr userDrawn="1"/>
-        </p:nvPicPr>
-        <p:blipFill>
-          <a:blip r:embed="rId3">
-            <a:extLst>
-              <a:ext uri="{28A0092B-C50C-407E-A947-70E740481C1C}">
-                <a14:useLocalDpi xmlns:a14="http://schemas.microsoft.com/office/drawing/2010/main" val="0"/>
-              </a:ext>
-            </a:extLst>
-          </a:blip>
-          <a:stretch>
-            <a:fillRect/>
-          </a:stretch>
-        </p:blipFill>
-        <p:spPr>
-          <a:xfrm>
-            <a:off x="696686" y="5625414"/>
-            <a:ext cx="1309914" cy="736679"/>
-          </a:xfrm>
-          <a:prstGeom prst="rect">
-            <a:avLst/>
-          </a:prstGeom>
-        </p:spPr>
-      </p:pic>
     </p:spTree>
     <p:extLst>
       <p:ext uri="{BB962C8B-B14F-4D97-AF65-F5344CB8AC3E}">
@@ -3210,42 +3174,6 @@
           </a:p>
         </p:txBody>
       </p:sp>
-      <p:pic>
-        <p:nvPicPr>
-          <p:cNvPr id="11" name="Picture 10" descr="A white triangle with dots and lines on a black background&#10;&#10;Description automatically generated">
-            <a:extLst>
-              <a:ext uri="{FF2B5EF4-FFF2-40B4-BE49-F238E27FC236}">
-                <a16:creationId xmlns:a16="http://schemas.microsoft.com/office/drawing/2014/main" id="{E0CF2FAB-F505-B460-25C1-71F66B9B6FD7}"/>
-              </a:ext>
-            </a:extLst>
-          </p:cNvPr>
-          <p:cNvPicPr>
-            <a:picLocks noChangeAspect="1"/>
-          </p:cNvPicPr>
-          <p:nvPr userDrawn="1"/>
-        </p:nvPicPr>
-        <p:blipFill>
-          <a:blip r:embed="rId3">
-            <a:extLst>
-              <a:ext uri="{28A0092B-C50C-407E-A947-70E740481C1C}">
-                <a14:useLocalDpi xmlns:a14="http://schemas.microsoft.com/office/drawing/2010/main" val="0"/>
-              </a:ext>
-            </a:extLst>
-          </a:blip>
-          <a:stretch>
-            <a:fillRect/>
-          </a:stretch>
-        </p:blipFill>
-        <p:spPr>
-          <a:xfrm>
-            <a:off x="696686" y="5625414"/>
-            <a:ext cx="1309914" cy="736679"/>
-          </a:xfrm>
-          <a:prstGeom prst="rect">
-            <a:avLst/>
-          </a:prstGeom>
-        </p:spPr>
-      </p:pic>
     </p:spTree>
     <p:extLst>
       <p:ext uri="{BB962C8B-B14F-4D97-AF65-F5344CB8AC3E}">
@@ -3609,42 +3537,6 @@
           </a:p>
         </p:txBody>
       </p:sp>
-      <p:pic>
-        <p:nvPicPr>
-          <p:cNvPr id="11" name="Picture 10" descr="A white triangle with dots and lines on a black background&#10;&#10;Description automatically generated">
-            <a:extLst>
-              <a:ext uri="{FF2B5EF4-FFF2-40B4-BE49-F238E27FC236}">
-                <a16:creationId xmlns:a16="http://schemas.microsoft.com/office/drawing/2014/main" id="{E0CF2FAB-F505-B460-25C1-71F66B9B6FD7}"/>
-              </a:ext>
-            </a:extLst>
-          </p:cNvPr>
-          <p:cNvPicPr>
-            <a:picLocks noChangeAspect="1"/>
-          </p:cNvPicPr>
-          <p:nvPr userDrawn="1"/>
-        </p:nvPicPr>
-        <p:blipFill>
-          <a:blip r:embed="rId3">
-            <a:extLst>
-              <a:ext uri="{28A0092B-C50C-407E-A947-70E740481C1C}">
-                <a14:useLocalDpi xmlns:a14="http://schemas.microsoft.com/office/drawing/2010/main" val="0"/>
-              </a:ext>
-            </a:extLst>
-          </a:blip>
-          <a:stretch>
-            <a:fillRect/>
-          </a:stretch>
-        </p:blipFill>
-        <p:spPr>
-          <a:xfrm>
-            <a:off x="696686" y="5625414"/>
-            <a:ext cx="1309914" cy="736679"/>
-          </a:xfrm>
-          <a:prstGeom prst="rect">
-            <a:avLst/>
-          </a:prstGeom>
-        </p:spPr>
-      </p:pic>
     </p:spTree>
     <p:extLst>
       <p:ext uri="{BB962C8B-B14F-4D97-AF65-F5344CB8AC3E}">
@@ -4693,42 +4585,6 @@
           </a:p>
         </p:txBody>
       </p:sp>
-      <p:pic>
-        <p:nvPicPr>
-          <p:cNvPr id="4" name="Picture 3" descr="A blue letter on a black background&#10;&#10;Description automatically generated">
-            <a:extLst>
-              <a:ext uri="{FF2B5EF4-FFF2-40B4-BE49-F238E27FC236}">
-                <a16:creationId xmlns:a16="http://schemas.microsoft.com/office/drawing/2014/main" id="{2081CC8A-4433-11D8-26FD-A812D9814824}"/>
-              </a:ext>
-            </a:extLst>
-          </p:cNvPr>
-          <p:cNvPicPr>
-            <a:picLocks noChangeAspect="1"/>
-          </p:cNvPicPr>
-          <p:nvPr userDrawn="1"/>
-        </p:nvPicPr>
-        <p:blipFill>
-          <a:blip r:embed="rId2">
-            <a:extLst>
-              <a:ext uri="{28A0092B-C50C-407E-A947-70E740481C1C}">
-                <a14:useLocalDpi xmlns:a14="http://schemas.microsoft.com/office/drawing/2010/main" val="0"/>
-              </a:ext>
-            </a:extLst>
-          </a:blip>
-          <a:stretch>
-            <a:fillRect/>
-          </a:stretch>
-        </p:blipFill>
-        <p:spPr>
-          <a:xfrm>
-            <a:off x="10846978" y="564630"/>
-            <a:ext cx="722721" cy="300801"/>
-          </a:xfrm>
-          <a:prstGeom prst="rect">
-            <a:avLst/>
-          </a:prstGeom>
-        </p:spPr>
-      </p:pic>
     </p:spTree>
     <p:extLst>
       <p:ext uri="{BB962C8B-B14F-4D97-AF65-F5344CB8AC3E}">
@@ -4978,47 +4834,11 @@
             <a:pPr lvl="0"/>
             <a:r>
               <a:rPr lang="en-US" dirty="0"/>
-              <a:t>© PSR</a:t>
+              <a:t>PESC/COPPE/UFRJ</a:t>
             </a:r>
           </a:p>
         </p:txBody>
       </p:sp>
-      <p:pic>
-        <p:nvPicPr>
-          <p:cNvPr id="11" name="Picture 10" descr="A triangle with lines and dots&#10;&#10;Description automatically generated">
-            <a:extLst>
-              <a:ext uri="{FF2B5EF4-FFF2-40B4-BE49-F238E27FC236}">
-                <a16:creationId xmlns:a16="http://schemas.microsoft.com/office/drawing/2014/main" id="{31F7C503-C8B3-7F85-B2F3-5714E158FA38}"/>
-              </a:ext>
-            </a:extLst>
-          </p:cNvPr>
-          <p:cNvPicPr>
-            <a:picLocks noChangeAspect="1"/>
-          </p:cNvPicPr>
-          <p:nvPr userDrawn="1"/>
-        </p:nvPicPr>
-        <p:blipFill>
-          <a:blip r:embed="rId2">
-            <a:extLst>
-              <a:ext uri="{28A0092B-C50C-407E-A947-70E740481C1C}">
-                <a14:useLocalDpi xmlns:a14="http://schemas.microsoft.com/office/drawing/2010/main" val="0"/>
-              </a:ext>
-            </a:extLst>
-          </a:blip>
-          <a:stretch>
-            <a:fillRect/>
-          </a:stretch>
-        </p:blipFill>
-        <p:spPr>
-          <a:xfrm>
-            <a:off x="199750" y="6396923"/>
-            <a:ext cx="612390" cy="296811"/>
-          </a:xfrm>
-          <a:prstGeom prst="rect">
-            <a:avLst/>
-          </a:prstGeom>
-        </p:spPr>
-      </p:pic>
       <p:sp>
         <p:nvSpPr>
           <p:cNvPr id="13" name="Text Placeholder 12">
@@ -20232,7 +20052,7 @@
 <file path=ppt/theme/theme1.xml><?xml version="1.0" encoding="utf-8"?>
 <a:theme xmlns:a="http://schemas.openxmlformats.org/drawingml/2006/main" name="content">
   <a:themeElements>
-    <a:clrScheme name="PSR">
+    <a:clrScheme name="Padrao">
       <a:dk1>
         <a:srgbClr val="000000"/>
       </a:dk1>
@@ -20270,7 +20090,7 @@
         <a:srgbClr val="2F5893"/>
       </a:folHlink>
     </a:clrScheme>
-    <a:fontScheme name="ELAU PSR 2024">
+    <a:fontScheme name="Apresentacao">
       <a:majorFont>
         <a:latin typeface="Myriad Pro"/>
         <a:ea typeface=""/>

--- a/Apresentacao/Apresentacao_MPIO.pptx
+++ b/Apresentacao/Apresentacao_MPIO.pptx
@@ -5533,7 +5533,7 @@
         <p:spPr>
           <a:xfrm>
             <a:off x="696686" y="3004268"/>
-            <a:ext cx="9418864" cy="1110532"/>
+            <a:ext cx="9418864" cy="1013611"/>
           </a:xfrm>
         </p:spPr>
         <p:txBody>
@@ -5565,19 +5565,29 @@
             </a:r>
             <a:r>
               <a:rPr lang="en-US" sz="1600" b="0" dirty="0"/>
-              <a:t>Nelson Maculan Filho (PESC/COPPE/UFRJ) e  Mario Veiga Ferraz Pereira (PSR) </a:t>
+              <a:t>Nelson Maculan Filho (PESC/COPPE/UFRJ</a:t>
+            </a:r>
+            <a:r>
+              <a:rPr lang="en-US" sz="1600" b="0"/>
+              <a:t>)  e Mario </a:t>
+            </a:r>
+            <a:r>
+              <a:rPr lang="en-US" sz="1600" b="0" dirty="0"/>
+              <a:t>Veiga Ferraz Pereira (PSR) </a:t>
             </a:r>
             <a:r>
               <a:rPr sz="1600" dirty="0"/>
-              <a:t> |   </a:t>
-            </a:r>
-            <a:r>
-              <a:rPr sz="1600" dirty="0" err="1"/>
-              <a:t>agosto</a:t>
+              <a:t> </a:t>
+            </a:r>
+          </a:p>
+          <a:p>
+            <a:r>
+              <a:rPr lang="en-US" sz="1600" dirty="0"/>
+              <a:t>A</a:t>
             </a:r>
             <a:r>
               <a:rPr sz="1600" dirty="0"/>
-              <a:t> de 2026</a:t>
+              <a:t>gosto de 2026</a:t>
             </a:r>
           </a:p>
         </p:txBody>

--- a/Apresentacao/Apresentacao_MPIO.pptx
+++ b/Apresentacao/Apresentacao_MPIO.pptx
@@ -17137,12 +17137,20 @@
               <a:buChar char="§"/>
             </a:pPr>
             <a:r>
+              <a:rPr lang="pt-BR" sz="1800">
+                <a:solidFill>
+                  <a:srgbClr val="00B050"/>
+                </a:solidFill>
+              </a:rPr>
+              <a:t>A banda </a:t>
+            </a:r>
+            <a:r>
               <a:rPr lang="pt-BR" sz="1800" dirty="0">
                 <a:solidFill>
                   <a:srgbClr val="00B050"/>
                 </a:solidFill>
               </a:rPr>
-              <a:t>O contraste é qualitativo, não pontual: a banda da MPI-IO cresce </a:t>
+              <a:t>da MPI-IO cresce </a:t>
             </a:r>
             <a:r>
               <a:rPr lang="pt-BR" sz="1800" dirty="0" err="1">

--- a/Apresentacao/Apresentacao_MPIO.pptx
+++ b/Apresentacao/Apresentacao_MPIO.pptx
@@ -5,38 +5,39 @@
     <p:sldMasterId id="2147483648" r:id="rId1"/>
   </p:sldMasterIdLst>
   <p:notesMasterIdLst>
-    <p:notesMasterId r:id="rId31"/>
+    <p:notesMasterId r:id="rId32"/>
   </p:notesMasterIdLst>
   <p:sldIdLst>
     <p:sldId id="278" r:id="rId2"/>
     <p:sldId id="258" r:id="rId3"/>
     <p:sldId id="259" r:id="rId4"/>
     <p:sldId id="260" r:id="rId5"/>
-    <p:sldId id="261" r:id="rId6"/>
-    <p:sldId id="289" r:id="rId7"/>
-    <p:sldId id="262" r:id="rId8"/>
-    <p:sldId id="263" r:id="rId9"/>
-    <p:sldId id="265" r:id="rId10"/>
-    <p:sldId id="279" r:id="rId11"/>
-    <p:sldId id="267" r:id="rId12"/>
-    <p:sldId id="268" r:id="rId13"/>
-    <p:sldId id="269" r:id="rId14"/>
-    <p:sldId id="281" r:id="rId15"/>
-    <p:sldId id="282" r:id="rId16"/>
-    <p:sldId id="283" r:id="rId17"/>
-    <p:sldId id="271" r:id="rId18"/>
-    <p:sldId id="272" r:id="rId19"/>
-    <p:sldId id="273" r:id="rId20"/>
-    <p:sldId id="284" r:id="rId21"/>
-    <p:sldId id="285" r:id="rId22"/>
-    <p:sldId id="286" r:id="rId23"/>
-    <p:sldId id="280" r:id="rId24"/>
-    <p:sldId id="275" r:id="rId25"/>
-    <p:sldId id="276" r:id="rId26"/>
-    <p:sldId id="288" r:id="rId27"/>
-    <p:sldId id="270" r:id="rId28"/>
-    <p:sldId id="274" r:id="rId29"/>
-    <p:sldId id="287" r:id="rId30"/>
+    <p:sldId id="290" r:id="rId6"/>
+    <p:sldId id="261" r:id="rId7"/>
+    <p:sldId id="289" r:id="rId8"/>
+    <p:sldId id="262" r:id="rId9"/>
+    <p:sldId id="263" r:id="rId10"/>
+    <p:sldId id="265" r:id="rId11"/>
+    <p:sldId id="279" r:id="rId12"/>
+    <p:sldId id="267" r:id="rId13"/>
+    <p:sldId id="268" r:id="rId14"/>
+    <p:sldId id="269" r:id="rId15"/>
+    <p:sldId id="281" r:id="rId16"/>
+    <p:sldId id="282" r:id="rId17"/>
+    <p:sldId id="283" r:id="rId18"/>
+    <p:sldId id="271" r:id="rId19"/>
+    <p:sldId id="272" r:id="rId20"/>
+    <p:sldId id="273" r:id="rId21"/>
+    <p:sldId id="284" r:id="rId22"/>
+    <p:sldId id="285" r:id="rId23"/>
+    <p:sldId id="286" r:id="rId24"/>
+    <p:sldId id="280" r:id="rId25"/>
+    <p:sldId id="275" r:id="rId26"/>
+    <p:sldId id="276" r:id="rId27"/>
+    <p:sldId id="288" r:id="rId28"/>
+    <p:sldId id="270" r:id="rId29"/>
+    <p:sldId id="274" r:id="rId30"/>
+    <p:sldId id="287" r:id="rId31"/>
   </p:sldIdLst>
   <p:sldSz cx="12192000" cy="6858000"/>
   <p:notesSz cx="6858000" cy="9144000"/>
@@ -225,7 +226,7 @@
           <a:p>
             <a:fld id="{E902A2CF-32D5-4D4E-B710-CC654E292E38}" type="datetimeFigureOut">
               <a:rPr lang="en-US" smtClean="0"/>
-              <a:t>8/24/2026</a:t>
+              <a:t>8/25/2026</a:t>
             </a:fld>
             <a:endParaRPr lang="en-US" dirty="0"/>
           </a:p>
@@ -1682,6 +1683,74 @@
   <p:cSld>
     <p:spTree>
       <p:nvGrpSpPr>
+        <p:cNvPr id="1" name=""/>
+        <p:cNvGrpSpPr/>
+        <p:nvPr/>
+      </p:nvGrpSpPr>
+      <p:grpSpPr>
+        <a:xfrm>
+          <a:off x="0" y="0"/>
+          <a:ext cx="0" cy="0"/>
+          <a:chOff x="0" y="0"/>
+          <a:chExt cx="0" cy="0"/>
+        </a:xfrm>
+      </p:grpSpPr>
+      <p:sp>
+        <p:nvSpPr>
+          <p:cNvPr id="2" name="Slide Image Placeholder 1"/>
+          <p:cNvSpPr>
+            <a:spLocks noGrp="1" noRot="1" noChangeAspect="1"/>
+          </p:cNvSpPr>
+          <p:nvPr>
+            <p:ph type="sldImg" idx="2"/>
+          </p:nvPr>
+        </p:nvSpPr>
+        <p:spPr/>
+      </p:sp>
+      <p:sp>
+        <p:nvSpPr>
+          <p:cNvPr id="3" name="Notes Placeholder 2"/>
+          <p:cNvSpPr>
+            <a:spLocks noGrp="1"/>
+          </p:cNvSpPr>
+          <p:nvPr>
+            <p:ph type="body" sz="quarter" idx="3"/>
+          </p:nvPr>
+        </p:nvSpPr>
+        <p:spPr/>
+        <p:txBody>
+          <a:bodyPr/>
+          <a:lstStyle/>
+          <a:p>
+            <a:endParaRPr/>
+          </a:p>
+        </p:txBody>
+      </p:sp>
+      <p:sp>
+        <p:nvSpPr>
+          <p:cNvPr id="4" name="Slide Number Placeholder 3"/>
+          <p:cNvSpPr>
+            <a:spLocks noGrp="1"/>
+          </p:cNvSpPr>
+          <p:nvPr>
+            <p:ph type="sldNum" sz="quarter" idx="5"/>
+          </p:nvPr>
+        </p:nvSpPr>
+        <p:spPr/>
+      </p:sp>
+    </p:spTree>
+  </p:cSld>
+  <p:clrMapOvr>
+    <a:masterClrMapping/>
+  </p:clrMapOvr>
+</p:notes>
+</file>
+
+<file path=ppt/notesSlides/notesSlide26.xml><?xml version="1.0" encoding="utf-8"?>
+<p:notes xmlns:a="http://schemas.openxmlformats.org/drawingml/2006/main" xmlns:r="http://schemas.openxmlformats.org/officeDocument/2006/relationships" xmlns:p="http://schemas.openxmlformats.org/presentationml/2006/main">
+  <p:cSld>
+    <p:spTree>
+      <p:nvGrpSpPr>
         <p:cNvPr id="1" name="">
           <a:extLst>
             <a:ext uri="{FF2B5EF4-FFF2-40B4-BE49-F238E27FC236}">
@@ -1767,74 +1836,6 @@
         <p14:creationId xmlns:p14="http://schemas.microsoft.com/office/powerpoint/2010/main" val="349750284"/>
       </p:ext>
     </p:extLst>
-  </p:cSld>
-  <p:clrMapOvr>
-    <a:masterClrMapping/>
-  </p:clrMapOvr>
-</p:notes>
-</file>
-
-<file path=ppt/notesSlides/notesSlide26.xml><?xml version="1.0" encoding="utf-8"?>
-<p:notes xmlns:a="http://schemas.openxmlformats.org/drawingml/2006/main" xmlns:r="http://schemas.openxmlformats.org/officeDocument/2006/relationships" xmlns:p="http://schemas.openxmlformats.org/presentationml/2006/main">
-  <p:cSld>
-    <p:spTree>
-      <p:nvGrpSpPr>
-        <p:cNvPr id="1" name=""/>
-        <p:cNvGrpSpPr/>
-        <p:nvPr/>
-      </p:nvGrpSpPr>
-      <p:grpSpPr>
-        <a:xfrm>
-          <a:off x="0" y="0"/>
-          <a:ext cx="0" cy="0"/>
-          <a:chOff x="0" y="0"/>
-          <a:chExt cx="0" cy="0"/>
-        </a:xfrm>
-      </p:grpSpPr>
-      <p:sp>
-        <p:nvSpPr>
-          <p:cNvPr id="2" name="Slide Image Placeholder 1"/>
-          <p:cNvSpPr>
-            <a:spLocks noGrp="1" noRot="1" noChangeAspect="1"/>
-          </p:cNvSpPr>
-          <p:nvPr>
-            <p:ph type="sldImg" idx="2"/>
-          </p:nvPr>
-        </p:nvSpPr>
-        <p:spPr/>
-      </p:sp>
-      <p:sp>
-        <p:nvSpPr>
-          <p:cNvPr id="3" name="Notes Placeholder 2"/>
-          <p:cNvSpPr>
-            <a:spLocks noGrp="1"/>
-          </p:cNvSpPr>
-          <p:nvPr>
-            <p:ph type="body" sz="quarter" idx="3"/>
-          </p:nvPr>
-        </p:nvSpPr>
-        <p:spPr/>
-        <p:txBody>
-          <a:bodyPr/>
-          <a:lstStyle/>
-          <a:p>
-            <a:endParaRPr/>
-          </a:p>
-        </p:txBody>
-      </p:sp>
-      <p:sp>
-        <p:nvSpPr>
-          <p:cNvPr id="4" name="Slide Number Placeholder 3"/>
-          <p:cNvSpPr>
-            <a:spLocks noGrp="1"/>
-          </p:cNvSpPr>
-          <p:nvPr>
-            <p:ph type="sldNum" sz="quarter" idx="5"/>
-          </p:nvPr>
-        </p:nvSpPr>
-        <p:spPr/>
-      </p:sp>
-    </p:spTree>
   </p:cSld>
   <p:clrMapOvr>
     <a:masterClrMapping/>
@@ -1911,6 +1912,74 @@
 </file>
 
 <file path=ppt/notesSlides/notesSlide28.xml><?xml version="1.0" encoding="utf-8"?>
+<p:notes xmlns:a="http://schemas.openxmlformats.org/drawingml/2006/main" xmlns:r="http://schemas.openxmlformats.org/officeDocument/2006/relationships" xmlns:p="http://schemas.openxmlformats.org/presentationml/2006/main">
+  <p:cSld>
+    <p:spTree>
+      <p:nvGrpSpPr>
+        <p:cNvPr id="1" name=""/>
+        <p:cNvGrpSpPr/>
+        <p:nvPr/>
+      </p:nvGrpSpPr>
+      <p:grpSpPr>
+        <a:xfrm>
+          <a:off x="0" y="0"/>
+          <a:ext cx="0" cy="0"/>
+          <a:chOff x="0" y="0"/>
+          <a:chExt cx="0" cy="0"/>
+        </a:xfrm>
+      </p:grpSpPr>
+      <p:sp>
+        <p:nvSpPr>
+          <p:cNvPr id="2" name="Slide Image Placeholder 1"/>
+          <p:cNvSpPr>
+            <a:spLocks noGrp="1" noRot="1" noChangeAspect="1"/>
+          </p:cNvSpPr>
+          <p:nvPr>
+            <p:ph type="sldImg" idx="2"/>
+          </p:nvPr>
+        </p:nvSpPr>
+        <p:spPr/>
+      </p:sp>
+      <p:sp>
+        <p:nvSpPr>
+          <p:cNvPr id="3" name="Notes Placeholder 2"/>
+          <p:cNvSpPr>
+            <a:spLocks noGrp="1"/>
+          </p:cNvSpPr>
+          <p:nvPr>
+            <p:ph type="body" sz="quarter" idx="3"/>
+          </p:nvPr>
+        </p:nvSpPr>
+        <p:spPr/>
+        <p:txBody>
+          <a:bodyPr/>
+          <a:lstStyle/>
+          <a:p>
+            <a:endParaRPr/>
+          </a:p>
+        </p:txBody>
+      </p:sp>
+      <p:sp>
+        <p:nvSpPr>
+          <p:cNvPr id="4" name="Slide Number Placeholder 3"/>
+          <p:cNvSpPr>
+            <a:spLocks noGrp="1"/>
+          </p:cNvSpPr>
+          <p:nvPr>
+            <p:ph type="sldNum" sz="quarter" idx="5"/>
+          </p:nvPr>
+        </p:nvSpPr>
+        <p:spPr/>
+      </p:sp>
+    </p:spTree>
+  </p:cSld>
+  <p:clrMapOvr>
+    <a:masterClrMapping/>
+  </p:clrMapOvr>
+</p:notes>
+</file>
+
+<file path=ppt/notesSlides/notesSlide29.xml><?xml version="1.0" encoding="utf-8"?>
 <p:notes xmlns:a="http://schemas.openxmlformats.org/drawingml/2006/main" xmlns:r="http://schemas.openxmlformats.org/officeDocument/2006/relationships" xmlns:p="http://schemas.openxmlformats.org/presentationml/2006/main">
   <p:cSld>
     <p:spTree>
@@ -2148,7 +2217,13 @@
   <p:cSld>
     <p:spTree>
       <p:nvGrpSpPr>
-        <p:cNvPr id="1" name=""/>
+        <p:cNvPr id="1" name="">
+          <a:extLst>
+            <a:ext uri="{FF2B5EF4-FFF2-40B4-BE49-F238E27FC236}">
+              <a16:creationId xmlns:a16="http://schemas.microsoft.com/office/drawing/2014/main" id="{BEA4C2C2-80CB-3FFB-A24E-0E1CCDD93FF8}"/>
+            </a:ext>
+          </a:extLst>
+        </p:cNvPr>
         <p:cNvGrpSpPr/>
         <p:nvPr/>
       </p:nvGrpSpPr>
@@ -2162,7 +2237,13 @@
       </p:grpSpPr>
       <p:sp>
         <p:nvSpPr>
-          <p:cNvPr id="2" name="Slide Image Placeholder 1"/>
+          <p:cNvPr id="2" name="Slide Image Placeholder 1">
+            <a:extLst>
+              <a:ext uri="{FF2B5EF4-FFF2-40B4-BE49-F238E27FC236}">
+                <a16:creationId xmlns:a16="http://schemas.microsoft.com/office/drawing/2014/main" id="{D384172F-DF2F-1FB1-7B1E-F7E16AC60C2C}"/>
+              </a:ext>
+            </a:extLst>
+          </p:cNvPr>
           <p:cNvSpPr>
             <a:spLocks noGrp="1" noRot="1" noChangeAspect="1"/>
           </p:cNvSpPr>
@@ -2174,7 +2255,13 @@
       </p:sp>
       <p:sp>
         <p:nvSpPr>
-          <p:cNvPr id="3" name="Notes Placeholder 2"/>
+          <p:cNvPr id="3" name="Notes Placeholder 2">
+            <a:extLst>
+              <a:ext uri="{FF2B5EF4-FFF2-40B4-BE49-F238E27FC236}">
+                <a16:creationId xmlns:a16="http://schemas.microsoft.com/office/drawing/2014/main" id="{C4BD6FCA-39F7-972D-08D0-EC786EE23E93}"/>
+              </a:ext>
+            </a:extLst>
+          </p:cNvPr>
           <p:cNvSpPr>
             <a:spLocks noGrp="1"/>
           </p:cNvSpPr>
@@ -2193,7 +2280,13 @@
       </p:sp>
       <p:sp>
         <p:nvSpPr>
-          <p:cNvPr id="4" name="Slide Number Placeholder 3"/>
+          <p:cNvPr id="4" name="Slide Number Placeholder 3">
+            <a:extLst>
+              <a:ext uri="{FF2B5EF4-FFF2-40B4-BE49-F238E27FC236}">
+                <a16:creationId xmlns:a16="http://schemas.microsoft.com/office/drawing/2014/main" id="{E7AD9873-D283-0FFC-3C4B-632460DA89E6}"/>
+              </a:ext>
+            </a:extLst>
+          </p:cNvPr>
           <p:cNvSpPr>
             <a:spLocks noGrp="1"/>
           </p:cNvSpPr>
@@ -2204,6 +2297,11 @@
         <p:spPr/>
       </p:sp>
     </p:spTree>
+    <p:extLst>
+      <p:ext uri="{BB962C8B-B14F-4D97-AF65-F5344CB8AC3E}">
+        <p14:creationId xmlns:p14="http://schemas.microsoft.com/office/powerpoint/2010/main" val="2951800365"/>
+      </p:ext>
+    </p:extLst>
   </p:cSld>
   <p:clrMapOvr>
     <a:masterClrMapping/>
@@ -5395,7 +5493,7 @@
 </file>
 
 <file path=ppt/slides/slide1.xml><?xml version="1.0" encoding="utf-8"?>
-<p:sld xmlns:a="http://schemas.openxmlformats.org/drawingml/2006/main" xmlns:r="http://schemas.openxmlformats.org/officeDocument/2006/relationships" xmlns:p="http://schemas.openxmlformats.org/presentationml/2006/main" show="0">
+<p:sld xmlns:a="http://schemas.openxmlformats.org/drawingml/2006/main" xmlns:r="http://schemas.openxmlformats.org/officeDocument/2006/relationships" xmlns:p="http://schemas.openxmlformats.org/presentationml/2006/main">
   <p:cSld>
     <p:spTree>
       <p:nvGrpSpPr>
@@ -5554,7 +5652,11 @@
             </a:r>
             <a:r>
               <a:rPr lang="en-US" sz="1600" b="0" dirty="0"/>
-              <a:t>Diego Leonel Cadette Dutra</a:t>
+              <a:t>Diego Leonel Cadette Dutra </a:t>
+            </a:r>
+            <a:r>
+              <a:rPr lang="en-US" sz="1600" b="0"/>
+              <a:t>e Cláudio Amorim</a:t>
             </a:r>
             <a:endParaRPr sz="1600" dirty="0"/>
           </a:p>
@@ -5565,15 +5667,7 @@
             </a:r>
             <a:r>
               <a:rPr lang="en-US" sz="1600" b="0" dirty="0"/>
-              <a:t>Nelson Maculan Filho (PESC/COPPE/UFRJ</a:t>
-            </a:r>
-            <a:r>
-              <a:rPr lang="en-US" sz="1600" b="0"/>
-              <a:t>)  e Mario </a:t>
-            </a:r>
-            <a:r>
-              <a:rPr lang="en-US" sz="1600" b="0" dirty="0"/>
-              <a:t>Veiga Ferraz Pereira (PSR) </a:t>
+              <a:t>Nelson Maculan Filho (PESC/COPPE/UFRJ)  e Mario Veiga Ferraz Pereira (PSR) </a:t>
             </a:r>
             <a:r>
               <a:rPr sz="1600" dirty="0"/>
@@ -5663,6 +5757,256 @@
           <a:lstStyle/>
           <a:p>
             <a:r>
+              <a:rPr lang="pt-BR" sz="3600" b="0" i="0" u="none" strike="noStrike" baseline="0" dirty="0">
+                <a:latin typeface="F70"/>
+              </a:rPr>
+              <a:t>Implementação das escritas paralelas independentes</a:t>
+            </a:r>
+            <a:endParaRPr dirty="0"/>
+          </a:p>
+        </p:txBody>
+      </p:sp>
+      <p:sp>
+        <p:nvSpPr>
+          <p:cNvPr id="4" name="Text Placeholder 3"/>
+          <p:cNvSpPr>
+            <a:spLocks noGrp="1"/>
+          </p:cNvSpPr>
+          <p:nvPr>
+            <p:ph type="body" sz="quarter" idx="13"/>
+          </p:nvPr>
+        </p:nvSpPr>
+        <p:spPr/>
+        <p:txBody>
+          <a:bodyPr/>
+          <a:lstStyle/>
+          <a:p>
+            <a:r>
+              <a:rPr sz="1400"/>
+              <a:t>Capítulo 3 — Código 3.1 (esq.) e Figura 3.4 (dir.)</a:t>
+            </a:r>
+          </a:p>
+        </p:txBody>
+      </p:sp>
+      <p:sp>
+        <p:nvSpPr>
+          <p:cNvPr id="30" name="Rotulo 1"/>
+          <p:cNvSpPr txBox="1"/>
+          <p:nvPr/>
+        </p:nvSpPr>
+        <p:spPr>
+          <a:xfrm>
+            <a:off x="201168" y="1170432"/>
+            <a:ext cx="6766560" cy="310896"/>
+          </a:xfrm>
+          <a:prstGeom prst="rect">
+            <a:avLst/>
+          </a:prstGeom>
+          <a:noFill/>
+        </p:spPr>
+        <p:txBody>
+          <a:bodyPr wrap="square">
+            <a:spAutoFit/>
+          </a:bodyPr>
+          <a:lstStyle/>
+          <a:p>
+            <a:pPr marL="0" indent="0">
+              <a:buNone/>
+            </a:pPr>
+            <a:r>
+              <a:rPr sz="1400" b="1">
+                <a:solidFill>
+                  <a:srgbClr val="2F5893"/>
+                </a:solidFill>
+              </a:rPr>
+              <a:t>Pseudocódigo da escrita independente por rank</a:t>
+            </a:r>
+          </a:p>
+        </p:txBody>
+      </p:sp>
+      <p:sp>
+        <p:nvSpPr>
+          <p:cNvPr id="31" name="Rotulo 2"/>
+          <p:cNvSpPr txBox="1"/>
+          <p:nvPr/>
+        </p:nvSpPr>
+        <p:spPr>
+          <a:xfrm>
+            <a:off x="7242048" y="1170432"/>
+            <a:ext cx="4745736" cy="310896"/>
+          </a:xfrm>
+          <a:prstGeom prst="rect">
+            <a:avLst/>
+          </a:prstGeom>
+          <a:noFill/>
+        </p:spPr>
+        <p:txBody>
+          <a:bodyPr wrap="square">
+            <a:spAutoFit/>
+          </a:bodyPr>
+          <a:lstStyle/>
+          <a:p>
+            <a:pPr marL="0" indent="0">
+              <a:buNone/>
+            </a:pPr>
+            <a:r>
+              <a:rPr sz="1400" b="1">
+                <a:solidFill>
+                  <a:srgbClr val="2F5893"/>
+                </a:solidFill>
+              </a:rPr>
+              <a:t>Formato dos resultados preservado</a:t>
+            </a:r>
+          </a:p>
+        </p:txBody>
+      </p:sp>
+      <p:pic>
+        <p:nvPicPr>
+          <p:cNvPr id="38" name="Codigo 3.1" descr="codigo_3_1_slide.png"/>
+          <p:cNvPicPr>
+            <a:picLocks noChangeAspect="1"/>
+          </p:cNvPicPr>
+          <p:nvPr/>
+        </p:nvPicPr>
+        <p:blipFill>
+          <a:blip r:embed="rId3"/>
+          <a:stretch>
+            <a:fillRect/>
+          </a:stretch>
+        </p:blipFill>
+        <p:spPr>
+          <a:xfrm>
+            <a:off x="201168" y="1554480"/>
+            <a:ext cx="6766560" cy="4155026"/>
+          </a:xfrm>
+          <a:prstGeom prst="rect">
+            <a:avLst/>
+          </a:prstGeom>
+        </p:spPr>
+      </p:pic>
+      <p:pic>
+        <p:nvPicPr>
+          <p:cNvPr id="39" name="Figura 3.4" descr="image.png"/>
+          <p:cNvPicPr>
+            <a:picLocks noChangeAspect="1"/>
+          </p:cNvPicPr>
+          <p:nvPr/>
+        </p:nvPicPr>
+        <p:blipFill>
+          <a:blip r:embed="rId4"/>
+          <a:stretch>
+            <a:fillRect/>
+          </a:stretch>
+        </p:blipFill>
+        <p:spPr>
+          <a:xfrm>
+            <a:off x="7242048" y="1764792"/>
+            <a:ext cx="4745736" cy="1802575"/>
+          </a:xfrm>
+          <a:prstGeom prst="rect">
+            <a:avLst/>
+          </a:prstGeom>
+        </p:spPr>
+      </p:pic>
+      <p:sp>
+        <p:nvSpPr>
+          <p:cNvPr id="40" name="Ponte"/>
+          <p:cNvSpPr txBox="1"/>
+          <p:nvPr/>
+        </p:nvSpPr>
+        <p:spPr>
+          <a:xfrm>
+            <a:off x="7242048" y="3886200"/>
+            <a:ext cx="4745736" cy="1463040"/>
+          </a:xfrm>
+          <a:prstGeom prst="rect">
+            <a:avLst/>
+          </a:prstGeom>
+          <a:noFill/>
+        </p:spPr>
+        <p:txBody>
+          <a:bodyPr wrap="square">
+            <a:spAutoFit/>
+          </a:bodyPr>
+          <a:lstStyle/>
+          <a:p>
+            <a:r>
+              <a:rPr sz="1400" b="1">
+                <a:solidFill>
+                  <a:srgbClr val="2F5893"/>
+                </a:solidFill>
+              </a:rPr>
+              <a:t>irec = posicaoLogica(estágio, cenário, hora)</a:t>
+            </a:r>
+          </a:p>
+          <a:p>
+            <a:r>
+              <a:rPr sz="1400" b="1">
+                <a:solidFill>
+                  <a:srgbClr val="2F5893"/>
+                </a:solidFill>
+              </a:rPr>
+              <a:t>offset = irec × tamRegistro</a:t>
+            </a:r>
+          </a:p>
+          <a:p>
+            <a:pPr>
+              <a:spcBef>
+                <a:spcPts val="800"/>
+              </a:spcBef>
+            </a:pPr>
+            <a:r>
+              <a:rPr sz="1300">
+                <a:solidFill>
+                  <a:srgbClr val="333333"/>
+                </a:solidFill>
+              </a:rPr>
+              <a:t>A posição de cada registro é função do índice — então cada rank calcula sozinho onde gravar, sem coordenação global e sem escritor central.</a:t>
+            </a:r>
+          </a:p>
+        </p:txBody>
+      </p:sp>
+    </p:spTree>
+  </p:cSld>
+  <p:clrMapOvr>
+    <a:masterClrMapping/>
+  </p:clrMapOvr>
+</p:sld>
+</file>
+
+<file path=ppt/slides/slide11.xml><?xml version="1.0" encoding="utf-8"?>
+<p:sld xmlns:a="http://schemas.openxmlformats.org/drawingml/2006/main" xmlns:r="http://schemas.openxmlformats.org/officeDocument/2006/relationships" xmlns:p="http://schemas.openxmlformats.org/presentationml/2006/main">
+  <p:cSld>
+    <p:spTree>
+      <p:nvGrpSpPr>
+        <p:cNvPr id="1" name=""/>
+        <p:cNvGrpSpPr/>
+        <p:nvPr/>
+      </p:nvGrpSpPr>
+      <p:grpSpPr>
+        <a:xfrm>
+          <a:off x="0" y="0"/>
+          <a:ext cx="0" cy="0"/>
+          <a:chOff x="0" y="0"/>
+          <a:chExt cx="0" cy="0"/>
+        </a:xfrm>
+      </p:grpSpPr>
+      <p:sp>
+        <p:nvSpPr>
+          <p:cNvPr id="2" name="Title 1"/>
+          <p:cNvSpPr>
+            <a:spLocks noGrp="1"/>
+          </p:cNvSpPr>
+          <p:nvPr>
+            <p:ph type="title"/>
+          </p:nvPr>
+        </p:nvSpPr>
+        <p:spPr/>
+        <p:txBody>
+          <a:bodyPr/>
+          <a:lstStyle/>
+          <a:p>
+            <a:r>
               <a:t>Ambientes experimentais</a:t>
             </a:r>
           </a:p>
@@ -6330,7 +6674,7 @@
 </p:sld>
 </file>
 
-<file path=ppt/slides/slide11.xml><?xml version="1.0" encoding="utf-8"?>
+<file path=ppt/slides/slide12.xml><?xml version="1.0" encoding="utf-8"?>
 <p:sld xmlns:a="http://schemas.openxmlformats.org/drawingml/2006/main" xmlns:r="http://schemas.openxmlformats.org/officeDocument/2006/relationships" xmlns:p="http://schemas.openxmlformats.org/presentationml/2006/main">
   <p:cSld>
     <p:spTree>
@@ -6518,7 +6862,7 @@
 </p:sld>
 </file>
 
-<file path=ppt/slides/slide12.xml><?xml version="1.0" encoding="utf-8"?>
+<file path=ppt/slides/slide13.xml><?xml version="1.0" encoding="utf-8"?>
 <p:sld xmlns:a="http://schemas.openxmlformats.org/drawingml/2006/main" xmlns:r="http://schemas.openxmlformats.org/officeDocument/2006/relationships" xmlns:p="http://schemas.openxmlformats.org/presentationml/2006/main">
   <p:cSld>
     <p:spTree>
@@ -6709,7 +7053,7 @@
 </p:sld>
 </file>
 
-<file path=ppt/slides/slide13.xml><?xml version="1.0" encoding="utf-8"?>
+<file path=ppt/slides/slide14.xml><?xml version="1.0" encoding="utf-8"?>
 <p:sld xmlns:a="http://schemas.openxmlformats.org/drawingml/2006/main" xmlns:r="http://schemas.openxmlformats.org/officeDocument/2006/relationships" xmlns:p="http://schemas.openxmlformats.org/presentationml/2006/main">
   <p:cSld>
     <p:spTree>
@@ -6900,7 +7244,7 @@
 </p:sld>
 </file>
 
-<file path=ppt/slides/slide14.xml><?xml version="1.0" encoding="utf-8"?>
+<file path=ppt/slides/slide15.xml><?xml version="1.0" encoding="utf-8"?>
 <p:sld xmlns:a="http://schemas.openxmlformats.org/drawingml/2006/main" xmlns:r="http://schemas.openxmlformats.org/officeDocument/2006/relationships" xmlns:p="http://schemas.openxmlformats.org/presentationml/2006/main">
   <p:cSld>
     <p:spTree>
@@ -8221,7 +8565,7 @@
 </p:sld>
 </file>
 
-<file path=ppt/slides/slide15.xml><?xml version="1.0" encoding="utf-8"?>
+<file path=ppt/slides/slide16.xml><?xml version="1.0" encoding="utf-8"?>
 <p:sld xmlns:a="http://schemas.openxmlformats.org/drawingml/2006/main" xmlns:r="http://schemas.openxmlformats.org/officeDocument/2006/relationships" xmlns:p="http://schemas.openxmlformats.org/presentationml/2006/main">
   <p:cSld>
     <p:spTree>
@@ -9692,7 +10036,7 @@
 </p:sld>
 </file>
 
-<file path=ppt/slides/slide16.xml><?xml version="1.0" encoding="utf-8"?>
+<file path=ppt/slides/slide17.xml><?xml version="1.0" encoding="utf-8"?>
 <p:sld xmlns:a="http://schemas.openxmlformats.org/drawingml/2006/main" xmlns:r="http://schemas.openxmlformats.org/officeDocument/2006/relationships" xmlns:p="http://schemas.openxmlformats.org/presentationml/2006/main">
   <p:cSld>
     <p:spTree>
@@ -11376,7 +11720,7 @@
 </p:sld>
 </file>
 
-<file path=ppt/slides/slide17.xml><?xml version="1.0" encoding="utf-8"?>
+<file path=ppt/slides/slide18.xml><?xml version="1.0" encoding="utf-8"?>
 <p:sld xmlns:a="http://schemas.openxmlformats.org/drawingml/2006/main" xmlns:r="http://schemas.openxmlformats.org/officeDocument/2006/relationships" xmlns:p="http://schemas.openxmlformats.org/presentationml/2006/main">
   <p:cSld>
     <p:spTree>
@@ -11504,7 +11848,7 @@
 </p:sld>
 </file>
 
-<file path=ppt/slides/slide18.xml><?xml version="1.0" encoding="utf-8"?>
+<file path=ppt/slides/slide19.xml><?xml version="1.0" encoding="utf-8"?>
 <p:sld xmlns:a="http://schemas.openxmlformats.org/drawingml/2006/main" xmlns:r="http://schemas.openxmlformats.org/officeDocument/2006/relationships" xmlns:p="http://schemas.openxmlformats.org/presentationml/2006/main">
   <p:cSld>
     <p:spTree>
@@ -11695,7 +12039,237 @@
 </p:sld>
 </file>
 
-<file path=ppt/slides/slide19.xml><?xml version="1.0" encoding="utf-8"?>
+<file path=ppt/slides/slide2.xml><?xml version="1.0" encoding="utf-8"?>
+<p:sld xmlns:a="http://schemas.openxmlformats.org/drawingml/2006/main" xmlns:r="http://schemas.openxmlformats.org/officeDocument/2006/relationships" xmlns:p="http://schemas.openxmlformats.org/presentationml/2006/main">
+  <p:cSld>
+    <p:spTree>
+      <p:nvGrpSpPr>
+        <p:cNvPr id="1" name=""/>
+        <p:cNvGrpSpPr/>
+        <p:nvPr/>
+      </p:nvGrpSpPr>
+      <p:grpSpPr>
+        <a:xfrm>
+          <a:off x="0" y="0"/>
+          <a:ext cx="0" cy="0"/>
+          <a:chOff x="0" y="0"/>
+          <a:chExt cx="0" cy="0"/>
+        </a:xfrm>
+      </p:grpSpPr>
+      <p:sp>
+        <p:nvSpPr>
+          <p:cNvPr id="2" name="Title 1"/>
+          <p:cNvSpPr>
+            <a:spLocks noGrp="1"/>
+          </p:cNvSpPr>
+          <p:nvPr>
+            <p:ph type="title"/>
+          </p:nvPr>
+        </p:nvSpPr>
+        <p:spPr/>
+        <p:txBody>
+          <a:bodyPr/>
+          <a:lstStyle/>
+          <a:p>
+            <a:r>
+              <a:rPr lang="pt-BR" noProof="0" dirty="0"/>
+              <a:t>Introdução e Motivação</a:t>
+            </a:r>
+          </a:p>
+        </p:txBody>
+      </p:sp>
+      <p:sp>
+        <p:nvSpPr>
+          <p:cNvPr id="4" name="Text Placeholder 3"/>
+          <p:cNvSpPr>
+            <a:spLocks noGrp="1"/>
+          </p:cNvSpPr>
+          <p:nvPr>
+            <p:ph type="body" sz="quarter" idx="13"/>
+          </p:nvPr>
+        </p:nvSpPr>
+        <p:spPr/>
+        <p:txBody>
+          <a:bodyPr/>
+          <a:lstStyle/>
+          <a:p>
+            <a:r>
+              <a:rPr lang="pt-BR" sz="1400" noProof="0" dirty="0"/>
+              <a:t>Quando a E/S se torna o gargalo de uma aplicação paralela</a:t>
+            </a:r>
+          </a:p>
+        </p:txBody>
+      </p:sp>
+      <p:sp>
+        <p:nvSpPr>
+          <p:cNvPr id="5" name="TextBox 4"/>
+          <p:cNvSpPr txBox="1"/>
+          <p:nvPr/>
+        </p:nvSpPr>
+        <p:spPr>
+          <a:xfrm>
+            <a:off x="199751" y="1211601"/>
+            <a:ext cx="11755539" cy="1931298"/>
+          </a:xfrm>
+          <a:prstGeom prst="rect">
+            <a:avLst/>
+          </a:prstGeom>
+          <a:noFill/>
+        </p:spPr>
+        <p:txBody>
+          <a:bodyPr wrap="square">
+            <a:spAutoFit/>
+          </a:bodyPr>
+          <a:lstStyle/>
+          <a:p>
+            <a:pPr marL="285750" indent="-285750">
+              <a:spcBef>
+                <a:spcPts val="300"/>
+              </a:spcBef>
+              <a:buFont typeface="Wingdings" pitchFamily="2" charset="2"/>
+              <a:buChar char="§"/>
+            </a:pPr>
+            <a:r>
+              <a:rPr lang="pt-BR" sz="1600" noProof="0" dirty="0"/>
+              <a:t>Caso de estudo — o SDDP: na simulação final os problemas são independentes e cada processo produz blocos contíguo de dados por (estágio, cenário), </a:t>
+            </a:r>
+            <a:endParaRPr lang="pt-BR" sz="1600" dirty="0"/>
+          </a:p>
+          <a:p>
+            <a:pPr marL="285750" indent="-285750">
+              <a:spcBef>
+                <a:spcPts val="300"/>
+              </a:spcBef>
+              <a:buFont typeface="Wingdings" pitchFamily="2" charset="2"/>
+              <a:buChar char="§"/>
+            </a:pPr>
+            <a:r>
+              <a:rPr lang="pt-BR" sz="1600" noProof="0" dirty="0"/>
+              <a:t>A mudança de resolução por patamares para horária em alguns casos </a:t>
+            </a:r>
+            <a:r>
+              <a:rPr lang="pt-BR" sz="1600" noProof="0"/>
+              <a:t>pode ampliar em </a:t>
+            </a:r>
+            <a:r>
+              <a:rPr lang="pt-BR" sz="1600" noProof="0" dirty="0"/>
+              <a:t>até 240x o tamanho dos resultados.</a:t>
+            </a:r>
+          </a:p>
+          <a:p>
+            <a:pPr marL="285750" indent="-285750">
+              <a:spcBef>
+                <a:spcPts val="300"/>
+              </a:spcBef>
+              <a:buFont typeface="Wingdings" pitchFamily="2" charset="2"/>
+              <a:buChar char="§"/>
+            </a:pPr>
+            <a:r>
+              <a:rPr lang="pt-BR" sz="1600" noProof="0" dirty="0"/>
+              <a:t>O HPC oferece as duas peças para esse padrão: o Lustre entrega banda agregada que cresce com o número de </a:t>
+            </a:r>
+            <a:r>
+              <a:rPr lang="pt-BR" sz="1600" noProof="0" dirty="0" err="1"/>
+              <a:t>OSTs</a:t>
+            </a:r>
+            <a:r>
+              <a:rPr lang="pt-BR" sz="1600" noProof="0" dirty="0"/>
+              <a:t>, e a MPI-IO permite que vários processos gravem em offsets distintos de um mesmo arquivo</a:t>
+            </a:r>
+          </a:p>
+          <a:p>
+            <a:pPr marL="285750" indent="-285750">
+              <a:spcBef>
+                <a:spcPts val="300"/>
+              </a:spcBef>
+              <a:buFont typeface="Wingdings" pitchFamily="2" charset="2"/>
+              <a:buChar char="§"/>
+            </a:pPr>
+            <a:r>
+              <a:rPr lang="pt-BR" sz="1600" noProof="0" dirty="0"/>
+              <a:t>Mas essa banda é potencial, não automática: um único rank escritor converte a E/S em comunicação ponto a ponto e a serializa — o limite passa a ser a rede do nó escritor, não o armazenamento</a:t>
+            </a:r>
+          </a:p>
+        </p:txBody>
+      </p:sp>
+      <p:pic>
+        <p:nvPicPr>
+          <p:cNvPr id="6" name="Picture 5" descr="formato_patamares_vs_horario.png"/>
+          <p:cNvPicPr>
+            <a:picLocks noChangeAspect="1"/>
+          </p:cNvPicPr>
+          <p:nvPr/>
+        </p:nvPicPr>
+        <p:blipFill>
+          <a:blip r:embed="rId3"/>
+          <a:stretch>
+            <a:fillRect/>
+          </a:stretch>
+        </p:blipFill>
+        <p:spPr>
+          <a:xfrm>
+            <a:off x="2584937" y="3099920"/>
+            <a:ext cx="6985161" cy="1620000"/>
+          </a:xfrm>
+          <a:prstGeom prst="rect">
+            <a:avLst/>
+          </a:prstGeom>
+        </p:spPr>
+      </p:pic>
+      <p:sp>
+        <p:nvSpPr>
+          <p:cNvPr id="7" name="TextBox 6"/>
+          <p:cNvSpPr txBox="1"/>
+          <p:nvPr/>
+        </p:nvSpPr>
+        <p:spPr>
+          <a:xfrm>
+            <a:off x="199749" y="4871218"/>
+            <a:ext cx="11755539" cy="750000"/>
+          </a:xfrm>
+          <a:prstGeom prst="rect">
+            <a:avLst/>
+          </a:prstGeom>
+          <a:noFill/>
+        </p:spPr>
+        <p:txBody>
+          <a:bodyPr wrap="square">
+            <a:spAutoFit/>
+          </a:bodyPr>
+          <a:lstStyle/>
+          <a:p>
+            <a:pPr marL="0" indent="0">
+              <a:buNone/>
+            </a:pPr>
+            <a:r>
+              <a:rPr lang="pt-BR" sz="1700" b="1" noProof="0" dirty="0">
+                <a:solidFill>
+                  <a:srgbClr val="2F5893"/>
+                </a:solidFill>
+              </a:rPr>
+              <a:t>Por tarefa (estágio, cenário): 3 registros  →  720 registros  =  240x mais dados a persistir</a:t>
+            </a:r>
+          </a:p>
+          <a:p>
+            <a:pPr marL="0" indent="0">
+              <a:buNone/>
+            </a:pPr>
+            <a:r>
+              <a:rPr lang="pt-BR" sz="1200" noProof="0" dirty="0"/>
+              <a:t>A carga de computação por tarefa não muda — cresce o volume de saída, e o gargalo migra da CPU para a E/S</a:t>
+            </a:r>
+          </a:p>
+        </p:txBody>
+      </p:sp>
+    </p:spTree>
+  </p:cSld>
+  <p:clrMapOvr>
+    <a:masterClrMapping/>
+  </p:clrMapOvr>
+</p:sld>
+</file>
+
+<file path=ppt/slides/slide20.xml><?xml version="1.0" encoding="utf-8"?>
 <p:sld xmlns:a="http://schemas.openxmlformats.org/drawingml/2006/main" xmlns:r="http://schemas.openxmlformats.org/officeDocument/2006/relationships" xmlns:p="http://schemas.openxmlformats.org/presentationml/2006/main">
   <p:cSld>
     <p:spTree>
@@ -11886,237 +12460,7 @@
 </p:sld>
 </file>
 
-<file path=ppt/slides/slide2.xml><?xml version="1.0" encoding="utf-8"?>
-<p:sld xmlns:a="http://schemas.openxmlformats.org/drawingml/2006/main" xmlns:r="http://schemas.openxmlformats.org/officeDocument/2006/relationships" xmlns:p="http://schemas.openxmlformats.org/presentationml/2006/main">
-  <p:cSld>
-    <p:spTree>
-      <p:nvGrpSpPr>
-        <p:cNvPr id="1" name=""/>
-        <p:cNvGrpSpPr/>
-        <p:nvPr/>
-      </p:nvGrpSpPr>
-      <p:grpSpPr>
-        <a:xfrm>
-          <a:off x="0" y="0"/>
-          <a:ext cx="0" cy="0"/>
-          <a:chOff x="0" y="0"/>
-          <a:chExt cx="0" cy="0"/>
-        </a:xfrm>
-      </p:grpSpPr>
-      <p:sp>
-        <p:nvSpPr>
-          <p:cNvPr id="2" name="Title 1"/>
-          <p:cNvSpPr>
-            <a:spLocks noGrp="1"/>
-          </p:cNvSpPr>
-          <p:nvPr>
-            <p:ph type="title"/>
-          </p:nvPr>
-        </p:nvSpPr>
-        <p:spPr/>
-        <p:txBody>
-          <a:bodyPr/>
-          <a:lstStyle/>
-          <a:p>
-            <a:r>
-              <a:rPr lang="pt-BR" noProof="0" dirty="0"/>
-              <a:t>Introdução e Motivação</a:t>
-            </a:r>
-          </a:p>
-        </p:txBody>
-      </p:sp>
-      <p:sp>
-        <p:nvSpPr>
-          <p:cNvPr id="4" name="Text Placeholder 3"/>
-          <p:cNvSpPr>
-            <a:spLocks noGrp="1"/>
-          </p:cNvSpPr>
-          <p:nvPr>
-            <p:ph type="body" sz="quarter" idx="13"/>
-          </p:nvPr>
-        </p:nvSpPr>
-        <p:spPr/>
-        <p:txBody>
-          <a:bodyPr/>
-          <a:lstStyle/>
-          <a:p>
-            <a:r>
-              <a:rPr lang="pt-BR" sz="1400" noProof="0" dirty="0"/>
-              <a:t>Quando a E/S se torna o gargalo de uma aplicação paralela</a:t>
-            </a:r>
-          </a:p>
-        </p:txBody>
-      </p:sp>
-      <p:sp>
-        <p:nvSpPr>
-          <p:cNvPr id="5" name="TextBox 4"/>
-          <p:cNvSpPr txBox="1"/>
-          <p:nvPr/>
-        </p:nvSpPr>
-        <p:spPr>
-          <a:xfrm>
-            <a:off x="199751" y="1211601"/>
-            <a:ext cx="11755539" cy="1931298"/>
-          </a:xfrm>
-          <a:prstGeom prst="rect">
-            <a:avLst/>
-          </a:prstGeom>
-          <a:noFill/>
-        </p:spPr>
-        <p:txBody>
-          <a:bodyPr wrap="square">
-            <a:spAutoFit/>
-          </a:bodyPr>
-          <a:lstStyle/>
-          <a:p>
-            <a:pPr marL="285750" indent="-285750">
-              <a:spcBef>
-                <a:spcPts val="300"/>
-              </a:spcBef>
-              <a:buFont typeface="Wingdings" pitchFamily="2" charset="2"/>
-              <a:buChar char="§"/>
-            </a:pPr>
-            <a:r>
-              <a:rPr lang="pt-BR" sz="1600" noProof="0" dirty="0"/>
-              <a:t>Caso de estudo — o SDDP: na simulação final os problemas são independentes e cada processo produz blocos contíguo de dados por (estágio, cenário), </a:t>
-            </a:r>
-            <a:endParaRPr lang="pt-BR" sz="1600" dirty="0"/>
-          </a:p>
-          <a:p>
-            <a:pPr marL="285750" indent="-285750">
-              <a:spcBef>
-                <a:spcPts val="300"/>
-              </a:spcBef>
-              <a:buFont typeface="Wingdings" pitchFamily="2" charset="2"/>
-              <a:buChar char="§"/>
-            </a:pPr>
-            <a:r>
-              <a:rPr lang="pt-BR" sz="1600" noProof="0" dirty="0"/>
-              <a:t>A mudança de resolução por patamares para horária em alguns casos </a:t>
-            </a:r>
-            <a:r>
-              <a:rPr lang="pt-BR" sz="1600" noProof="0"/>
-              <a:t>pode ampliar em </a:t>
-            </a:r>
-            <a:r>
-              <a:rPr lang="pt-BR" sz="1600" noProof="0" dirty="0"/>
-              <a:t>até 240x o tamanho dos resultados.</a:t>
-            </a:r>
-          </a:p>
-          <a:p>
-            <a:pPr marL="285750" indent="-285750">
-              <a:spcBef>
-                <a:spcPts val="300"/>
-              </a:spcBef>
-              <a:buFont typeface="Wingdings" pitchFamily="2" charset="2"/>
-              <a:buChar char="§"/>
-            </a:pPr>
-            <a:r>
-              <a:rPr lang="pt-BR" sz="1600" noProof="0" dirty="0"/>
-              <a:t>O HPC oferece as duas peças para esse padrão: o Lustre entrega banda agregada que cresce com o número de </a:t>
-            </a:r>
-            <a:r>
-              <a:rPr lang="pt-BR" sz="1600" noProof="0" dirty="0" err="1"/>
-              <a:t>OSTs</a:t>
-            </a:r>
-            <a:r>
-              <a:rPr lang="pt-BR" sz="1600" noProof="0" dirty="0"/>
-              <a:t>, e a MPI-IO permite que vários processos gravem em offsets distintos de um mesmo arquivo</a:t>
-            </a:r>
-          </a:p>
-          <a:p>
-            <a:pPr marL="285750" indent="-285750">
-              <a:spcBef>
-                <a:spcPts val="300"/>
-              </a:spcBef>
-              <a:buFont typeface="Wingdings" pitchFamily="2" charset="2"/>
-              <a:buChar char="§"/>
-            </a:pPr>
-            <a:r>
-              <a:rPr lang="pt-BR" sz="1600" noProof="0" dirty="0"/>
-              <a:t>Mas essa banda é potencial, não automática: um único rank escritor converte a E/S em comunicação ponto a ponto e a serializa — o limite passa a ser a rede do nó escritor, não o armazenamento</a:t>
-            </a:r>
-          </a:p>
-        </p:txBody>
-      </p:sp>
-      <p:pic>
-        <p:nvPicPr>
-          <p:cNvPr id="6" name="Picture 5" descr="formato_patamares_vs_horario.png"/>
-          <p:cNvPicPr>
-            <a:picLocks noChangeAspect="1"/>
-          </p:cNvPicPr>
-          <p:nvPr/>
-        </p:nvPicPr>
-        <p:blipFill>
-          <a:blip r:embed="rId3"/>
-          <a:stretch>
-            <a:fillRect/>
-          </a:stretch>
-        </p:blipFill>
-        <p:spPr>
-          <a:xfrm>
-            <a:off x="2584937" y="3099920"/>
-            <a:ext cx="6985161" cy="1620000"/>
-          </a:xfrm>
-          <a:prstGeom prst="rect">
-            <a:avLst/>
-          </a:prstGeom>
-        </p:spPr>
-      </p:pic>
-      <p:sp>
-        <p:nvSpPr>
-          <p:cNvPr id="7" name="TextBox 6"/>
-          <p:cNvSpPr txBox="1"/>
-          <p:nvPr/>
-        </p:nvSpPr>
-        <p:spPr>
-          <a:xfrm>
-            <a:off x="199749" y="4871218"/>
-            <a:ext cx="11755539" cy="750000"/>
-          </a:xfrm>
-          <a:prstGeom prst="rect">
-            <a:avLst/>
-          </a:prstGeom>
-          <a:noFill/>
-        </p:spPr>
-        <p:txBody>
-          <a:bodyPr wrap="square">
-            <a:spAutoFit/>
-          </a:bodyPr>
-          <a:lstStyle/>
-          <a:p>
-            <a:pPr marL="0" indent="0">
-              <a:buNone/>
-            </a:pPr>
-            <a:r>
-              <a:rPr lang="pt-BR" sz="1700" b="1" noProof="0" dirty="0">
-                <a:solidFill>
-                  <a:srgbClr val="2F5893"/>
-                </a:solidFill>
-              </a:rPr>
-              <a:t>Por tarefa (estágio, cenário): 3 registros  →  720 registros  =  240x mais dados a persistir</a:t>
-            </a:r>
-          </a:p>
-          <a:p>
-            <a:pPr marL="0" indent="0">
-              <a:buNone/>
-            </a:pPr>
-            <a:r>
-              <a:rPr lang="pt-BR" sz="1200" noProof="0" dirty="0"/>
-              <a:t>A carga de computação por tarefa não muda — cresce o volume de saída, e o gargalo migra da CPU para a E/S</a:t>
-            </a:r>
-          </a:p>
-        </p:txBody>
-      </p:sp>
-    </p:spTree>
-  </p:cSld>
-  <p:clrMapOvr>
-    <a:masterClrMapping/>
-  </p:clrMapOvr>
-</p:sld>
-</file>
-
-<file path=ppt/slides/slide20.xml><?xml version="1.0" encoding="utf-8"?>
+<file path=ppt/slides/slide21.xml><?xml version="1.0" encoding="utf-8"?>
 <p:sld xmlns:a="http://schemas.openxmlformats.org/drawingml/2006/main" xmlns:r="http://schemas.openxmlformats.org/officeDocument/2006/relationships" xmlns:p="http://schemas.openxmlformats.org/presentationml/2006/main">
   <p:cSld>
     <p:spTree>
@@ -13437,7 +13781,7 @@
 </p:sld>
 </file>
 
-<file path=ppt/slides/slide21.xml><?xml version="1.0" encoding="utf-8"?>
+<file path=ppt/slides/slide22.xml><?xml version="1.0" encoding="utf-8"?>
 <p:sld xmlns:a="http://schemas.openxmlformats.org/drawingml/2006/main" xmlns:r="http://schemas.openxmlformats.org/officeDocument/2006/relationships" xmlns:p="http://schemas.openxmlformats.org/presentationml/2006/main">
   <p:cSld>
     <p:spTree>
@@ -14908,7 +15252,7 @@
 </p:sld>
 </file>
 
-<file path=ppt/slides/slide22.xml><?xml version="1.0" encoding="utf-8"?>
+<file path=ppt/slides/slide23.xml><?xml version="1.0" encoding="utf-8"?>
 <p:sld xmlns:a="http://schemas.openxmlformats.org/drawingml/2006/main" xmlns:r="http://schemas.openxmlformats.org/officeDocument/2006/relationships" xmlns:p="http://schemas.openxmlformats.org/presentationml/2006/main">
   <p:cSld>
     <p:spTree>
@@ -16600,7 +16944,7 @@
 </p:sld>
 </file>
 
-<file path=ppt/slides/slide23.xml><?xml version="1.0" encoding="utf-8"?>
+<file path=ppt/slides/slide24.xml><?xml version="1.0" encoding="utf-8"?>
 <p:sld xmlns:a="http://schemas.openxmlformats.org/drawingml/2006/main" xmlns:r="http://schemas.openxmlformats.org/officeDocument/2006/relationships" xmlns:p="http://schemas.openxmlformats.org/presentationml/2006/main">
   <p:cSld>
     <p:spTree>
@@ -17076,528 +17420,6 @@
 </p:sld>
 </file>
 
-<file path=ppt/slides/slide24.xml><?xml version="1.0" encoding="utf-8"?>
-<p:sld xmlns:a="http://schemas.openxmlformats.org/drawingml/2006/main" xmlns:r="http://schemas.openxmlformats.org/officeDocument/2006/relationships" xmlns:p="http://schemas.openxmlformats.org/presentationml/2006/main">
-  <p:cSld>
-    <p:spTree>
-      <p:nvGrpSpPr>
-        <p:cNvPr id="1" name=""/>
-        <p:cNvGrpSpPr/>
-        <p:nvPr/>
-      </p:nvGrpSpPr>
-      <p:grpSpPr>
-        <a:xfrm>
-          <a:off x="0" y="0"/>
-          <a:ext cx="0" cy="0"/>
-          <a:chOff x="0" y="0"/>
-          <a:chExt cx="0" cy="0"/>
-        </a:xfrm>
-      </p:grpSpPr>
-      <p:sp>
-        <p:nvSpPr>
-          <p:cNvPr id="2" name="Title 1"/>
-          <p:cNvSpPr>
-            <a:spLocks noGrp="1"/>
-          </p:cNvSpPr>
-          <p:nvPr>
-            <p:ph type="title"/>
-          </p:nvPr>
-        </p:nvSpPr>
-        <p:spPr/>
-        <p:txBody>
-          <a:bodyPr/>
-          <a:lstStyle/>
-          <a:p>
-            <a:r>
-              <a:t>Conclusões</a:t>
-            </a:r>
-          </a:p>
-        </p:txBody>
-      </p:sp>
-      <p:sp>
-        <p:nvSpPr>
-          <p:cNvPr id="3" name="Content Placeholder 2"/>
-          <p:cNvSpPr>
-            <a:spLocks noGrp="1"/>
-          </p:cNvSpPr>
-          <p:nvPr>
-            <p:ph idx="1"/>
-          </p:nvPr>
-        </p:nvSpPr>
-        <p:spPr/>
-        <p:txBody>
-          <a:bodyPr wrap="square"/>
-          <a:lstStyle/>
-          <a:p>
-            <a:pPr marL="342900" indent="-342900">
-              <a:spcBef>
-                <a:spcPts val="600"/>
-              </a:spcBef>
-              <a:buFont typeface="Wingdings" pitchFamily="2" charset="2"/>
-              <a:buChar char="§"/>
-            </a:pPr>
-            <a:r>
-              <a:rPr lang="pt-BR" sz="1800">
-                <a:solidFill>
-                  <a:srgbClr val="00B050"/>
-                </a:solidFill>
-              </a:rPr>
-              <a:t>A banda </a:t>
-            </a:r>
-            <a:r>
-              <a:rPr lang="pt-BR" sz="1800" dirty="0">
-                <a:solidFill>
-                  <a:srgbClr val="00B050"/>
-                </a:solidFill>
-              </a:rPr>
-              <a:t>da MPI-IO cresce </a:t>
-            </a:r>
-            <a:r>
-              <a:rPr lang="pt-BR" sz="1800" dirty="0" err="1">
-                <a:solidFill>
-                  <a:srgbClr val="00B050"/>
-                </a:solidFill>
-              </a:rPr>
-              <a:t>monotonicamente</a:t>
-            </a:r>
-            <a:r>
-              <a:rPr lang="pt-BR" sz="1800" dirty="0">
-                <a:solidFill>
-                  <a:srgbClr val="00B050"/>
-                </a:solidFill>
-              </a:rPr>
-              <a:t> até </a:t>
-            </a:r>
-            <a:r>
-              <a:rPr lang="pt-BR" sz="1800" b="1" dirty="0">
-                <a:solidFill>
-                  <a:srgbClr val="00B050"/>
-                </a:solidFill>
-              </a:rPr>
-              <a:t>380 Gb/s (113×) </a:t>
-            </a:r>
-            <a:r>
-              <a:rPr lang="pt-BR" sz="1800" dirty="0">
-                <a:solidFill>
-                  <a:srgbClr val="00B050"/>
-                </a:solidFill>
-              </a:rPr>
-              <a:t>na AWS </a:t>
-            </a:r>
-            <a:r>
-              <a:rPr lang="pt-BR" sz="1800" b="1" dirty="0">
-                <a:solidFill>
-                  <a:srgbClr val="00B050"/>
-                </a:solidFill>
-              </a:rPr>
-              <a:t>e 34 Gb/s (13,7×) </a:t>
-            </a:r>
-            <a:r>
-              <a:rPr lang="pt-BR" sz="1800" dirty="0">
-                <a:solidFill>
-                  <a:srgbClr val="00B050"/>
-                </a:solidFill>
-              </a:rPr>
-              <a:t>no </a:t>
-            </a:r>
-            <a:r>
-              <a:rPr lang="pt-BR" sz="1800" dirty="0" err="1">
-                <a:solidFill>
-                  <a:srgbClr val="00B050"/>
-                </a:solidFill>
-              </a:rPr>
-              <a:t>SDumont</a:t>
-            </a:r>
-            <a:r>
-              <a:rPr lang="pt-BR" sz="1800" dirty="0">
-                <a:solidFill>
-                  <a:srgbClr val="00B050"/>
-                </a:solidFill>
-              </a:rPr>
-              <a:t> — o armazenamento ainda não saturou.</a:t>
-            </a:r>
-          </a:p>
-          <a:p>
-            <a:pPr marL="342900" indent="-342900">
-              <a:spcBef>
-                <a:spcPts val="600"/>
-              </a:spcBef>
-              <a:buFont typeface="Wingdings" pitchFamily="2" charset="2"/>
-              <a:buChar char="§"/>
-            </a:pPr>
-            <a:r>
-              <a:rPr lang="pt-BR" sz="1800" dirty="0">
-                <a:solidFill>
-                  <a:srgbClr val="00B050"/>
-                </a:solidFill>
-              </a:rPr>
-              <a:t>Em 32 nós a E/S consome </a:t>
-            </a:r>
-            <a:r>
-              <a:rPr lang="pt-BR" sz="1800" b="1" dirty="0">
-                <a:solidFill>
-                  <a:srgbClr val="00B050"/>
-                </a:solidFill>
-              </a:rPr>
-              <a:t>49,5%</a:t>
-            </a:r>
-            <a:r>
-              <a:rPr lang="pt-BR" sz="1800" dirty="0">
-                <a:solidFill>
-                  <a:srgbClr val="00B050"/>
-                </a:solidFill>
-              </a:rPr>
-              <a:t> do tempo na implementação atual; com escritas independentes em MPI-IO cai para </a:t>
-            </a:r>
-            <a:r>
-              <a:rPr lang="pt-BR" sz="1800" b="1" dirty="0">
-                <a:solidFill>
-                  <a:srgbClr val="00B050"/>
-                </a:solidFill>
-              </a:rPr>
-              <a:t>0,7%, </a:t>
-            </a:r>
-            <a:r>
-              <a:rPr lang="pt-BR" sz="1800" dirty="0">
-                <a:solidFill>
-                  <a:srgbClr val="00B050"/>
-                </a:solidFill>
-              </a:rPr>
-              <a:t>e o tempo total cai </a:t>
-            </a:r>
-            <a:r>
-              <a:rPr lang="pt-BR" sz="1800" b="1" dirty="0">
-                <a:solidFill>
-                  <a:srgbClr val="00B050"/>
-                </a:solidFill>
-              </a:rPr>
-              <a:t>36,7% (2.013 s → 1.274 s)</a:t>
-            </a:r>
-          </a:p>
-          <a:p>
-            <a:pPr marL="342900" indent="-342900">
-              <a:spcBef>
-                <a:spcPts val="600"/>
-              </a:spcBef>
-              <a:buFont typeface="Wingdings" pitchFamily="2" charset="2"/>
-              <a:buChar char="§"/>
-            </a:pPr>
-            <a:r>
-              <a:rPr lang="pt-BR" sz="1800" dirty="0">
-                <a:solidFill>
-                  <a:srgbClr val="00B050"/>
-                </a:solidFill>
-              </a:rPr>
-              <a:t>Portabilidade: o mesmo padrão se repete em nuvem dedicada e em supercomputador compartilhado (</a:t>
-            </a:r>
-            <a:r>
-              <a:rPr lang="pt-BR" sz="1800" b="1" dirty="0">
-                <a:solidFill>
-                  <a:srgbClr val="00B050"/>
-                </a:solidFill>
-              </a:rPr>
-              <a:t>40,4% </a:t>
-            </a:r>
-            <a:r>
-              <a:rPr lang="pt-BR" sz="1800" dirty="0">
-                <a:solidFill>
-                  <a:srgbClr val="00B050"/>
-                </a:solidFill>
-              </a:rPr>
-              <a:t>de redução em 32 nós no </a:t>
-            </a:r>
-            <a:r>
-              <a:rPr lang="pt-BR" sz="1800" dirty="0" err="1">
-                <a:solidFill>
-                  <a:srgbClr val="00B050"/>
-                </a:solidFill>
-              </a:rPr>
-              <a:t>SDumont</a:t>
-            </a:r>
-            <a:r>
-              <a:rPr lang="pt-BR" sz="1800" dirty="0">
-                <a:solidFill>
-                  <a:srgbClr val="00B050"/>
-                </a:solidFill>
-              </a:rPr>
-              <a:t>) — não é artefato de infraestrutura</a:t>
-            </a:r>
-          </a:p>
-          <a:p>
-            <a:pPr marL="342900" indent="-342900">
-              <a:spcBef>
-                <a:spcPts val="600"/>
-              </a:spcBef>
-              <a:buFont typeface="Wingdings" pitchFamily="2" charset="2"/>
-              <a:buChar char="§"/>
-            </a:pPr>
-            <a:r>
-              <a:rPr lang="pt-BR" sz="1800" dirty="0">
-                <a:solidFill>
-                  <a:srgbClr val="FFC000"/>
-                </a:solidFill>
-              </a:rPr>
-              <a:t>Dimensionar o Lustre é parte do ganho: passar de 4 para 10 </a:t>
-            </a:r>
-            <a:r>
-              <a:rPr lang="pt-BR" sz="1800" dirty="0" err="1">
-                <a:solidFill>
-                  <a:srgbClr val="FFC000"/>
-                </a:solidFill>
-              </a:rPr>
-              <a:t>OSTs</a:t>
-            </a:r>
-            <a:r>
-              <a:rPr lang="pt-BR" sz="1800" dirty="0">
-                <a:solidFill>
-                  <a:srgbClr val="FFC000"/>
-                </a:solidFill>
-              </a:rPr>
-              <a:t> amplia a banda agregada </a:t>
-            </a:r>
-            <a:r>
-              <a:rPr lang="pt-BR" sz="1800" b="1" dirty="0">
-                <a:solidFill>
-                  <a:srgbClr val="FFC000"/>
-                </a:solidFill>
-              </a:rPr>
-              <a:t>5,6× </a:t>
-            </a:r>
-            <a:r>
-              <a:rPr lang="pt-BR" sz="1800" dirty="0">
-                <a:solidFill>
-                  <a:srgbClr val="FFC000"/>
-                </a:solidFill>
-              </a:rPr>
-              <a:t>em 16 nós e </a:t>
-            </a:r>
-            <a:r>
-              <a:rPr lang="pt-BR" sz="1800" b="1" dirty="0">
-                <a:solidFill>
-                  <a:srgbClr val="FFC000"/>
-                </a:solidFill>
-              </a:rPr>
-              <a:t>23,6× </a:t>
-            </a:r>
-            <a:r>
-              <a:rPr lang="pt-BR" sz="1800" dirty="0">
-                <a:solidFill>
-                  <a:srgbClr val="FFC000"/>
-                </a:solidFill>
-              </a:rPr>
-              <a:t>em 32 nós</a:t>
-            </a:r>
-          </a:p>
-          <a:p>
-            <a:pPr marL="342900" indent="-342900">
-              <a:spcBef>
-                <a:spcPts val="600"/>
-              </a:spcBef>
-              <a:buFont typeface="Wingdings" pitchFamily="2" charset="2"/>
-              <a:buChar char="§"/>
-            </a:pPr>
-            <a:r>
-              <a:rPr lang="pt-BR" sz="1800" dirty="0">
-                <a:solidFill>
-                  <a:srgbClr val="FF0000"/>
-                </a:solidFill>
-              </a:rPr>
-              <a:t>Limites assumidos: eficiência de </a:t>
-            </a:r>
-            <a:r>
-              <a:rPr lang="pt-BR" sz="1800" b="1" dirty="0">
-                <a:solidFill>
-                  <a:srgbClr val="FF0000"/>
-                </a:solidFill>
-              </a:rPr>
-              <a:t>43,5</a:t>
-            </a:r>
-            <a:r>
-              <a:rPr lang="pt-BR" sz="1800" dirty="0">
-                <a:solidFill>
-                  <a:srgbClr val="FF0000"/>
-                </a:solidFill>
-              </a:rPr>
-              <a:t>% em 32 nós (</a:t>
-            </a:r>
-            <a:r>
-              <a:rPr lang="pt-BR" sz="1800" dirty="0" err="1">
-                <a:solidFill>
-                  <a:srgbClr val="FF0000"/>
-                </a:solidFill>
-              </a:rPr>
-              <a:t>strong</a:t>
-            </a:r>
-            <a:r>
-              <a:rPr lang="pt-BR" sz="1800" dirty="0">
-                <a:solidFill>
-                  <a:srgbClr val="FF0000"/>
-                </a:solidFill>
-              </a:rPr>
-              <a:t> </a:t>
-            </a:r>
-            <a:r>
-              <a:rPr lang="pt-BR" sz="1800" dirty="0" err="1">
-                <a:solidFill>
-                  <a:srgbClr val="FF0000"/>
-                </a:solidFill>
-              </a:rPr>
-              <a:t>scaling</a:t>
-            </a:r>
-            <a:r>
-              <a:rPr lang="pt-BR" sz="1800" dirty="0">
-                <a:solidFill>
-                  <a:srgbClr val="FF0000"/>
-                </a:solidFill>
-              </a:rPr>
-              <a:t>, gargalo de computação) e </a:t>
-            </a:r>
-            <a:r>
-              <a:rPr lang="pt-BR" sz="1800" b="1" dirty="0" err="1">
-                <a:solidFill>
-                  <a:srgbClr val="FF0000"/>
-                </a:solidFill>
-              </a:rPr>
-              <a:t>MPI_File_open</a:t>
-            </a:r>
-            <a:r>
-              <a:rPr lang="pt-BR" sz="1800" b="1" dirty="0">
-                <a:solidFill>
-                  <a:srgbClr val="FF0000"/>
-                </a:solidFill>
-              </a:rPr>
-              <a:t>/close </a:t>
-            </a:r>
-            <a:r>
-              <a:rPr lang="pt-BR" sz="1800" dirty="0">
-                <a:solidFill>
-                  <a:srgbClr val="FF0000"/>
-                </a:solidFill>
-              </a:rPr>
-              <a:t>em </a:t>
-            </a:r>
-            <a:r>
-              <a:rPr lang="pt-BR" sz="1800" b="1" dirty="0">
-                <a:solidFill>
-                  <a:srgbClr val="FF0000"/>
-                </a:solidFill>
-              </a:rPr>
-              <a:t>11,6% </a:t>
-            </a:r>
-            <a:r>
-              <a:rPr lang="pt-BR" sz="1800" dirty="0">
-                <a:solidFill>
-                  <a:srgbClr val="FF0000"/>
-                </a:solidFill>
-              </a:rPr>
-              <a:t>do tempo — custo fixo por execução, não por carga</a:t>
-            </a:r>
-          </a:p>
-          <a:p>
-            <a:pPr marL="342900" indent="-342900">
-              <a:spcBef>
-                <a:spcPts val="600"/>
-              </a:spcBef>
-              <a:buFont typeface="Wingdings" pitchFamily="2" charset="2"/>
-              <a:buChar char="§"/>
-            </a:pPr>
-            <a:r>
-              <a:rPr sz="1800" dirty="0" err="1">
-                <a:solidFill>
-                  <a:srgbClr val="FF0000"/>
-                </a:solidFill>
-              </a:rPr>
-              <a:t>Diagnóstico</a:t>
-            </a:r>
-            <a:r>
-              <a:rPr sz="1800" dirty="0">
-                <a:solidFill>
-                  <a:srgbClr val="FF0000"/>
-                </a:solidFill>
-              </a:rPr>
-              <a:t>: o escritor único inverte a escalabilidade — na AWS a banda percebida cai de </a:t>
-            </a:r>
-            <a:r>
-              <a:rPr sz="1800" b="1" dirty="0">
-                <a:solidFill>
-                  <a:srgbClr val="FF0000"/>
-                </a:solidFill>
-              </a:rPr>
-              <a:t>60,5</a:t>
-            </a:r>
-            <a:r>
-              <a:rPr sz="1800" dirty="0">
-                <a:solidFill>
-                  <a:srgbClr val="FF0000"/>
-                </a:solidFill>
-              </a:rPr>
-              <a:t> para </a:t>
-            </a:r>
-            <a:r>
-              <a:rPr sz="1800" b="1" dirty="0">
-                <a:solidFill>
-                  <a:srgbClr val="FF0000"/>
-                </a:solidFill>
-              </a:rPr>
-              <a:t>3,4 Gb/s </a:t>
-            </a:r>
-            <a:r>
-              <a:rPr sz="1800" dirty="0">
-                <a:solidFill>
-                  <a:srgbClr val="FF0000"/>
-                </a:solidFill>
-              </a:rPr>
-              <a:t>entre 2 e 32 nós, e o melhor tempo total ocorre em 16 nós, não </a:t>
-            </a:r>
-            <a:r>
-              <a:rPr sz="1800" dirty="0" err="1">
-                <a:solidFill>
-                  <a:srgbClr val="FF0000"/>
-                </a:solidFill>
-              </a:rPr>
-              <a:t>em</a:t>
-            </a:r>
-            <a:r>
-              <a:rPr sz="1800" dirty="0">
-                <a:solidFill>
-                  <a:srgbClr val="FF0000"/>
-                </a:solidFill>
-              </a:rPr>
-              <a:t> 32</a:t>
-            </a:r>
-          </a:p>
-        </p:txBody>
-      </p:sp>
-      <p:sp>
-        <p:nvSpPr>
-          <p:cNvPr id="4" name="Text Placeholder 3"/>
-          <p:cNvSpPr>
-            <a:spLocks noGrp="1"/>
-          </p:cNvSpPr>
-          <p:nvPr>
-            <p:ph type="body" sz="quarter" idx="13"/>
-          </p:nvPr>
-        </p:nvSpPr>
-        <p:spPr/>
-        <p:txBody>
-          <a:bodyPr/>
-          <a:lstStyle/>
-          <a:p>
-            <a:r>
-              <a:rPr sz="1400"/>
-              <a:t>O que foi demonstrado</a:t>
-            </a:r>
-          </a:p>
-        </p:txBody>
-      </p:sp>
-    </p:spTree>
-  </p:cSld>
-  <p:clrMapOvr>
-    <a:masterClrMapping/>
-  </p:clrMapOvr>
-</p:sld>
-</file>
-
 <file path=ppt/slides/slide25.xml><?xml version="1.0" encoding="utf-8"?>
 <p:sld xmlns:a="http://schemas.openxmlformats.org/drawingml/2006/main" xmlns:r="http://schemas.openxmlformats.org/officeDocument/2006/relationships" xmlns:p="http://schemas.openxmlformats.org/presentationml/2006/main">
   <p:cSld>
@@ -17631,7 +17453,7 @@
           <a:lstStyle/>
           <a:p>
             <a:r>
-              <a:t>Trabalhos futuros</a:t>
+              <a:t>Conclusões</a:t>
             </a:r>
           </a:p>
         </p:txBody>
@@ -17659,142 +17481,85 @@
               <a:buChar char="§"/>
             </a:pPr>
             <a:r>
-              <a:rPr sz="1800" dirty="0" err="1"/>
-              <a:t>Reorganizar</a:t>
-            </a:r>
-            <a:r>
-              <a:rPr sz="1800" dirty="0"/>
-              <a:t> o </a:t>
-            </a:r>
-            <a:r>
-              <a:rPr sz="1800" dirty="0" err="1"/>
-              <a:t>padrão</a:t>
-            </a:r>
-            <a:r>
-              <a:rPr sz="1800" dirty="0"/>
-              <a:t> dos </a:t>
-            </a:r>
-            <a:r>
-              <a:rPr sz="1800" dirty="0" err="1"/>
-              <a:t>arquivos</a:t>
-            </a:r>
-            <a:r>
-              <a:rPr sz="1800" dirty="0"/>
-              <a:t> </a:t>
-            </a:r>
-            <a:r>
-              <a:rPr sz="1800" dirty="0" err="1"/>
-              <a:t>diários</a:t>
-            </a:r>
-            <a:r>
-              <a:rPr sz="1800" dirty="0"/>
-              <a:t> (13 dos 117 </a:t>
-            </a:r>
-            <a:r>
-              <a:rPr sz="1800" dirty="0" err="1"/>
-              <a:t>arquivos</a:t>
-            </a:r>
-            <a:r>
-              <a:rPr sz="1800" dirty="0"/>
-              <a:t>), </a:t>
-            </a:r>
-            <a:r>
-              <a:rPr sz="1800" dirty="0" err="1"/>
-              <a:t>agrupando</a:t>
-            </a:r>
-            <a:r>
-              <a:rPr sz="1800" dirty="0"/>
-              <a:t> o </a:t>
-            </a:r>
-            <a:r>
-              <a:rPr sz="1800" dirty="0" err="1"/>
-              <a:t>mês</a:t>
-            </a:r>
-            <a:r>
-              <a:rPr sz="1800" dirty="0"/>
-              <a:t> </a:t>
-            </a:r>
-            <a:r>
-              <a:rPr sz="1800" dirty="0" err="1"/>
-              <a:t>em</a:t>
-            </a:r>
-            <a:r>
-              <a:rPr sz="1800" dirty="0"/>
-              <a:t> </a:t>
-            </a:r>
-            <a:r>
-              <a:rPr sz="1800" dirty="0" err="1"/>
-              <a:t>uma</a:t>
-            </a:r>
-            <a:r>
-              <a:rPr sz="1800" dirty="0"/>
-              <a:t> </a:t>
-            </a:r>
-            <a:r>
-              <a:rPr sz="1800" dirty="0" err="1"/>
-              <a:t>escrita</a:t>
-            </a:r>
-            <a:r>
-              <a:rPr sz="1800" dirty="0"/>
-              <a:t> </a:t>
-            </a:r>
-            <a:r>
-              <a:rPr sz="1800" dirty="0" err="1"/>
-              <a:t>por</a:t>
-            </a:r>
-            <a:r>
-              <a:rPr sz="1800" dirty="0"/>
-              <a:t> (</a:t>
-            </a:r>
-            <a:r>
-              <a:rPr sz="1800" dirty="0" err="1"/>
-              <a:t>estágio</a:t>
-            </a:r>
-            <a:r>
-              <a:rPr sz="1800" dirty="0"/>
-              <a:t>, </a:t>
-            </a:r>
-            <a:r>
-              <a:rPr sz="1800" dirty="0" err="1"/>
-              <a:t>cenário</a:t>
-            </a:r>
-            <a:r>
-              <a:rPr sz="1800" dirty="0"/>
-              <a:t>) — </a:t>
-            </a:r>
-            <a:r>
-              <a:rPr sz="1800" dirty="0" err="1"/>
-              <a:t>elimina</a:t>
-            </a:r>
-            <a:r>
-              <a:rPr sz="1800" dirty="0"/>
-              <a:t> a </a:t>
-            </a:r>
-            <a:r>
-              <a:rPr sz="1800" dirty="0" err="1"/>
-              <a:t>parcela</a:t>
-            </a:r>
-            <a:r>
-              <a:rPr sz="1800" dirty="0"/>
-              <a:t> residual de </a:t>
-            </a:r>
-            <a:r>
-              <a:rPr sz="1800" dirty="0" err="1"/>
-              <a:t>requisições</a:t>
-            </a:r>
-            <a:r>
-              <a:rPr sz="1800" dirty="0"/>
-              <a:t> </a:t>
-            </a:r>
-            <a:r>
-              <a:rPr sz="1800" dirty="0" err="1"/>
-              <a:t>pequenas</a:t>
-            </a:r>
-            <a:r>
-              <a:rPr lang="en-US" sz="1800" dirty="0"/>
-              <a:t>.</a:t>
-            </a:r>
-            <a:endParaRPr sz="1800" dirty="0"/>
+              <a:rPr lang="pt-BR" sz="1800">
+                <a:solidFill>
+                  <a:srgbClr val="00B050"/>
+                </a:solidFill>
+              </a:rPr>
+              <a:t>A banda </a:t>
+            </a:r>
+            <a:r>
+              <a:rPr lang="pt-BR" sz="1800" dirty="0">
+                <a:solidFill>
+                  <a:srgbClr val="00B050"/>
+                </a:solidFill>
+              </a:rPr>
+              <a:t>da MPI-IO cresce </a:t>
+            </a:r>
+            <a:r>
+              <a:rPr lang="pt-BR" sz="1800" dirty="0" err="1">
+                <a:solidFill>
+                  <a:srgbClr val="00B050"/>
+                </a:solidFill>
+              </a:rPr>
+              <a:t>monotonicamente</a:t>
+            </a:r>
+            <a:r>
+              <a:rPr lang="pt-BR" sz="1800" dirty="0">
+                <a:solidFill>
+                  <a:srgbClr val="00B050"/>
+                </a:solidFill>
+              </a:rPr>
+              <a:t> até </a:t>
+            </a:r>
+            <a:r>
+              <a:rPr lang="pt-BR" sz="1800" b="1" dirty="0">
+                <a:solidFill>
+                  <a:srgbClr val="00B050"/>
+                </a:solidFill>
+              </a:rPr>
+              <a:t>380 Gb/s (113×) </a:t>
+            </a:r>
+            <a:r>
+              <a:rPr lang="pt-BR" sz="1800" dirty="0">
+                <a:solidFill>
+                  <a:srgbClr val="00B050"/>
+                </a:solidFill>
+              </a:rPr>
+              <a:t>na AWS </a:t>
+            </a:r>
+            <a:r>
+              <a:rPr lang="pt-BR" sz="1800" b="1" dirty="0">
+                <a:solidFill>
+                  <a:srgbClr val="00B050"/>
+                </a:solidFill>
+              </a:rPr>
+              <a:t>e 34 Gb/s (13,7×) </a:t>
+            </a:r>
+            <a:r>
+              <a:rPr lang="pt-BR" sz="1800" dirty="0">
+                <a:solidFill>
+                  <a:srgbClr val="00B050"/>
+                </a:solidFill>
+              </a:rPr>
+              <a:t>no </a:t>
+            </a:r>
+            <a:r>
+              <a:rPr lang="pt-BR" sz="1800" dirty="0" err="1">
+                <a:solidFill>
+                  <a:srgbClr val="00B050"/>
+                </a:solidFill>
+              </a:rPr>
+              <a:t>SDumont</a:t>
+            </a:r>
+            <a:r>
+              <a:rPr lang="pt-BR" sz="1800" dirty="0">
+                <a:solidFill>
+                  <a:srgbClr val="00B050"/>
+                </a:solidFill>
+              </a:rPr>
+              <a:t> — o armazenamento ainda não saturou.</a:t>
+            </a:r>
           </a:p>
           <a:p>
             <a:pPr marL="342900" indent="-342900">
@@ -17805,90 +17570,53 @@
               <a:buChar char="§"/>
             </a:pPr>
             <a:r>
-              <a:rPr sz="1800" dirty="0" err="1"/>
-              <a:t>Bufferização</a:t>
-            </a:r>
-            <a:r>
-              <a:rPr sz="1800" dirty="0"/>
-              <a:t> </a:t>
-            </a:r>
-            <a:r>
-              <a:rPr sz="1800" dirty="0" err="1"/>
-              <a:t>alinhada</a:t>
-            </a:r>
-            <a:r>
-              <a:rPr sz="1800" dirty="0"/>
-              <a:t> </a:t>
-            </a:r>
-            <a:r>
-              <a:rPr sz="1800" dirty="0" err="1"/>
-              <a:t>às</a:t>
-            </a:r>
-            <a:r>
-              <a:rPr sz="1800" dirty="0"/>
-              <a:t> stripes do </a:t>
-            </a:r>
-            <a:r>
-              <a:rPr sz="1800" dirty="0" err="1"/>
-              <a:t>Lustre</a:t>
-            </a:r>
-            <a:r>
-              <a:rPr sz="1800" dirty="0"/>
-              <a:t>, para </a:t>
-            </a:r>
-            <a:r>
-              <a:rPr sz="1800" dirty="0" err="1"/>
-              <a:t>que</a:t>
-            </a:r>
-            <a:r>
-              <a:rPr sz="1800" dirty="0"/>
-              <a:t> </a:t>
-            </a:r>
-            <a:r>
-              <a:rPr sz="1800" dirty="0" err="1"/>
-              <a:t>cada</a:t>
-            </a:r>
-            <a:r>
-              <a:rPr sz="1800" dirty="0"/>
-              <a:t> </a:t>
-            </a:r>
-            <a:r>
-              <a:rPr sz="1800" dirty="0" err="1"/>
-              <a:t>submissão</a:t>
-            </a:r>
-            <a:r>
-              <a:rPr sz="1800" dirty="0"/>
-              <a:t> MPI-IO </a:t>
-            </a:r>
-            <a:r>
-              <a:rPr sz="1800" dirty="0" err="1"/>
-              <a:t>incida</a:t>
-            </a:r>
-            <a:r>
-              <a:rPr sz="1800" dirty="0"/>
-              <a:t> </a:t>
-            </a:r>
-            <a:r>
-              <a:rPr sz="1800" dirty="0" err="1"/>
-              <a:t>sobre</a:t>
-            </a:r>
-            <a:r>
-              <a:rPr sz="1800" dirty="0"/>
-              <a:t> </a:t>
-            </a:r>
-            <a:r>
-              <a:rPr sz="1800" dirty="0" err="1"/>
-              <a:t>exatamente</a:t>
-            </a:r>
-            <a:r>
-              <a:rPr sz="1800" dirty="0"/>
-              <a:t> um OST (Liao et al., 2007)</a:t>
-            </a:r>
-            <a:r>
-              <a:rPr lang="en-US" sz="1800" dirty="0"/>
-              <a:t>.</a:t>
-            </a:r>
-            <a:endParaRPr sz="1800" dirty="0"/>
+              <a:rPr lang="pt-BR" sz="1800" dirty="0">
+                <a:solidFill>
+                  <a:srgbClr val="00B050"/>
+                </a:solidFill>
+              </a:rPr>
+              <a:t>Em 32 nós a E/S consome </a:t>
+            </a:r>
+            <a:r>
+              <a:rPr lang="pt-BR" sz="1800" b="1" dirty="0">
+                <a:solidFill>
+                  <a:srgbClr val="00B050"/>
+                </a:solidFill>
+              </a:rPr>
+              <a:t>49,5%</a:t>
+            </a:r>
+            <a:r>
+              <a:rPr lang="pt-BR" sz="1800" dirty="0">
+                <a:solidFill>
+                  <a:srgbClr val="00B050"/>
+                </a:solidFill>
+              </a:rPr>
+              <a:t> do tempo na implementação atual; com escritas independentes em MPI-IO cai para </a:t>
+            </a:r>
+            <a:r>
+              <a:rPr lang="pt-BR" sz="1800" b="1" dirty="0">
+                <a:solidFill>
+                  <a:srgbClr val="00B050"/>
+                </a:solidFill>
+              </a:rPr>
+              <a:t>0,7%, </a:t>
+            </a:r>
+            <a:r>
+              <a:rPr lang="pt-BR" sz="1800" dirty="0">
+                <a:solidFill>
+                  <a:srgbClr val="00B050"/>
+                </a:solidFill>
+              </a:rPr>
+              <a:t>e o tempo total cai </a:t>
+            </a:r>
+            <a:r>
+              <a:rPr lang="pt-BR" sz="1800" b="1" dirty="0">
+                <a:solidFill>
+                  <a:srgbClr val="00B050"/>
+                </a:solidFill>
+              </a:rPr>
+              <a:t>36,7% (2.013 s → 1.274 s)</a:t>
+            </a:r>
           </a:p>
           <a:p>
             <a:pPr marL="342900" indent="-342900">
@@ -17899,54 +17627,45 @@
               <a:buChar char="§"/>
             </a:pPr>
             <a:r>
-              <a:rPr sz="1800" dirty="0" err="1"/>
-              <a:t>Sensibilidade</a:t>
-            </a:r>
-            <a:r>
-              <a:rPr sz="1800" dirty="0"/>
-              <a:t> </a:t>
-            </a:r>
-            <a:r>
-              <a:rPr sz="1800" dirty="0" err="1"/>
-              <a:t>aos</a:t>
-            </a:r>
-            <a:r>
-              <a:rPr sz="1800" dirty="0"/>
-              <a:t> </a:t>
-            </a:r>
-            <a:r>
-              <a:rPr sz="1800" dirty="0" err="1"/>
-              <a:t>parâmetros</a:t>
-            </a:r>
-            <a:r>
-              <a:rPr sz="1800" dirty="0"/>
-              <a:t> de </a:t>
-            </a:r>
-            <a:r>
-              <a:rPr sz="1800" dirty="0" err="1"/>
-              <a:t>projeto</a:t>
-            </a:r>
-            <a:r>
-              <a:rPr sz="1800" dirty="0"/>
-              <a:t>: </a:t>
-            </a:r>
-            <a:r>
-              <a:rPr sz="1800" dirty="0" err="1"/>
-              <a:t>stripe_size</a:t>
-            </a:r>
-            <a:r>
-              <a:rPr sz="1800" dirty="0"/>
-              <a:t> do </a:t>
-            </a:r>
-            <a:r>
-              <a:rPr sz="1800" dirty="0" err="1"/>
-              <a:t>Lustre</a:t>
-            </a:r>
-            <a:r>
-              <a:rPr lang="en-US" sz="1800" dirty="0"/>
-              <a:t>.</a:t>
-            </a:r>
-            <a:endParaRPr sz="1800" dirty="0"/>
+              <a:rPr lang="pt-BR" sz="1800" dirty="0">
+                <a:solidFill>
+                  <a:srgbClr val="00B050"/>
+                </a:solidFill>
+              </a:rPr>
+              <a:t>Portabilidade: o mesmo padrão se repete em nuvem dedicada e em supercomputador compartilhado (</a:t>
+            </a:r>
+            <a:r>
+              <a:rPr lang="pt-BR" sz="1800" b="1" dirty="0">
+                <a:solidFill>
+                  <a:srgbClr val="00B050"/>
+                </a:solidFill>
+              </a:rPr>
+              <a:t>40,4% </a:t>
+            </a:r>
+            <a:r>
+              <a:rPr lang="pt-BR" sz="1800" dirty="0">
+                <a:solidFill>
+                  <a:srgbClr val="00B050"/>
+                </a:solidFill>
+              </a:rPr>
+              <a:t>de redução em 32 nós no </a:t>
+            </a:r>
+            <a:r>
+              <a:rPr lang="pt-BR" sz="1800" dirty="0" err="1">
+                <a:solidFill>
+                  <a:srgbClr val="00B050"/>
+                </a:solidFill>
+              </a:rPr>
+              <a:t>SDumont</a:t>
+            </a:r>
+            <a:r>
+              <a:rPr lang="pt-BR" sz="1800" dirty="0">
+                <a:solidFill>
+                  <a:srgbClr val="00B050"/>
+                </a:solidFill>
+              </a:rPr>
+              <a:t>) — não é artefato de infraestrutura</a:t>
+            </a:r>
           </a:p>
           <a:p>
             <a:pPr marL="342900" indent="-342900">
@@ -17957,102 +17676,61 @@
               <a:buChar char="§"/>
             </a:pPr>
             <a:r>
-              <a:rPr sz="1800" dirty="0" err="1"/>
-              <a:t>Escrita</a:t>
-            </a:r>
-            <a:r>
-              <a:rPr sz="1800" dirty="0"/>
-              <a:t> </a:t>
-            </a:r>
-            <a:r>
-              <a:rPr sz="1800" dirty="0" err="1"/>
-              <a:t>coletiva</a:t>
-            </a:r>
-            <a:r>
-              <a:rPr sz="1800" dirty="0"/>
-              <a:t> (two-phase I/O): </a:t>
-            </a:r>
-            <a:r>
-              <a:rPr sz="1800" dirty="0" err="1"/>
-              <a:t>tentativas</a:t>
-            </a:r>
-            <a:r>
-              <a:rPr sz="1800" dirty="0"/>
-              <a:t> </a:t>
-            </a:r>
-            <a:r>
-              <a:rPr sz="1800" dirty="0" err="1"/>
-              <a:t>preliminares</a:t>
-            </a:r>
-            <a:r>
-              <a:rPr sz="1800" dirty="0"/>
-              <a:t> </a:t>
-            </a:r>
-            <a:r>
-              <a:rPr sz="1800" dirty="0" err="1"/>
-              <a:t>resultaram</a:t>
-            </a:r>
-            <a:r>
-              <a:rPr sz="1800" dirty="0"/>
-              <a:t> </a:t>
-            </a:r>
-            <a:r>
-              <a:rPr sz="1800" dirty="0" err="1"/>
-              <a:t>em</a:t>
-            </a:r>
-            <a:r>
-              <a:rPr sz="1800" dirty="0"/>
-              <a:t> deadlock com o bag-of-tasks — </a:t>
-            </a:r>
-            <a:r>
-              <a:rPr sz="1800" dirty="0" err="1"/>
-              <a:t>exige</a:t>
-            </a:r>
-            <a:r>
-              <a:rPr sz="1800" dirty="0"/>
-              <a:t> </a:t>
-            </a:r>
-            <a:r>
-              <a:rPr sz="1800" dirty="0" err="1"/>
-              <a:t>reconciliar</a:t>
-            </a:r>
-            <a:r>
-              <a:rPr sz="1800" dirty="0"/>
-              <a:t> </a:t>
-            </a:r>
-            <a:r>
-              <a:rPr sz="1800" dirty="0" err="1"/>
-              <a:t>distribuição</a:t>
-            </a:r>
-            <a:r>
-              <a:rPr sz="1800" dirty="0"/>
-              <a:t> </a:t>
-            </a:r>
-            <a:r>
-              <a:rPr sz="1800" dirty="0" err="1"/>
-              <a:t>dinâmica</a:t>
-            </a:r>
-            <a:r>
-              <a:rPr sz="1800" dirty="0"/>
-              <a:t> e </a:t>
-            </a:r>
-            <a:r>
-              <a:rPr sz="1800" dirty="0" err="1"/>
-              <a:t>semântica</a:t>
-            </a:r>
-            <a:r>
-              <a:rPr sz="1800" dirty="0"/>
-              <a:t> </a:t>
-            </a:r>
-            <a:r>
-              <a:rPr sz="1800" dirty="0" err="1"/>
-              <a:t>coletiva</a:t>
-            </a:r>
-            <a:r>
-              <a:rPr lang="en-US" sz="1800" dirty="0"/>
-              <a:t>.</a:t>
-            </a:r>
-            <a:endParaRPr sz="1800" dirty="0"/>
+              <a:rPr lang="pt-BR" sz="1800" dirty="0">
+                <a:solidFill>
+                  <a:srgbClr val="FFC000"/>
+                </a:solidFill>
+              </a:rPr>
+              <a:t>Dimensionar o Lustre é parte do ganho: passar de 4 para 10 </a:t>
+            </a:r>
+            <a:r>
+              <a:rPr lang="pt-BR" sz="1800" dirty="0" err="1">
+                <a:solidFill>
+                  <a:srgbClr val="FFC000"/>
+                </a:solidFill>
+              </a:rPr>
+              <a:t>OSTs</a:t>
+            </a:r>
+            <a:r>
+              <a:rPr lang="pt-BR" sz="1800" dirty="0">
+                <a:solidFill>
+                  <a:srgbClr val="FFC000"/>
+                </a:solidFill>
+              </a:rPr>
+              <a:t> amplia a banda agregada </a:t>
+            </a:r>
+            <a:r>
+              <a:rPr lang="pt-BR" sz="1800" b="1" dirty="0">
+                <a:solidFill>
+                  <a:srgbClr val="FFC000"/>
+                </a:solidFill>
+              </a:rPr>
+              <a:t>5,6× </a:t>
+            </a:r>
+            <a:r>
+              <a:rPr lang="pt-BR" sz="1800" dirty="0">
+                <a:solidFill>
+                  <a:srgbClr val="FFC000"/>
+                </a:solidFill>
+              </a:rPr>
+              <a:t>em 16 nós e </a:t>
+            </a:r>
+            <a:r>
+              <a:rPr lang="pt-BR" sz="1800" b="1" dirty="0">
+                <a:solidFill>
+                  <a:srgbClr val="FFC000"/>
+                </a:solidFill>
+              </a:rPr>
+              <a:t>23,6× </a:t>
+            </a:r>
+            <a:r>
+              <a:rPr lang="pt-BR" sz="1800" dirty="0">
+                <a:solidFill>
+                  <a:srgbClr val="FFC000"/>
+                </a:solidFill>
+              </a:rPr>
+              <a:t>em 32 nós</a:t>
+            </a:r>
           </a:p>
           <a:p>
             <a:pPr marL="342900" indent="-342900">
@@ -18063,90 +17741,101 @@
               <a:buChar char="§"/>
             </a:pPr>
             <a:r>
-              <a:rPr sz="1800" dirty="0"/>
-              <a:t>Redes de </a:t>
-            </a:r>
-            <a:r>
-              <a:rPr sz="1800" dirty="0" err="1"/>
-              <a:t>baixa</a:t>
-            </a:r>
-            <a:r>
-              <a:rPr sz="1800" dirty="0"/>
+              <a:rPr lang="pt-BR" sz="1800" dirty="0">
+                <a:solidFill>
+                  <a:srgbClr val="FF0000"/>
+                </a:solidFill>
+              </a:rPr>
+              <a:t>Limites assumidos: eficiência de </a:t>
+            </a:r>
+            <a:r>
+              <a:rPr lang="pt-BR" sz="1800" b="1" dirty="0">
+                <a:solidFill>
+                  <a:srgbClr val="FF0000"/>
+                </a:solidFill>
+              </a:rPr>
+              <a:t>43,5</a:t>
+            </a:r>
+            <a:r>
+              <a:rPr lang="pt-BR" sz="1800" dirty="0">
+                <a:solidFill>
+                  <a:srgbClr val="FF0000"/>
+                </a:solidFill>
+              </a:rPr>
+              <a:t>% em 32 nós (</a:t>
+            </a:r>
+            <a:r>
+              <a:rPr lang="pt-BR" sz="1800" dirty="0" err="1">
+                <a:solidFill>
+                  <a:srgbClr val="FF0000"/>
+                </a:solidFill>
+              </a:rPr>
+              <a:t>strong</a:t>
+            </a:r>
+            <a:r>
+              <a:rPr lang="pt-BR" sz="1800" dirty="0">
+                <a:solidFill>
+                  <a:srgbClr val="FF0000"/>
+                </a:solidFill>
+              </a:rPr>
               <a:t> </a:t>
             </a:r>
             <a:r>
-              <a:rPr sz="1800" dirty="0" err="1"/>
-              <a:t>latência</a:t>
-            </a:r>
-            <a:r>
-              <a:rPr sz="1800" dirty="0"/>
-              <a:t> (InfiniBand HDR/NDR, AWS EFA) e </a:t>
-            </a:r>
-            <a:r>
-              <a:rPr sz="1800" dirty="0" err="1"/>
-              <a:t>escalas</a:t>
-            </a:r>
-            <a:r>
-              <a:rPr sz="1800" dirty="0"/>
-              <a:t> </a:t>
-            </a:r>
-            <a:r>
-              <a:rPr sz="1800" dirty="0" err="1"/>
-              <a:t>acima</a:t>
-            </a:r>
-            <a:r>
-              <a:rPr sz="1800" dirty="0"/>
-              <a:t> de 32 </a:t>
-            </a:r>
-            <a:r>
-              <a:rPr sz="1800" dirty="0" err="1"/>
-              <a:t>nós</a:t>
-            </a:r>
-            <a:r>
-              <a:rPr sz="1800" dirty="0"/>
-              <a:t>, </a:t>
-            </a:r>
-            <a:r>
-              <a:rPr sz="1800" dirty="0" err="1"/>
-              <a:t>onde</a:t>
-            </a:r>
-            <a:r>
-              <a:rPr sz="1800" dirty="0"/>
-              <a:t> </a:t>
-            </a:r>
-            <a:r>
-              <a:rPr sz="1800" dirty="0" err="1"/>
-              <a:t>pode</a:t>
-            </a:r>
-            <a:r>
-              <a:rPr sz="1800" dirty="0"/>
-              <a:t> </a:t>
-            </a:r>
-            <a:r>
-              <a:rPr sz="1800" dirty="0" err="1"/>
-              <a:t>surgir</a:t>
-            </a:r>
-            <a:r>
-              <a:rPr sz="1800" dirty="0"/>
-              <a:t> </a:t>
-            </a:r>
-            <a:r>
-              <a:rPr sz="1800" dirty="0" err="1"/>
-              <a:t>saturação</a:t>
-            </a:r>
-            <a:r>
-              <a:rPr sz="1800" dirty="0"/>
-              <a:t> de </a:t>
-            </a:r>
-            <a:r>
-              <a:rPr sz="1800" dirty="0" err="1"/>
-              <a:t>metadados</a:t>
-            </a:r>
-            <a:r>
-              <a:rPr lang="en-US" sz="1800" dirty="0"/>
-              <a:t>.</a:t>
-            </a:r>
-            <a:endParaRPr sz="1800" dirty="0"/>
+              <a:rPr lang="pt-BR" sz="1800" dirty="0" err="1">
+                <a:solidFill>
+                  <a:srgbClr val="FF0000"/>
+                </a:solidFill>
+              </a:rPr>
+              <a:t>scaling</a:t>
+            </a:r>
+            <a:r>
+              <a:rPr lang="pt-BR" sz="1800" dirty="0">
+                <a:solidFill>
+                  <a:srgbClr val="FF0000"/>
+                </a:solidFill>
+              </a:rPr>
+              <a:t>, gargalo de computação) e </a:t>
+            </a:r>
+            <a:r>
+              <a:rPr lang="pt-BR" sz="1800" b="1" dirty="0" err="1">
+                <a:solidFill>
+                  <a:srgbClr val="FF0000"/>
+                </a:solidFill>
+              </a:rPr>
+              <a:t>MPI_File_open</a:t>
+            </a:r>
+            <a:r>
+              <a:rPr lang="pt-BR" sz="1800" b="1" dirty="0">
+                <a:solidFill>
+                  <a:srgbClr val="FF0000"/>
+                </a:solidFill>
+              </a:rPr>
+              <a:t>/close </a:t>
+            </a:r>
+            <a:r>
+              <a:rPr lang="pt-BR" sz="1800" dirty="0">
+                <a:solidFill>
+                  <a:srgbClr val="FF0000"/>
+                </a:solidFill>
+              </a:rPr>
+              <a:t>em </a:t>
+            </a:r>
+            <a:r>
+              <a:rPr lang="pt-BR" sz="1800" b="1" dirty="0">
+                <a:solidFill>
+                  <a:srgbClr val="FF0000"/>
+                </a:solidFill>
+              </a:rPr>
+              <a:t>11,6% </a:t>
+            </a:r>
+            <a:r>
+              <a:rPr lang="pt-BR" sz="1800" dirty="0">
+                <a:solidFill>
+                  <a:srgbClr val="FF0000"/>
+                </a:solidFill>
+              </a:rPr>
+              <a:t>do tempo — custo fixo por execução, não por carga</a:t>
+            </a:r>
           </a:p>
           <a:p>
             <a:pPr marL="342900" indent="-342900">
@@ -18157,70 +17846,69 @@
               <a:buChar char="§"/>
             </a:pPr>
             <a:r>
-              <a:rPr sz="1800" dirty="0" err="1"/>
-              <a:t>Estender</a:t>
-            </a:r>
-            <a:r>
-              <a:rPr sz="1800" dirty="0"/>
-              <a:t> a </a:t>
-            </a:r>
-            <a:r>
-              <a:rPr sz="1800" dirty="0" err="1"/>
-              <a:t>arquitetura</a:t>
-            </a:r>
-            <a:r>
-              <a:rPr sz="1800" dirty="0"/>
-              <a:t> à </a:t>
-            </a:r>
-            <a:r>
-              <a:rPr sz="1800" dirty="0" err="1"/>
-              <a:t>fase</a:t>
-            </a:r>
-            <a:r>
-              <a:rPr lang="en-US" sz="1800" dirty="0"/>
-              <a:t> de </a:t>
-            </a:r>
-            <a:r>
-              <a:rPr lang="en-US" sz="1800" dirty="0" err="1"/>
-              <a:t>politica</a:t>
-            </a:r>
-            <a:r>
-              <a:rPr lang="en-US" sz="1800" dirty="0"/>
-              <a:t> </a:t>
-            </a:r>
-            <a:r>
-              <a:rPr sz="1800" dirty="0"/>
-              <a:t>e </a:t>
-            </a:r>
-            <a:r>
-              <a:rPr sz="1800" dirty="0" err="1"/>
-              <a:t>diagnosticar</a:t>
-            </a:r>
-            <a:r>
-              <a:rPr sz="1800" dirty="0"/>
-              <a:t> o </a:t>
-            </a:r>
-            <a:r>
-              <a:rPr sz="1800" dirty="0" err="1"/>
-              <a:t>gargalo</a:t>
-            </a:r>
-            <a:r>
-              <a:rPr sz="1800" dirty="0"/>
-              <a:t> </a:t>
-            </a:r>
-            <a:r>
-              <a:rPr sz="1800" dirty="0" err="1"/>
-              <a:t>computacional</a:t>
-            </a:r>
-            <a:r>
-              <a:rPr sz="1800" dirty="0"/>
-              <a:t> do regime de strong scaling</a:t>
-            </a:r>
-            <a:r>
-              <a:rPr lang="en-US" sz="1800" dirty="0"/>
-              <a:t>.</a:t>
-            </a:r>
-            <a:endParaRPr sz="1800" dirty="0"/>
+              <a:rPr sz="1800" dirty="0" err="1">
+                <a:solidFill>
+                  <a:srgbClr val="FF0000"/>
+                </a:solidFill>
+              </a:rPr>
+              <a:t>Diagnóstico</a:t>
+            </a:r>
+            <a:r>
+              <a:rPr sz="1800" dirty="0">
+                <a:solidFill>
+                  <a:srgbClr val="FF0000"/>
+                </a:solidFill>
+              </a:rPr>
+              <a:t>: o escritor único inverte a escalabilidade — na AWS a banda percebida cai de </a:t>
+            </a:r>
+            <a:r>
+              <a:rPr sz="1800" b="1" dirty="0">
+                <a:solidFill>
+                  <a:srgbClr val="FF0000"/>
+                </a:solidFill>
+              </a:rPr>
+              <a:t>60,5</a:t>
+            </a:r>
+            <a:r>
+              <a:rPr sz="1800" dirty="0">
+                <a:solidFill>
+                  <a:srgbClr val="FF0000"/>
+                </a:solidFill>
+              </a:rPr>
+              <a:t> para </a:t>
+            </a:r>
+            <a:r>
+              <a:rPr sz="1800" b="1" dirty="0">
+                <a:solidFill>
+                  <a:srgbClr val="FF0000"/>
+                </a:solidFill>
+              </a:rPr>
+              <a:t>3,4 Gb/s </a:t>
+            </a:r>
+            <a:r>
+              <a:rPr sz="1800" dirty="0">
+                <a:solidFill>
+                  <a:srgbClr val="FF0000"/>
+                </a:solidFill>
+              </a:rPr>
+              <a:t>entre 2 e 32 nós, e o melhor tempo total ocorre em 16 nós, não </a:t>
+            </a:r>
+            <a:r>
+              <a:rPr sz="1800" dirty="0" err="1">
+                <a:solidFill>
+                  <a:srgbClr val="FF0000"/>
+                </a:solidFill>
+              </a:rPr>
+              <a:t>em</a:t>
+            </a:r>
+            <a:r>
+              <a:rPr sz="1800" dirty="0">
+                <a:solidFill>
+                  <a:srgbClr val="FF0000"/>
+                </a:solidFill>
+              </a:rPr>
+              <a:t> 32</a:t>
+            </a:r>
           </a:p>
         </p:txBody>
       </p:sp>
@@ -18241,7 +17929,7 @@
           <a:p>
             <a:r>
               <a:rPr sz="1400"/>
-              <a:t>Direções de continuidade</a:t>
+              <a:t>O que foi demonstrado</a:t>
             </a:r>
           </a:p>
         </p:txBody>
@@ -18255,6 +17943,662 @@
 </file>
 
 <file path=ppt/slides/slide26.xml><?xml version="1.0" encoding="utf-8"?>
+<p:sld xmlns:a="http://schemas.openxmlformats.org/drawingml/2006/main" xmlns:r="http://schemas.openxmlformats.org/officeDocument/2006/relationships" xmlns:p="http://schemas.openxmlformats.org/presentationml/2006/main">
+  <p:cSld>
+    <p:spTree>
+      <p:nvGrpSpPr>
+        <p:cNvPr id="1" name=""/>
+        <p:cNvGrpSpPr/>
+        <p:nvPr/>
+      </p:nvGrpSpPr>
+      <p:grpSpPr>
+        <a:xfrm>
+          <a:off x="0" y="0"/>
+          <a:ext cx="0" cy="0"/>
+          <a:chOff x="0" y="0"/>
+          <a:chExt cx="0" cy="0"/>
+        </a:xfrm>
+      </p:grpSpPr>
+      <p:sp>
+        <p:nvSpPr>
+          <p:cNvPr id="2" name="Title 1"/>
+          <p:cNvSpPr>
+            <a:spLocks noGrp="1"/>
+          </p:cNvSpPr>
+          <p:nvPr>
+            <p:ph type="title"/>
+          </p:nvPr>
+        </p:nvSpPr>
+        <p:spPr/>
+        <p:txBody>
+          <a:bodyPr/>
+          <a:lstStyle/>
+          <a:p>
+            <a:r>
+              <a:t>Trabalhos futuros</a:t>
+            </a:r>
+          </a:p>
+        </p:txBody>
+      </p:sp>
+      <p:sp>
+        <p:nvSpPr>
+          <p:cNvPr id="3" name="Content Placeholder 2"/>
+          <p:cNvSpPr>
+            <a:spLocks noGrp="1"/>
+          </p:cNvSpPr>
+          <p:nvPr>
+            <p:ph idx="1"/>
+          </p:nvPr>
+        </p:nvSpPr>
+        <p:spPr/>
+        <p:txBody>
+          <a:bodyPr wrap="square"/>
+          <a:lstStyle/>
+          <a:p>
+            <a:pPr marL="342900" indent="-342900">
+              <a:spcBef>
+                <a:spcPts val="600"/>
+              </a:spcBef>
+              <a:buFont typeface="Wingdings" pitchFamily="2" charset="2"/>
+              <a:buChar char="§"/>
+            </a:pPr>
+            <a:r>
+              <a:rPr sz="1800" dirty="0" err="1"/>
+              <a:t>Reorganizar</a:t>
+            </a:r>
+            <a:r>
+              <a:rPr sz="1800" dirty="0"/>
+              <a:t> o </a:t>
+            </a:r>
+            <a:r>
+              <a:rPr sz="1800" dirty="0" err="1"/>
+              <a:t>padrão</a:t>
+            </a:r>
+            <a:r>
+              <a:rPr sz="1800" dirty="0"/>
+              <a:t> dos </a:t>
+            </a:r>
+            <a:r>
+              <a:rPr sz="1800" dirty="0" err="1"/>
+              <a:t>arquivos</a:t>
+            </a:r>
+            <a:r>
+              <a:rPr sz="1800" dirty="0"/>
+              <a:t> </a:t>
+            </a:r>
+            <a:r>
+              <a:rPr sz="1800" dirty="0" err="1"/>
+              <a:t>diários</a:t>
+            </a:r>
+            <a:r>
+              <a:rPr sz="1800" dirty="0"/>
+              <a:t> (13 dos 117 </a:t>
+            </a:r>
+            <a:r>
+              <a:rPr sz="1800" dirty="0" err="1"/>
+              <a:t>arquivos</a:t>
+            </a:r>
+            <a:r>
+              <a:rPr sz="1800" dirty="0"/>
+              <a:t>), </a:t>
+            </a:r>
+            <a:r>
+              <a:rPr sz="1800" dirty="0" err="1"/>
+              <a:t>agrupando</a:t>
+            </a:r>
+            <a:r>
+              <a:rPr sz="1800" dirty="0"/>
+              <a:t> o </a:t>
+            </a:r>
+            <a:r>
+              <a:rPr sz="1800" dirty="0" err="1"/>
+              <a:t>mês</a:t>
+            </a:r>
+            <a:r>
+              <a:rPr sz="1800" dirty="0"/>
+              <a:t> </a:t>
+            </a:r>
+            <a:r>
+              <a:rPr sz="1800" dirty="0" err="1"/>
+              <a:t>em</a:t>
+            </a:r>
+            <a:r>
+              <a:rPr sz="1800" dirty="0"/>
+              <a:t> </a:t>
+            </a:r>
+            <a:r>
+              <a:rPr sz="1800" dirty="0" err="1"/>
+              <a:t>uma</a:t>
+            </a:r>
+            <a:r>
+              <a:rPr sz="1800" dirty="0"/>
+              <a:t> </a:t>
+            </a:r>
+            <a:r>
+              <a:rPr sz="1800" dirty="0" err="1"/>
+              <a:t>escrita</a:t>
+            </a:r>
+            <a:r>
+              <a:rPr sz="1800" dirty="0"/>
+              <a:t> </a:t>
+            </a:r>
+            <a:r>
+              <a:rPr sz="1800" dirty="0" err="1"/>
+              <a:t>por</a:t>
+            </a:r>
+            <a:r>
+              <a:rPr sz="1800" dirty="0"/>
+              <a:t> (</a:t>
+            </a:r>
+            <a:r>
+              <a:rPr sz="1800" dirty="0" err="1"/>
+              <a:t>estágio</a:t>
+            </a:r>
+            <a:r>
+              <a:rPr sz="1800" dirty="0"/>
+              <a:t>, </a:t>
+            </a:r>
+            <a:r>
+              <a:rPr sz="1800" dirty="0" err="1"/>
+              <a:t>cenário</a:t>
+            </a:r>
+            <a:r>
+              <a:rPr sz="1800" dirty="0"/>
+              <a:t>) — </a:t>
+            </a:r>
+            <a:r>
+              <a:rPr sz="1800" dirty="0" err="1"/>
+              <a:t>elimina</a:t>
+            </a:r>
+            <a:r>
+              <a:rPr sz="1800" dirty="0"/>
+              <a:t> a </a:t>
+            </a:r>
+            <a:r>
+              <a:rPr sz="1800" dirty="0" err="1"/>
+              <a:t>parcela</a:t>
+            </a:r>
+            <a:r>
+              <a:rPr sz="1800" dirty="0"/>
+              <a:t> residual de </a:t>
+            </a:r>
+            <a:r>
+              <a:rPr sz="1800" dirty="0" err="1"/>
+              <a:t>requisições</a:t>
+            </a:r>
+            <a:r>
+              <a:rPr sz="1800" dirty="0"/>
+              <a:t> </a:t>
+            </a:r>
+            <a:r>
+              <a:rPr sz="1800" dirty="0" err="1"/>
+              <a:t>pequenas</a:t>
+            </a:r>
+            <a:r>
+              <a:rPr lang="en-US" sz="1800" dirty="0"/>
+              <a:t>.</a:t>
+            </a:r>
+            <a:endParaRPr sz="1800" dirty="0"/>
+          </a:p>
+          <a:p>
+            <a:pPr marL="342900" indent="-342900">
+              <a:spcBef>
+                <a:spcPts val="600"/>
+              </a:spcBef>
+              <a:buFont typeface="Wingdings" pitchFamily="2" charset="2"/>
+              <a:buChar char="§"/>
+            </a:pPr>
+            <a:r>
+              <a:rPr sz="1800" dirty="0" err="1"/>
+              <a:t>Bufferização</a:t>
+            </a:r>
+            <a:r>
+              <a:rPr sz="1800" dirty="0"/>
+              <a:t> </a:t>
+            </a:r>
+            <a:r>
+              <a:rPr sz="1800" dirty="0" err="1"/>
+              <a:t>alinhada</a:t>
+            </a:r>
+            <a:r>
+              <a:rPr sz="1800" dirty="0"/>
+              <a:t> </a:t>
+            </a:r>
+            <a:r>
+              <a:rPr sz="1800" dirty="0" err="1"/>
+              <a:t>às</a:t>
+            </a:r>
+            <a:r>
+              <a:rPr sz="1800" dirty="0"/>
+              <a:t> stripes do </a:t>
+            </a:r>
+            <a:r>
+              <a:rPr sz="1800" dirty="0" err="1"/>
+              <a:t>Lustre</a:t>
+            </a:r>
+            <a:r>
+              <a:rPr sz="1800" dirty="0"/>
+              <a:t>, para </a:t>
+            </a:r>
+            <a:r>
+              <a:rPr sz="1800" dirty="0" err="1"/>
+              <a:t>que</a:t>
+            </a:r>
+            <a:r>
+              <a:rPr sz="1800" dirty="0"/>
+              <a:t> </a:t>
+            </a:r>
+            <a:r>
+              <a:rPr sz="1800" dirty="0" err="1"/>
+              <a:t>cada</a:t>
+            </a:r>
+            <a:r>
+              <a:rPr sz="1800" dirty="0"/>
+              <a:t> </a:t>
+            </a:r>
+            <a:r>
+              <a:rPr sz="1800" dirty="0" err="1"/>
+              <a:t>submissão</a:t>
+            </a:r>
+            <a:r>
+              <a:rPr sz="1800" dirty="0"/>
+              <a:t> MPI-IO </a:t>
+            </a:r>
+            <a:r>
+              <a:rPr sz="1800" dirty="0" err="1"/>
+              <a:t>incida</a:t>
+            </a:r>
+            <a:r>
+              <a:rPr sz="1800" dirty="0"/>
+              <a:t> </a:t>
+            </a:r>
+            <a:r>
+              <a:rPr sz="1800" dirty="0" err="1"/>
+              <a:t>sobre</a:t>
+            </a:r>
+            <a:r>
+              <a:rPr sz="1800" dirty="0"/>
+              <a:t> </a:t>
+            </a:r>
+            <a:r>
+              <a:rPr sz="1800" dirty="0" err="1"/>
+              <a:t>exatamente</a:t>
+            </a:r>
+            <a:r>
+              <a:rPr sz="1800" dirty="0"/>
+              <a:t> um OST (Liao et al., 2007)</a:t>
+            </a:r>
+            <a:r>
+              <a:rPr lang="en-US" sz="1800" dirty="0"/>
+              <a:t>.</a:t>
+            </a:r>
+            <a:endParaRPr sz="1800" dirty="0"/>
+          </a:p>
+          <a:p>
+            <a:pPr marL="342900" indent="-342900">
+              <a:spcBef>
+                <a:spcPts val="600"/>
+              </a:spcBef>
+              <a:buFont typeface="Wingdings" pitchFamily="2" charset="2"/>
+              <a:buChar char="§"/>
+            </a:pPr>
+            <a:r>
+              <a:rPr sz="1800" dirty="0" err="1"/>
+              <a:t>Sensibilidade</a:t>
+            </a:r>
+            <a:r>
+              <a:rPr sz="1800" dirty="0"/>
+              <a:t> </a:t>
+            </a:r>
+            <a:r>
+              <a:rPr sz="1800" dirty="0" err="1"/>
+              <a:t>aos</a:t>
+            </a:r>
+            <a:r>
+              <a:rPr sz="1800" dirty="0"/>
+              <a:t> </a:t>
+            </a:r>
+            <a:r>
+              <a:rPr sz="1800" dirty="0" err="1"/>
+              <a:t>parâmetros</a:t>
+            </a:r>
+            <a:r>
+              <a:rPr sz="1800" dirty="0"/>
+              <a:t> de </a:t>
+            </a:r>
+            <a:r>
+              <a:rPr sz="1800" dirty="0" err="1"/>
+              <a:t>projeto</a:t>
+            </a:r>
+            <a:r>
+              <a:rPr sz="1800" dirty="0"/>
+              <a:t>: </a:t>
+            </a:r>
+            <a:r>
+              <a:rPr sz="1800" dirty="0" err="1"/>
+              <a:t>stripe_size</a:t>
+            </a:r>
+            <a:r>
+              <a:rPr sz="1800" dirty="0"/>
+              <a:t> do </a:t>
+            </a:r>
+            <a:r>
+              <a:rPr sz="1800" dirty="0" err="1"/>
+              <a:t>Lustre</a:t>
+            </a:r>
+            <a:r>
+              <a:rPr lang="en-US" sz="1800" dirty="0"/>
+              <a:t>.</a:t>
+            </a:r>
+            <a:endParaRPr sz="1800" dirty="0"/>
+          </a:p>
+          <a:p>
+            <a:pPr marL="342900" indent="-342900">
+              <a:spcBef>
+                <a:spcPts val="600"/>
+              </a:spcBef>
+              <a:buFont typeface="Wingdings" pitchFamily="2" charset="2"/>
+              <a:buChar char="§"/>
+            </a:pPr>
+            <a:r>
+              <a:rPr sz="1800" dirty="0" err="1"/>
+              <a:t>Escrita</a:t>
+            </a:r>
+            <a:r>
+              <a:rPr sz="1800" dirty="0"/>
+              <a:t> </a:t>
+            </a:r>
+            <a:r>
+              <a:rPr sz="1800" dirty="0" err="1"/>
+              <a:t>coletiva</a:t>
+            </a:r>
+            <a:r>
+              <a:rPr sz="1800" dirty="0"/>
+              <a:t> (two-phase I/O): </a:t>
+            </a:r>
+            <a:r>
+              <a:rPr sz="1800" dirty="0" err="1"/>
+              <a:t>tentativas</a:t>
+            </a:r>
+            <a:r>
+              <a:rPr sz="1800" dirty="0"/>
+              <a:t> </a:t>
+            </a:r>
+            <a:r>
+              <a:rPr sz="1800" dirty="0" err="1"/>
+              <a:t>preliminares</a:t>
+            </a:r>
+            <a:r>
+              <a:rPr sz="1800" dirty="0"/>
+              <a:t> </a:t>
+            </a:r>
+            <a:r>
+              <a:rPr sz="1800" dirty="0" err="1"/>
+              <a:t>resultaram</a:t>
+            </a:r>
+            <a:r>
+              <a:rPr sz="1800" dirty="0"/>
+              <a:t> </a:t>
+            </a:r>
+            <a:r>
+              <a:rPr sz="1800" dirty="0" err="1"/>
+              <a:t>em</a:t>
+            </a:r>
+            <a:r>
+              <a:rPr sz="1800" dirty="0"/>
+              <a:t> deadlock com o bag-of-tasks — </a:t>
+            </a:r>
+            <a:r>
+              <a:rPr sz="1800" dirty="0" err="1"/>
+              <a:t>exige</a:t>
+            </a:r>
+            <a:r>
+              <a:rPr sz="1800" dirty="0"/>
+              <a:t> </a:t>
+            </a:r>
+            <a:r>
+              <a:rPr sz="1800" dirty="0" err="1"/>
+              <a:t>reconciliar</a:t>
+            </a:r>
+            <a:r>
+              <a:rPr sz="1800" dirty="0"/>
+              <a:t> </a:t>
+            </a:r>
+            <a:r>
+              <a:rPr sz="1800" dirty="0" err="1"/>
+              <a:t>distribuição</a:t>
+            </a:r>
+            <a:r>
+              <a:rPr sz="1800" dirty="0"/>
+              <a:t> </a:t>
+            </a:r>
+            <a:r>
+              <a:rPr sz="1800" dirty="0" err="1"/>
+              <a:t>dinâmica</a:t>
+            </a:r>
+            <a:r>
+              <a:rPr sz="1800" dirty="0"/>
+              <a:t> e </a:t>
+            </a:r>
+            <a:r>
+              <a:rPr sz="1800" dirty="0" err="1"/>
+              <a:t>semântica</a:t>
+            </a:r>
+            <a:r>
+              <a:rPr sz="1800" dirty="0"/>
+              <a:t> </a:t>
+            </a:r>
+            <a:r>
+              <a:rPr sz="1800" dirty="0" err="1"/>
+              <a:t>coletiva</a:t>
+            </a:r>
+            <a:r>
+              <a:rPr lang="en-US" sz="1800" dirty="0"/>
+              <a:t>.</a:t>
+            </a:r>
+            <a:endParaRPr sz="1800" dirty="0"/>
+          </a:p>
+          <a:p>
+            <a:pPr marL="342900" indent="-342900">
+              <a:spcBef>
+                <a:spcPts val="600"/>
+              </a:spcBef>
+              <a:buFont typeface="Wingdings" pitchFamily="2" charset="2"/>
+              <a:buChar char="§"/>
+            </a:pPr>
+            <a:r>
+              <a:rPr sz="1800" dirty="0"/>
+              <a:t>Redes de </a:t>
+            </a:r>
+            <a:r>
+              <a:rPr sz="1800" dirty="0" err="1"/>
+              <a:t>baixa</a:t>
+            </a:r>
+            <a:r>
+              <a:rPr sz="1800" dirty="0"/>
+              <a:t> </a:t>
+            </a:r>
+            <a:r>
+              <a:rPr sz="1800" dirty="0" err="1"/>
+              <a:t>latência</a:t>
+            </a:r>
+            <a:r>
+              <a:rPr sz="1800" dirty="0"/>
+              <a:t> (InfiniBand HDR/NDR, AWS EFA) e </a:t>
+            </a:r>
+            <a:r>
+              <a:rPr sz="1800" dirty="0" err="1"/>
+              <a:t>escalas</a:t>
+            </a:r>
+            <a:r>
+              <a:rPr sz="1800" dirty="0"/>
+              <a:t> </a:t>
+            </a:r>
+            <a:r>
+              <a:rPr sz="1800" dirty="0" err="1"/>
+              <a:t>acima</a:t>
+            </a:r>
+            <a:r>
+              <a:rPr sz="1800" dirty="0"/>
+              <a:t> de 32 </a:t>
+            </a:r>
+            <a:r>
+              <a:rPr sz="1800" dirty="0" err="1"/>
+              <a:t>nós</a:t>
+            </a:r>
+            <a:r>
+              <a:rPr sz="1800" dirty="0"/>
+              <a:t>, </a:t>
+            </a:r>
+            <a:r>
+              <a:rPr sz="1800" dirty="0" err="1"/>
+              <a:t>onde</a:t>
+            </a:r>
+            <a:r>
+              <a:rPr sz="1800" dirty="0"/>
+              <a:t> </a:t>
+            </a:r>
+            <a:r>
+              <a:rPr sz="1800" dirty="0" err="1"/>
+              <a:t>pode</a:t>
+            </a:r>
+            <a:r>
+              <a:rPr sz="1800" dirty="0"/>
+              <a:t> </a:t>
+            </a:r>
+            <a:r>
+              <a:rPr sz="1800" dirty="0" err="1"/>
+              <a:t>surgir</a:t>
+            </a:r>
+            <a:r>
+              <a:rPr sz="1800" dirty="0"/>
+              <a:t> </a:t>
+            </a:r>
+            <a:r>
+              <a:rPr sz="1800" dirty="0" err="1"/>
+              <a:t>saturação</a:t>
+            </a:r>
+            <a:r>
+              <a:rPr sz="1800" dirty="0"/>
+              <a:t> de </a:t>
+            </a:r>
+            <a:r>
+              <a:rPr sz="1800" dirty="0" err="1"/>
+              <a:t>metadados</a:t>
+            </a:r>
+            <a:r>
+              <a:rPr lang="en-US" sz="1800" dirty="0"/>
+              <a:t>.</a:t>
+            </a:r>
+            <a:endParaRPr sz="1800" dirty="0"/>
+          </a:p>
+          <a:p>
+            <a:pPr marL="342900" indent="-342900">
+              <a:spcBef>
+                <a:spcPts val="600"/>
+              </a:spcBef>
+              <a:buFont typeface="Wingdings" pitchFamily="2" charset="2"/>
+              <a:buChar char="§"/>
+            </a:pPr>
+            <a:r>
+              <a:rPr sz="1800" dirty="0" err="1"/>
+              <a:t>Estender</a:t>
+            </a:r>
+            <a:r>
+              <a:rPr sz="1800" dirty="0"/>
+              <a:t> a </a:t>
+            </a:r>
+            <a:r>
+              <a:rPr sz="1800" dirty="0" err="1"/>
+              <a:t>arquitetura</a:t>
+            </a:r>
+            <a:r>
+              <a:rPr sz="1800" dirty="0"/>
+              <a:t> à </a:t>
+            </a:r>
+            <a:r>
+              <a:rPr sz="1800" dirty="0" err="1"/>
+              <a:t>fase</a:t>
+            </a:r>
+            <a:r>
+              <a:rPr lang="en-US" sz="1800" dirty="0"/>
+              <a:t> de </a:t>
+            </a:r>
+            <a:r>
+              <a:rPr lang="en-US" sz="1800" dirty="0" err="1"/>
+              <a:t>politica</a:t>
+            </a:r>
+            <a:r>
+              <a:rPr lang="en-US" sz="1800" dirty="0"/>
+              <a:t> </a:t>
+            </a:r>
+            <a:r>
+              <a:rPr sz="1800" dirty="0"/>
+              <a:t>e </a:t>
+            </a:r>
+            <a:r>
+              <a:rPr sz="1800" dirty="0" err="1"/>
+              <a:t>diagnosticar</a:t>
+            </a:r>
+            <a:r>
+              <a:rPr sz="1800" dirty="0"/>
+              <a:t> o </a:t>
+            </a:r>
+            <a:r>
+              <a:rPr sz="1800" dirty="0" err="1"/>
+              <a:t>gargalo</a:t>
+            </a:r>
+            <a:r>
+              <a:rPr sz="1800" dirty="0"/>
+              <a:t> </a:t>
+            </a:r>
+            <a:r>
+              <a:rPr sz="1800" dirty="0" err="1"/>
+              <a:t>computacional</a:t>
+            </a:r>
+            <a:r>
+              <a:rPr sz="1800" dirty="0"/>
+              <a:t> do regime de strong scaling</a:t>
+            </a:r>
+            <a:r>
+              <a:rPr lang="en-US" sz="1800" dirty="0"/>
+              <a:t>.</a:t>
+            </a:r>
+            <a:endParaRPr sz="1800" dirty="0"/>
+          </a:p>
+        </p:txBody>
+      </p:sp>
+      <p:sp>
+        <p:nvSpPr>
+          <p:cNvPr id="4" name="Text Placeholder 3"/>
+          <p:cNvSpPr>
+            <a:spLocks noGrp="1"/>
+          </p:cNvSpPr>
+          <p:nvPr>
+            <p:ph type="body" sz="quarter" idx="13"/>
+          </p:nvPr>
+        </p:nvSpPr>
+        <p:spPr/>
+        <p:txBody>
+          <a:bodyPr/>
+          <a:lstStyle/>
+          <a:p>
+            <a:r>
+              <a:rPr sz="1400"/>
+              <a:t>Direções de continuidade</a:t>
+            </a:r>
+          </a:p>
+        </p:txBody>
+      </p:sp>
+    </p:spTree>
+  </p:cSld>
+  <p:clrMapOvr>
+    <a:masterClrMapping/>
+  </p:clrMapOvr>
+</p:sld>
+</file>
+
+<file path=ppt/slides/slide27.xml><?xml version="1.0" encoding="utf-8"?>
 <p:sld xmlns:a="http://schemas.openxmlformats.org/drawingml/2006/main" xmlns:r="http://schemas.openxmlformats.org/officeDocument/2006/relationships" xmlns:p="http://schemas.openxmlformats.org/presentationml/2006/main">
   <p:cSld>
     <p:spTree>
@@ -18379,7 +18723,7 @@
 </p:sld>
 </file>
 
-<file path=ppt/slides/slide27.xml><?xml version="1.0" encoding="utf-8"?>
+<file path=ppt/slides/slide28.xml><?xml version="1.0" encoding="utf-8"?>
 <p:sld xmlns:a="http://schemas.openxmlformats.org/drawingml/2006/main" xmlns:r="http://schemas.openxmlformats.org/officeDocument/2006/relationships" xmlns:p="http://schemas.openxmlformats.org/presentationml/2006/main">
   <p:cSld>
     <p:spTree>
@@ -18471,7 +18815,7 @@
 </p:sld>
 </file>
 
-<file path=ppt/slides/slide28.xml><?xml version="1.0" encoding="utf-8"?>
+<file path=ppt/slides/slide29.xml><?xml version="1.0" encoding="utf-8"?>
 <p:sld xmlns:a="http://schemas.openxmlformats.org/drawingml/2006/main" xmlns:r="http://schemas.openxmlformats.org/officeDocument/2006/relationships" xmlns:p="http://schemas.openxmlformats.org/presentationml/2006/main">
   <p:cSld>
     <p:spTree>
@@ -18563,7 +18907,544 @@
 </p:sld>
 </file>
 
-<file path=ppt/slides/slide29.xml><?xml version="1.0" encoding="utf-8"?>
+<file path=ppt/slides/slide3.xml><?xml version="1.0" encoding="utf-8"?>
+<p:sld xmlns:a="http://schemas.openxmlformats.org/drawingml/2006/main" xmlns:r="http://schemas.openxmlformats.org/officeDocument/2006/relationships" xmlns:p="http://schemas.openxmlformats.org/presentationml/2006/main">
+  <p:cSld>
+    <p:spTree>
+      <p:nvGrpSpPr>
+        <p:cNvPr id="1" name=""/>
+        <p:cNvGrpSpPr/>
+        <p:nvPr/>
+      </p:nvGrpSpPr>
+      <p:grpSpPr>
+        <a:xfrm>
+          <a:off x="0" y="0"/>
+          <a:ext cx="0" cy="0"/>
+          <a:chOff x="0" y="0"/>
+          <a:chExt cx="0" cy="0"/>
+        </a:xfrm>
+      </p:grpSpPr>
+      <p:sp>
+        <p:nvSpPr>
+          <p:cNvPr id="2" name="Title 1"/>
+          <p:cNvSpPr>
+            <a:spLocks noGrp="1"/>
+          </p:cNvSpPr>
+          <p:nvPr>
+            <p:ph type="title"/>
+          </p:nvPr>
+        </p:nvSpPr>
+        <p:spPr/>
+        <p:txBody>
+          <a:bodyPr/>
+          <a:lstStyle/>
+          <a:p>
+            <a:r>
+              <a:t>Objetivo e Contribuições</a:t>
+            </a:r>
+          </a:p>
+        </p:txBody>
+      </p:sp>
+      <p:sp>
+        <p:nvSpPr>
+          <p:cNvPr id="3" name="TextBox 2"/>
+          <p:cNvSpPr txBox="1"/>
+          <p:nvPr/>
+        </p:nvSpPr>
+        <p:spPr>
+          <a:xfrm>
+            <a:off x="199751" y="1211601"/>
+            <a:ext cx="11755539" cy="1180000"/>
+          </a:xfrm>
+          <a:prstGeom prst="rect">
+            <a:avLst/>
+          </a:prstGeom>
+          <a:noFill/>
+        </p:spPr>
+        <p:txBody>
+          <a:bodyPr wrap="square">
+            <a:spAutoFit/>
+          </a:bodyPr>
+          <a:lstStyle/>
+          <a:p>
+            <a:pPr marL="0" indent="0">
+              <a:buNone/>
+            </a:pPr>
+            <a:r>
+              <a:rPr sz="1500" b="1">
+                <a:solidFill>
+                  <a:srgbClr val="2F5893"/>
+                </a:solidFill>
+              </a:rPr>
+              <a:t>Objetivo</a:t>
+            </a:r>
+          </a:p>
+          <a:p>
+            <a:pPr marL="0" indent="0">
+              <a:buNone/>
+            </a:pPr>
+            <a:r>
+              <a:rPr sz="1300"/>
+              <a:t>Propor e avaliar uma arquitetura paralela de E/S para o SDDP, baseada em escritas independentes com MPI-IO sobre Lustre, substituindo a estratégia atual com processo escritor único.</a:t>
+            </a:r>
+          </a:p>
+          <a:p>
+            <a:pPr marL="0" indent="0">
+              <a:spcBef>
+                <a:spcPts val="400"/>
+              </a:spcBef>
+              <a:buNone/>
+            </a:pPr>
+            <a:r>
+              <a:rPr sz="1300"/>
+              <a:t>O foco da pesquisa é exclusivamente a </a:t>
+            </a:r>
+            <a:r>
+              <a:rPr sz="1300" b="1">
+                <a:solidFill>
+                  <a:srgbClr val="2F5893"/>
+                </a:solidFill>
+              </a:rPr>
+              <a:t>escrita dos resultados da simulação final</a:t>
+            </a:r>
+            <a:r>
+              <a:rPr sz="1300"/>
+              <a:t> — etapa posterior à convergência da política, em que se acumula o maior volume de dados produzido pela aplicação.</a:t>
+            </a:r>
+          </a:p>
+        </p:txBody>
+      </p:sp>
+      <p:sp>
+        <p:nvSpPr>
+          <p:cNvPr id="4" name="TextBox 3"/>
+          <p:cNvSpPr txBox="1"/>
+          <p:nvPr/>
+        </p:nvSpPr>
+        <p:spPr>
+          <a:xfrm>
+            <a:off x="199751" y="2451601"/>
+            <a:ext cx="5583881" cy="2056973"/>
+          </a:xfrm>
+          <a:prstGeom prst="rect">
+            <a:avLst/>
+          </a:prstGeom>
+          <a:noFill/>
+        </p:spPr>
+        <p:txBody>
+          <a:bodyPr wrap="square">
+            <a:spAutoFit/>
+          </a:bodyPr>
+          <a:lstStyle/>
+          <a:p>
+            <a:pPr marL="0" indent="0">
+              <a:buNone/>
+            </a:pPr>
+            <a:r>
+              <a:rPr sz="1500" b="1" dirty="0">
+                <a:solidFill>
+                  <a:srgbClr val="877553"/>
+                </a:solidFill>
+              </a:rPr>
+              <a:t>Fora do </a:t>
+            </a:r>
+            <a:r>
+              <a:rPr sz="1500" b="1" dirty="0" err="1">
+                <a:solidFill>
+                  <a:srgbClr val="877553"/>
+                </a:solidFill>
+              </a:rPr>
+              <a:t>escopo</a:t>
+            </a:r>
+            <a:endParaRPr sz="1500" b="1" dirty="0">
+              <a:solidFill>
+                <a:srgbClr val="877553"/>
+              </a:solidFill>
+            </a:endParaRPr>
+          </a:p>
+          <a:p>
+            <a:pPr marL="285750" indent="-285750">
+              <a:spcBef>
+                <a:spcPts val="500"/>
+              </a:spcBef>
+              <a:buFont typeface="Wingdings" pitchFamily="2" charset="2"/>
+              <a:buChar char="§"/>
+            </a:pPr>
+            <a:r>
+              <a:rPr sz="1200" dirty="0"/>
+              <a:t>A </a:t>
+            </a:r>
+            <a:r>
+              <a:rPr sz="1200" dirty="0" err="1"/>
+              <a:t>fase</a:t>
+            </a:r>
+            <a:r>
+              <a:rPr sz="1200" dirty="0"/>
+              <a:t> </a:t>
+            </a:r>
+            <a:r>
+              <a:rPr lang="en-US" sz="1200" dirty="0"/>
+              <a:t>de </a:t>
+            </a:r>
+            <a:r>
+              <a:rPr lang="en-US" sz="1200" dirty="0" err="1"/>
+              <a:t>politica</a:t>
+            </a:r>
+            <a:r>
+              <a:rPr lang="en-US" sz="1200"/>
+              <a:t>.</a:t>
+            </a:r>
+            <a:endParaRPr sz="1200" dirty="0"/>
+          </a:p>
+          <a:p>
+            <a:pPr marL="285750" indent="-285750">
+              <a:spcBef>
+                <a:spcPts val="500"/>
+              </a:spcBef>
+              <a:buFont typeface="Wingdings" pitchFamily="2" charset="2"/>
+              <a:buChar char="§"/>
+            </a:pPr>
+            <a:r>
+              <a:rPr sz="1200" dirty="0" err="1"/>
+              <a:t>Otimizações</a:t>
+            </a:r>
+            <a:r>
+              <a:rPr sz="1200" dirty="0"/>
+              <a:t> da </a:t>
+            </a:r>
+            <a:r>
+              <a:rPr sz="1200" dirty="0" err="1"/>
+              <a:t>computação</a:t>
+            </a:r>
+            <a:r>
+              <a:rPr sz="1200" dirty="0"/>
+              <a:t> </a:t>
+            </a:r>
+            <a:r>
+              <a:rPr sz="1200" dirty="0" err="1"/>
+              <a:t>executada</a:t>
+            </a:r>
+            <a:r>
+              <a:rPr sz="1200" dirty="0"/>
+              <a:t> </a:t>
+            </a:r>
+            <a:r>
+              <a:rPr sz="1200" dirty="0" err="1"/>
+              <a:t>na</a:t>
+            </a:r>
+            <a:r>
+              <a:rPr sz="1200" dirty="0"/>
+              <a:t> </a:t>
+            </a:r>
+            <a:r>
+              <a:rPr sz="1200" dirty="0" err="1"/>
+              <a:t>simulação</a:t>
+            </a:r>
+            <a:r>
+              <a:rPr sz="1200" dirty="0"/>
+              <a:t> final: o tempo de </a:t>
+            </a:r>
+            <a:r>
+              <a:rPr sz="1200" dirty="0" err="1"/>
+              <a:t>resolução</a:t>
+            </a:r>
+            <a:r>
+              <a:rPr sz="1200" dirty="0"/>
+              <a:t> de </a:t>
+            </a:r>
+            <a:r>
+              <a:rPr sz="1200" dirty="0" err="1"/>
+              <a:t>cada</a:t>
+            </a:r>
+            <a:r>
+              <a:rPr sz="1200" dirty="0"/>
+              <a:t> </a:t>
+            </a:r>
+            <a:r>
+              <a:rPr sz="1200" dirty="0" err="1"/>
+              <a:t>cenário</a:t>
+            </a:r>
+            <a:r>
+              <a:rPr sz="1200" dirty="0"/>
+              <a:t> é </a:t>
+            </a:r>
+            <a:r>
+              <a:rPr sz="1200" dirty="0" err="1"/>
+              <a:t>tratado</a:t>
+            </a:r>
+            <a:r>
+              <a:rPr sz="1200" dirty="0"/>
+              <a:t> </a:t>
+            </a:r>
+            <a:r>
+              <a:rPr sz="1200" dirty="0" err="1"/>
+              <a:t>como</a:t>
+            </a:r>
+            <a:r>
+              <a:rPr sz="1200" dirty="0"/>
+              <a:t> dado, e </a:t>
+            </a:r>
+            <a:r>
+              <a:rPr sz="1200" dirty="0" err="1"/>
+              <a:t>apenas</a:t>
+            </a:r>
+            <a:r>
+              <a:rPr sz="1200" dirty="0"/>
+              <a:t> a </a:t>
+            </a:r>
+            <a:r>
+              <a:rPr sz="1200" dirty="0" err="1"/>
+              <a:t>escrita</a:t>
+            </a:r>
+            <a:r>
+              <a:rPr sz="1200" dirty="0"/>
+              <a:t> dos </a:t>
+            </a:r>
+            <a:r>
+              <a:rPr sz="1200" dirty="0" err="1"/>
+              <a:t>resultados</a:t>
+            </a:r>
+            <a:r>
+              <a:rPr sz="1200" dirty="0"/>
+              <a:t> é </a:t>
+            </a:r>
+            <a:r>
+              <a:rPr sz="1200" dirty="0" err="1"/>
+              <a:t>objeto</a:t>
+            </a:r>
+            <a:r>
+              <a:rPr sz="1200" dirty="0"/>
+              <a:t> do </a:t>
+            </a:r>
+            <a:r>
+              <a:rPr sz="1200" dirty="0" err="1"/>
+              <a:t>trabalho</a:t>
+            </a:r>
+            <a:endParaRPr sz="1200" dirty="0"/>
+          </a:p>
+          <a:p>
+            <a:pPr marL="285750" indent="-285750">
+              <a:spcBef>
+                <a:spcPts val="500"/>
+              </a:spcBef>
+              <a:buFont typeface="Wingdings" pitchFamily="2" charset="2"/>
+              <a:buChar char="§"/>
+            </a:pPr>
+            <a:r>
+              <a:rPr sz="1200" dirty="0"/>
+              <a:t>A </a:t>
+            </a:r>
+            <a:r>
+              <a:rPr sz="1200" dirty="0" err="1"/>
+              <a:t>paralelização</a:t>
+            </a:r>
+            <a:r>
+              <a:rPr sz="1200" dirty="0"/>
+              <a:t> das </a:t>
+            </a:r>
+            <a:r>
+              <a:rPr sz="1200" dirty="0" err="1"/>
+              <a:t>leituras</a:t>
+            </a:r>
+            <a:r>
+              <a:rPr sz="1200" dirty="0"/>
+              <a:t> dos dados de entrada, </a:t>
+            </a:r>
+            <a:r>
+              <a:rPr sz="1200" dirty="0" err="1"/>
+              <a:t>cujo</a:t>
+            </a:r>
+            <a:r>
+              <a:rPr sz="1200" dirty="0"/>
+              <a:t> volume é </a:t>
+            </a:r>
+            <a:r>
+              <a:rPr sz="1200" dirty="0" err="1"/>
+              <a:t>muito</a:t>
+            </a:r>
+            <a:r>
+              <a:rPr sz="1200" dirty="0"/>
+              <a:t> inferior </a:t>
+            </a:r>
+            <a:r>
+              <a:rPr sz="1200" dirty="0" err="1"/>
+              <a:t>ao</a:t>
+            </a:r>
+            <a:r>
+              <a:rPr sz="1200" dirty="0"/>
+              <a:t> da </a:t>
+            </a:r>
+            <a:r>
+              <a:rPr sz="1200" dirty="0" err="1"/>
+              <a:t>escrita</a:t>
+            </a:r>
+            <a:endParaRPr sz="1200" dirty="0"/>
+          </a:p>
+          <a:p>
+            <a:pPr marL="285750" indent="-285750">
+              <a:spcBef>
+                <a:spcPts val="500"/>
+              </a:spcBef>
+              <a:buFont typeface="Wingdings" pitchFamily="2" charset="2"/>
+              <a:buChar char="§"/>
+            </a:pPr>
+            <a:r>
+              <a:rPr sz="1200" dirty="0" err="1"/>
+              <a:t>Melhorias</a:t>
+            </a:r>
+            <a:r>
+              <a:rPr sz="1200" dirty="0"/>
+              <a:t> no </a:t>
+            </a:r>
+            <a:r>
+              <a:rPr sz="1200" dirty="0" err="1"/>
+              <a:t>escalonamento</a:t>
+            </a:r>
+            <a:r>
+              <a:rPr sz="1200" dirty="0"/>
+              <a:t> de </a:t>
+            </a:r>
+            <a:r>
+              <a:rPr sz="1200" dirty="0" err="1"/>
+              <a:t>tarefas</a:t>
+            </a:r>
+            <a:r>
+              <a:rPr sz="1200" dirty="0"/>
+              <a:t> entre ranks: </a:t>
+            </a:r>
+            <a:r>
+              <a:rPr sz="1200" dirty="0" err="1"/>
+              <a:t>mantém</a:t>
+            </a:r>
+            <a:r>
+              <a:rPr sz="1200" dirty="0"/>
+              <a:t>-se o bag-of-tasks </a:t>
+            </a:r>
+            <a:r>
+              <a:rPr sz="1200" dirty="0" err="1"/>
+              <a:t>já</a:t>
+            </a:r>
+            <a:r>
+              <a:rPr sz="1200" dirty="0"/>
+              <a:t> </a:t>
+            </a:r>
+            <a:r>
+              <a:rPr sz="1200" dirty="0" err="1"/>
+              <a:t>existente</a:t>
+            </a:r>
+            <a:endParaRPr sz="1200" dirty="0"/>
+          </a:p>
+        </p:txBody>
+      </p:sp>
+      <p:sp>
+        <p:nvSpPr>
+          <p:cNvPr id="5" name="TextBox 4"/>
+          <p:cNvSpPr txBox="1"/>
+          <p:nvPr/>
+        </p:nvSpPr>
+        <p:spPr>
+          <a:xfrm>
+            <a:off x="6371409" y="2451601"/>
+            <a:ext cx="5583881" cy="3844424"/>
+          </a:xfrm>
+          <a:prstGeom prst="rect">
+            <a:avLst/>
+          </a:prstGeom>
+          <a:noFill/>
+        </p:spPr>
+        <p:txBody>
+          <a:bodyPr wrap="square">
+            <a:spAutoFit/>
+          </a:bodyPr>
+          <a:lstStyle/>
+          <a:p>
+            <a:pPr marL="0" indent="0">
+              <a:buNone/>
+            </a:pPr>
+            <a:r>
+              <a:rPr sz="1500" b="1">
+                <a:solidFill>
+                  <a:srgbClr val="2F5893"/>
+                </a:solidFill>
+              </a:rPr>
+              <a:t>Contribuições</a:t>
+            </a:r>
+          </a:p>
+          <a:p>
+            <a:pPr marL="285750" indent="-285750">
+              <a:spcBef>
+                <a:spcPts val="500"/>
+              </a:spcBef>
+              <a:buFont typeface="Wingdings" pitchFamily="2" charset="2"/>
+              <a:buChar char="§"/>
+            </a:pPr>
+            <a:r>
+              <a:rPr sz="1200"/>
+              <a:t>Diagnóstico dos gargalos da arquitetura atual: o processo escritor único e o limite do adaptador de rede do nó</a:t>
+            </a:r>
+          </a:p>
+          <a:p>
+            <a:pPr marL="285750" indent="-285750">
+              <a:spcBef>
+                <a:spcPts val="500"/>
+              </a:spcBef>
+              <a:buFont typeface="Wingdings" pitchFamily="2" charset="2"/>
+              <a:buChar char="§"/>
+            </a:pPr>
+            <a:r>
+              <a:rPr sz="1200"/>
+              <a:t>Arquitetura de E/S paralela com MPI-IO sobre Lustre, com escritas independentes em offsets pré-calculados, preservando o formato dos arquivos</a:t>
+            </a:r>
+          </a:p>
+          <a:p>
+            <a:pPr marL="285750" indent="-285750">
+              <a:spcBef>
+                <a:spcPts val="500"/>
+              </a:spcBef>
+              <a:buFont typeface="Wingdings" pitchFamily="2" charset="2"/>
+              <a:buChar char="§"/>
+            </a:pPr>
+            <a:r>
+              <a:rPr sz="1200"/>
+              <a:t>Instrumentação das duas implementações com métricas equivalentes: computação, coordenação MPI, E/S, bloqueio e banda</a:t>
+            </a:r>
+          </a:p>
+          <a:p>
+            <a:pPr marL="285750" indent="-285750">
+              <a:spcBef>
+                <a:spcPts val="500"/>
+              </a:spcBef>
+              <a:buFont typeface="Wingdings" pitchFamily="2" charset="2"/>
+              <a:buChar char="§"/>
+            </a:pPr>
+            <a:r>
+              <a:rPr sz="1200"/>
+              <a:t>Avaliação experimental em dois ambientes — AWS com FSx for Lustre e SDumont com Lustre compartilhado — de 2 a 32 nós</a:t>
+            </a:r>
+          </a:p>
+          <a:p>
+            <a:pPr marL="285750" indent="-285750">
+              <a:spcBef>
+                <a:spcPts val="500"/>
+              </a:spcBef>
+              <a:buFont typeface="Wingdings" pitchFamily="2" charset="2"/>
+              <a:buChar char="§"/>
+            </a:pPr>
+            <a:r>
+              <a:rPr sz="1200"/>
+              <a:t>Análise da influência do número de OSTs na escalabilidade, com orientações de dimensionamento</a:t>
+            </a:r>
+          </a:p>
+        </p:txBody>
+      </p:sp>
+    </p:spTree>
+  </p:cSld>
+  <p:clrMapOvr>
+    <a:masterClrMapping/>
+  </p:clrMapOvr>
+</p:sld>
+</file>
+
+<file path=ppt/slides/slide30.xml><?xml version="1.0" encoding="utf-8"?>
 <p:sld xmlns:a="http://schemas.openxmlformats.org/drawingml/2006/main" xmlns:r="http://schemas.openxmlformats.org/officeDocument/2006/relationships" xmlns:p="http://schemas.openxmlformats.org/presentationml/2006/main">
   <p:cSld>
     <p:spTree>
@@ -18688,543 +19569,6 @@
 </p:sld>
 </file>
 
-<file path=ppt/slides/slide3.xml><?xml version="1.0" encoding="utf-8"?>
-<p:sld xmlns:a="http://schemas.openxmlformats.org/drawingml/2006/main" xmlns:r="http://schemas.openxmlformats.org/officeDocument/2006/relationships" xmlns:p="http://schemas.openxmlformats.org/presentationml/2006/main">
-  <p:cSld>
-    <p:spTree>
-      <p:nvGrpSpPr>
-        <p:cNvPr id="1" name=""/>
-        <p:cNvGrpSpPr/>
-        <p:nvPr/>
-      </p:nvGrpSpPr>
-      <p:grpSpPr>
-        <a:xfrm>
-          <a:off x="0" y="0"/>
-          <a:ext cx="0" cy="0"/>
-          <a:chOff x="0" y="0"/>
-          <a:chExt cx="0" cy="0"/>
-        </a:xfrm>
-      </p:grpSpPr>
-      <p:sp>
-        <p:nvSpPr>
-          <p:cNvPr id="2" name="Title 1"/>
-          <p:cNvSpPr>
-            <a:spLocks noGrp="1"/>
-          </p:cNvSpPr>
-          <p:nvPr>
-            <p:ph type="title"/>
-          </p:nvPr>
-        </p:nvSpPr>
-        <p:spPr/>
-        <p:txBody>
-          <a:bodyPr/>
-          <a:lstStyle/>
-          <a:p>
-            <a:r>
-              <a:t>Objetivo e Contribuições</a:t>
-            </a:r>
-          </a:p>
-        </p:txBody>
-      </p:sp>
-      <p:sp>
-        <p:nvSpPr>
-          <p:cNvPr id="3" name="TextBox 2"/>
-          <p:cNvSpPr txBox="1"/>
-          <p:nvPr/>
-        </p:nvSpPr>
-        <p:spPr>
-          <a:xfrm>
-            <a:off x="199751" y="1211601"/>
-            <a:ext cx="11755539" cy="1180000"/>
-          </a:xfrm>
-          <a:prstGeom prst="rect">
-            <a:avLst/>
-          </a:prstGeom>
-          <a:noFill/>
-        </p:spPr>
-        <p:txBody>
-          <a:bodyPr wrap="square">
-            <a:spAutoFit/>
-          </a:bodyPr>
-          <a:lstStyle/>
-          <a:p>
-            <a:pPr marL="0" indent="0">
-              <a:buNone/>
-            </a:pPr>
-            <a:r>
-              <a:rPr sz="1500" b="1">
-                <a:solidFill>
-                  <a:srgbClr val="2F5893"/>
-                </a:solidFill>
-              </a:rPr>
-              <a:t>Objetivo</a:t>
-            </a:r>
-          </a:p>
-          <a:p>
-            <a:pPr marL="0" indent="0">
-              <a:buNone/>
-            </a:pPr>
-            <a:r>
-              <a:rPr sz="1300"/>
-              <a:t>Propor e avaliar uma arquitetura paralela de E/S para o SDDP, baseada em escritas independentes com MPI-IO sobre Lustre, substituindo a estratégia atual com processo escritor único.</a:t>
-            </a:r>
-          </a:p>
-          <a:p>
-            <a:pPr marL="0" indent="0">
-              <a:spcBef>
-                <a:spcPts val="400"/>
-              </a:spcBef>
-              <a:buNone/>
-            </a:pPr>
-            <a:r>
-              <a:rPr sz="1300"/>
-              <a:t>O foco da pesquisa é exclusivamente a </a:t>
-            </a:r>
-            <a:r>
-              <a:rPr sz="1300" b="1">
-                <a:solidFill>
-                  <a:srgbClr val="2F5893"/>
-                </a:solidFill>
-              </a:rPr>
-              <a:t>escrita dos resultados da simulação final</a:t>
-            </a:r>
-            <a:r>
-              <a:rPr sz="1300"/>
-              <a:t> — etapa posterior à convergência da política, em que se acumula o maior volume de dados produzido pela aplicação.</a:t>
-            </a:r>
-          </a:p>
-        </p:txBody>
-      </p:sp>
-      <p:sp>
-        <p:nvSpPr>
-          <p:cNvPr id="4" name="TextBox 3"/>
-          <p:cNvSpPr txBox="1"/>
-          <p:nvPr/>
-        </p:nvSpPr>
-        <p:spPr>
-          <a:xfrm>
-            <a:off x="199751" y="2451601"/>
-            <a:ext cx="5583881" cy="2056973"/>
-          </a:xfrm>
-          <a:prstGeom prst="rect">
-            <a:avLst/>
-          </a:prstGeom>
-          <a:noFill/>
-        </p:spPr>
-        <p:txBody>
-          <a:bodyPr wrap="square">
-            <a:spAutoFit/>
-          </a:bodyPr>
-          <a:lstStyle/>
-          <a:p>
-            <a:pPr marL="0" indent="0">
-              <a:buNone/>
-            </a:pPr>
-            <a:r>
-              <a:rPr sz="1500" b="1" dirty="0">
-                <a:solidFill>
-                  <a:srgbClr val="877553"/>
-                </a:solidFill>
-              </a:rPr>
-              <a:t>Fora do </a:t>
-            </a:r>
-            <a:r>
-              <a:rPr sz="1500" b="1" dirty="0" err="1">
-                <a:solidFill>
-                  <a:srgbClr val="877553"/>
-                </a:solidFill>
-              </a:rPr>
-              <a:t>escopo</a:t>
-            </a:r>
-            <a:endParaRPr sz="1500" b="1" dirty="0">
-              <a:solidFill>
-                <a:srgbClr val="877553"/>
-              </a:solidFill>
-            </a:endParaRPr>
-          </a:p>
-          <a:p>
-            <a:pPr marL="285750" indent="-285750">
-              <a:spcBef>
-                <a:spcPts val="500"/>
-              </a:spcBef>
-              <a:buFont typeface="Wingdings" pitchFamily="2" charset="2"/>
-              <a:buChar char="§"/>
-            </a:pPr>
-            <a:r>
-              <a:rPr sz="1200" dirty="0"/>
-              <a:t>A </a:t>
-            </a:r>
-            <a:r>
-              <a:rPr sz="1200" dirty="0" err="1"/>
-              <a:t>fase</a:t>
-            </a:r>
-            <a:r>
-              <a:rPr sz="1200" dirty="0"/>
-              <a:t> </a:t>
-            </a:r>
-            <a:r>
-              <a:rPr lang="en-US" sz="1200" dirty="0"/>
-              <a:t>de </a:t>
-            </a:r>
-            <a:r>
-              <a:rPr lang="en-US" sz="1200" dirty="0" err="1"/>
-              <a:t>politica</a:t>
-            </a:r>
-            <a:r>
-              <a:rPr lang="en-US" sz="1200"/>
-              <a:t>.</a:t>
-            </a:r>
-            <a:endParaRPr sz="1200" dirty="0"/>
-          </a:p>
-          <a:p>
-            <a:pPr marL="285750" indent="-285750">
-              <a:spcBef>
-                <a:spcPts val="500"/>
-              </a:spcBef>
-              <a:buFont typeface="Wingdings" pitchFamily="2" charset="2"/>
-              <a:buChar char="§"/>
-            </a:pPr>
-            <a:r>
-              <a:rPr sz="1200" dirty="0" err="1"/>
-              <a:t>Otimizações</a:t>
-            </a:r>
-            <a:r>
-              <a:rPr sz="1200" dirty="0"/>
-              <a:t> da </a:t>
-            </a:r>
-            <a:r>
-              <a:rPr sz="1200" dirty="0" err="1"/>
-              <a:t>computação</a:t>
-            </a:r>
-            <a:r>
-              <a:rPr sz="1200" dirty="0"/>
-              <a:t> </a:t>
-            </a:r>
-            <a:r>
-              <a:rPr sz="1200" dirty="0" err="1"/>
-              <a:t>executada</a:t>
-            </a:r>
-            <a:r>
-              <a:rPr sz="1200" dirty="0"/>
-              <a:t> </a:t>
-            </a:r>
-            <a:r>
-              <a:rPr sz="1200" dirty="0" err="1"/>
-              <a:t>na</a:t>
-            </a:r>
-            <a:r>
-              <a:rPr sz="1200" dirty="0"/>
-              <a:t> </a:t>
-            </a:r>
-            <a:r>
-              <a:rPr sz="1200" dirty="0" err="1"/>
-              <a:t>simulação</a:t>
-            </a:r>
-            <a:r>
-              <a:rPr sz="1200" dirty="0"/>
-              <a:t> final: o tempo de </a:t>
-            </a:r>
-            <a:r>
-              <a:rPr sz="1200" dirty="0" err="1"/>
-              <a:t>resolução</a:t>
-            </a:r>
-            <a:r>
-              <a:rPr sz="1200" dirty="0"/>
-              <a:t> de </a:t>
-            </a:r>
-            <a:r>
-              <a:rPr sz="1200" dirty="0" err="1"/>
-              <a:t>cada</a:t>
-            </a:r>
-            <a:r>
-              <a:rPr sz="1200" dirty="0"/>
-              <a:t> </a:t>
-            </a:r>
-            <a:r>
-              <a:rPr sz="1200" dirty="0" err="1"/>
-              <a:t>cenário</a:t>
-            </a:r>
-            <a:r>
-              <a:rPr sz="1200" dirty="0"/>
-              <a:t> é </a:t>
-            </a:r>
-            <a:r>
-              <a:rPr sz="1200" dirty="0" err="1"/>
-              <a:t>tratado</a:t>
-            </a:r>
-            <a:r>
-              <a:rPr sz="1200" dirty="0"/>
-              <a:t> </a:t>
-            </a:r>
-            <a:r>
-              <a:rPr sz="1200" dirty="0" err="1"/>
-              <a:t>como</a:t>
-            </a:r>
-            <a:r>
-              <a:rPr sz="1200" dirty="0"/>
-              <a:t> dado, e </a:t>
-            </a:r>
-            <a:r>
-              <a:rPr sz="1200" dirty="0" err="1"/>
-              <a:t>apenas</a:t>
-            </a:r>
-            <a:r>
-              <a:rPr sz="1200" dirty="0"/>
-              <a:t> a </a:t>
-            </a:r>
-            <a:r>
-              <a:rPr sz="1200" dirty="0" err="1"/>
-              <a:t>escrita</a:t>
-            </a:r>
-            <a:r>
-              <a:rPr sz="1200" dirty="0"/>
-              <a:t> dos </a:t>
-            </a:r>
-            <a:r>
-              <a:rPr sz="1200" dirty="0" err="1"/>
-              <a:t>resultados</a:t>
-            </a:r>
-            <a:r>
-              <a:rPr sz="1200" dirty="0"/>
-              <a:t> é </a:t>
-            </a:r>
-            <a:r>
-              <a:rPr sz="1200" dirty="0" err="1"/>
-              <a:t>objeto</a:t>
-            </a:r>
-            <a:r>
-              <a:rPr sz="1200" dirty="0"/>
-              <a:t> do </a:t>
-            </a:r>
-            <a:r>
-              <a:rPr sz="1200" dirty="0" err="1"/>
-              <a:t>trabalho</a:t>
-            </a:r>
-            <a:endParaRPr sz="1200" dirty="0"/>
-          </a:p>
-          <a:p>
-            <a:pPr marL="285750" indent="-285750">
-              <a:spcBef>
-                <a:spcPts val="500"/>
-              </a:spcBef>
-              <a:buFont typeface="Wingdings" pitchFamily="2" charset="2"/>
-              <a:buChar char="§"/>
-            </a:pPr>
-            <a:r>
-              <a:rPr sz="1200" dirty="0"/>
-              <a:t>A </a:t>
-            </a:r>
-            <a:r>
-              <a:rPr sz="1200" dirty="0" err="1"/>
-              <a:t>paralelização</a:t>
-            </a:r>
-            <a:r>
-              <a:rPr sz="1200" dirty="0"/>
-              <a:t> das </a:t>
-            </a:r>
-            <a:r>
-              <a:rPr sz="1200" dirty="0" err="1"/>
-              <a:t>leituras</a:t>
-            </a:r>
-            <a:r>
-              <a:rPr sz="1200" dirty="0"/>
-              <a:t> dos dados de entrada, </a:t>
-            </a:r>
-            <a:r>
-              <a:rPr sz="1200" dirty="0" err="1"/>
-              <a:t>cujo</a:t>
-            </a:r>
-            <a:r>
-              <a:rPr sz="1200" dirty="0"/>
-              <a:t> volume é </a:t>
-            </a:r>
-            <a:r>
-              <a:rPr sz="1200" dirty="0" err="1"/>
-              <a:t>muito</a:t>
-            </a:r>
-            <a:r>
-              <a:rPr sz="1200" dirty="0"/>
-              <a:t> inferior </a:t>
-            </a:r>
-            <a:r>
-              <a:rPr sz="1200" dirty="0" err="1"/>
-              <a:t>ao</a:t>
-            </a:r>
-            <a:r>
-              <a:rPr sz="1200" dirty="0"/>
-              <a:t> da </a:t>
-            </a:r>
-            <a:r>
-              <a:rPr sz="1200" dirty="0" err="1"/>
-              <a:t>escrita</a:t>
-            </a:r>
-            <a:endParaRPr sz="1200" dirty="0"/>
-          </a:p>
-          <a:p>
-            <a:pPr marL="285750" indent="-285750">
-              <a:spcBef>
-                <a:spcPts val="500"/>
-              </a:spcBef>
-              <a:buFont typeface="Wingdings" pitchFamily="2" charset="2"/>
-              <a:buChar char="§"/>
-            </a:pPr>
-            <a:r>
-              <a:rPr sz="1200" dirty="0" err="1"/>
-              <a:t>Melhorias</a:t>
-            </a:r>
-            <a:r>
-              <a:rPr sz="1200" dirty="0"/>
-              <a:t> no </a:t>
-            </a:r>
-            <a:r>
-              <a:rPr sz="1200" dirty="0" err="1"/>
-              <a:t>escalonamento</a:t>
-            </a:r>
-            <a:r>
-              <a:rPr sz="1200" dirty="0"/>
-              <a:t> de </a:t>
-            </a:r>
-            <a:r>
-              <a:rPr sz="1200" dirty="0" err="1"/>
-              <a:t>tarefas</a:t>
-            </a:r>
-            <a:r>
-              <a:rPr sz="1200" dirty="0"/>
-              <a:t> entre ranks: </a:t>
-            </a:r>
-            <a:r>
-              <a:rPr sz="1200" dirty="0" err="1"/>
-              <a:t>mantém</a:t>
-            </a:r>
-            <a:r>
-              <a:rPr sz="1200" dirty="0"/>
-              <a:t>-se o bag-of-tasks </a:t>
-            </a:r>
-            <a:r>
-              <a:rPr sz="1200" dirty="0" err="1"/>
-              <a:t>já</a:t>
-            </a:r>
-            <a:r>
-              <a:rPr sz="1200" dirty="0"/>
-              <a:t> </a:t>
-            </a:r>
-            <a:r>
-              <a:rPr sz="1200" dirty="0" err="1"/>
-              <a:t>existente</a:t>
-            </a:r>
-            <a:endParaRPr sz="1200" dirty="0"/>
-          </a:p>
-        </p:txBody>
-      </p:sp>
-      <p:sp>
-        <p:nvSpPr>
-          <p:cNvPr id="5" name="TextBox 4"/>
-          <p:cNvSpPr txBox="1"/>
-          <p:nvPr/>
-        </p:nvSpPr>
-        <p:spPr>
-          <a:xfrm>
-            <a:off x="6371409" y="2451601"/>
-            <a:ext cx="5583881" cy="3844424"/>
-          </a:xfrm>
-          <a:prstGeom prst="rect">
-            <a:avLst/>
-          </a:prstGeom>
-          <a:noFill/>
-        </p:spPr>
-        <p:txBody>
-          <a:bodyPr wrap="square">
-            <a:spAutoFit/>
-          </a:bodyPr>
-          <a:lstStyle/>
-          <a:p>
-            <a:pPr marL="0" indent="0">
-              <a:buNone/>
-            </a:pPr>
-            <a:r>
-              <a:rPr sz="1500" b="1">
-                <a:solidFill>
-                  <a:srgbClr val="2F5893"/>
-                </a:solidFill>
-              </a:rPr>
-              <a:t>Contribuições</a:t>
-            </a:r>
-          </a:p>
-          <a:p>
-            <a:pPr marL="285750" indent="-285750">
-              <a:spcBef>
-                <a:spcPts val="500"/>
-              </a:spcBef>
-              <a:buFont typeface="Wingdings" pitchFamily="2" charset="2"/>
-              <a:buChar char="§"/>
-            </a:pPr>
-            <a:r>
-              <a:rPr sz="1200"/>
-              <a:t>Diagnóstico dos gargalos da arquitetura atual: o processo escritor único e o limite do adaptador de rede do nó</a:t>
-            </a:r>
-          </a:p>
-          <a:p>
-            <a:pPr marL="285750" indent="-285750">
-              <a:spcBef>
-                <a:spcPts val="500"/>
-              </a:spcBef>
-              <a:buFont typeface="Wingdings" pitchFamily="2" charset="2"/>
-              <a:buChar char="§"/>
-            </a:pPr>
-            <a:r>
-              <a:rPr sz="1200"/>
-              <a:t>Arquitetura de E/S paralela com MPI-IO sobre Lustre, com escritas independentes em offsets pré-calculados, preservando o formato dos arquivos</a:t>
-            </a:r>
-          </a:p>
-          <a:p>
-            <a:pPr marL="285750" indent="-285750">
-              <a:spcBef>
-                <a:spcPts val="500"/>
-              </a:spcBef>
-              <a:buFont typeface="Wingdings" pitchFamily="2" charset="2"/>
-              <a:buChar char="§"/>
-            </a:pPr>
-            <a:r>
-              <a:rPr sz="1200"/>
-              <a:t>Instrumentação das duas implementações com métricas equivalentes: computação, coordenação MPI, E/S, bloqueio e banda</a:t>
-            </a:r>
-          </a:p>
-          <a:p>
-            <a:pPr marL="285750" indent="-285750">
-              <a:spcBef>
-                <a:spcPts val="500"/>
-              </a:spcBef>
-              <a:buFont typeface="Wingdings" pitchFamily="2" charset="2"/>
-              <a:buChar char="§"/>
-            </a:pPr>
-            <a:r>
-              <a:rPr sz="1200"/>
-              <a:t>Avaliação experimental em dois ambientes — AWS com FSx for Lustre e SDumont com Lustre compartilhado — de 2 a 32 nós</a:t>
-            </a:r>
-          </a:p>
-          <a:p>
-            <a:pPr marL="285750" indent="-285750">
-              <a:spcBef>
-                <a:spcPts val="500"/>
-              </a:spcBef>
-              <a:buFont typeface="Wingdings" pitchFamily="2" charset="2"/>
-              <a:buChar char="§"/>
-            </a:pPr>
-            <a:r>
-              <a:rPr sz="1200"/>
-              <a:t>Análise da influência do número de OSTs na escalabilidade, com orientações de dimensionamento</a:t>
-            </a:r>
-          </a:p>
-        </p:txBody>
-      </p:sp>
-    </p:spTree>
-  </p:cSld>
-  <p:clrMapOvr>
-    <a:masterClrMapping/>
-  </p:clrMapOvr>
-</p:sld>
-</file>
-
 <file path=ppt/slides/slide4.xml><?xml version="1.0" encoding="utf-8"?>
 <p:sld xmlns:a="http://schemas.openxmlformats.org/drawingml/2006/main" xmlns:r="http://schemas.openxmlformats.org/officeDocument/2006/relationships" xmlns:p="http://schemas.openxmlformats.org/presentationml/2006/main">
   <p:cSld>
@@ -19330,7 +19674,7 @@
         <p:spPr>
           <a:xfrm>
             <a:off x="6253854" y="1251601"/>
-            <a:ext cx="5701436" cy="430000"/>
+            <a:ext cx="5701436" cy="553998"/>
           </a:xfrm>
           <a:prstGeom prst="rect">
             <a:avLst/>
@@ -19346,14 +19690,21 @@
             <a:pPr marL="0" indent="0">
               <a:buNone/>
             </a:pPr>
-            <a:r>
-              <a:rPr sz="1500" b="1">
-                <a:solidFill>
-                  <a:srgbClr val="2F5893"/>
-                </a:solidFill>
-              </a:rPr>
-              <a:t>MPI-IO — escritas independentes e coletivas</a:t>
-            </a:r>
+            <a:endParaRPr lang="en-US" sz="1500" b="1" dirty="0">
+              <a:solidFill>
+                <a:srgbClr val="2F5893"/>
+              </a:solidFill>
+            </a:endParaRPr>
+          </a:p>
+          <a:p>
+            <a:pPr marL="0" indent="0">
+              <a:buNone/>
+            </a:pPr>
+            <a:endParaRPr sz="1500" b="1" dirty="0">
+              <a:solidFill>
+                <a:srgbClr val="2F5893"/>
+              </a:solidFill>
+            </a:endParaRPr>
           </a:p>
         </p:txBody>
       </p:sp>
@@ -19373,32 +19724,8 @@
         </p:blipFill>
         <p:spPr>
           <a:xfrm>
-            <a:off x="199751" y="2642935"/>
-            <a:ext cx="5701436" cy="2671755"/>
-          </a:xfrm>
-          <a:prstGeom prst="rect">
-            <a:avLst/>
-          </a:prstGeom>
-        </p:spPr>
-      </p:pic>
-      <p:pic>
-        <p:nvPicPr>
-          <p:cNvPr id="8" name="Picture 7" descr="mpiio_independente_vs_coletiva.png"/>
-          <p:cNvPicPr>
-            <a:picLocks noChangeAspect="1"/>
-          </p:cNvPicPr>
-          <p:nvPr/>
-        </p:nvPicPr>
-        <p:blipFill>
-          <a:blip r:embed="rId4"/>
-          <a:stretch>
-            <a:fillRect/>
-          </a:stretch>
-        </p:blipFill>
-        <p:spPr>
-          <a:xfrm>
-            <a:off x="6253854" y="3147738"/>
-            <a:ext cx="5701436" cy="1662149"/>
+            <a:off x="726671" y="1805599"/>
+            <a:ext cx="10422952" cy="4884308"/>
           </a:xfrm>
           <a:prstGeom prst="rect">
             <a:avLst/>
@@ -19450,6 +19777,256 @@
 </file>
 
 <file path=ppt/slides/slide5.xml><?xml version="1.0" encoding="utf-8"?>
+<p:sld xmlns:a="http://schemas.openxmlformats.org/drawingml/2006/main" xmlns:r="http://schemas.openxmlformats.org/officeDocument/2006/relationships" xmlns:p="http://schemas.openxmlformats.org/presentationml/2006/main">
+  <p:cSld>
+    <p:spTree>
+      <p:nvGrpSpPr>
+        <p:cNvPr id="1" name="">
+          <a:extLst>
+            <a:ext uri="{FF2B5EF4-FFF2-40B4-BE49-F238E27FC236}">
+              <a16:creationId xmlns:a16="http://schemas.microsoft.com/office/drawing/2014/main" id="{8E4FB9C2-2DC0-F5DA-A6DC-869546E5D0C0}"/>
+            </a:ext>
+          </a:extLst>
+        </p:cNvPr>
+        <p:cNvGrpSpPr/>
+        <p:nvPr/>
+      </p:nvGrpSpPr>
+      <p:grpSpPr>
+        <a:xfrm>
+          <a:off x="0" y="0"/>
+          <a:ext cx="0" cy="0"/>
+          <a:chOff x="0" y="0"/>
+          <a:chExt cx="0" cy="0"/>
+        </a:xfrm>
+      </p:grpSpPr>
+      <p:sp>
+        <p:nvSpPr>
+          <p:cNvPr id="2" name="Title 1">
+            <a:extLst>
+              <a:ext uri="{FF2B5EF4-FFF2-40B4-BE49-F238E27FC236}">
+                <a16:creationId xmlns:a16="http://schemas.microsoft.com/office/drawing/2014/main" id="{F1DE79BB-D63C-A774-3C43-3247F660A05D}"/>
+              </a:ext>
+            </a:extLst>
+          </p:cNvPr>
+          <p:cNvSpPr>
+            <a:spLocks noGrp="1"/>
+          </p:cNvSpPr>
+          <p:nvPr>
+            <p:ph type="title"/>
+          </p:nvPr>
+        </p:nvSpPr>
+        <p:spPr/>
+        <p:txBody>
+          <a:bodyPr/>
+          <a:lstStyle/>
+          <a:p>
+            <a:r>
+              <a:t>MPI e MPI-IO</a:t>
+            </a:r>
+          </a:p>
+        </p:txBody>
+      </p:sp>
+      <p:sp>
+        <p:nvSpPr>
+          <p:cNvPr id="4" name="Text Placeholder 3">
+            <a:extLst>
+              <a:ext uri="{FF2B5EF4-FFF2-40B4-BE49-F238E27FC236}">
+                <a16:creationId xmlns:a16="http://schemas.microsoft.com/office/drawing/2014/main" id="{F08C6E13-EDED-745E-6D4B-FB4A4119EB5D}"/>
+              </a:ext>
+            </a:extLst>
+          </p:cNvPr>
+          <p:cNvSpPr>
+            <a:spLocks noGrp="1"/>
+          </p:cNvSpPr>
+          <p:nvPr>
+            <p:ph type="body" sz="quarter" idx="13"/>
+          </p:nvPr>
+        </p:nvSpPr>
+        <p:spPr/>
+        <p:txBody>
+          <a:bodyPr/>
+          <a:lstStyle/>
+          <a:p>
+            <a:r>
+              <a:rPr sz="1400"/>
+              <a:t>Do modelo de troca de mensagens à E/S paralela</a:t>
+            </a:r>
+          </a:p>
+        </p:txBody>
+      </p:sp>
+      <p:sp>
+        <p:nvSpPr>
+          <p:cNvPr id="6" name="TextBox 5">
+            <a:extLst>
+              <a:ext uri="{FF2B5EF4-FFF2-40B4-BE49-F238E27FC236}">
+                <a16:creationId xmlns:a16="http://schemas.microsoft.com/office/drawing/2014/main" id="{FAF7AD22-E8EB-4E57-92AD-2B16D64AED5C}"/>
+              </a:ext>
+            </a:extLst>
+          </p:cNvPr>
+          <p:cNvSpPr txBox="1"/>
+          <p:nvPr/>
+        </p:nvSpPr>
+        <p:spPr>
+          <a:xfrm>
+            <a:off x="4172806" y="1565126"/>
+            <a:ext cx="5701436" cy="430000"/>
+          </a:xfrm>
+          <a:prstGeom prst="rect">
+            <a:avLst/>
+          </a:prstGeom>
+          <a:noFill/>
+        </p:spPr>
+        <p:txBody>
+          <a:bodyPr wrap="square">
+            <a:spAutoFit/>
+          </a:bodyPr>
+          <a:lstStyle/>
+          <a:p>
+            <a:pPr marL="0" indent="0">
+              <a:buNone/>
+            </a:pPr>
+            <a:r>
+              <a:rPr sz="1500" b="1" dirty="0">
+                <a:solidFill>
+                  <a:srgbClr val="2F5893"/>
+                </a:solidFill>
+              </a:rPr>
+              <a:t>MPI-IO — </a:t>
+            </a:r>
+            <a:r>
+              <a:rPr sz="1500" b="1" dirty="0" err="1">
+                <a:solidFill>
+                  <a:srgbClr val="2F5893"/>
+                </a:solidFill>
+              </a:rPr>
+              <a:t>escritas</a:t>
+            </a:r>
+            <a:r>
+              <a:rPr sz="1500" b="1" dirty="0">
+                <a:solidFill>
+                  <a:srgbClr val="2F5893"/>
+                </a:solidFill>
+              </a:rPr>
+              <a:t> </a:t>
+            </a:r>
+            <a:r>
+              <a:rPr sz="1500" b="1" dirty="0" err="1">
+                <a:solidFill>
+                  <a:srgbClr val="2F5893"/>
+                </a:solidFill>
+              </a:rPr>
+              <a:t>independentes</a:t>
+            </a:r>
+            <a:r>
+              <a:rPr sz="1500" b="1" dirty="0">
+                <a:solidFill>
+                  <a:srgbClr val="2F5893"/>
+                </a:solidFill>
+              </a:rPr>
+              <a:t> e </a:t>
+            </a:r>
+            <a:r>
+              <a:rPr sz="1500" b="1" dirty="0" err="1">
+                <a:solidFill>
+                  <a:srgbClr val="2F5893"/>
+                </a:solidFill>
+              </a:rPr>
+              <a:t>coletivas</a:t>
+            </a:r>
+            <a:endParaRPr sz="1500" b="1" dirty="0">
+              <a:solidFill>
+                <a:srgbClr val="2F5893"/>
+              </a:solidFill>
+            </a:endParaRPr>
+          </a:p>
+        </p:txBody>
+      </p:sp>
+      <p:pic>
+        <p:nvPicPr>
+          <p:cNvPr id="8" name="Picture 7" descr="mpiio_independente_vs_coletiva.png">
+            <a:extLst>
+              <a:ext uri="{FF2B5EF4-FFF2-40B4-BE49-F238E27FC236}">
+                <a16:creationId xmlns:a16="http://schemas.microsoft.com/office/drawing/2014/main" id="{DA06A4CC-914E-A36B-201E-5D99FEDD4B9C}"/>
+              </a:ext>
+            </a:extLst>
+          </p:cNvPr>
+          <p:cNvPicPr>
+            <a:picLocks noChangeAspect="1"/>
+          </p:cNvPicPr>
+          <p:nvPr/>
+        </p:nvPicPr>
+        <p:blipFill>
+          <a:blip r:embed="rId3"/>
+          <a:stretch>
+            <a:fillRect/>
+          </a:stretch>
+        </p:blipFill>
+        <p:spPr>
+          <a:xfrm>
+            <a:off x="1384371" y="2489111"/>
+            <a:ext cx="9617354" cy="2803763"/>
+          </a:xfrm>
+          <a:prstGeom prst="rect">
+            <a:avLst/>
+          </a:prstGeom>
+        </p:spPr>
+      </p:pic>
+      <p:sp>
+        <p:nvSpPr>
+          <p:cNvPr id="9" name="TextBox 8">
+            <a:extLst>
+              <a:ext uri="{FF2B5EF4-FFF2-40B4-BE49-F238E27FC236}">
+                <a16:creationId xmlns:a16="http://schemas.microsoft.com/office/drawing/2014/main" id="{21575477-1723-4C56-9704-D84C82ADA548}"/>
+              </a:ext>
+            </a:extLst>
+          </p:cNvPr>
+          <p:cNvSpPr txBox="1"/>
+          <p:nvPr/>
+        </p:nvSpPr>
+        <p:spPr>
+          <a:xfrm>
+            <a:off x="199751" y="6106025"/>
+            <a:ext cx="11755539" cy="300000"/>
+          </a:xfrm>
+          <a:prstGeom prst="rect">
+            <a:avLst/>
+          </a:prstGeom>
+          <a:noFill/>
+        </p:spPr>
+        <p:txBody>
+          <a:bodyPr wrap="none">
+            <a:spAutoFit/>
+          </a:bodyPr>
+          <a:lstStyle/>
+          <a:p>
+            <a:pPr marL="0" indent="0">
+              <a:buNone/>
+            </a:pPr>
+            <a:r>
+              <a:rPr sz="1000">
+                <a:solidFill>
+                  <a:srgbClr val="877553"/>
+                </a:solidFill>
+              </a:rPr>
+              <a:t>Capítulo 2 — Figuras 2.1 (esq.) e 2.3 (dir.)</a:t>
+            </a:r>
+          </a:p>
+        </p:txBody>
+      </p:sp>
+    </p:spTree>
+    <p:extLst>
+      <p:ext uri="{BB962C8B-B14F-4D97-AF65-F5344CB8AC3E}">
+        <p14:creationId xmlns:p14="http://schemas.microsoft.com/office/powerpoint/2010/main" val="2462135656"/>
+      </p:ext>
+    </p:extLst>
+  </p:cSld>
+  <p:clrMapOvr>
+    <a:masterClrMapping/>
+  </p:clrMapOvr>
+</p:sld>
+</file>
+
+<file path=ppt/slides/slide6.xml><?xml version="1.0" encoding="utf-8"?>
 <p:sld xmlns:a="http://schemas.openxmlformats.org/drawingml/2006/main" xmlns:r="http://schemas.openxmlformats.org/officeDocument/2006/relationships" xmlns:p="http://schemas.openxmlformats.org/presentationml/2006/main">
   <p:cSld>
     <p:spTree>
@@ -19525,8 +20102,8 @@
         </p:blipFill>
         <p:spPr>
           <a:xfrm>
-            <a:off x="2443530" y="1571601"/>
-            <a:ext cx="7267980" cy="4524424"/>
+            <a:off x="2159000" y="1105420"/>
+            <a:ext cx="7874000" cy="4901680"/>
           </a:xfrm>
           <a:prstGeom prst="rect">
             <a:avLst/>
@@ -19541,7 +20118,7 @@
 </p:sld>
 </file>
 
-<file path=ppt/slides/slide6.xml><?xml version="1.0" encoding="utf-8"?>
+<file path=ppt/slides/slide7.xml><?xml version="1.0" encoding="utf-8"?>
 <p:sld xmlns:a="http://schemas.openxmlformats.org/drawingml/2006/main" xmlns:r="http://schemas.openxmlformats.org/officeDocument/2006/relationships" xmlns:p="http://schemas.openxmlformats.org/presentationml/2006/main">
   <p:cSld>
     <p:spTree>
@@ -19633,7 +20210,7 @@
 </p:sld>
 </file>
 
-<file path=ppt/slides/slide7.xml><?xml version="1.0" encoding="utf-8"?>
+<file path=ppt/slides/slide8.xml><?xml version="1.0" encoding="utf-8"?>
 <p:sld xmlns:a="http://schemas.openxmlformats.org/drawingml/2006/main" xmlns:r="http://schemas.openxmlformats.org/officeDocument/2006/relationships" xmlns:p="http://schemas.openxmlformats.org/presentationml/2006/main">
   <p:cSld>
     <p:spTree>
@@ -19725,7 +20302,7 @@
 </p:sld>
 </file>
 
-<file path=ppt/slides/slide8.xml><?xml version="1.0" encoding="utf-8"?>
+<file path=ppt/slides/slide9.xml><?xml version="1.0" encoding="utf-8"?>
 <p:sld xmlns:a="http://schemas.openxmlformats.org/drawingml/2006/main" xmlns:r="http://schemas.openxmlformats.org/officeDocument/2006/relationships" xmlns:p="http://schemas.openxmlformats.org/presentationml/2006/main">
   <p:cSld>
     <p:spTree>
@@ -19809,256 +20386,6 @@
           </a:prstGeom>
         </p:spPr>
       </p:pic>
-    </p:spTree>
-  </p:cSld>
-  <p:clrMapOvr>
-    <a:masterClrMapping/>
-  </p:clrMapOvr>
-</p:sld>
-</file>
-
-<file path=ppt/slides/slide9.xml><?xml version="1.0" encoding="utf-8"?>
-<p:sld xmlns:a="http://schemas.openxmlformats.org/drawingml/2006/main" xmlns:r="http://schemas.openxmlformats.org/officeDocument/2006/relationships" xmlns:p="http://schemas.openxmlformats.org/presentationml/2006/main">
-  <p:cSld>
-    <p:spTree>
-      <p:nvGrpSpPr>
-        <p:cNvPr id="1" name=""/>
-        <p:cNvGrpSpPr/>
-        <p:nvPr/>
-      </p:nvGrpSpPr>
-      <p:grpSpPr>
-        <a:xfrm>
-          <a:off x="0" y="0"/>
-          <a:ext cx="0" cy="0"/>
-          <a:chOff x="0" y="0"/>
-          <a:chExt cx="0" cy="0"/>
-        </a:xfrm>
-      </p:grpSpPr>
-      <p:sp>
-        <p:nvSpPr>
-          <p:cNvPr id="2" name="Title 1"/>
-          <p:cNvSpPr>
-            <a:spLocks noGrp="1"/>
-          </p:cNvSpPr>
-          <p:nvPr>
-            <p:ph type="title"/>
-          </p:nvPr>
-        </p:nvSpPr>
-        <p:spPr/>
-        <p:txBody>
-          <a:bodyPr/>
-          <a:lstStyle/>
-          <a:p>
-            <a:r>
-              <a:rPr lang="pt-BR" sz="3600" b="0" i="0" u="none" strike="noStrike" baseline="0" dirty="0">
-                <a:latin typeface="F70"/>
-              </a:rPr>
-              <a:t>Implementação das escritas paralelas independentes</a:t>
-            </a:r>
-            <a:endParaRPr dirty="0"/>
-          </a:p>
-        </p:txBody>
-      </p:sp>
-      <p:sp>
-        <p:nvSpPr>
-          <p:cNvPr id="4" name="Text Placeholder 3"/>
-          <p:cNvSpPr>
-            <a:spLocks noGrp="1"/>
-          </p:cNvSpPr>
-          <p:nvPr>
-            <p:ph type="body" sz="quarter" idx="13"/>
-          </p:nvPr>
-        </p:nvSpPr>
-        <p:spPr/>
-        <p:txBody>
-          <a:bodyPr/>
-          <a:lstStyle/>
-          <a:p>
-            <a:r>
-              <a:rPr sz="1400"/>
-              <a:t>Capítulo 3 — Código 3.1 (esq.) e Figura 3.4 (dir.)</a:t>
-            </a:r>
-          </a:p>
-        </p:txBody>
-      </p:sp>
-      <p:sp>
-        <p:nvSpPr>
-          <p:cNvPr id="30" name="Rotulo 1"/>
-          <p:cNvSpPr txBox="1"/>
-          <p:nvPr/>
-        </p:nvSpPr>
-        <p:spPr>
-          <a:xfrm>
-            <a:off x="201168" y="1170432"/>
-            <a:ext cx="6766560" cy="310896"/>
-          </a:xfrm>
-          <a:prstGeom prst="rect">
-            <a:avLst/>
-          </a:prstGeom>
-          <a:noFill/>
-        </p:spPr>
-        <p:txBody>
-          <a:bodyPr wrap="square">
-            <a:spAutoFit/>
-          </a:bodyPr>
-          <a:lstStyle/>
-          <a:p>
-            <a:pPr marL="0" indent="0">
-              <a:buNone/>
-            </a:pPr>
-            <a:r>
-              <a:rPr sz="1400" b="1">
-                <a:solidFill>
-                  <a:srgbClr val="2F5893"/>
-                </a:solidFill>
-              </a:rPr>
-              <a:t>Pseudocódigo da escrita independente por rank</a:t>
-            </a:r>
-          </a:p>
-        </p:txBody>
-      </p:sp>
-      <p:sp>
-        <p:nvSpPr>
-          <p:cNvPr id="31" name="Rotulo 2"/>
-          <p:cNvSpPr txBox="1"/>
-          <p:nvPr/>
-        </p:nvSpPr>
-        <p:spPr>
-          <a:xfrm>
-            <a:off x="7242048" y="1170432"/>
-            <a:ext cx="4745736" cy="310896"/>
-          </a:xfrm>
-          <a:prstGeom prst="rect">
-            <a:avLst/>
-          </a:prstGeom>
-          <a:noFill/>
-        </p:spPr>
-        <p:txBody>
-          <a:bodyPr wrap="square">
-            <a:spAutoFit/>
-          </a:bodyPr>
-          <a:lstStyle/>
-          <a:p>
-            <a:pPr marL="0" indent="0">
-              <a:buNone/>
-            </a:pPr>
-            <a:r>
-              <a:rPr sz="1400" b="1">
-                <a:solidFill>
-                  <a:srgbClr val="2F5893"/>
-                </a:solidFill>
-              </a:rPr>
-              <a:t>Formato dos resultados preservado</a:t>
-            </a:r>
-          </a:p>
-        </p:txBody>
-      </p:sp>
-      <p:pic>
-        <p:nvPicPr>
-          <p:cNvPr id="38" name="Codigo 3.1" descr="codigo_3_1_slide.png"/>
-          <p:cNvPicPr>
-            <a:picLocks noChangeAspect="1"/>
-          </p:cNvPicPr>
-          <p:nvPr/>
-        </p:nvPicPr>
-        <p:blipFill>
-          <a:blip r:embed="rId3"/>
-          <a:stretch>
-            <a:fillRect/>
-          </a:stretch>
-        </p:blipFill>
-        <p:spPr>
-          <a:xfrm>
-            <a:off x="201168" y="1554480"/>
-            <a:ext cx="6766560" cy="4155026"/>
-          </a:xfrm>
-          <a:prstGeom prst="rect">
-            <a:avLst/>
-          </a:prstGeom>
-        </p:spPr>
-      </p:pic>
-      <p:pic>
-        <p:nvPicPr>
-          <p:cNvPr id="39" name="Figura 3.4" descr="image.png"/>
-          <p:cNvPicPr>
-            <a:picLocks noChangeAspect="1"/>
-          </p:cNvPicPr>
-          <p:nvPr/>
-        </p:nvPicPr>
-        <p:blipFill>
-          <a:blip r:embed="rId4"/>
-          <a:stretch>
-            <a:fillRect/>
-          </a:stretch>
-        </p:blipFill>
-        <p:spPr>
-          <a:xfrm>
-            <a:off x="7242048" y="1764792"/>
-            <a:ext cx="4745736" cy="1802575"/>
-          </a:xfrm>
-          <a:prstGeom prst="rect">
-            <a:avLst/>
-          </a:prstGeom>
-        </p:spPr>
-      </p:pic>
-      <p:sp>
-        <p:nvSpPr>
-          <p:cNvPr id="40" name="Ponte"/>
-          <p:cNvSpPr txBox="1"/>
-          <p:nvPr/>
-        </p:nvSpPr>
-        <p:spPr>
-          <a:xfrm>
-            <a:off x="7242048" y="3886200"/>
-            <a:ext cx="4745736" cy="1463040"/>
-          </a:xfrm>
-          <a:prstGeom prst="rect">
-            <a:avLst/>
-          </a:prstGeom>
-          <a:noFill/>
-        </p:spPr>
-        <p:txBody>
-          <a:bodyPr wrap="square">
-            <a:spAutoFit/>
-          </a:bodyPr>
-          <a:lstStyle/>
-          <a:p>
-            <a:r>
-              <a:rPr sz="1400" b="1">
-                <a:solidFill>
-                  <a:srgbClr val="2F5893"/>
-                </a:solidFill>
-              </a:rPr>
-              <a:t>irec = posicaoLogica(estágio, cenário, hora)</a:t>
-            </a:r>
-          </a:p>
-          <a:p>
-            <a:r>
-              <a:rPr sz="1400" b="1">
-                <a:solidFill>
-                  <a:srgbClr val="2F5893"/>
-                </a:solidFill>
-              </a:rPr>
-              <a:t>offset = irec × tamRegistro</a:t>
-            </a:r>
-          </a:p>
-          <a:p>
-            <a:pPr>
-              <a:spcBef>
-                <a:spcPts val="800"/>
-              </a:spcBef>
-            </a:pPr>
-            <a:r>
-              <a:rPr sz="1300">
-                <a:solidFill>
-                  <a:srgbClr val="333333"/>
-                </a:solidFill>
-              </a:rPr>
-              <a:t>A posição de cada registro é função do índice — então cada rank calcula sozinho onde gravar, sem coordenação global e sem escritor central.</a:t>
-            </a:r>
-          </a:p>
-        </p:txBody>
-      </p:sp>
     </p:spTree>
   </p:cSld>
   <p:clrMapOvr>
